--- a/source/Instructor Pub10_Ed22B_Updated/Instructor Pub10_Ed22B_Updated.pptx
+++ b/source/Instructor Pub10_Ed22B_Updated/Instructor Pub10_Ed22B_Updated.pptx
@@ -3145,11 +3145,11 @@
       </p:sp>
       <p:sp>
         <p:nvSpPr>
-          <p:cNvPr id="3" name="Rounded Rectangle 2"/>
+          <p:cNvPr id="3" name="Rounded Rectangle 2">
+            <a:hlinkClick r:id="rId2"/>
+          </p:cNvPr>
           <p:cNvSpPr/>
-          <p:nvPr>
-            <a:hlinkClick r:id="rId2"/>
-          </p:nvPr>
+          <p:nvPr/>
         </p:nvSpPr>
         <p:spPr>
           <a:xfrm>
@@ -3247,11 +3247,11 @@
       </p:sp>
       <p:sp>
         <p:nvSpPr>
-          <p:cNvPr id="5" name="Rounded Rectangle 4"/>
+          <p:cNvPr id="5" name="Rounded Rectangle 4">
+            <a:hlinkClick r:id="rId6"/>
+          </p:cNvPr>
           <p:cNvSpPr/>
-          <p:nvPr>
-            <a:hlinkClick r:id="rId6"/>
-          </p:nvPr>
+          <p:nvPr/>
         </p:nvSpPr>
         <p:spPr>
           <a:xfrm>
@@ -3341,11 +3341,11 @@
       </p:sp>
       <p:sp>
         <p:nvSpPr>
-          <p:cNvPr id="7" name="Rounded Rectangle 6"/>
+          <p:cNvPr id="7" name="Rounded Rectangle 6">
+            <a:hlinkClick r:id="rId9"/>
+          </p:cNvPr>
           <p:cNvSpPr/>
-          <p:nvPr>
-            <a:hlinkClick r:id="rId9"/>
-          </p:nvPr>
+          <p:nvPr/>
         </p:nvSpPr>
         <p:spPr>
           <a:xfrm>
@@ -3443,11 +3443,11 @@
       </p:sp>
       <p:sp>
         <p:nvSpPr>
-          <p:cNvPr id="9" name="Rounded Rectangle 8"/>
+          <p:cNvPr id="9" name="Rounded Rectangle 8">
+            <a:hlinkClick r:id="rId13"/>
+          </p:cNvPr>
           <p:cNvSpPr/>
-          <p:nvPr>
-            <a:hlinkClick r:id="rId13"/>
-          </p:nvPr>
+          <p:nvPr/>
         </p:nvSpPr>
         <p:spPr>
           <a:xfrm>
@@ -3545,11 +3545,11 @@
       </p:sp>
       <p:sp>
         <p:nvSpPr>
-          <p:cNvPr id="11" name="Rounded Rectangle 10"/>
+          <p:cNvPr id="11" name="Rounded Rectangle 10">
+            <a:hlinkClick r:id="rId17"/>
+          </p:cNvPr>
           <p:cNvSpPr/>
-          <p:nvPr>
-            <a:hlinkClick r:id="rId17"/>
-          </p:nvPr>
+          <p:nvPr/>
         </p:nvSpPr>
         <p:spPr>
           <a:xfrm>
@@ -3655,11 +3655,11 @@
       </p:sp>
       <p:sp>
         <p:nvSpPr>
-          <p:cNvPr id="13" name="Rounded Rectangle 12"/>
+          <p:cNvPr id="13" name="Rounded Rectangle 12">
+            <a:hlinkClick r:id="rId22"/>
+          </p:cNvPr>
           <p:cNvSpPr/>
-          <p:nvPr>
-            <a:hlinkClick r:id="rId22"/>
-          </p:nvPr>
+          <p:nvPr/>
         </p:nvSpPr>
         <p:spPr>
           <a:xfrm>
@@ -3749,11 +3749,11 @@
       </p:sp>
       <p:sp>
         <p:nvSpPr>
-          <p:cNvPr id="15" name="Rounded Rectangle 14"/>
+          <p:cNvPr id="15" name="Rounded Rectangle 14">
+            <a:hlinkClick r:id="rId25"/>
+          </p:cNvPr>
           <p:cNvSpPr/>
-          <p:nvPr>
-            <a:hlinkClick r:id="rId25"/>
-          </p:nvPr>
+          <p:nvPr/>
         </p:nvSpPr>
         <p:spPr>
           <a:xfrm>
@@ -3835,11 +3835,11 @@
       </p:sp>
       <p:sp>
         <p:nvSpPr>
-          <p:cNvPr id="17" name="Rounded Rectangle 16"/>
+          <p:cNvPr id="17" name="Rounded Rectangle 16">
+            <a:hlinkClick r:id="rId27"/>
+          </p:cNvPr>
           <p:cNvSpPr/>
-          <p:nvPr>
-            <a:hlinkClick r:id="rId27"/>
-          </p:nvPr>
+          <p:nvPr/>
         </p:nvSpPr>
         <p:spPr>
           <a:xfrm>
@@ -3945,11 +3945,11 @@
       </p:sp>
       <p:sp>
         <p:nvSpPr>
-          <p:cNvPr id="19" name="Rounded Rectangle 18"/>
+          <p:cNvPr id="19" name="Rounded Rectangle 18">
+            <a:hlinkClick r:id="rId32"/>
+          </p:cNvPr>
           <p:cNvSpPr/>
-          <p:nvPr>
-            <a:hlinkClick r:id="rId32"/>
-          </p:nvPr>
+          <p:nvPr/>
         </p:nvSpPr>
         <p:spPr>
           <a:xfrm>
@@ -4031,11 +4031,11 @@
       </p:sp>
       <p:sp>
         <p:nvSpPr>
-          <p:cNvPr id="21" name="Rounded Rectangle 20"/>
+          <p:cNvPr id="21" name="Rounded Rectangle 20">
+            <a:hlinkClick r:id="rId34"/>
+          </p:cNvPr>
           <p:cNvSpPr/>
-          <p:nvPr>
-            <a:hlinkClick r:id="rId34"/>
-          </p:nvPr>
+          <p:nvPr/>
         </p:nvSpPr>
         <p:spPr>
           <a:xfrm>
@@ -4141,11 +4141,11 @@
       </p:sp>
       <p:sp>
         <p:nvSpPr>
-          <p:cNvPr id="23" name="Rounded Rectangle 22"/>
+          <p:cNvPr id="23" name="Rounded Rectangle 22">
+            <a:hlinkClick r:id="rId39"/>
+          </p:cNvPr>
           <p:cNvSpPr/>
-          <p:nvPr>
-            <a:hlinkClick r:id="rId39"/>
-          </p:nvPr>
+          <p:nvPr/>
         </p:nvSpPr>
         <p:spPr>
           <a:xfrm>
@@ -4251,11 +4251,11 @@
       </p:sp>
       <p:sp>
         <p:nvSpPr>
-          <p:cNvPr id="25" name="Rounded Rectangle 24"/>
+          <p:cNvPr id="25" name="Rounded Rectangle 24">
+            <a:hlinkClick r:id="rId44"/>
+          </p:cNvPr>
           <p:cNvSpPr/>
-          <p:nvPr>
-            <a:hlinkClick r:id="rId44"/>
-          </p:nvPr>
+          <p:nvPr/>
         </p:nvSpPr>
         <p:spPr>
           <a:xfrm>
@@ -4345,11 +4345,11 @@
       </p:sp>
       <p:sp>
         <p:nvSpPr>
-          <p:cNvPr id="27" name="Rounded Rectangle 26"/>
+          <p:cNvPr id="27" name="Rounded Rectangle 26">
+            <a:hlinkClick r:id="rId47"/>
+          </p:cNvPr>
           <p:cNvSpPr/>
-          <p:nvPr>
-            <a:hlinkClick r:id="rId47"/>
-          </p:nvPr>
+          <p:nvPr/>
         </p:nvSpPr>
         <p:spPr>
           <a:xfrm>
@@ -4439,11 +4439,11 @@
       </p:sp>
       <p:sp>
         <p:nvSpPr>
-          <p:cNvPr id="29" name="Rounded Rectangle 28"/>
+          <p:cNvPr id="29" name="Rounded Rectangle 28">
+            <a:hlinkClick r:id="rId50"/>
+          </p:cNvPr>
           <p:cNvSpPr/>
-          <p:nvPr>
-            <a:hlinkClick r:id="rId50"/>
-          </p:nvPr>
+          <p:nvPr/>
         </p:nvSpPr>
         <p:spPr>
           <a:xfrm>
@@ -4525,11 +4525,11 @@
       </p:sp>
       <p:sp>
         <p:nvSpPr>
-          <p:cNvPr id="31" name="Rounded Rectangle 30"/>
+          <p:cNvPr id="31" name="Rounded Rectangle 30">
+            <a:hlinkClick r:id="rId52"/>
+          </p:cNvPr>
           <p:cNvSpPr/>
-          <p:nvPr>
-            <a:hlinkClick r:id="rId52"/>
-          </p:nvPr>
+          <p:nvPr/>
         </p:nvSpPr>
         <p:spPr>
           <a:xfrm>
@@ -4696,11 +4696,11 @@
       </p:sp>
       <p:sp>
         <p:nvSpPr>
-          <p:cNvPr id="3" name="Rounded Rectangle 2"/>
+          <p:cNvPr id="3" name="Rounded Rectangle 2">
+            <a:hlinkClick r:id="rId2"/>
+          </p:cNvPr>
           <p:cNvSpPr/>
-          <p:nvPr>
-            <a:hlinkClick r:id="rId2"/>
-          </p:nvPr>
+          <p:nvPr/>
         </p:nvSpPr>
         <p:spPr>
           <a:xfrm>
@@ -4798,11 +4798,11 @@
       </p:sp>
       <p:sp>
         <p:nvSpPr>
-          <p:cNvPr id="5" name="Rounded Rectangle 4"/>
+          <p:cNvPr id="5" name="Rounded Rectangle 4">
+            <a:hlinkClick r:id="rId6"/>
+          </p:cNvPr>
           <p:cNvSpPr/>
-          <p:nvPr>
-            <a:hlinkClick r:id="rId6"/>
-          </p:nvPr>
+          <p:nvPr/>
         </p:nvSpPr>
         <p:spPr>
           <a:xfrm>
@@ -4900,11 +4900,11 @@
       </p:sp>
       <p:sp>
         <p:nvSpPr>
-          <p:cNvPr id="7" name="Rounded Rectangle 6"/>
+          <p:cNvPr id="7" name="Rounded Rectangle 6">
+            <a:hlinkClick r:id="rId10"/>
+          </p:cNvPr>
           <p:cNvSpPr/>
-          <p:nvPr>
-            <a:hlinkClick r:id="rId10"/>
-          </p:nvPr>
+          <p:nvPr/>
         </p:nvSpPr>
         <p:spPr>
           <a:xfrm>
@@ -5002,11 +5002,11 @@
       </p:sp>
       <p:sp>
         <p:nvSpPr>
-          <p:cNvPr id="9" name="Rounded Rectangle 8"/>
+          <p:cNvPr id="9" name="Rounded Rectangle 8">
+            <a:hlinkClick r:id="rId14"/>
+          </p:cNvPr>
           <p:cNvSpPr/>
-          <p:nvPr>
-            <a:hlinkClick r:id="rId14"/>
-          </p:nvPr>
+          <p:nvPr/>
         </p:nvSpPr>
         <p:spPr>
           <a:xfrm>
@@ -5104,11 +5104,11 @@
       </p:sp>
       <p:sp>
         <p:nvSpPr>
-          <p:cNvPr id="11" name="Rounded Rectangle 10"/>
+          <p:cNvPr id="11" name="Rounded Rectangle 10">
+            <a:hlinkClick r:id="rId18"/>
+          </p:cNvPr>
           <p:cNvSpPr/>
-          <p:nvPr>
-            <a:hlinkClick r:id="rId18"/>
-          </p:nvPr>
+          <p:nvPr/>
         </p:nvSpPr>
         <p:spPr>
           <a:xfrm>
@@ -5190,11 +5190,11 @@
       </p:sp>
       <p:sp>
         <p:nvSpPr>
-          <p:cNvPr id="13" name="Rounded Rectangle 12"/>
+          <p:cNvPr id="13" name="Rounded Rectangle 12">
+            <a:hlinkClick r:id="rId20"/>
+          </p:cNvPr>
           <p:cNvSpPr/>
-          <p:nvPr>
-            <a:hlinkClick r:id="rId20"/>
-          </p:nvPr>
+          <p:nvPr/>
         </p:nvSpPr>
         <p:spPr>
           <a:xfrm>
@@ -5284,11 +5284,11 @@
       </p:sp>
       <p:sp>
         <p:nvSpPr>
-          <p:cNvPr id="15" name="Rounded Rectangle 14"/>
+          <p:cNvPr id="15" name="Rounded Rectangle 14">
+            <a:hlinkClick r:id="rId23"/>
+          </p:cNvPr>
           <p:cNvSpPr/>
-          <p:nvPr>
-            <a:hlinkClick r:id="rId23"/>
-          </p:nvPr>
+          <p:nvPr/>
         </p:nvSpPr>
         <p:spPr>
           <a:xfrm>
@@ -5386,11 +5386,11 @@
       </p:sp>
       <p:sp>
         <p:nvSpPr>
-          <p:cNvPr id="17" name="Rounded Rectangle 16"/>
+          <p:cNvPr id="17" name="Rounded Rectangle 16">
+            <a:hlinkClick r:id="rId27"/>
+          </p:cNvPr>
           <p:cNvSpPr/>
-          <p:nvPr>
-            <a:hlinkClick r:id="rId27"/>
-          </p:nvPr>
+          <p:nvPr/>
         </p:nvSpPr>
         <p:spPr>
           <a:xfrm>
@@ -5496,11 +5496,11 @@
       </p:sp>
       <p:sp>
         <p:nvSpPr>
-          <p:cNvPr id="19" name="Rounded Rectangle 18"/>
+          <p:cNvPr id="19" name="Rounded Rectangle 18">
+            <a:hlinkClick r:id="rId32"/>
+          </p:cNvPr>
           <p:cNvSpPr/>
-          <p:nvPr>
-            <a:hlinkClick r:id="rId32"/>
-          </p:nvPr>
+          <p:nvPr/>
         </p:nvSpPr>
         <p:spPr>
           <a:xfrm>
@@ -5582,11 +5582,11 @@
       </p:sp>
       <p:sp>
         <p:nvSpPr>
-          <p:cNvPr id="21" name="Rounded Rectangle 20"/>
+          <p:cNvPr id="21" name="Rounded Rectangle 20">
+            <a:hlinkClick r:id="rId34"/>
+          </p:cNvPr>
           <p:cNvSpPr/>
-          <p:nvPr>
-            <a:hlinkClick r:id="rId34"/>
-          </p:nvPr>
+          <p:nvPr/>
         </p:nvSpPr>
         <p:spPr>
           <a:xfrm>
@@ -5692,11 +5692,11 @@
       </p:sp>
       <p:sp>
         <p:nvSpPr>
-          <p:cNvPr id="23" name="Rounded Rectangle 22"/>
+          <p:cNvPr id="23" name="Rounded Rectangle 22">
+            <a:hlinkClick r:id="rId39"/>
+          </p:cNvPr>
           <p:cNvSpPr/>
-          <p:nvPr>
-            <a:hlinkClick r:id="rId39"/>
-          </p:nvPr>
+          <p:nvPr/>
         </p:nvSpPr>
         <p:spPr>
           <a:xfrm>
@@ -5778,11 +5778,11 @@
       </p:sp>
       <p:sp>
         <p:nvSpPr>
-          <p:cNvPr id="25" name="Rounded Rectangle 24"/>
+          <p:cNvPr id="25" name="Rounded Rectangle 24">
+            <a:hlinkClick r:id="rId41"/>
+          </p:cNvPr>
           <p:cNvSpPr/>
-          <p:nvPr>
-            <a:hlinkClick r:id="rId41"/>
-          </p:nvPr>
+          <p:nvPr/>
         </p:nvSpPr>
         <p:spPr>
           <a:xfrm>
@@ -5880,11 +5880,11 @@
       </p:sp>
       <p:sp>
         <p:nvSpPr>
-          <p:cNvPr id="27" name="Rounded Rectangle 26"/>
+          <p:cNvPr id="27" name="Rounded Rectangle 26">
+            <a:hlinkClick r:id="rId45"/>
+          </p:cNvPr>
           <p:cNvSpPr/>
-          <p:nvPr>
-            <a:hlinkClick r:id="rId45"/>
-          </p:nvPr>
+          <p:nvPr/>
         </p:nvSpPr>
         <p:spPr>
           <a:xfrm>
@@ -5982,11 +5982,11 @@
       </p:sp>
       <p:sp>
         <p:nvSpPr>
-          <p:cNvPr id="29" name="Rounded Rectangle 28"/>
+          <p:cNvPr id="29" name="Rounded Rectangle 28">
+            <a:hlinkClick r:id="rId49"/>
+          </p:cNvPr>
           <p:cNvSpPr/>
-          <p:nvPr>
-            <a:hlinkClick r:id="rId49"/>
-          </p:nvPr>
+          <p:nvPr/>
         </p:nvSpPr>
         <p:spPr>
           <a:xfrm>
@@ -6068,11 +6068,11 @@
       </p:sp>
       <p:sp>
         <p:nvSpPr>
-          <p:cNvPr id="31" name="Rounded Rectangle 30"/>
+          <p:cNvPr id="31" name="Rounded Rectangle 30">
+            <a:hlinkClick r:id="rId51"/>
+          </p:cNvPr>
           <p:cNvSpPr/>
-          <p:nvPr>
-            <a:hlinkClick r:id="rId51"/>
-          </p:nvPr>
+          <p:nvPr/>
         </p:nvSpPr>
         <p:spPr>
           <a:xfrm>
@@ -6239,11 +6239,11 @@
       </p:sp>
       <p:sp>
         <p:nvSpPr>
-          <p:cNvPr id="3" name="Rounded Rectangle 2"/>
+          <p:cNvPr id="3" name="Rounded Rectangle 2">
+            <a:hlinkClick r:id="rId2"/>
+          </p:cNvPr>
           <p:cNvSpPr/>
-          <p:nvPr>
-            <a:hlinkClick r:id="rId2"/>
-          </p:nvPr>
+          <p:nvPr/>
         </p:nvSpPr>
         <p:spPr>
           <a:xfrm>
@@ -6341,11 +6341,11 @@
       </p:sp>
       <p:sp>
         <p:nvSpPr>
-          <p:cNvPr id="5" name="Rounded Rectangle 4"/>
+          <p:cNvPr id="5" name="Rounded Rectangle 4">
+            <a:hlinkClick r:id="rId6"/>
+          </p:cNvPr>
           <p:cNvSpPr/>
-          <p:nvPr>
-            <a:hlinkClick r:id="rId6"/>
-          </p:nvPr>
+          <p:nvPr/>
         </p:nvSpPr>
         <p:spPr>
           <a:xfrm>
@@ -6435,11 +6435,11 @@
       </p:sp>
       <p:sp>
         <p:nvSpPr>
-          <p:cNvPr id="7" name="Rounded Rectangle 6"/>
+          <p:cNvPr id="7" name="Rounded Rectangle 6">
+            <a:hlinkClick r:id="rId9"/>
+          </p:cNvPr>
           <p:cNvSpPr/>
-          <p:nvPr>
-            <a:hlinkClick r:id="rId9"/>
-          </p:nvPr>
+          <p:nvPr/>
         </p:nvSpPr>
         <p:spPr>
           <a:xfrm>
@@ -6529,11 +6529,11 @@
       </p:sp>
       <p:sp>
         <p:nvSpPr>
-          <p:cNvPr id="9" name="Rounded Rectangle 8"/>
+          <p:cNvPr id="9" name="Rounded Rectangle 8">
+            <a:hlinkClick r:id="rId12"/>
+          </p:cNvPr>
           <p:cNvSpPr/>
-          <p:nvPr>
-            <a:hlinkClick r:id="rId12"/>
-          </p:nvPr>
+          <p:nvPr/>
         </p:nvSpPr>
         <p:spPr>
           <a:xfrm>
@@ -6631,11 +6631,11 @@
       </p:sp>
       <p:sp>
         <p:nvSpPr>
-          <p:cNvPr id="11" name="Rounded Rectangle 10"/>
+          <p:cNvPr id="11" name="Rounded Rectangle 10">
+            <a:hlinkClick r:id="rId16"/>
+          </p:cNvPr>
           <p:cNvSpPr/>
-          <p:nvPr>
-            <a:hlinkClick r:id="rId16"/>
-          </p:nvPr>
+          <p:nvPr/>
         </p:nvSpPr>
         <p:spPr>
           <a:xfrm>
@@ -6733,11 +6733,11 @@
       </p:sp>
       <p:sp>
         <p:nvSpPr>
-          <p:cNvPr id="13" name="Rounded Rectangle 12"/>
+          <p:cNvPr id="13" name="Rounded Rectangle 12">
+            <a:hlinkClick r:id="rId20"/>
+          </p:cNvPr>
           <p:cNvSpPr/>
-          <p:nvPr>
-            <a:hlinkClick r:id="rId20"/>
-          </p:nvPr>
+          <p:nvPr/>
         </p:nvSpPr>
         <p:spPr>
           <a:xfrm>
@@ -6819,11 +6819,11 @@
       </p:sp>
       <p:sp>
         <p:nvSpPr>
-          <p:cNvPr id="15" name="Rounded Rectangle 14"/>
+          <p:cNvPr id="15" name="Rounded Rectangle 14">
+            <a:hlinkClick r:id="rId22"/>
+          </p:cNvPr>
           <p:cNvSpPr/>
-          <p:nvPr>
-            <a:hlinkClick r:id="rId22"/>
-          </p:nvPr>
+          <p:nvPr/>
         </p:nvSpPr>
         <p:spPr>
           <a:xfrm>
@@ -6913,11 +6913,11 @@
       </p:sp>
       <p:sp>
         <p:nvSpPr>
-          <p:cNvPr id="17" name="Rounded Rectangle 16"/>
+          <p:cNvPr id="17" name="Rounded Rectangle 16">
+            <a:hlinkClick r:id="rId25"/>
+          </p:cNvPr>
           <p:cNvSpPr/>
-          <p:nvPr>
-            <a:hlinkClick r:id="rId25"/>
-          </p:nvPr>
+          <p:nvPr/>
         </p:nvSpPr>
         <p:spPr>
           <a:xfrm>
@@ -6999,11 +6999,11 @@
       </p:sp>
       <p:sp>
         <p:nvSpPr>
-          <p:cNvPr id="19" name="Rounded Rectangle 18"/>
+          <p:cNvPr id="19" name="Rounded Rectangle 18">
+            <a:hlinkClick r:id="rId27"/>
+          </p:cNvPr>
           <p:cNvSpPr/>
-          <p:nvPr>
-            <a:hlinkClick r:id="rId27"/>
-          </p:nvPr>
+          <p:nvPr/>
         </p:nvSpPr>
         <p:spPr>
           <a:xfrm>
@@ -7101,11 +7101,11 @@
       </p:sp>
       <p:sp>
         <p:nvSpPr>
-          <p:cNvPr id="21" name="Rounded Rectangle 20"/>
+          <p:cNvPr id="21" name="Rounded Rectangle 20">
+            <a:hlinkClick r:id="rId31"/>
+          </p:cNvPr>
           <p:cNvSpPr/>
-          <p:nvPr>
-            <a:hlinkClick r:id="rId31"/>
-          </p:nvPr>
+          <p:nvPr/>
         </p:nvSpPr>
         <p:spPr>
           <a:xfrm>
@@ -7195,11 +7195,11 @@
       </p:sp>
       <p:sp>
         <p:nvSpPr>
-          <p:cNvPr id="23" name="Rounded Rectangle 22"/>
+          <p:cNvPr id="23" name="Rounded Rectangle 22">
+            <a:hlinkClick r:id="rId34"/>
+          </p:cNvPr>
           <p:cNvSpPr/>
-          <p:nvPr>
-            <a:hlinkClick r:id="rId34"/>
-          </p:nvPr>
+          <p:nvPr/>
         </p:nvSpPr>
         <p:spPr>
           <a:xfrm>
@@ -7289,11 +7289,11 @@
       </p:sp>
       <p:sp>
         <p:nvSpPr>
-          <p:cNvPr id="25" name="Rounded Rectangle 24"/>
+          <p:cNvPr id="25" name="Rounded Rectangle 24">
+            <a:hlinkClick r:id="rId37"/>
+          </p:cNvPr>
           <p:cNvSpPr/>
-          <p:nvPr>
-            <a:hlinkClick r:id="rId37"/>
-          </p:nvPr>
+          <p:nvPr/>
         </p:nvSpPr>
         <p:spPr>
           <a:xfrm>
@@ -7375,11 +7375,11 @@
       </p:sp>
       <p:sp>
         <p:nvSpPr>
-          <p:cNvPr id="27" name="Rounded Rectangle 26"/>
+          <p:cNvPr id="27" name="Rounded Rectangle 26">
+            <a:hlinkClick r:id="rId39"/>
+          </p:cNvPr>
           <p:cNvSpPr/>
-          <p:nvPr>
-            <a:hlinkClick r:id="rId39"/>
-          </p:nvPr>
+          <p:nvPr/>
         </p:nvSpPr>
         <p:spPr>
           <a:xfrm>
@@ -7485,11 +7485,11 @@
       </p:sp>
       <p:sp>
         <p:nvSpPr>
-          <p:cNvPr id="29" name="Rounded Rectangle 28"/>
+          <p:cNvPr id="29" name="Rounded Rectangle 28">
+            <a:hlinkClick r:id="rId44"/>
+          </p:cNvPr>
           <p:cNvSpPr/>
-          <p:nvPr>
-            <a:hlinkClick r:id="rId44"/>
-          </p:nvPr>
+          <p:nvPr/>
         </p:nvSpPr>
         <p:spPr>
           <a:xfrm>
@@ -7571,11 +7571,11 @@
       </p:sp>
       <p:sp>
         <p:nvSpPr>
-          <p:cNvPr id="31" name="Rounded Rectangle 30"/>
+          <p:cNvPr id="31" name="Rounded Rectangle 30">
+            <a:hlinkClick r:id="rId46"/>
+          </p:cNvPr>
           <p:cNvSpPr/>
-          <p:nvPr>
-            <a:hlinkClick r:id="rId46"/>
-          </p:nvPr>
+          <p:nvPr/>
         </p:nvSpPr>
         <p:spPr>
           <a:xfrm>
@@ -7750,11 +7750,11 @@
       </p:sp>
       <p:sp>
         <p:nvSpPr>
-          <p:cNvPr id="3" name="Rounded Rectangle 2"/>
+          <p:cNvPr id="3" name="Rounded Rectangle 2">
+            <a:hlinkClick r:id="rId2"/>
+          </p:cNvPr>
           <p:cNvSpPr/>
-          <p:nvPr>
-            <a:hlinkClick r:id="rId2"/>
-          </p:nvPr>
+          <p:nvPr/>
         </p:nvSpPr>
         <p:spPr>
           <a:xfrm>
@@ -7852,11 +7852,11 @@
       </p:sp>
       <p:sp>
         <p:nvSpPr>
-          <p:cNvPr id="5" name="Rounded Rectangle 4"/>
+          <p:cNvPr id="5" name="Rounded Rectangle 4">
+            <a:hlinkClick r:id="rId6"/>
+          </p:cNvPr>
           <p:cNvSpPr/>
-          <p:nvPr>
-            <a:hlinkClick r:id="rId6"/>
-          </p:nvPr>
+          <p:nvPr/>
         </p:nvSpPr>
         <p:spPr>
           <a:xfrm>
@@ -7946,11 +7946,11 @@
       </p:sp>
       <p:sp>
         <p:nvSpPr>
-          <p:cNvPr id="7" name="Rounded Rectangle 6"/>
+          <p:cNvPr id="7" name="Rounded Rectangle 6">
+            <a:hlinkClick r:id="rId9"/>
+          </p:cNvPr>
           <p:cNvSpPr/>
-          <p:nvPr>
-            <a:hlinkClick r:id="rId9"/>
-          </p:nvPr>
+          <p:nvPr/>
         </p:nvSpPr>
         <p:spPr>
           <a:xfrm>
@@ -8048,11 +8048,11 @@
       </p:sp>
       <p:sp>
         <p:nvSpPr>
-          <p:cNvPr id="9" name="Rounded Rectangle 8"/>
+          <p:cNvPr id="9" name="Rounded Rectangle 8">
+            <a:hlinkClick r:id="rId13"/>
+          </p:cNvPr>
           <p:cNvSpPr/>
-          <p:nvPr>
-            <a:hlinkClick r:id="rId13"/>
-          </p:nvPr>
+          <p:nvPr/>
         </p:nvSpPr>
         <p:spPr>
           <a:xfrm>
@@ -8134,11 +8134,11 @@
       </p:sp>
       <p:sp>
         <p:nvSpPr>
-          <p:cNvPr id="11" name="Rounded Rectangle 10"/>
+          <p:cNvPr id="11" name="Rounded Rectangle 10">
+            <a:hlinkClick r:id="rId15"/>
+          </p:cNvPr>
           <p:cNvSpPr/>
-          <p:nvPr>
-            <a:hlinkClick r:id="rId15"/>
-          </p:nvPr>
+          <p:nvPr/>
         </p:nvSpPr>
         <p:spPr>
           <a:xfrm>
@@ -8236,11 +8236,11 @@
       </p:sp>
       <p:sp>
         <p:nvSpPr>
-          <p:cNvPr id="13" name="Rounded Rectangle 12"/>
+          <p:cNvPr id="13" name="Rounded Rectangle 12">
+            <a:hlinkClick r:id="rId19"/>
+          </p:cNvPr>
           <p:cNvSpPr/>
-          <p:nvPr>
-            <a:hlinkClick r:id="rId19"/>
-          </p:nvPr>
+          <p:nvPr/>
         </p:nvSpPr>
         <p:spPr>
           <a:xfrm>
@@ -8330,11 +8330,11 @@
       </p:sp>
       <p:sp>
         <p:nvSpPr>
-          <p:cNvPr id="15" name="Rounded Rectangle 14"/>
+          <p:cNvPr id="15" name="Rounded Rectangle 14">
+            <a:hlinkClick r:id="rId22"/>
+          </p:cNvPr>
           <p:cNvSpPr/>
-          <p:nvPr>
-            <a:hlinkClick r:id="rId22"/>
-          </p:nvPr>
+          <p:nvPr/>
         </p:nvSpPr>
         <p:spPr>
           <a:xfrm>
@@ -8440,11 +8440,11 @@
       </p:sp>
       <p:sp>
         <p:nvSpPr>
-          <p:cNvPr id="17" name="Rounded Rectangle 16"/>
+          <p:cNvPr id="17" name="Rounded Rectangle 16">
+            <a:hlinkClick r:id="rId27"/>
+          </p:cNvPr>
           <p:cNvSpPr/>
-          <p:nvPr>
-            <a:hlinkClick r:id="rId27"/>
-          </p:nvPr>
+          <p:nvPr/>
         </p:nvSpPr>
         <p:spPr>
           <a:xfrm>
@@ -8542,11 +8542,11 @@
       </p:sp>
       <p:sp>
         <p:nvSpPr>
-          <p:cNvPr id="19" name="Rounded Rectangle 18"/>
+          <p:cNvPr id="19" name="Rounded Rectangle 18">
+            <a:hlinkClick r:id="rId31"/>
+          </p:cNvPr>
           <p:cNvSpPr/>
-          <p:nvPr>
-            <a:hlinkClick r:id="rId31"/>
-          </p:nvPr>
+          <p:nvPr/>
         </p:nvSpPr>
         <p:spPr>
           <a:xfrm>
@@ -8644,11 +8644,11 @@
       </p:sp>
       <p:sp>
         <p:nvSpPr>
-          <p:cNvPr id="21" name="Rounded Rectangle 20"/>
+          <p:cNvPr id="21" name="Rounded Rectangle 20">
+            <a:hlinkClick r:id="rId35"/>
+          </p:cNvPr>
           <p:cNvSpPr/>
-          <p:nvPr>
-            <a:hlinkClick r:id="rId35"/>
-          </p:nvPr>
+          <p:nvPr/>
         </p:nvSpPr>
         <p:spPr>
           <a:xfrm>
@@ -8754,11 +8754,11 @@
       </p:sp>
       <p:sp>
         <p:nvSpPr>
-          <p:cNvPr id="23" name="Rounded Rectangle 22"/>
+          <p:cNvPr id="23" name="Rounded Rectangle 22">
+            <a:hlinkClick r:id="rId40"/>
+          </p:cNvPr>
           <p:cNvSpPr/>
-          <p:nvPr>
-            <a:hlinkClick r:id="rId40"/>
-          </p:nvPr>
+          <p:nvPr/>
         </p:nvSpPr>
         <p:spPr>
           <a:xfrm>
@@ -8848,11 +8848,11 @@
       </p:sp>
       <p:sp>
         <p:nvSpPr>
-          <p:cNvPr id="25" name="Rounded Rectangle 24"/>
+          <p:cNvPr id="25" name="Rounded Rectangle 24">
+            <a:hlinkClick r:id="rId43"/>
+          </p:cNvPr>
           <p:cNvSpPr/>
-          <p:nvPr>
-            <a:hlinkClick r:id="rId43"/>
-          </p:nvPr>
+          <p:nvPr/>
         </p:nvSpPr>
         <p:spPr>
           <a:xfrm>
@@ -8934,11 +8934,11 @@
       </p:sp>
       <p:sp>
         <p:nvSpPr>
-          <p:cNvPr id="27" name="Rounded Rectangle 26"/>
+          <p:cNvPr id="27" name="Rounded Rectangle 26">
+            <a:hlinkClick r:id="rId45"/>
+          </p:cNvPr>
           <p:cNvSpPr/>
-          <p:nvPr>
-            <a:hlinkClick r:id="rId45"/>
-          </p:nvPr>
+          <p:nvPr/>
         </p:nvSpPr>
         <p:spPr>
           <a:xfrm>
@@ -9020,11 +9020,11 @@
       </p:sp>
       <p:sp>
         <p:nvSpPr>
-          <p:cNvPr id="29" name="Rounded Rectangle 28"/>
+          <p:cNvPr id="29" name="Rounded Rectangle 28">
+            <a:hlinkClick r:id="rId47"/>
+          </p:cNvPr>
           <p:cNvSpPr/>
-          <p:nvPr>
-            <a:hlinkClick r:id="rId47"/>
-          </p:nvPr>
+          <p:nvPr/>
         </p:nvSpPr>
         <p:spPr>
           <a:xfrm>
@@ -9106,11 +9106,11 @@
       </p:sp>
       <p:sp>
         <p:nvSpPr>
-          <p:cNvPr id="31" name="Rounded Rectangle 30"/>
+          <p:cNvPr id="31" name="Rounded Rectangle 30">
+            <a:hlinkClick r:id="rId49"/>
+          </p:cNvPr>
           <p:cNvSpPr/>
-          <p:nvPr>
-            <a:hlinkClick r:id="rId49"/>
-          </p:nvPr>
+          <p:nvPr/>
         </p:nvSpPr>
         <p:spPr>
           <a:xfrm>
@@ -9261,11 +9261,11 @@
       </p:sp>
       <p:sp>
         <p:nvSpPr>
-          <p:cNvPr id="3" name="Rounded Rectangle 2"/>
+          <p:cNvPr id="3" name="Rounded Rectangle 2">
+            <a:hlinkClick r:id="rId2"/>
+          </p:cNvPr>
           <p:cNvSpPr/>
-          <p:nvPr>
-            <a:hlinkClick r:id="rId2"/>
-          </p:nvPr>
+          <p:nvPr/>
         </p:nvSpPr>
         <p:spPr>
           <a:xfrm>
@@ -9355,11 +9355,11 @@
       </p:sp>
       <p:sp>
         <p:nvSpPr>
-          <p:cNvPr id="5" name="Rounded Rectangle 4"/>
+          <p:cNvPr id="5" name="Rounded Rectangle 4">
+            <a:hlinkClick r:id="rId5"/>
+          </p:cNvPr>
           <p:cNvSpPr/>
-          <p:nvPr>
-            <a:hlinkClick r:id="rId5"/>
-          </p:nvPr>
+          <p:nvPr/>
         </p:nvSpPr>
         <p:spPr>
           <a:xfrm>
@@ -9441,11 +9441,11 @@
       </p:sp>
       <p:sp>
         <p:nvSpPr>
-          <p:cNvPr id="7" name="Rounded Rectangle 6"/>
+          <p:cNvPr id="7" name="Rounded Rectangle 6">
+            <a:hlinkClick r:id="rId7"/>
+          </p:cNvPr>
           <p:cNvSpPr/>
-          <p:nvPr>
-            <a:hlinkClick r:id="rId7"/>
-          </p:nvPr>
+          <p:nvPr/>
         </p:nvSpPr>
         <p:spPr>
           <a:xfrm>
@@ -9535,11 +9535,11 @@
       </p:sp>
       <p:sp>
         <p:nvSpPr>
-          <p:cNvPr id="9" name="Rounded Rectangle 8"/>
+          <p:cNvPr id="9" name="Rounded Rectangle 8">
+            <a:hlinkClick r:id="rId10"/>
+          </p:cNvPr>
           <p:cNvSpPr/>
-          <p:nvPr>
-            <a:hlinkClick r:id="rId10"/>
-          </p:nvPr>
+          <p:nvPr/>
         </p:nvSpPr>
         <p:spPr>
           <a:xfrm>
@@ -9629,11 +9629,11 @@
       </p:sp>
       <p:sp>
         <p:nvSpPr>
-          <p:cNvPr id="11" name="Rounded Rectangle 10"/>
+          <p:cNvPr id="11" name="Rounded Rectangle 10">
+            <a:hlinkClick r:id="rId13"/>
+          </p:cNvPr>
           <p:cNvSpPr/>
-          <p:nvPr>
-            <a:hlinkClick r:id="rId13"/>
-          </p:nvPr>
+          <p:nvPr/>
         </p:nvSpPr>
         <p:spPr>
           <a:xfrm>
@@ -9715,11 +9715,11 @@
       </p:sp>
       <p:sp>
         <p:nvSpPr>
-          <p:cNvPr id="13" name="Rounded Rectangle 12"/>
+          <p:cNvPr id="13" name="Rounded Rectangle 12">
+            <a:hlinkClick r:id="rId15"/>
+          </p:cNvPr>
           <p:cNvSpPr/>
-          <p:nvPr>
-            <a:hlinkClick r:id="rId15"/>
-          </p:nvPr>
+          <p:nvPr/>
         </p:nvSpPr>
         <p:spPr>
           <a:xfrm>
@@ -9825,11 +9825,11 @@
       </p:sp>
       <p:sp>
         <p:nvSpPr>
-          <p:cNvPr id="15" name="Rounded Rectangle 14"/>
+          <p:cNvPr id="15" name="Rounded Rectangle 14">
+            <a:hlinkClick r:id="rId20"/>
+          </p:cNvPr>
           <p:cNvSpPr/>
-          <p:nvPr>
-            <a:hlinkClick r:id="rId20"/>
-          </p:nvPr>
+          <p:nvPr/>
         </p:nvSpPr>
         <p:spPr>
           <a:xfrm>
@@ -9935,11 +9935,11 @@
       </p:sp>
       <p:sp>
         <p:nvSpPr>
-          <p:cNvPr id="17" name="Rounded Rectangle 16"/>
+          <p:cNvPr id="17" name="Rounded Rectangle 16">
+            <a:hlinkClick r:id="rId25"/>
+          </p:cNvPr>
           <p:cNvSpPr/>
-          <p:nvPr>
-            <a:hlinkClick r:id="rId25"/>
-          </p:nvPr>
+          <p:nvPr/>
         </p:nvSpPr>
         <p:spPr>
           <a:xfrm>
@@ -10045,11 +10045,11 @@
       </p:sp>
       <p:sp>
         <p:nvSpPr>
-          <p:cNvPr id="19" name="Rounded Rectangle 18"/>
+          <p:cNvPr id="19" name="Rounded Rectangle 18">
+            <a:hlinkClick r:id="rId30"/>
+          </p:cNvPr>
           <p:cNvSpPr/>
-          <p:nvPr>
-            <a:hlinkClick r:id="rId30"/>
-          </p:nvPr>
+          <p:nvPr/>
         </p:nvSpPr>
         <p:spPr>
           <a:xfrm>
@@ -10147,11 +10147,11 @@
       </p:sp>
       <p:sp>
         <p:nvSpPr>
-          <p:cNvPr id="21" name="Rounded Rectangle 20"/>
+          <p:cNvPr id="21" name="Rounded Rectangle 20">
+            <a:hlinkClick r:id="rId34"/>
+          </p:cNvPr>
           <p:cNvSpPr/>
-          <p:nvPr>
-            <a:hlinkClick r:id="rId34"/>
-          </p:nvPr>
+          <p:nvPr/>
         </p:nvSpPr>
         <p:spPr>
           <a:xfrm>
@@ -10233,11 +10233,11 @@
       </p:sp>
       <p:sp>
         <p:nvSpPr>
-          <p:cNvPr id="23" name="Rounded Rectangle 22"/>
+          <p:cNvPr id="23" name="Rounded Rectangle 22">
+            <a:hlinkClick r:id="rId36"/>
+          </p:cNvPr>
           <p:cNvSpPr/>
-          <p:nvPr>
-            <a:hlinkClick r:id="rId36"/>
-          </p:nvPr>
+          <p:nvPr/>
         </p:nvSpPr>
         <p:spPr>
           <a:xfrm>
@@ -10343,11 +10343,11 @@
       </p:sp>
       <p:sp>
         <p:nvSpPr>
-          <p:cNvPr id="25" name="Rounded Rectangle 24"/>
+          <p:cNvPr id="25" name="Rounded Rectangle 24">
+            <a:hlinkClick r:id="rId41"/>
+          </p:cNvPr>
           <p:cNvSpPr/>
-          <p:nvPr>
-            <a:hlinkClick r:id="rId41"/>
-          </p:nvPr>
+          <p:nvPr/>
         </p:nvSpPr>
         <p:spPr>
           <a:xfrm>
@@ -10437,11 +10437,11 @@
       </p:sp>
       <p:sp>
         <p:nvSpPr>
-          <p:cNvPr id="27" name="Rounded Rectangle 26"/>
+          <p:cNvPr id="27" name="Rounded Rectangle 26">
+            <a:hlinkClick r:id="rId44"/>
+          </p:cNvPr>
           <p:cNvSpPr/>
-          <p:nvPr>
-            <a:hlinkClick r:id="rId44"/>
-          </p:nvPr>
+          <p:nvPr/>
         </p:nvSpPr>
         <p:spPr>
           <a:xfrm>
@@ -10523,11 +10523,11 @@
       </p:sp>
       <p:sp>
         <p:nvSpPr>
-          <p:cNvPr id="29" name="Rounded Rectangle 28"/>
+          <p:cNvPr id="29" name="Rounded Rectangle 28">
+            <a:hlinkClick r:id="rId46"/>
+          </p:cNvPr>
           <p:cNvSpPr/>
-          <p:nvPr>
-            <a:hlinkClick r:id="rId46"/>
-          </p:nvPr>
+          <p:nvPr/>
         </p:nvSpPr>
         <p:spPr>
           <a:xfrm>
@@ -10617,11 +10617,11 @@
       </p:sp>
       <p:sp>
         <p:nvSpPr>
-          <p:cNvPr id="31" name="Rounded Rectangle 30"/>
+          <p:cNvPr id="31" name="Rounded Rectangle 30">
+            <a:hlinkClick r:id="rId49"/>
+          </p:cNvPr>
           <p:cNvSpPr/>
-          <p:nvPr>
-            <a:hlinkClick r:id="rId49"/>
-          </p:nvPr>
+          <p:nvPr/>
         </p:nvSpPr>
         <p:spPr>
           <a:xfrm>

--- a/source/Instructor Pub10_Ed22B_Updated/Instructor Pub10_Ed22B_Updated.pptx
+++ b/source/Instructor Pub10_Ed22B_Updated/Instructor Pub10_Ed22B_Updated.pptx
@@ -10,6 +10,8 @@
     <p:sldId id="258" r:id="rId9"/>
     <p:sldId id="259" r:id="rId10"/>
     <p:sldId id="260" r:id="rId11"/>
+    <p:sldId id="261" r:id="rId12"/>
+    <p:sldId id="262" r:id="rId13"/>
   </p:sldIdLst>
   <p:sldSz cx="12188952" cy="6858000" type="screen4x3"/>
   <p:notesSz cx="6858000" cy="9144000"/>
@@ -3094,120 +3096,48 @@
       <p:grpSpPr/>
       <p:sp>
         <p:nvSpPr>
-          <p:cNvPr id="2" name="Rectangle 1"/>
-          <p:cNvSpPr/>
+          <p:cNvPr id="2" name="TextBox 1"/>
+          <p:cNvSpPr txBox="1"/>
           <p:nvPr/>
         </p:nvSpPr>
         <p:spPr>
           <a:xfrm>
-            <a:off x="0" y="0"/>
-            <a:ext cx="12188952" cy="548640"/>
+            <a:off x="914400" y="2377440"/>
+            <a:ext cx="10360152" cy="1280160"/>
           </a:xfrm>
           <a:prstGeom prst="rect">
             <a:avLst/>
           </a:prstGeom>
-          <a:solidFill>
-            <a:srgbClr val="1F3A5F"/>
-          </a:solidFill>
-          <a:ln>
-            <a:noFill/>
-          </a:ln>
-        </p:spPr>
-        <p:style>
-          <a:lnRef idx="1">
-            <a:schemeClr val="accent1"/>
-          </a:lnRef>
-          <a:fillRef idx="3">
-            <a:schemeClr val="accent1"/>
-          </a:fillRef>
-          <a:effectRef idx="2">
-            <a:schemeClr val="accent1"/>
-          </a:effectRef>
-          <a:fontRef idx="minor">
-            <a:schemeClr val="lt1"/>
-          </a:fontRef>
-        </p:style>
-        <p:txBody>
-          <a:bodyPr rtlCol="0" anchor="ctr" lIns="182880" rIns="182880"/>
+          <a:noFill/>
+        </p:spPr>
+        <p:txBody>
+          <a:bodyPr wrap="square">
+            <a:spAutoFit/>
+          </a:bodyPr>
           <a:lstStyle/>
           <a:p>
             <a:pPr algn="ctr"/>
             <a:r>
-              <a:rPr sz="2000" b="1">
-                <a:solidFill>
-                  <a:srgbClr val="FFFFFF"/>
-                </a:solidFill>
-              </a:rPr>
-              <a:t>Instructor Pub10_Ed22B_Updated — Page 1 of 5</a:t>
-            </a:r>
-          </a:p>
-        </p:txBody>
-      </p:sp>
-      <p:sp>
-        <p:nvSpPr>
-          <p:cNvPr id="3" name="Rounded Rectangle 2"/>
-          <p:cNvSpPr/>
-          <p:nvPr>
-            <a:hlinkClick r:id="rId2"/>
-          </p:nvPr>
-        </p:nvSpPr>
-        <p:spPr>
-          <a:xfrm>
-            <a:off x="365760" y="731520"/>
-            <a:ext cx="2200046" cy="365760"/>
-          </a:xfrm>
-          <a:prstGeom prst="roundRect">
-            <a:avLst/>
-          </a:prstGeom>
-          <a:solidFill>
-            <a:srgbClr val="E8EEF7"/>
-          </a:solidFill>
-          <a:ln>
-            <a:solidFill>
-              <a:srgbClr val="1F3A5F"/>
-            </a:solidFill>
-          </a:ln>
-        </p:spPr>
-        <p:style>
-          <a:lnRef idx="1">
-            <a:schemeClr val="accent1"/>
-          </a:lnRef>
-          <a:fillRef idx="3">
-            <a:schemeClr val="accent1"/>
-          </a:fillRef>
-          <a:effectRef idx="2">
-            <a:schemeClr val="accent1"/>
-          </a:effectRef>
-          <a:fontRef idx="minor">
-            <a:schemeClr val="lt1"/>
-          </a:fontRef>
-        </p:style>
-        <p:txBody>
-          <a:bodyPr rtlCol="0" anchor="ctr" lIns="45720" rIns="45720"/>
-          <a:lstStyle/>
-          <a:p>
-            <a:pPr algn="ctr"/>
-            <a:r>
-              <a:rPr sz="900">
+              <a:rPr sz="4000" b="1">
                 <a:solidFill>
                   <a:srgbClr val="1F3A5F"/>
                 </a:solidFill>
               </a:rPr>
-              <a:t>Gram 1: FR Outrider, Category 4, Tantive</a:t>
-            </a:r>
-          </a:p>
-        </p:txBody>
-      </p:sp>
-      <p:sp>
-        <p:nvSpPr>
-          <p:cNvPr id="4" name="TextBox 3"/>
+              <a:t>Welcome to Instructor Pub10_Ed22B_Updated</a:t>
+            </a:r>
+          </a:p>
+        </p:txBody>
+      </p:sp>
+      <p:sp>
+        <p:nvSpPr>
+          <p:cNvPr id="3" name="TextBox 2"/>
           <p:cNvSpPr txBox="1"/>
           <p:nvPr/>
         </p:nvSpPr>
         <p:spPr>
           <a:xfrm>
-            <a:off x="365760" y="1115568"/>
-            <a:ext cx="2200046" cy="1447800"/>
+            <a:off x="914400" y="3840480"/>
+            <a:ext cx="10360152" cy="731520"/>
           </a:xfrm>
           <a:prstGeom prst="rect">
             <a:avLst/>
@@ -3215,1412 +3145,19 @@
           <a:noFill/>
         </p:spPr>
         <p:txBody>
-          <a:bodyPr wrap="square">
+          <a:bodyPr wrap="none">
             <a:spAutoFit/>
           </a:bodyPr>
           <a:lstStyle/>
           <a:p>
-            <a:r>
-              <a:rPr sz="800">
-                <a:hlinkClick r:id="rId3"/>
-              </a:rPr>
-              <a:t>Lofar 1</a:t>
-            </a:r>
-          </a:p>
-          <a:p>
-            <a:r>
-              <a:rPr sz="800">
-                <a:hlinkClick r:id="rId4"/>
-              </a:rPr>
-              <a:t>Lofar 2</a:t>
-            </a:r>
-          </a:p>
-          <a:p>
-            <a:r>
-              <a:rPr sz="800">
-                <a:hlinkClick r:id="rId5"/>
-              </a:rPr>
-              <a:t>Lofar 3</a:t>
-            </a:r>
-          </a:p>
-        </p:txBody>
-      </p:sp>
-      <p:sp>
-        <p:nvSpPr>
-          <p:cNvPr id="5" name="Rounded Rectangle 4"/>
-          <p:cNvSpPr/>
-          <p:nvPr>
-            <a:hlinkClick r:id="rId6"/>
-          </p:nvPr>
-        </p:nvSpPr>
-        <p:spPr>
-          <a:xfrm>
-            <a:off x="2657246" y="731520"/>
-            <a:ext cx="2200046" cy="365760"/>
-          </a:xfrm>
-          <a:prstGeom prst="roundRect">
-            <a:avLst/>
-          </a:prstGeom>
-          <a:solidFill>
-            <a:srgbClr val="E8EEF7"/>
-          </a:solidFill>
-          <a:ln>
-            <a:solidFill>
-              <a:srgbClr val="1F3A5F"/>
-            </a:solidFill>
-          </a:ln>
-        </p:spPr>
-        <p:style>
-          <a:lnRef idx="1">
-            <a:schemeClr val="accent1"/>
-          </a:lnRef>
-          <a:fillRef idx="3">
-            <a:schemeClr val="accent1"/>
-          </a:fillRef>
-          <a:effectRef idx="2">
-            <a:schemeClr val="accent1"/>
-          </a:effectRef>
-          <a:fontRef idx="minor">
-            <a:schemeClr val="lt1"/>
-          </a:fontRef>
-        </p:style>
-        <p:txBody>
-          <a:bodyPr rtlCol="0" anchor="ctr" lIns="45720" rIns="45720"/>
-          <a:lstStyle/>
-          <a:p>
             <a:pPr algn="ctr"/>
             <a:r>
-              <a:rPr sz="900">
+              <a:rPr sz="2400">
                 <a:solidFill>
                   <a:srgbClr val="1F3A5F"/>
                 </a:solidFill>
               </a:rPr>
-              <a:t>Gram 2: FR Millennium Falcon, Category 1, Hoth</a:t>
-            </a:r>
-          </a:p>
-        </p:txBody>
-      </p:sp>
-      <p:sp>
-        <p:nvSpPr>
-          <p:cNvPr id="6" name="TextBox 5"/>
-          <p:cNvSpPr txBox="1"/>
-          <p:nvPr/>
-        </p:nvSpPr>
-        <p:spPr>
-          <a:xfrm>
-            <a:off x="2657246" y="1115568"/>
-            <a:ext cx="2200046" cy="1447800"/>
-          </a:xfrm>
-          <a:prstGeom prst="rect">
-            <a:avLst/>
-          </a:prstGeom>
-          <a:noFill/>
-        </p:spPr>
-        <p:txBody>
-          <a:bodyPr wrap="square">
-            <a:spAutoFit/>
-          </a:bodyPr>
-          <a:lstStyle/>
-          <a:p>
-            <a:r>
-              <a:rPr sz="800">
-                <a:hlinkClick r:id="rId7"/>
-              </a:rPr>
-              <a:t>Lofar 1</a:t>
-            </a:r>
-          </a:p>
-          <a:p>
-            <a:r>
-              <a:rPr sz="800">
-                <a:hlinkClick r:id="rId8"/>
-              </a:rPr>
-              <a:t>Lofar 2</a:t>
-            </a:r>
-          </a:p>
-        </p:txBody>
-      </p:sp>
-      <p:sp>
-        <p:nvSpPr>
-          <p:cNvPr id="7" name="Rounded Rectangle 6"/>
-          <p:cNvSpPr/>
-          <p:nvPr>
-            <a:hlinkClick r:id="rId9"/>
-          </p:nvPr>
-        </p:nvSpPr>
-        <p:spPr>
-          <a:xfrm>
-            <a:off x="4948732" y="731520"/>
-            <a:ext cx="2200046" cy="365760"/>
-          </a:xfrm>
-          <a:prstGeom prst="roundRect">
-            <a:avLst/>
-          </a:prstGeom>
-          <a:solidFill>
-            <a:srgbClr val="E8EEF7"/>
-          </a:solidFill>
-          <a:ln>
-            <a:solidFill>
-              <a:srgbClr val="1F3A5F"/>
-            </a:solidFill>
-          </a:ln>
-        </p:spPr>
-        <p:style>
-          <a:lnRef idx="1">
-            <a:schemeClr val="accent1"/>
-          </a:lnRef>
-          <a:fillRef idx="3">
-            <a:schemeClr val="accent1"/>
-          </a:fillRef>
-          <a:effectRef idx="2">
-            <a:schemeClr val="accent1"/>
-          </a:effectRef>
-          <a:fontRef idx="minor">
-            <a:schemeClr val="lt1"/>
-          </a:fontRef>
-        </p:style>
-        <p:txBody>
-          <a:bodyPr rtlCol="0" anchor="ctr" lIns="45720" rIns="45720"/>
-          <a:lstStyle/>
-          <a:p>
-            <a:pPr algn="ctr"/>
-            <a:r>
-              <a:rPr sz="900">
-                <a:solidFill>
-                  <a:srgbClr val="1F3A5F"/>
-                </a:solidFill>
-              </a:rPr>
-              <a:t>Gram 3: Intrepid-class contact bearing 281, codename Dagobah</a:t>
-            </a:r>
-          </a:p>
-        </p:txBody>
-      </p:sp>
-      <p:sp>
-        <p:nvSpPr>
-          <p:cNvPr id="8" name="TextBox 7"/>
-          <p:cNvSpPr txBox="1"/>
-          <p:nvPr/>
-        </p:nvSpPr>
-        <p:spPr>
-          <a:xfrm>
-            <a:off x="4948732" y="1115568"/>
-            <a:ext cx="2200046" cy="1447800"/>
-          </a:xfrm>
-          <a:prstGeom prst="rect">
-            <a:avLst/>
-          </a:prstGeom>
-          <a:noFill/>
-        </p:spPr>
-        <p:txBody>
-          <a:bodyPr wrap="square">
-            <a:spAutoFit/>
-          </a:bodyPr>
-          <a:lstStyle/>
-          <a:p>
-            <a:r>
-              <a:rPr sz="800">
-                <a:hlinkClick r:id="rId10"/>
-              </a:rPr>
-              <a:t>Lofar 1</a:t>
-            </a:r>
-          </a:p>
-          <a:p>
-            <a:r>
-              <a:rPr sz="800">
-                <a:hlinkClick r:id="rId11"/>
-              </a:rPr>
-              <a:t>Lofar 2</a:t>
-            </a:r>
-          </a:p>
-          <a:p>
-            <a:r>
-              <a:rPr sz="800">
-                <a:hlinkClick r:id="rId12"/>
-              </a:rPr>
-              <a:t>Lofar 3</a:t>
-            </a:r>
-          </a:p>
-        </p:txBody>
-      </p:sp>
-      <p:sp>
-        <p:nvSpPr>
-          <p:cNvPr id="9" name="Rounded Rectangle 8"/>
-          <p:cNvSpPr/>
-          <p:nvPr>
-            <a:hlinkClick r:id="rId13"/>
-          </p:nvPr>
-        </p:nvSpPr>
-        <p:spPr>
-          <a:xfrm>
-            <a:off x="7240219" y="731520"/>
-            <a:ext cx="2200046" cy="365760"/>
-          </a:xfrm>
-          <a:prstGeom prst="roundRect">
-            <a:avLst/>
-          </a:prstGeom>
-          <a:solidFill>
-            <a:srgbClr val="E8EEF7"/>
-          </a:solidFill>
-          <a:ln>
-            <a:solidFill>
-              <a:srgbClr val="1F3A5F"/>
-            </a:solidFill>
-          </a:ln>
-        </p:spPr>
-        <p:style>
-          <a:lnRef idx="1">
-            <a:schemeClr val="accent1"/>
-          </a:lnRef>
-          <a:fillRef idx="3">
-            <a:schemeClr val="accent1"/>
-          </a:fillRef>
-          <a:effectRef idx="2">
-            <a:schemeClr val="accent1"/>
-          </a:effectRef>
-          <a:fontRef idx="minor">
-            <a:schemeClr val="lt1"/>
-          </a:fontRef>
-        </p:style>
-        <p:txBody>
-          <a:bodyPr rtlCol="0" anchor="ctr" lIns="45720" rIns="45720"/>
-          <a:lstStyle/>
-          <a:p>
-            <a:pPr algn="ctr"/>
-            <a:r>
-              <a:rPr sz="900">
-                <a:solidFill>
-                  <a:srgbClr val="1F3A5F"/>
-                </a:solidFill>
-              </a:rPr>
-              <a:t>Gram 6: TIE Bomber contact bearing 018, codename Dank</a:t>
-            </a:r>
-          </a:p>
-        </p:txBody>
-      </p:sp>
-      <p:sp>
-        <p:nvSpPr>
-          <p:cNvPr id="10" name="TextBox 9"/>
-          <p:cNvSpPr txBox="1"/>
-          <p:nvPr/>
-        </p:nvSpPr>
-        <p:spPr>
-          <a:xfrm>
-            <a:off x="7240219" y="1115568"/>
-            <a:ext cx="2200046" cy="1447800"/>
-          </a:xfrm>
-          <a:prstGeom prst="rect">
-            <a:avLst/>
-          </a:prstGeom>
-          <a:noFill/>
-        </p:spPr>
-        <p:txBody>
-          <a:bodyPr wrap="square">
-            <a:spAutoFit/>
-          </a:bodyPr>
-          <a:lstStyle/>
-          <a:p>
-            <a:r>
-              <a:rPr sz="800">
-                <a:hlinkClick r:id="rId14"/>
-              </a:rPr>
-              <a:t>Lofar 1</a:t>
-            </a:r>
-          </a:p>
-          <a:p>
-            <a:r>
-              <a:rPr sz="800">
-                <a:hlinkClick r:id="rId15"/>
-              </a:rPr>
-              <a:t>Lofar 2</a:t>
-            </a:r>
-          </a:p>
-          <a:p>
-            <a:r>
-              <a:rPr sz="800">
-                <a:hlinkClick r:id="rId16"/>
-              </a:rPr>
-              <a:t>Lofar 3</a:t>
-            </a:r>
-          </a:p>
-        </p:txBody>
-      </p:sp>
-      <p:sp>
-        <p:nvSpPr>
-          <p:cNvPr id="11" name="Rounded Rectangle 10"/>
-          <p:cNvSpPr/>
-          <p:nvPr>
-            <a:hlinkClick r:id="rId17"/>
-          </p:nvPr>
-        </p:nvSpPr>
-        <p:spPr>
-          <a:xfrm>
-            <a:off x="9531705" y="731520"/>
-            <a:ext cx="2200046" cy="365760"/>
-          </a:xfrm>
-          <a:prstGeom prst="roundRect">
-            <a:avLst/>
-          </a:prstGeom>
-          <a:solidFill>
-            <a:srgbClr val="E8EEF7"/>
-          </a:solidFill>
-          <a:ln>
-            <a:solidFill>
-              <a:srgbClr val="1F3A5F"/>
-            </a:solidFill>
-          </a:ln>
-        </p:spPr>
-        <p:style>
-          <a:lnRef idx="1">
-            <a:schemeClr val="accent1"/>
-          </a:lnRef>
-          <a:fillRef idx="3">
-            <a:schemeClr val="accent1"/>
-          </a:fillRef>
-          <a:effectRef idx="2">
-            <a:schemeClr val="accent1"/>
-          </a:effectRef>
-          <a:fontRef idx="minor">
-            <a:schemeClr val="lt1"/>
-          </a:fontRef>
-        </p:style>
-        <p:txBody>
-          <a:bodyPr rtlCol="0" anchor="ctr" lIns="45720" rIns="45720"/>
-          <a:lstStyle/>
-          <a:p>
-            <a:pPr algn="ctr"/>
-            <a:r>
-              <a:rPr sz="900">
-                <a:solidFill>
-                  <a:srgbClr val="1F3A5F"/>
-                </a:solidFill>
-              </a:rPr>
-              <a:t>Gram 7: FR Outrider, Category 1, Romulus</a:t>
-            </a:r>
-          </a:p>
-        </p:txBody>
-      </p:sp>
-      <p:sp>
-        <p:nvSpPr>
-          <p:cNvPr id="12" name="TextBox 11"/>
-          <p:cNvSpPr txBox="1"/>
-          <p:nvPr/>
-        </p:nvSpPr>
-        <p:spPr>
-          <a:xfrm>
-            <a:off x="9531705" y="1115568"/>
-            <a:ext cx="2200046" cy="1447800"/>
-          </a:xfrm>
-          <a:prstGeom prst="rect">
-            <a:avLst/>
-          </a:prstGeom>
-          <a:noFill/>
-        </p:spPr>
-        <p:txBody>
-          <a:bodyPr wrap="square">
-            <a:spAutoFit/>
-          </a:bodyPr>
-          <a:lstStyle/>
-          <a:p>
-            <a:r>
-              <a:rPr sz="800">
-                <a:hlinkClick r:id="rId18"/>
-              </a:rPr>
-              <a:t>Lofar 1</a:t>
-            </a:r>
-          </a:p>
-          <a:p>
-            <a:r>
-              <a:rPr sz="800">
-                <a:hlinkClick r:id="rId19"/>
-              </a:rPr>
-              <a:t>Lofar 2</a:t>
-            </a:r>
-          </a:p>
-          <a:p>
-            <a:r>
-              <a:rPr sz="800">
-                <a:hlinkClick r:id="rId20"/>
-              </a:rPr>
-              <a:t>Lofar 3</a:t>
-            </a:r>
-          </a:p>
-          <a:p>
-            <a:r>
-              <a:rPr sz="800">
-                <a:hlinkClick r:id="rId21"/>
-              </a:rPr>
-              <a:t>Lofar 4</a:t>
-            </a:r>
-          </a:p>
-        </p:txBody>
-      </p:sp>
-      <p:sp>
-        <p:nvSpPr>
-          <p:cNvPr id="13" name="Rounded Rectangle 12"/>
-          <p:cNvSpPr/>
-          <p:nvPr>
-            <a:hlinkClick r:id="rId22"/>
-          </p:nvPr>
-        </p:nvSpPr>
-        <p:spPr>
-          <a:xfrm>
-            <a:off x="365760" y="2682240"/>
-            <a:ext cx="2200046" cy="365760"/>
-          </a:xfrm>
-          <a:prstGeom prst="roundRect">
-            <a:avLst/>
-          </a:prstGeom>
-          <a:solidFill>
-            <a:srgbClr val="E8EEF7"/>
-          </a:solidFill>
-          <a:ln>
-            <a:solidFill>
-              <a:srgbClr val="1F3A5F"/>
-            </a:solidFill>
-          </a:ln>
-        </p:spPr>
-        <p:style>
-          <a:lnRef idx="1">
-            <a:schemeClr val="accent1"/>
-          </a:lnRef>
-          <a:fillRef idx="3">
-            <a:schemeClr val="accent1"/>
-          </a:fillRef>
-          <a:effectRef idx="2">
-            <a:schemeClr val="accent1"/>
-          </a:effectRef>
-          <a:fontRef idx="minor">
-            <a:schemeClr val="lt1"/>
-          </a:fontRef>
-        </p:style>
-        <p:txBody>
-          <a:bodyPr rtlCol="0" anchor="ctr" lIns="45720" rIns="45720"/>
-          <a:lstStyle/>
-          <a:p>
-            <a:pPr algn="ctr"/>
-            <a:r>
-              <a:rPr sz="900">
-                <a:solidFill>
-                  <a:srgbClr val="1F3A5F"/>
-                </a:solidFill>
-              </a:rPr>
-              <a:t>Gram 9: B-wing contact bearing 007, codename Bespin</a:t>
-            </a:r>
-          </a:p>
-        </p:txBody>
-      </p:sp>
-      <p:sp>
-        <p:nvSpPr>
-          <p:cNvPr id="14" name="TextBox 13"/>
-          <p:cNvSpPr txBox="1"/>
-          <p:nvPr/>
-        </p:nvSpPr>
-        <p:spPr>
-          <a:xfrm>
-            <a:off x="365760" y="3066288"/>
-            <a:ext cx="2200046" cy="1447800"/>
-          </a:xfrm>
-          <a:prstGeom prst="rect">
-            <a:avLst/>
-          </a:prstGeom>
-          <a:noFill/>
-        </p:spPr>
-        <p:txBody>
-          <a:bodyPr wrap="square">
-            <a:spAutoFit/>
-          </a:bodyPr>
-          <a:lstStyle/>
-          <a:p>
-            <a:r>
-              <a:rPr sz="800">
-                <a:hlinkClick r:id="rId23"/>
-              </a:rPr>
-              <a:t>Lofar 1</a:t>
-            </a:r>
-          </a:p>
-          <a:p>
-            <a:r>
-              <a:rPr sz="800">
-                <a:hlinkClick r:id="rId24"/>
-              </a:rPr>
-              <a:t>Lofar 2</a:t>
-            </a:r>
-          </a:p>
-        </p:txBody>
-      </p:sp>
-      <p:sp>
-        <p:nvSpPr>
-          <p:cNvPr id="15" name="Rounded Rectangle 14"/>
-          <p:cNvSpPr/>
-          <p:nvPr>
-            <a:hlinkClick r:id="rId25"/>
-          </p:nvPr>
-        </p:nvSpPr>
-        <p:spPr>
-          <a:xfrm>
-            <a:off x="2657246" y="2682240"/>
-            <a:ext cx="2200046" cy="365760"/>
-          </a:xfrm>
-          <a:prstGeom prst="roundRect">
-            <a:avLst/>
-          </a:prstGeom>
-          <a:solidFill>
-            <a:srgbClr val="E8EEF7"/>
-          </a:solidFill>
-          <a:ln>
-            <a:solidFill>
-              <a:srgbClr val="1F3A5F"/>
-            </a:solidFill>
-          </a:ln>
-        </p:spPr>
-        <p:style>
-          <a:lnRef idx="1">
-            <a:schemeClr val="accent1"/>
-          </a:lnRef>
-          <a:fillRef idx="3">
-            <a:schemeClr val="accent1"/>
-          </a:fillRef>
-          <a:effectRef idx="2">
-            <a:schemeClr val="accent1"/>
-          </a:effectRef>
-          <a:fontRef idx="minor">
-            <a:schemeClr val="lt1"/>
-          </a:fontRef>
-        </p:style>
-        <p:txBody>
-          <a:bodyPr rtlCol="0" anchor="ctr" lIns="45720" rIns="45720"/>
-          <a:lstStyle/>
-          <a:p>
-            <a:pPr algn="ctr"/>
-            <a:r>
-              <a:rPr sz="900">
-                <a:solidFill>
-                  <a:srgbClr val="1F3A5F"/>
-                </a:solidFill>
-              </a:rPr>
-              <a:t>Gram 10: FR Razor Crest, Category 3, Romulus</a:t>
-            </a:r>
-          </a:p>
-        </p:txBody>
-      </p:sp>
-      <p:sp>
-        <p:nvSpPr>
-          <p:cNvPr id="16" name="TextBox 15"/>
-          <p:cNvSpPr txBox="1"/>
-          <p:nvPr/>
-        </p:nvSpPr>
-        <p:spPr>
-          <a:xfrm>
-            <a:off x="2657246" y="3066288"/>
-            <a:ext cx="2200046" cy="1447800"/>
-          </a:xfrm>
-          <a:prstGeom prst="rect">
-            <a:avLst/>
-          </a:prstGeom>
-          <a:noFill/>
-        </p:spPr>
-        <p:txBody>
-          <a:bodyPr wrap="square">
-            <a:spAutoFit/>
-          </a:bodyPr>
-          <a:lstStyle/>
-          <a:p>
-            <a:r>
-              <a:rPr sz="800">
-                <a:hlinkClick r:id="rId26"/>
-              </a:rPr>
-              <a:t>Lofar 1</a:t>
-            </a:r>
-          </a:p>
-        </p:txBody>
-      </p:sp>
-      <p:sp>
-        <p:nvSpPr>
-          <p:cNvPr id="17" name="Rounded Rectangle 16"/>
-          <p:cNvSpPr/>
-          <p:nvPr>
-            <a:hlinkClick r:id="rId27"/>
-          </p:nvPr>
-        </p:nvSpPr>
-        <p:spPr>
-          <a:xfrm>
-            <a:off x="4948732" y="2682240"/>
-            <a:ext cx="2200046" cy="365760"/>
-          </a:xfrm>
-          <a:prstGeom prst="roundRect">
-            <a:avLst/>
-          </a:prstGeom>
-          <a:solidFill>
-            <a:srgbClr val="E8EEF7"/>
-          </a:solidFill>
-          <a:ln>
-            <a:solidFill>
-              <a:srgbClr val="1F3A5F"/>
-            </a:solidFill>
-          </a:ln>
-        </p:spPr>
-        <p:style>
-          <a:lnRef idx="1">
-            <a:schemeClr val="accent1"/>
-          </a:lnRef>
-          <a:fillRef idx="3">
-            <a:schemeClr val="accent1"/>
-          </a:fillRef>
-          <a:effectRef idx="2">
-            <a:schemeClr val="accent1"/>
-          </a:effectRef>
-          <a:fontRef idx="minor">
-            <a:schemeClr val="lt1"/>
-          </a:fontRef>
-        </p:style>
-        <p:txBody>
-          <a:bodyPr rtlCol="0" anchor="ctr" lIns="45720" rIns="45720"/>
-          <a:lstStyle/>
-          <a:p>
-            <a:pPr algn="ctr"/>
-            <a:r>
-              <a:rPr sz="900">
-                <a:solidFill>
-                  <a:srgbClr val="1F3A5F"/>
-                </a:solidFill>
-              </a:rPr>
-              <a:t>Gram 11: FR Constitution-class, Category 1, Defiant</a:t>
-            </a:r>
-          </a:p>
-        </p:txBody>
-      </p:sp>
-      <p:sp>
-        <p:nvSpPr>
-          <p:cNvPr id="18" name="TextBox 17"/>
-          <p:cNvSpPr txBox="1"/>
-          <p:nvPr/>
-        </p:nvSpPr>
-        <p:spPr>
-          <a:xfrm>
-            <a:off x="4948732" y="3066288"/>
-            <a:ext cx="2200046" cy="1447800"/>
-          </a:xfrm>
-          <a:prstGeom prst="rect">
-            <a:avLst/>
-          </a:prstGeom>
-          <a:noFill/>
-        </p:spPr>
-        <p:txBody>
-          <a:bodyPr wrap="square">
-            <a:spAutoFit/>
-          </a:bodyPr>
-          <a:lstStyle/>
-          <a:p>
-            <a:r>
-              <a:rPr sz="800">
-                <a:hlinkClick r:id="rId28"/>
-              </a:rPr>
-              <a:t>Lofar 1</a:t>
-            </a:r>
-          </a:p>
-          <a:p>
-            <a:r>
-              <a:rPr sz="800">
-                <a:hlinkClick r:id="rId29"/>
-              </a:rPr>
-              <a:t>Lofar 2</a:t>
-            </a:r>
-          </a:p>
-          <a:p>
-            <a:r>
-              <a:rPr sz="800">
-                <a:hlinkClick r:id="rId30"/>
-              </a:rPr>
-              <a:t>Lofar 3</a:t>
-            </a:r>
-          </a:p>
-          <a:p>
-            <a:r>
-              <a:rPr sz="800">
-                <a:hlinkClick r:id="rId31"/>
-              </a:rPr>
-              <a:t>Lofar 4</a:t>
-            </a:r>
-          </a:p>
-        </p:txBody>
-      </p:sp>
-      <p:sp>
-        <p:nvSpPr>
-          <p:cNvPr id="19" name="Rounded Rectangle 18"/>
-          <p:cNvSpPr/>
-          <p:nvPr>
-            <a:hlinkClick r:id="rId32"/>
-          </p:nvPr>
-        </p:nvSpPr>
-        <p:spPr>
-          <a:xfrm>
-            <a:off x="7240219" y="2682240"/>
-            <a:ext cx="2200046" cy="365760"/>
-          </a:xfrm>
-          <a:prstGeom prst="roundRect">
-            <a:avLst/>
-          </a:prstGeom>
-          <a:solidFill>
-            <a:srgbClr val="E8EEF7"/>
-          </a:solidFill>
-          <a:ln>
-            <a:solidFill>
-              <a:srgbClr val="1F3A5F"/>
-            </a:solidFill>
-          </a:ln>
-        </p:spPr>
-        <p:style>
-          <a:lnRef idx="1">
-            <a:schemeClr val="accent1"/>
-          </a:lnRef>
-          <a:fillRef idx="3">
-            <a:schemeClr val="accent1"/>
-          </a:fillRef>
-          <a:effectRef idx="2">
-            <a:schemeClr val="accent1"/>
-          </a:effectRef>
-          <a:fontRef idx="minor">
-            <a:schemeClr val="lt1"/>
-          </a:fontRef>
-        </p:style>
-        <p:txBody>
-          <a:bodyPr rtlCol="0" anchor="ctr" lIns="45720" rIns="45720"/>
-          <a:lstStyle/>
-          <a:p>
-            <a:pPr algn="ctr"/>
-            <a:r>
-              <a:rPr sz="900">
-                <a:solidFill>
-                  <a:srgbClr val="1F3A5F"/>
-                </a:solidFill>
-              </a:rPr>
-              <a:t>Gram 13: FR Equinox, Category 4, Naboo</a:t>
-            </a:r>
-          </a:p>
-        </p:txBody>
-      </p:sp>
-      <p:sp>
-        <p:nvSpPr>
-          <p:cNvPr id="20" name="TextBox 19"/>
-          <p:cNvSpPr txBox="1"/>
-          <p:nvPr/>
-        </p:nvSpPr>
-        <p:spPr>
-          <a:xfrm>
-            <a:off x="7240219" y="3066288"/>
-            <a:ext cx="2200046" cy="1447800"/>
-          </a:xfrm>
-          <a:prstGeom prst="rect">
-            <a:avLst/>
-          </a:prstGeom>
-          <a:noFill/>
-        </p:spPr>
-        <p:txBody>
-          <a:bodyPr wrap="square">
-            <a:spAutoFit/>
-          </a:bodyPr>
-          <a:lstStyle/>
-          <a:p>
-            <a:r>
-              <a:rPr sz="800">
-                <a:hlinkClick r:id="rId33"/>
-              </a:rPr>
-              <a:t>Lofar 1</a:t>
-            </a:r>
-          </a:p>
-        </p:txBody>
-      </p:sp>
-      <p:sp>
-        <p:nvSpPr>
-          <p:cNvPr id="21" name="Rounded Rectangle 20"/>
-          <p:cNvSpPr/>
-          <p:nvPr>
-            <a:hlinkClick r:id="rId34"/>
-          </p:nvPr>
-        </p:nvSpPr>
-        <p:spPr>
-          <a:xfrm>
-            <a:off x="9531705" y="2682240"/>
-            <a:ext cx="2200046" cy="365760"/>
-          </a:xfrm>
-          <a:prstGeom prst="roundRect">
-            <a:avLst/>
-          </a:prstGeom>
-          <a:solidFill>
-            <a:srgbClr val="E8EEF7"/>
-          </a:solidFill>
-          <a:ln>
-            <a:solidFill>
-              <a:srgbClr val="1F3A5F"/>
-            </a:solidFill>
-          </a:ln>
-        </p:spPr>
-        <p:style>
-          <a:lnRef idx="1">
-            <a:schemeClr val="accent1"/>
-          </a:lnRef>
-          <a:fillRef idx="3">
-            <a:schemeClr val="accent1"/>
-          </a:fillRef>
-          <a:effectRef idx="2">
-            <a:schemeClr val="accent1"/>
-          </a:effectRef>
-          <a:fontRef idx="minor">
-            <a:schemeClr val="lt1"/>
-          </a:fontRef>
-        </p:style>
-        <p:txBody>
-          <a:bodyPr rtlCol="0" anchor="ctr" lIns="45720" rIns="45720"/>
-          <a:lstStyle/>
-          <a:p>
-            <a:pPr algn="ctr"/>
-            <a:r>
-              <a:rPr sz="900">
-                <a:solidFill>
-                  <a:srgbClr val="1F3A5F"/>
-                </a:solidFill>
-              </a:rPr>
-              <a:t>Gram 14: FR A-wing, Category 2, Tatooine</a:t>
-            </a:r>
-          </a:p>
-        </p:txBody>
-      </p:sp>
-      <p:sp>
-        <p:nvSpPr>
-          <p:cNvPr id="22" name="TextBox 21"/>
-          <p:cNvSpPr txBox="1"/>
-          <p:nvPr/>
-        </p:nvSpPr>
-        <p:spPr>
-          <a:xfrm>
-            <a:off x="9531705" y="3066288"/>
-            <a:ext cx="2200046" cy="1447800"/>
-          </a:xfrm>
-          <a:prstGeom prst="rect">
-            <a:avLst/>
-          </a:prstGeom>
-          <a:noFill/>
-        </p:spPr>
-        <p:txBody>
-          <a:bodyPr wrap="square">
-            <a:spAutoFit/>
-          </a:bodyPr>
-          <a:lstStyle/>
-          <a:p>
-            <a:r>
-              <a:rPr sz="800">
-                <a:hlinkClick r:id="rId35"/>
-              </a:rPr>
-              <a:t>Lofar 1</a:t>
-            </a:r>
-          </a:p>
-          <a:p>
-            <a:r>
-              <a:rPr sz="800">
-                <a:hlinkClick r:id="rId36"/>
-              </a:rPr>
-              <a:t>Lofar 2</a:t>
-            </a:r>
-          </a:p>
-          <a:p>
-            <a:r>
-              <a:rPr sz="800">
-                <a:hlinkClick r:id="rId37"/>
-              </a:rPr>
-              <a:t>Lofar 3</a:t>
-            </a:r>
-          </a:p>
-          <a:p>
-            <a:r>
-              <a:rPr sz="800">
-                <a:hlinkClick r:id="rId38"/>
-              </a:rPr>
-              <a:t>Lofar 4</a:t>
-            </a:r>
-          </a:p>
-        </p:txBody>
-      </p:sp>
-      <p:sp>
-        <p:nvSpPr>
-          <p:cNvPr id="23" name="Rounded Rectangle 22"/>
-          <p:cNvSpPr/>
-          <p:nvPr>
-            <a:hlinkClick r:id="rId39"/>
-          </p:nvPr>
-        </p:nvSpPr>
-        <p:spPr>
-          <a:xfrm>
-            <a:off x="365760" y="4632960"/>
-            <a:ext cx="2200046" cy="365760"/>
-          </a:xfrm>
-          <a:prstGeom prst="roundRect">
-            <a:avLst/>
-          </a:prstGeom>
-          <a:solidFill>
-            <a:srgbClr val="E8EEF7"/>
-          </a:solidFill>
-          <a:ln>
-            <a:solidFill>
-              <a:srgbClr val="1F3A5F"/>
-            </a:solidFill>
-          </a:ln>
-        </p:spPr>
-        <p:style>
-          <a:lnRef idx="1">
-            <a:schemeClr val="accent1"/>
-          </a:lnRef>
-          <a:fillRef idx="3">
-            <a:schemeClr val="accent1"/>
-          </a:fillRef>
-          <a:effectRef idx="2">
-            <a:schemeClr val="accent1"/>
-          </a:effectRef>
-          <a:fontRef idx="minor">
-            <a:schemeClr val="lt1"/>
-          </a:fontRef>
-        </p:style>
-        <p:txBody>
-          <a:bodyPr rtlCol="0" anchor="ctr" lIns="45720" rIns="45720"/>
-          <a:lstStyle/>
-          <a:p>
-            <a:pPr algn="ctr"/>
-            <a:r>
-              <a:rPr sz="900">
-                <a:solidFill>
-                  <a:srgbClr val="1F3A5F"/>
-                </a:solidFill>
-              </a:rPr>
-              <a:t>Gram 15: FR B-wing, Category 1, Mustafar</a:t>
-            </a:r>
-          </a:p>
-        </p:txBody>
-      </p:sp>
-      <p:sp>
-        <p:nvSpPr>
-          <p:cNvPr id="24" name="TextBox 23"/>
-          <p:cNvSpPr txBox="1"/>
-          <p:nvPr/>
-        </p:nvSpPr>
-        <p:spPr>
-          <a:xfrm>
-            <a:off x="365760" y="5017008"/>
-            <a:ext cx="2200046" cy="1447800"/>
-          </a:xfrm>
-          <a:prstGeom prst="rect">
-            <a:avLst/>
-          </a:prstGeom>
-          <a:noFill/>
-        </p:spPr>
-        <p:txBody>
-          <a:bodyPr wrap="square">
-            <a:spAutoFit/>
-          </a:bodyPr>
-          <a:lstStyle/>
-          <a:p>
-            <a:r>
-              <a:rPr sz="800">
-                <a:hlinkClick r:id="rId40"/>
-              </a:rPr>
-              <a:t>Lofar 1</a:t>
-            </a:r>
-          </a:p>
-          <a:p>
-            <a:r>
-              <a:rPr sz="800">
-                <a:hlinkClick r:id="rId41"/>
-              </a:rPr>
-              <a:t>Lofar 2</a:t>
-            </a:r>
-          </a:p>
-          <a:p>
-            <a:r>
-              <a:rPr sz="800">
-                <a:hlinkClick r:id="rId42"/>
-              </a:rPr>
-              <a:t>Lofar 3</a:t>
-            </a:r>
-          </a:p>
-          <a:p>
-            <a:r>
-              <a:rPr sz="800">
-                <a:hlinkClick r:id="rId43"/>
-              </a:rPr>
-              <a:t>Lofar 4</a:t>
-            </a:r>
-          </a:p>
-        </p:txBody>
-      </p:sp>
-      <p:sp>
-        <p:nvSpPr>
-          <p:cNvPr id="25" name="Rounded Rectangle 24"/>
-          <p:cNvSpPr/>
-          <p:nvPr>
-            <a:hlinkClick r:id="rId44"/>
-          </p:nvPr>
-        </p:nvSpPr>
-        <p:spPr>
-          <a:xfrm>
-            <a:off x="2657246" y="4632960"/>
-            <a:ext cx="2200046" cy="365760"/>
-          </a:xfrm>
-          <a:prstGeom prst="roundRect">
-            <a:avLst/>
-          </a:prstGeom>
-          <a:solidFill>
-            <a:srgbClr val="E8EEF7"/>
-          </a:solidFill>
-          <a:ln>
-            <a:solidFill>
-              <a:srgbClr val="1F3A5F"/>
-            </a:solidFill>
-          </a:ln>
-        </p:spPr>
-        <p:style>
-          <a:lnRef idx="1">
-            <a:schemeClr val="accent1"/>
-          </a:lnRef>
-          <a:fillRef idx="3">
-            <a:schemeClr val="accent1"/>
-          </a:fillRef>
-          <a:effectRef idx="2">
-            <a:schemeClr val="accent1"/>
-          </a:effectRef>
-          <a:fontRef idx="minor">
-            <a:schemeClr val="lt1"/>
-          </a:fontRef>
-        </p:style>
-        <p:txBody>
-          <a:bodyPr rtlCol="0" anchor="ctr" lIns="45720" rIns="45720"/>
-          <a:lstStyle/>
-          <a:p>
-            <a:pPr algn="ctr"/>
-            <a:r>
-              <a:rPr sz="900">
-                <a:solidFill>
-                  <a:srgbClr val="1F3A5F"/>
-                </a:solidFill>
-              </a:rPr>
-              <a:t>Gram 16: FR Equinox, Category 1, Kobol</a:t>
-            </a:r>
-          </a:p>
-        </p:txBody>
-      </p:sp>
-      <p:sp>
-        <p:nvSpPr>
-          <p:cNvPr id="26" name="TextBox 25"/>
-          <p:cNvSpPr txBox="1"/>
-          <p:nvPr/>
-        </p:nvSpPr>
-        <p:spPr>
-          <a:xfrm>
-            <a:off x="2657246" y="5017008"/>
-            <a:ext cx="2200046" cy="1447800"/>
-          </a:xfrm>
-          <a:prstGeom prst="rect">
-            <a:avLst/>
-          </a:prstGeom>
-          <a:noFill/>
-        </p:spPr>
-        <p:txBody>
-          <a:bodyPr wrap="square">
-            <a:spAutoFit/>
-          </a:bodyPr>
-          <a:lstStyle/>
-          <a:p>
-            <a:r>
-              <a:rPr sz="800">
-                <a:hlinkClick r:id="rId45"/>
-              </a:rPr>
-              <a:t>Lofar 1</a:t>
-            </a:r>
-          </a:p>
-          <a:p>
-            <a:r>
-              <a:rPr sz="800">
-                <a:hlinkClick r:id="rId46"/>
-              </a:rPr>
-              <a:t>Lofar 2</a:t>
-            </a:r>
-          </a:p>
-        </p:txBody>
-      </p:sp>
-      <p:sp>
-        <p:nvSpPr>
-          <p:cNvPr id="27" name="Rounded Rectangle 26"/>
-          <p:cNvSpPr/>
-          <p:nvPr>
-            <a:hlinkClick r:id="rId47"/>
-          </p:nvPr>
-        </p:nvSpPr>
-        <p:spPr>
-          <a:xfrm>
-            <a:off x="4948732" y="4632960"/>
-            <a:ext cx="2200046" cy="365760"/>
-          </a:xfrm>
-          <a:prstGeom prst="roundRect">
-            <a:avLst/>
-          </a:prstGeom>
-          <a:solidFill>
-            <a:srgbClr val="E8EEF7"/>
-          </a:solidFill>
-          <a:ln>
-            <a:solidFill>
-              <a:srgbClr val="1F3A5F"/>
-            </a:solidFill>
-          </a:ln>
-        </p:spPr>
-        <p:style>
-          <a:lnRef idx="1">
-            <a:schemeClr val="accent1"/>
-          </a:lnRef>
-          <a:fillRef idx="3">
-            <a:schemeClr val="accent1"/>
-          </a:fillRef>
-          <a:effectRef idx="2">
-            <a:schemeClr val="accent1"/>
-          </a:effectRef>
-          <a:fontRef idx="minor">
-            <a:schemeClr val="lt1"/>
-          </a:fontRef>
-        </p:style>
-        <p:txBody>
-          <a:bodyPr rtlCol="0" anchor="ctr" lIns="45720" rIns="45720"/>
-          <a:lstStyle/>
-          <a:p>
-            <a:pPr algn="ctr"/>
-            <a:r>
-              <a:rPr sz="900">
-                <a:solidFill>
-                  <a:srgbClr val="1F3A5F"/>
-                </a:solidFill>
-              </a:rPr>
-              <a:t>Gram 17: Acclamator-class contact bearing 199, codename Vulcan</a:t>
-            </a:r>
-          </a:p>
-        </p:txBody>
-      </p:sp>
-      <p:sp>
-        <p:nvSpPr>
-          <p:cNvPr id="28" name="TextBox 27"/>
-          <p:cNvSpPr txBox="1"/>
-          <p:nvPr/>
-        </p:nvSpPr>
-        <p:spPr>
-          <a:xfrm>
-            <a:off x="4948732" y="5017008"/>
-            <a:ext cx="2200046" cy="1447800"/>
-          </a:xfrm>
-          <a:prstGeom prst="rect">
-            <a:avLst/>
-          </a:prstGeom>
-          <a:noFill/>
-        </p:spPr>
-        <p:txBody>
-          <a:bodyPr wrap="square">
-            <a:spAutoFit/>
-          </a:bodyPr>
-          <a:lstStyle/>
-          <a:p>
-            <a:r>
-              <a:rPr sz="800">
-                <a:hlinkClick r:id="rId48"/>
-              </a:rPr>
-              <a:t>Lofar 1</a:t>
-            </a:r>
-          </a:p>
-          <a:p>
-            <a:r>
-              <a:rPr sz="800">
-                <a:hlinkClick r:id="rId49"/>
-              </a:rPr>
-              <a:t>Lofar 2</a:t>
-            </a:r>
-          </a:p>
-        </p:txBody>
-      </p:sp>
-      <p:sp>
-        <p:nvSpPr>
-          <p:cNvPr id="29" name="Rounded Rectangle 28"/>
-          <p:cNvSpPr/>
-          <p:nvPr>
-            <a:hlinkClick r:id="rId50"/>
-          </p:nvPr>
-        </p:nvSpPr>
-        <p:spPr>
-          <a:xfrm>
-            <a:off x="7240219" y="4632960"/>
-            <a:ext cx="2200046" cy="365760"/>
-          </a:xfrm>
-          <a:prstGeom prst="roundRect">
-            <a:avLst/>
-          </a:prstGeom>
-          <a:solidFill>
-            <a:srgbClr val="E8EEF7"/>
-          </a:solidFill>
-          <a:ln>
-            <a:solidFill>
-              <a:srgbClr val="1F3A5F"/>
-            </a:solidFill>
-          </a:ln>
-        </p:spPr>
-        <p:style>
-          <a:lnRef idx="1">
-            <a:schemeClr val="accent1"/>
-          </a:lnRef>
-          <a:fillRef idx="3">
-            <a:schemeClr val="accent1"/>
-          </a:fillRef>
-          <a:effectRef idx="2">
-            <a:schemeClr val="accent1"/>
-          </a:effectRef>
-          <a:fontRef idx="minor">
-            <a:schemeClr val="lt1"/>
-          </a:fontRef>
-        </p:style>
-        <p:txBody>
-          <a:bodyPr rtlCol="0" anchor="ctr" lIns="45720" rIns="45720"/>
-          <a:lstStyle/>
-          <a:p>
-            <a:pPr algn="ctr"/>
-            <a:r>
-              <a:rPr sz="900">
-                <a:solidFill>
-                  <a:srgbClr val="1F3A5F"/>
-                </a:solidFill>
-              </a:rPr>
-              <a:t>Gram 18: Enterprise contact bearing 015, codename Betazed</a:t>
-            </a:r>
-          </a:p>
-        </p:txBody>
-      </p:sp>
-      <p:sp>
-        <p:nvSpPr>
-          <p:cNvPr id="30" name="TextBox 29"/>
-          <p:cNvSpPr txBox="1"/>
-          <p:nvPr/>
-        </p:nvSpPr>
-        <p:spPr>
-          <a:xfrm>
-            <a:off x="7240219" y="5017008"/>
-            <a:ext cx="2200046" cy="1447800"/>
-          </a:xfrm>
-          <a:prstGeom prst="rect">
-            <a:avLst/>
-          </a:prstGeom>
-          <a:noFill/>
-        </p:spPr>
-        <p:txBody>
-          <a:bodyPr wrap="square">
-            <a:spAutoFit/>
-          </a:bodyPr>
-          <a:lstStyle/>
-          <a:p>
-            <a:r>
-              <a:rPr sz="800">
-                <a:hlinkClick r:id="rId51"/>
-              </a:rPr>
-              <a:t>Lofar 1</a:t>
-            </a:r>
-          </a:p>
-        </p:txBody>
-      </p:sp>
-      <p:sp>
-        <p:nvSpPr>
-          <p:cNvPr id="31" name="Rounded Rectangle 30"/>
-          <p:cNvSpPr/>
-          <p:nvPr>
-            <a:hlinkClick r:id="rId52"/>
-          </p:nvPr>
-        </p:nvSpPr>
-        <p:spPr>
-          <a:xfrm>
-            <a:off x="9531705" y="4632960"/>
-            <a:ext cx="2200046" cy="365760"/>
-          </a:xfrm>
-          <a:prstGeom prst="roundRect">
-            <a:avLst/>
-          </a:prstGeom>
-          <a:solidFill>
-            <a:srgbClr val="E8EEF7"/>
-          </a:solidFill>
-          <a:ln>
-            <a:solidFill>
-              <a:srgbClr val="1F3A5F"/>
-            </a:solidFill>
-          </a:ln>
-        </p:spPr>
-        <p:style>
-          <a:lnRef idx="1">
-            <a:schemeClr val="accent1"/>
-          </a:lnRef>
-          <a:fillRef idx="3">
-            <a:schemeClr val="accent1"/>
-          </a:fillRef>
-          <a:effectRef idx="2">
-            <a:schemeClr val="accent1"/>
-          </a:effectRef>
-          <a:fontRef idx="minor">
-            <a:schemeClr val="lt1"/>
-          </a:fontRef>
-        </p:style>
-        <p:txBody>
-          <a:bodyPr rtlCol="0" anchor="ctr" lIns="45720" rIns="45720"/>
-          <a:lstStyle/>
-          <a:p>
-            <a:pPr algn="ctr"/>
-            <a:r>
-              <a:rPr sz="900">
-                <a:solidFill>
-                  <a:srgbClr val="1F3A5F"/>
-                </a:solidFill>
-              </a:rPr>
-              <a:t>Gram 19: FR Rebel One, Category 1, Tatooine</a:t>
-            </a:r>
-          </a:p>
-        </p:txBody>
-      </p:sp>
-      <p:sp>
-        <p:nvSpPr>
-          <p:cNvPr id="32" name="TextBox 31"/>
-          <p:cNvSpPr txBox="1"/>
-          <p:nvPr/>
-        </p:nvSpPr>
-        <p:spPr>
-          <a:xfrm>
-            <a:off x="9531705" y="5017008"/>
-            <a:ext cx="2200046" cy="1447800"/>
-          </a:xfrm>
-          <a:prstGeom prst="rect">
-            <a:avLst/>
-          </a:prstGeom>
-          <a:noFill/>
-        </p:spPr>
-        <p:txBody>
-          <a:bodyPr wrap="square">
-            <a:spAutoFit/>
-          </a:bodyPr>
-          <a:lstStyle/>
-          <a:p>
-            <a:r>
-              <a:rPr sz="800">
-                <a:hlinkClick r:id="rId53"/>
-              </a:rPr>
-              <a:t>Lofar 1</a:t>
-            </a:r>
-          </a:p>
-          <a:p>
-            <a:r>
-              <a:rPr sz="800">
-                <a:hlinkClick r:id="rId54"/>
-              </a:rPr>
-              <a:t>Lofar 2</a:t>
-            </a:r>
-          </a:p>
-          <a:p>
-            <a:r>
-              <a:rPr sz="800">
-                <a:hlinkClick r:id="rId55"/>
-              </a:rPr>
-              <a:t>Lofar 3</a:t>
+              <a:t>Instructor Version</a:t>
             </a:r>
           </a:p>
         </p:txBody>
@@ -4689,7 +3226,7 @@
                   <a:srgbClr val="FFFFFF"/>
                 </a:solidFill>
               </a:rPr>
-              <a:t>Instructor Pub10_Ed22B_Updated — Page 2 of 5</a:t>
+              <a:t>Instructor Pub10_Ed22B_Updated — Page 1 of 5</a:t>
             </a:r>
           </a:p>
         </p:txBody>
@@ -4744,7 +3281,7 @@
                   <a:srgbClr val="1F3A5F"/>
                 </a:solidFill>
               </a:rPr>
-              <a:t>Gram 20: FR Defiant-class, Category 2, Cardassia</a:t>
+              <a:t>Gram 1: FR Outrider, Category 4, Tantive</a:t>
             </a:r>
           </a:p>
         </p:txBody>
@@ -4846,7 +3383,7 @@
                   <a:srgbClr val="1F3A5F"/>
                 </a:solidFill>
               </a:rPr>
-              <a:t>Gram 21: FR Outrider, Category 1, Naboo</a:t>
+              <a:t>Gram 2: FR Millennium Falcon, Category 1, Hoth</a:t>
             </a:r>
           </a:p>
         </p:txBody>
@@ -4888,14 +3425,6 @@
               <a:t>Lofar 2</a:t>
             </a:r>
           </a:p>
-          <a:p>
-            <a:r>
-              <a:rPr sz="800">
-                <a:hlinkClick r:id="rId9"/>
-              </a:rPr>
-              <a:t>Lofar 3</a:t>
-            </a:r>
-          </a:p>
         </p:txBody>
       </p:sp>
       <p:sp>
@@ -4903,7 +3432,7 @@
           <p:cNvPr id="7" name="Rounded Rectangle 6"/>
           <p:cNvSpPr/>
           <p:nvPr>
-            <a:hlinkClick r:id="rId10"/>
+            <a:hlinkClick r:id="rId9"/>
           </p:nvPr>
         </p:nvSpPr>
         <p:spPr>
@@ -4948,7 +3477,7 @@
                   <a:srgbClr val="1F3A5F"/>
                 </a:solidFill>
               </a:rPr>
-              <a:t>Gram 23: Star Destroyer contact bearing 214, codename Mustafar</a:t>
+              <a:t>Gram 3: Intrepid-class contact bearing 281, codename Dagobah</a:t>
             </a:r>
           </a:p>
         </p:txBody>
@@ -4977,23 +3506,23 @@
           <a:p>
             <a:r>
               <a:rPr sz="800">
+                <a:hlinkClick r:id="rId10"/>
+              </a:rPr>
+              <a:t>Lofar 1</a:t>
+            </a:r>
+          </a:p>
+          <a:p>
+            <a:r>
+              <a:rPr sz="800">
                 <a:hlinkClick r:id="rId11"/>
               </a:rPr>
-              <a:t>Lofar 1</a:t>
+              <a:t>Lofar 2</a:t>
             </a:r>
           </a:p>
           <a:p>
             <a:r>
               <a:rPr sz="800">
                 <a:hlinkClick r:id="rId12"/>
-              </a:rPr>
-              <a:t>Lofar 2</a:t>
-            </a:r>
-          </a:p>
-          <a:p>
-            <a:r>
-              <a:rPr sz="800">
-                <a:hlinkClick r:id="rId13"/>
               </a:rPr>
               <a:t>Lofar 3</a:t>
             </a:r>
@@ -5005,7 +3534,7 @@
           <p:cNvPr id="9" name="Rounded Rectangle 8"/>
           <p:cNvSpPr/>
           <p:nvPr>
-            <a:hlinkClick r:id="rId14"/>
+            <a:hlinkClick r:id="rId13"/>
           </p:nvPr>
         </p:nvSpPr>
         <p:spPr>
@@ -5050,7 +3579,7 @@
                   <a:srgbClr val="1F3A5F"/>
                 </a:solidFill>
               </a:rPr>
-              <a:t>Gram 24: Corellian Corvette contact bearing 131, codename Caprica</a:t>
+              <a:t>Gram 6: TIE Bomber contact bearing 018, codename Dank</a:t>
             </a:r>
           </a:p>
         </p:txBody>
@@ -5079,23 +3608,23 @@
           <a:p>
             <a:r>
               <a:rPr sz="800">
+                <a:hlinkClick r:id="rId14"/>
+              </a:rPr>
+              <a:t>Lofar 1</a:t>
+            </a:r>
+          </a:p>
+          <a:p>
+            <a:r>
+              <a:rPr sz="800">
                 <a:hlinkClick r:id="rId15"/>
               </a:rPr>
-              <a:t>Lofar 1</a:t>
+              <a:t>Lofar 2</a:t>
             </a:r>
           </a:p>
           <a:p>
             <a:r>
               <a:rPr sz="800">
                 <a:hlinkClick r:id="rId16"/>
-              </a:rPr>
-              <a:t>Lofar 2</a:t>
-            </a:r>
-          </a:p>
-          <a:p>
-            <a:r>
-              <a:rPr sz="800">
-                <a:hlinkClick r:id="rId17"/>
               </a:rPr>
               <a:t>Lofar 3</a:t>
             </a:r>
@@ -5107,7 +3636,7 @@
           <p:cNvPr id="11" name="Rounded Rectangle 10"/>
           <p:cNvSpPr/>
           <p:nvPr>
-            <a:hlinkClick r:id="rId18"/>
+            <a:hlinkClick r:id="rId17"/>
           </p:nvPr>
         </p:nvSpPr>
         <p:spPr>
@@ -5152,7 +3681,7 @@
                   <a:srgbClr val="1F3A5F"/>
                 </a:solidFill>
               </a:rPr>
-              <a:t>Gram 25: FR Akira-class, Category 2, Risa</a:t>
+              <a:t>Gram 7: FR Outrider, Category 1, Romulus</a:t>
             </a:r>
           </a:p>
         </p:txBody>
@@ -5181,9 +3710,33 @@
           <a:p>
             <a:r>
               <a:rPr sz="800">
+                <a:hlinkClick r:id="rId18"/>
+              </a:rPr>
+              <a:t>Lofar 1</a:t>
+            </a:r>
+          </a:p>
+          <a:p>
+            <a:r>
+              <a:rPr sz="800">
                 <a:hlinkClick r:id="rId19"/>
               </a:rPr>
-              <a:t>Lofar 1</a:t>
+              <a:t>Lofar 2</a:t>
+            </a:r>
+          </a:p>
+          <a:p>
+            <a:r>
+              <a:rPr sz="800">
+                <a:hlinkClick r:id="rId20"/>
+              </a:rPr>
+              <a:t>Lofar 3</a:t>
+            </a:r>
+          </a:p>
+          <a:p>
+            <a:r>
+              <a:rPr sz="800">
+                <a:hlinkClick r:id="rId21"/>
+              </a:rPr>
+              <a:t>Lofar 4</a:t>
             </a:r>
           </a:p>
         </p:txBody>
@@ -5193,7 +3746,7 @@
           <p:cNvPr id="13" name="Rounded Rectangle 12"/>
           <p:cNvSpPr/>
           <p:nvPr>
-            <a:hlinkClick r:id="rId20"/>
+            <a:hlinkClick r:id="rId22"/>
           </p:nvPr>
         </p:nvSpPr>
         <p:spPr>
@@ -5238,7 +3791,7 @@
                   <a:srgbClr val="1F3A5F"/>
                 </a:solidFill>
               </a:rPr>
-              <a:t>Gram 26: FR Intrepid-class, Category 4, Kronos</a:t>
+              <a:t>Gram 9: B-wing contact bearing 007, codename Bespin</a:t>
             </a:r>
           </a:p>
         </p:txBody>
@@ -5267,7 +3820,7 @@
           <a:p>
             <a:r>
               <a:rPr sz="800">
-                <a:hlinkClick r:id="rId21"/>
+                <a:hlinkClick r:id="rId23"/>
               </a:rPr>
               <a:t>Lofar 1</a:t>
             </a:r>
@@ -5275,7 +3828,7 @@
           <a:p>
             <a:r>
               <a:rPr sz="800">
-                <a:hlinkClick r:id="rId22"/>
+                <a:hlinkClick r:id="rId24"/>
               </a:rPr>
               <a:t>Lofar 2</a:t>
             </a:r>
@@ -5287,7 +3840,7 @@
           <p:cNvPr id="15" name="Rounded Rectangle 14"/>
           <p:cNvSpPr/>
           <p:nvPr>
-            <a:hlinkClick r:id="rId23"/>
+            <a:hlinkClick r:id="rId25"/>
           </p:nvPr>
         </p:nvSpPr>
         <p:spPr>
@@ -5332,7 +3885,7 @@
                   <a:srgbClr val="1F3A5F"/>
                 </a:solidFill>
               </a:rPr>
-              <a:t>Gram 27: Slave I contact bearing 006, codename Risa</a:t>
+              <a:t>Gram 10: FR Razor Crest, Category 3, Romulus</a:t>
             </a:r>
           </a:p>
         </p:txBody>
@@ -5361,25 +3914,9 @@
           <a:p>
             <a:r>
               <a:rPr sz="800">
-                <a:hlinkClick r:id="rId24"/>
+                <a:hlinkClick r:id="rId26"/>
               </a:rPr>
               <a:t>Lofar 1</a:t>
-            </a:r>
-          </a:p>
-          <a:p>
-            <a:r>
-              <a:rPr sz="800">
-                <a:hlinkClick r:id="rId25"/>
-              </a:rPr>
-              <a:t>Lofar 2</a:t>
-            </a:r>
-          </a:p>
-          <a:p>
-            <a:r>
-              <a:rPr sz="800">
-                <a:hlinkClick r:id="rId26"/>
-              </a:rPr>
-              <a:t>Lofar 3</a:t>
             </a:r>
           </a:p>
         </p:txBody>
@@ -5434,7 +3971,7 @@
                   <a:srgbClr val="1F3A5F"/>
                 </a:solidFill>
               </a:rPr>
-              <a:t>Gram 28: FR Nebula-class, Category 3, Coruscant</a:t>
+              <a:t>Gram 11: FR Constitution-class, Category 1, Defiant</a:t>
             </a:r>
           </a:p>
         </p:txBody>
@@ -5544,7 +4081,7 @@
                   <a:srgbClr val="1F3A5F"/>
                 </a:solidFill>
               </a:rPr>
-              <a:t>Gram 29: FR Reliant, Category 2, Kobol</a:t>
+              <a:t>Gram 13: FR Equinox, Category 4, Naboo</a:t>
             </a:r>
           </a:p>
         </p:txBody>
@@ -5630,7 +4167,7 @@
                   <a:srgbClr val="1F3A5F"/>
                 </a:solidFill>
               </a:rPr>
-              <a:t>Gram 30: FR Corellian Corvette, Category 1, Dank</a:t>
+              <a:t>Gram 14: FR A-wing, Category 2, Tatooine</a:t>
             </a:r>
           </a:p>
         </p:txBody>
@@ -5740,7 +4277,7 @@
                   <a:srgbClr val="1F3A5F"/>
                 </a:solidFill>
               </a:rPr>
-              <a:t>Gram 31: A-wing contact bearing 298, codename Dank</a:t>
+              <a:t>Gram 15: FR B-wing, Category 1, Mustafar</a:t>
             </a:r>
           </a:p>
         </p:txBody>
@@ -5774,6 +4311,30 @@
               <a:t>Lofar 1</a:t>
             </a:r>
           </a:p>
+          <a:p>
+            <a:r>
+              <a:rPr sz="800">
+                <a:hlinkClick r:id="rId41"/>
+              </a:rPr>
+              <a:t>Lofar 2</a:t>
+            </a:r>
+          </a:p>
+          <a:p>
+            <a:r>
+              <a:rPr sz="800">
+                <a:hlinkClick r:id="rId42"/>
+              </a:rPr>
+              <a:t>Lofar 3</a:t>
+            </a:r>
+          </a:p>
+          <a:p>
+            <a:r>
+              <a:rPr sz="800">
+                <a:hlinkClick r:id="rId43"/>
+              </a:rPr>
+              <a:t>Lofar 4</a:t>
+            </a:r>
+          </a:p>
         </p:txBody>
       </p:sp>
       <p:sp>
@@ -5781,7 +4342,7 @@
           <p:cNvPr id="25" name="Rounded Rectangle 24"/>
           <p:cNvSpPr/>
           <p:nvPr>
-            <a:hlinkClick r:id="rId41"/>
+            <a:hlinkClick r:id="rId44"/>
           </p:nvPr>
         </p:nvSpPr>
         <p:spPr>
@@ -5826,7 +4387,7 @@
                   <a:srgbClr val="1F3A5F"/>
                 </a:solidFill>
               </a:rPr>
-              <a:t>Gram 32: FR Ghost, Category 1, Dank</a:t>
+              <a:t>Gram 16: FR Equinox, Category 1, Kobol</a:t>
             </a:r>
           </a:p>
         </p:txBody>
@@ -5855,7 +4416,7 @@
           <a:p>
             <a:r>
               <a:rPr sz="800">
-                <a:hlinkClick r:id="rId42"/>
+                <a:hlinkClick r:id="rId45"/>
               </a:rPr>
               <a:t>Lofar 1</a:t>
             </a:r>
@@ -5863,17 +4424,9 @@
           <a:p>
             <a:r>
               <a:rPr sz="800">
-                <a:hlinkClick r:id="rId43"/>
+                <a:hlinkClick r:id="rId46"/>
               </a:rPr>
               <a:t>Lofar 2</a:t>
-            </a:r>
-          </a:p>
-          <a:p>
-            <a:r>
-              <a:rPr sz="800">
-                <a:hlinkClick r:id="rId44"/>
-              </a:rPr>
-              <a:t>Lofar 3</a:t>
             </a:r>
           </a:p>
         </p:txBody>
@@ -5883,7 +4436,7 @@
           <p:cNvPr id="27" name="Rounded Rectangle 26"/>
           <p:cNvSpPr/>
           <p:nvPr>
-            <a:hlinkClick r:id="rId45"/>
+            <a:hlinkClick r:id="rId47"/>
           </p:nvPr>
         </p:nvSpPr>
         <p:spPr>
@@ -5928,7 +4481,7 @@
                   <a:srgbClr val="1F3A5F"/>
                 </a:solidFill>
               </a:rPr>
-              <a:t>Gram 33: FR Nebulon-B, Category 2, Mustafar</a:t>
+              <a:t>Gram 17: Acclamator-class contact bearing 199, codename Vulcan</a:t>
             </a:r>
           </a:p>
         </p:txBody>
@@ -5957,7 +4510,7 @@
           <a:p>
             <a:r>
               <a:rPr sz="800">
-                <a:hlinkClick r:id="rId46"/>
+                <a:hlinkClick r:id="rId48"/>
               </a:rPr>
               <a:t>Lofar 1</a:t>
             </a:r>
@@ -5965,17 +4518,9 @@
           <a:p>
             <a:r>
               <a:rPr sz="800">
-                <a:hlinkClick r:id="rId47"/>
+                <a:hlinkClick r:id="rId49"/>
               </a:rPr>
               <a:t>Lofar 2</a:t>
-            </a:r>
-          </a:p>
-          <a:p>
-            <a:r>
-              <a:rPr sz="800">
-                <a:hlinkClick r:id="rId48"/>
-              </a:rPr>
-              <a:t>Lofar 3</a:t>
             </a:r>
           </a:p>
         </p:txBody>
@@ -5985,7 +4530,7 @@
           <p:cNvPr id="29" name="Rounded Rectangle 28"/>
           <p:cNvSpPr/>
           <p:nvPr>
-            <a:hlinkClick r:id="rId49"/>
+            <a:hlinkClick r:id="rId50"/>
           </p:nvPr>
         </p:nvSpPr>
         <p:spPr>
@@ -6030,7 +4575,7 @@
                   <a:srgbClr val="1F3A5F"/>
                 </a:solidFill>
               </a:rPr>
-              <a:t>Gram 34: FR Discovery, Category 3, Dank</a:t>
+              <a:t>Gram 18: Enterprise contact bearing 015, codename Betazed</a:t>
             </a:r>
           </a:p>
         </p:txBody>
@@ -6059,7 +4604,7 @@
           <a:p>
             <a:r>
               <a:rPr sz="800">
-                <a:hlinkClick r:id="rId50"/>
+                <a:hlinkClick r:id="rId51"/>
               </a:rPr>
               <a:t>Lofar 1</a:t>
             </a:r>
@@ -6071,7 +4616,7 @@
           <p:cNvPr id="31" name="Rounded Rectangle 30"/>
           <p:cNvSpPr/>
           <p:nvPr>
-            <a:hlinkClick r:id="rId51"/>
+            <a:hlinkClick r:id="rId52"/>
           </p:nvPr>
         </p:nvSpPr>
         <p:spPr>
@@ -6116,7 +4661,7 @@
                   <a:srgbClr val="1F3A5F"/>
                 </a:solidFill>
               </a:rPr>
-              <a:t>Gram 35: FR Cerritos, Category 3, Naboo</a:t>
+              <a:t>Gram 19: FR Rebel One, Category 1, Tatooine</a:t>
             </a:r>
           </a:p>
         </p:txBody>
@@ -6145,7 +4690,7 @@
           <a:p>
             <a:r>
               <a:rPr sz="800">
-                <a:hlinkClick r:id="rId52"/>
+                <a:hlinkClick r:id="rId53"/>
               </a:rPr>
               <a:t>Lofar 1</a:t>
             </a:r>
@@ -6153,7 +4698,7 @@
           <a:p>
             <a:r>
               <a:rPr sz="800">
-                <a:hlinkClick r:id="rId53"/>
+                <a:hlinkClick r:id="rId54"/>
               </a:rPr>
               <a:t>Lofar 2</a:t>
             </a:r>
@@ -6161,7 +4706,7 @@
           <a:p>
             <a:r>
               <a:rPr sz="800">
-                <a:hlinkClick r:id="rId54"/>
+                <a:hlinkClick r:id="rId55"/>
               </a:rPr>
               <a:t>Lofar 3</a:t>
             </a:r>
@@ -6232,7 +4777,7 @@
                   <a:srgbClr val="FFFFFF"/>
                 </a:solidFill>
               </a:rPr>
-              <a:t>Instructor Pub10_Ed22B_Updated — Page 3 of 5</a:t>
+              <a:t>Instructor Pub10_Ed22B_Updated — Page 2 of 5</a:t>
             </a:r>
           </a:p>
         </p:txBody>
@@ -6287,7 +4832,7 @@
                   <a:srgbClr val="1F3A5F"/>
                 </a:solidFill>
               </a:rPr>
-              <a:t>Gram 37: FR Discovery, Category 1, Gandalf</a:t>
+              <a:t>Gram 20: FR Defiant-class, Category 2, Cardassia</a:t>
             </a:r>
           </a:p>
         </p:txBody>
@@ -6389,7 +4934,7 @@
                   <a:srgbClr val="1F3A5F"/>
                 </a:solidFill>
               </a:rPr>
-              <a:t>Gram 39: FR Defiant-class, Category 1, Coruscant</a:t>
+              <a:t>Gram 21: FR Outrider, Category 1, Naboo</a:t>
             </a:r>
           </a:p>
         </p:txBody>
@@ -6431,6 +4976,14 @@
               <a:t>Lofar 2</a:t>
             </a:r>
           </a:p>
+          <a:p>
+            <a:r>
+              <a:rPr sz="800">
+                <a:hlinkClick r:id="rId9"/>
+              </a:rPr>
+              <a:t>Lofar 3</a:t>
+            </a:r>
+          </a:p>
         </p:txBody>
       </p:sp>
       <p:sp>
@@ -6438,7 +4991,7 @@
           <p:cNvPr id="7" name="Rounded Rectangle 6"/>
           <p:cNvSpPr/>
           <p:nvPr>
-            <a:hlinkClick r:id="rId9"/>
+            <a:hlinkClick r:id="rId10"/>
           </p:nvPr>
         </p:nvSpPr>
         <p:spPr>
@@ -6483,7 +5036,7 @@
                   <a:srgbClr val="1F3A5F"/>
                 </a:solidFill>
               </a:rPr>
-              <a:t>Gram 40: FR Outrider, Category 1, Hoth</a:t>
+              <a:t>Gram 23: Star Destroyer contact bearing 214, codename Mustafar</a:t>
             </a:r>
           </a:p>
         </p:txBody>
@@ -6512,7 +5065,7 @@
           <a:p>
             <a:r>
               <a:rPr sz="800">
-                <a:hlinkClick r:id="rId10"/>
+                <a:hlinkClick r:id="rId11"/>
               </a:rPr>
               <a:t>Lofar 1</a:t>
             </a:r>
@@ -6520,9 +5073,17 @@
           <a:p>
             <a:r>
               <a:rPr sz="800">
-                <a:hlinkClick r:id="rId11"/>
+                <a:hlinkClick r:id="rId12"/>
               </a:rPr>
               <a:t>Lofar 2</a:t>
+            </a:r>
+          </a:p>
+          <a:p>
+            <a:r>
+              <a:rPr sz="800">
+                <a:hlinkClick r:id="rId13"/>
+              </a:rPr>
+              <a:t>Lofar 3</a:t>
             </a:r>
           </a:p>
         </p:txBody>
@@ -6532,7 +5093,7 @@
           <p:cNvPr id="9" name="Rounded Rectangle 8"/>
           <p:cNvSpPr/>
           <p:nvPr>
-            <a:hlinkClick r:id="rId12"/>
+            <a:hlinkClick r:id="rId14"/>
           </p:nvPr>
         </p:nvSpPr>
         <p:spPr>
@@ -6577,7 +5138,7 @@
                   <a:srgbClr val="1F3A5F"/>
                 </a:solidFill>
               </a:rPr>
-              <a:t>Gram 43: Nebulon-B contact bearing 034, codename Kronos</a:t>
+              <a:t>Gram 24: Corellian Corvette contact bearing 131, codename Caprica</a:t>
             </a:r>
           </a:p>
         </p:txBody>
@@ -6606,7 +5167,7 @@
           <a:p>
             <a:r>
               <a:rPr sz="800">
-                <a:hlinkClick r:id="rId13"/>
+                <a:hlinkClick r:id="rId15"/>
               </a:rPr>
               <a:t>Lofar 1</a:t>
             </a:r>
@@ -6614,7 +5175,7 @@
           <a:p>
             <a:r>
               <a:rPr sz="800">
-                <a:hlinkClick r:id="rId14"/>
+                <a:hlinkClick r:id="rId16"/>
               </a:rPr>
               <a:t>Lofar 2</a:t>
             </a:r>
@@ -6622,7 +5183,7 @@
           <a:p>
             <a:r>
               <a:rPr sz="800">
-                <a:hlinkClick r:id="rId15"/>
+                <a:hlinkClick r:id="rId17"/>
               </a:rPr>
               <a:t>Lofar 3</a:t>
             </a:r>
@@ -6634,7 +5195,7 @@
           <p:cNvPr id="11" name="Rounded Rectangle 10"/>
           <p:cNvSpPr/>
           <p:nvPr>
-            <a:hlinkClick r:id="rId16"/>
+            <a:hlinkClick r:id="rId18"/>
           </p:nvPr>
         </p:nvSpPr>
         <p:spPr>
@@ -6679,7 +5240,7 @@
                   <a:srgbClr val="1F3A5F"/>
                 </a:solidFill>
               </a:rPr>
-              <a:t>Gram 44: FR X-wing, Category 4, Vulcan</a:t>
+              <a:t>Gram 25: FR Akira-class, Category 2, Risa</a:t>
             </a:r>
           </a:p>
         </p:txBody>
@@ -6708,25 +5269,9 @@
           <a:p>
             <a:r>
               <a:rPr sz="800">
-                <a:hlinkClick r:id="rId17"/>
+                <a:hlinkClick r:id="rId19"/>
               </a:rPr>
               <a:t>Lofar 1</a:t>
-            </a:r>
-          </a:p>
-          <a:p>
-            <a:r>
-              <a:rPr sz="800">
-                <a:hlinkClick r:id="rId18"/>
-              </a:rPr>
-              <a:t>Lofar 2</a:t>
-            </a:r>
-          </a:p>
-          <a:p>
-            <a:r>
-              <a:rPr sz="800">
-                <a:hlinkClick r:id="rId19"/>
-              </a:rPr>
-              <a:t>Lofar 3</a:t>
             </a:r>
           </a:p>
         </p:txBody>
@@ -6781,7 +5326,7 @@
                   <a:srgbClr val="1F3A5F"/>
                 </a:solidFill>
               </a:rPr>
-              <a:t>Gram 46: FR Lambda Shuttle, Category 2, Endor</a:t>
+              <a:t>Gram 26: FR Intrepid-class, Category 4, Kronos</a:t>
             </a:r>
           </a:p>
         </p:txBody>
@@ -6815,6 +5360,14 @@
               <a:t>Lofar 1</a:t>
             </a:r>
           </a:p>
+          <a:p>
+            <a:r>
+              <a:rPr sz="800">
+                <a:hlinkClick r:id="rId22"/>
+              </a:rPr>
+              <a:t>Lofar 2</a:t>
+            </a:r>
+          </a:p>
         </p:txBody>
       </p:sp>
       <p:sp>
@@ -6822,7 +5375,7 @@
           <p:cNvPr id="15" name="Rounded Rectangle 14"/>
           <p:cNvSpPr/>
           <p:nvPr>
-            <a:hlinkClick r:id="rId22"/>
+            <a:hlinkClick r:id="rId23"/>
           </p:nvPr>
         </p:nvSpPr>
         <p:spPr>
@@ -6867,7 +5420,7 @@
                   <a:srgbClr val="1F3A5F"/>
                 </a:solidFill>
               </a:rPr>
-              <a:t>Gram 47: Intrepid-class contact bearing 304, codename Hoth</a:t>
+              <a:t>Gram 27: Slave I contact bearing 006, codename Risa</a:t>
             </a:r>
           </a:p>
         </p:txBody>
@@ -6896,7 +5449,7 @@
           <a:p>
             <a:r>
               <a:rPr sz="800">
-                <a:hlinkClick r:id="rId23"/>
+                <a:hlinkClick r:id="rId24"/>
               </a:rPr>
               <a:t>Lofar 1</a:t>
             </a:r>
@@ -6904,9 +5457,17 @@
           <a:p>
             <a:r>
               <a:rPr sz="800">
-                <a:hlinkClick r:id="rId24"/>
+                <a:hlinkClick r:id="rId25"/>
               </a:rPr>
               <a:t>Lofar 2</a:t>
+            </a:r>
+          </a:p>
+          <a:p>
+            <a:r>
+              <a:rPr sz="800">
+                <a:hlinkClick r:id="rId26"/>
+              </a:rPr>
+              <a:t>Lofar 3</a:t>
             </a:r>
           </a:p>
         </p:txBody>
@@ -6916,7 +5477,7 @@
           <p:cNvPr id="17" name="Rounded Rectangle 16"/>
           <p:cNvSpPr/>
           <p:nvPr>
-            <a:hlinkClick r:id="rId25"/>
+            <a:hlinkClick r:id="rId27"/>
           </p:nvPr>
         </p:nvSpPr>
         <p:spPr>
@@ -6961,7 +5522,7 @@
                   <a:srgbClr val="1F3A5F"/>
                 </a:solidFill>
               </a:rPr>
-              <a:t>Gram 48: FR Nebula-class, Category 2, Romulus</a:t>
+              <a:t>Gram 28: FR Nebula-class, Category 3, Coruscant</a:t>
             </a:r>
           </a:p>
         </p:txBody>
@@ -6990,9 +5551,33 @@
           <a:p>
             <a:r>
               <a:rPr sz="800">
-                <a:hlinkClick r:id="rId26"/>
+                <a:hlinkClick r:id="rId28"/>
               </a:rPr>
               <a:t>Lofar 1</a:t>
+            </a:r>
+          </a:p>
+          <a:p>
+            <a:r>
+              <a:rPr sz="800">
+                <a:hlinkClick r:id="rId29"/>
+              </a:rPr>
+              <a:t>Lofar 2</a:t>
+            </a:r>
+          </a:p>
+          <a:p>
+            <a:r>
+              <a:rPr sz="800">
+                <a:hlinkClick r:id="rId30"/>
+              </a:rPr>
+              <a:t>Lofar 3</a:t>
+            </a:r>
+          </a:p>
+          <a:p>
+            <a:r>
+              <a:rPr sz="800">
+                <a:hlinkClick r:id="rId31"/>
+              </a:rPr>
+              <a:t>Lofar 4</a:t>
             </a:r>
           </a:p>
         </p:txBody>
@@ -7002,7 +5587,7 @@
           <p:cNvPr id="19" name="Rounded Rectangle 18"/>
           <p:cNvSpPr/>
           <p:nvPr>
-            <a:hlinkClick r:id="rId27"/>
+            <a:hlinkClick r:id="rId32"/>
           </p:nvPr>
         </p:nvSpPr>
         <p:spPr>
@@ -7047,7 +5632,7 @@
                   <a:srgbClr val="1F3A5F"/>
                 </a:solidFill>
               </a:rPr>
-              <a:t>Gram 49: FR Stargazer, Category 4, Dagobah</a:t>
+              <a:t>Gram 29: FR Reliant, Category 2, Kobol</a:t>
             </a:r>
           </a:p>
         </p:txBody>
@@ -7076,25 +5661,9 @@
           <a:p>
             <a:r>
               <a:rPr sz="800">
-                <a:hlinkClick r:id="rId28"/>
+                <a:hlinkClick r:id="rId33"/>
               </a:rPr>
               <a:t>Lofar 1</a:t>
-            </a:r>
-          </a:p>
-          <a:p>
-            <a:r>
-              <a:rPr sz="800">
-                <a:hlinkClick r:id="rId29"/>
-              </a:rPr>
-              <a:t>Lofar 2</a:t>
-            </a:r>
-          </a:p>
-          <a:p>
-            <a:r>
-              <a:rPr sz="800">
-                <a:hlinkClick r:id="rId30"/>
-              </a:rPr>
-              <a:t>Lofar 3</a:t>
             </a:r>
           </a:p>
         </p:txBody>
@@ -7104,7 +5673,7 @@
           <p:cNvPr id="21" name="Rounded Rectangle 20"/>
           <p:cNvSpPr/>
           <p:nvPr>
-            <a:hlinkClick r:id="rId31"/>
+            <a:hlinkClick r:id="rId34"/>
           </p:nvPr>
         </p:nvSpPr>
         <p:spPr>
@@ -7149,7 +5718,7 @@
                   <a:srgbClr val="1F3A5F"/>
                 </a:solidFill>
               </a:rPr>
-              <a:t>Gram 50: FR Akira-class, Category 2, Coruscant</a:t>
+              <a:t>Gram 30: FR Corellian Corvette, Category 1, Dank</a:t>
             </a:r>
           </a:p>
         </p:txBody>
@@ -7178,7 +5747,7 @@
           <a:p>
             <a:r>
               <a:rPr sz="800">
-                <a:hlinkClick r:id="rId32"/>
+                <a:hlinkClick r:id="rId35"/>
               </a:rPr>
               <a:t>Lofar 1</a:t>
             </a:r>
@@ -7186,9 +5755,25 @@
           <a:p>
             <a:r>
               <a:rPr sz="800">
-                <a:hlinkClick r:id="rId33"/>
+                <a:hlinkClick r:id="rId36"/>
               </a:rPr>
               <a:t>Lofar 2</a:t>
+            </a:r>
+          </a:p>
+          <a:p>
+            <a:r>
+              <a:rPr sz="800">
+                <a:hlinkClick r:id="rId37"/>
+              </a:rPr>
+              <a:t>Lofar 3</a:t>
+            </a:r>
+          </a:p>
+          <a:p>
+            <a:r>
+              <a:rPr sz="800">
+                <a:hlinkClick r:id="rId38"/>
+              </a:rPr>
+              <a:t>Lofar 4</a:t>
             </a:r>
           </a:p>
         </p:txBody>
@@ -7198,7 +5783,7 @@
           <p:cNvPr id="23" name="Rounded Rectangle 22"/>
           <p:cNvSpPr/>
           <p:nvPr>
-            <a:hlinkClick r:id="rId34"/>
+            <a:hlinkClick r:id="rId39"/>
           </p:nvPr>
         </p:nvSpPr>
         <p:spPr>
@@ -7243,7 +5828,7 @@
                   <a:srgbClr val="1F3A5F"/>
                 </a:solidFill>
               </a:rPr>
-              <a:t>Gram 51: FR Slave I, Category 2, Naboo</a:t>
+              <a:t>Gram 31: A-wing contact bearing 298, codename Dank</a:t>
             </a:r>
           </a:p>
         </p:txBody>
@@ -7272,17 +5857,9 @@
           <a:p>
             <a:r>
               <a:rPr sz="800">
-                <a:hlinkClick r:id="rId35"/>
+                <a:hlinkClick r:id="rId40"/>
               </a:rPr>
               <a:t>Lofar 1</a:t>
-            </a:r>
-          </a:p>
-          <a:p>
-            <a:r>
-              <a:rPr sz="800">
-                <a:hlinkClick r:id="rId36"/>
-              </a:rPr>
-              <a:t>Lofar 2</a:t>
             </a:r>
           </a:p>
         </p:txBody>
@@ -7292,7 +5869,7 @@
           <p:cNvPr id="25" name="Rounded Rectangle 24"/>
           <p:cNvSpPr/>
           <p:nvPr>
-            <a:hlinkClick r:id="rId37"/>
+            <a:hlinkClick r:id="rId41"/>
           </p:nvPr>
         </p:nvSpPr>
         <p:spPr>
@@ -7337,7 +5914,7 @@
                   <a:srgbClr val="1F3A5F"/>
                 </a:solidFill>
               </a:rPr>
-              <a:t>Gram 52: Nebula-class contact bearing 194, codename Dagobah</a:t>
+              <a:t>Gram 32: FR Ghost, Category 1, Dank</a:t>
             </a:r>
           </a:p>
         </p:txBody>
@@ -7366,9 +5943,25 @@
           <a:p>
             <a:r>
               <a:rPr sz="800">
-                <a:hlinkClick r:id="rId38"/>
+                <a:hlinkClick r:id="rId42"/>
               </a:rPr>
               <a:t>Lofar 1</a:t>
+            </a:r>
+          </a:p>
+          <a:p>
+            <a:r>
+              <a:rPr sz="800">
+                <a:hlinkClick r:id="rId43"/>
+              </a:rPr>
+              <a:t>Lofar 2</a:t>
+            </a:r>
+          </a:p>
+          <a:p>
+            <a:r>
+              <a:rPr sz="800">
+                <a:hlinkClick r:id="rId44"/>
+              </a:rPr>
+              <a:t>Lofar 3</a:t>
             </a:r>
           </a:p>
         </p:txBody>
@@ -7378,7 +5971,7 @@
           <p:cNvPr id="27" name="Rounded Rectangle 26"/>
           <p:cNvSpPr/>
           <p:nvPr>
-            <a:hlinkClick r:id="rId39"/>
+            <a:hlinkClick r:id="rId45"/>
           </p:nvPr>
         </p:nvSpPr>
         <p:spPr>
@@ -7423,7 +6016,7 @@
                   <a:srgbClr val="1F3A5F"/>
                 </a:solidFill>
               </a:rPr>
-              <a:t>Gram 54: FR Cerritos, Category 3, Vulcan</a:t>
+              <a:t>Gram 33: FR Nebulon-B, Category 2, Mustafar</a:t>
             </a:r>
           </a:p>
         </p:txBody>
@@ -7452,7 +6045,7 @@
           <a:p>
             <a:r>
               <a:rPr sz="800">
-                <a:hlinkClick r:id="rId40"/>
+                <a:hlinkClick r:id="rId46"/>
               </a:rPr>
               <a:t>Lofar 1</a:t>
             </a:r>
@@ -7460,7 +6053,7 @@
           <a:p>
             <a:r>
               <a:rPr sz="800">
-                <a:hlinkClick r:id="rId41"/>
+                <a:hlinkClick r:id="rId47"/>
               </a:rPr>
               <a:t>Lofar 2</a:t>
             </a:r>
@@ -7468,17 +6061,9 @@
           <a:p>
             <a:r>
               <a:rPr sz="800">
-                <a:hlinkClick r:id="rId42"/>
+                <a:hlinkClick r:id="rId48"/>
               </a:rPr>
               <a:t>Lofar 3</a:t>
-            </a:r>
-          </a:p>
-          <a:p>
-            <a:r>
-              <a:rPr sz="800">
-                <a:hlinkClick r:id="rId43"/>
-              </a:rPr>
-              <a:t>Lofar 4</a:t>
             </a:r>
           </a:p>
         </p:txBody>
@@ -7488,7 +6073,7 @@
           <p:cNvPr id="29" name="Rounded Rectangle 28"/>
           <p:cNvSpPr/>
           <p:nvPr>
-            <a:hlinkClick r:id="rId44"/>
+            <a:hlinkClick r:id="rId49"/>
           </p:nvPr>
         </p:nvSpPr>
         <p:spPr>
@@ -7533,7 +6118,7 @@
                   <a:srgbClr val="1F3A5F"/>
                 </a:solidFill>
               </a:rPr>
-              <a:t>Gram 55: FR Akira-class, Category 3, Betazed</a:t>
+              <a:t>Gram 34: FR Discovery, Category 3, Dank</a:t>
             </a:r>
           </a:p>
         </p:txBody>
@@ -7562,7 +6147,7 @@
           <a:p>
             <a:r>
               <a:rPr sz="800">
-                <a:hlinkClick r:id="rId45"/>
+                <a:hlinkClick r:id="rId50"/>
               </a:rPr>
               <a:t>Lofar 1</a:t>
             </a:r>
@@ -7574,7 +6159,7 @@
           <p:cNvPr id="31" name="Rounded Rectangle 30"/>
           <p:cNvSpPr/>
           <p:nvPr>
-            <a:hlinkClick r:id="rId46"/>
+            <a:hlinkClick r:id="rId51"/>
           </p:nvPr>
         </p:nvSpPr>
         <p:spPr>
@@ -7619,7 +6204,7 @@
                   <a:srgbClr val="1F3A5F"/>
                 </a:solidFill>
               </a:rPr>
-              <a:t>Gram 56: FR Discovery, Category 3, Kobol</a:t>
+              <a:t>Gram 35: FR Cerritos, Category 3, Naboo</a:t>
             </a:r>
           </a:p>
         </p:txBody>
@@ -7648,7 +6233,7 @@
           <a:p>
             <a:r>
               <a:rPr sz="800">
-                <a:hlinkClick r:id="rId47"/>
+                <a:hlinkClick r:id="rId52"/>
               </a:rPr>
               <a:t>Lofar 1</a:t>
             </a:r>
@@ -7656,7 +6241,7 @@
           <a:p>
             <a:r>
               <a:rPr sz="800">
-                <a:hlinkClick r:id="rId48"/>
+                <a:hlinkClick r:id="rId53"/>
               </a:rPr>
               <a:t>Lofar 2</a:t>
             </a:r>
@@ -7664,17 +6249,9 @@
           <a:p>
             <a:r>
               <a:rPr sz="800">
-                <a:hlinkClick r:id="rId49"/>
+                <a:hlinkClick r:id="rId54"/>
               </a:rPr>
               <a:t>Lofar 3</a:t>
-            </a:r>
-          </a:p>
-          <a:p>
-            <a:r>
-              <a:rPr sz="800">
-                <a:hlinkClick r:id="rId50"/>
-              </a:rPr>
-              <a:t>Lofar 4</a:t>
             </a:r>
           </a:p>
         </p:txBody>
@@ -7743,7 +6320,7 @@
                   <a:srgbClr val="FFFFFF"/>
                 </a:solidFill>
               </a:rPr>
-              <a:t>Instructor Pub10_Ed22B_Updated — Page 4 of 5</a:t>
+              <a:t>Instructor Pub10_Ed22B_Updated — Page 3 of 5</a:t>
             </a:r>
           </a:p>
         </p:txBody>
@@ -7798,7 +6375,7 @@
                   <a:srgbClr val="1F3A5F"/>
                 </a:solidFill>
               </a:rPr>
-              <a:t>Gram 57: Imperial-class contact bearing 089, codename Dagobah</a:t>
+              <a:t>Gram 37: FR Discovery, Category 1, Gandalf</a:t>
             </a:r>
           </a:p>
         </p:txBody>
@@ -7900,7 +6477,7 @@
                   <a:srgbClr val="1F3A5F"/>
                 </a:solidFill>
               </a:rPr>
-              <a:t>Gram 58: FR Tantive IV, Category 3, Yavin</a:t>
+              <a:t>Gram 39: FR Defiant-class, Category 1, Coruscant</a:t>
             </a:r>
           </a:p>
         </p:txBody>
@@ -7994,7 +6571,7 @@
                   <a:srgbClr val="1F3A5F"/>
                 </a:solidFill>
               </a:rPr>
-              <a:t>Gram 59: FR Akira-class, Category 3, Kobol</a:t>
+              <a:t>Gram 40: FR Outrider, Category 1, Hoth</a:t>
             </a:r>
           </a:p>
         </p:txBody>
@@ -8036,14 +6613,6 @@
               <a:t>Lofar 2</a:t>
             </a:r>
           </a:p>
-          <a:p>
-            <a:r>
-              <a:rPr sz="800">
-                <a:hlinkClick r:id="rId12"/>
-              </a:rPr>
-              <a:t>Lofar 3</a:t>
-            </a:r>
-          </a:p>
         </p:txBody>
       </p:sp>
       <p:sp>
@@ -8051,7 +6620,7 @@
           <p:cNvPr id="9" name="Rounded Rectangle 8"/>
           <p:cNvSpPr/>
           <p:nvPr>
-            <a:hlinkClick r:id="rId13"/>
+            <a:hlinkClick r:id="rId12"/>
           </p:nvPr>
         </p:nvSpPr>
         <p:spPr>
@@ -8096,7 +6665,7 @@
                   <a:srgbClr val="1F3A5F"/>
                 </a:solidFill>
               </a:rPr>
-              <a:t>Gram 60: Constitution-class contact bearing 355, codename Dank</a:t>
+              <a:t>Gram 43: Nebulon-B contact bearing 034, codename Kronos</a:t>
             </a:r>
           </a:p>
         </p:txBody>
@@ -8125,9 +6694,25 @@
           <a:p>
             <a:r>
               <a:rPr sz="800">
+                <a:hlinkClick r:id="rId13"/>
+              </a:rPr>
+              <a:t>Lofar 1</a:t>
+            </a:r>
+          </a:p>
+          <a:p>
+            <a:r>
+              <a:rPr sz="800">
                 <a:hlinkClick r:id="rId14"/>
               </a:rPr>
-              <a:t>Lofar 1</a:t>
+              <a:t>Lofar 2</a:t>
+            </a:r>
+          </a:p>
+          <a:p>
+            <a:r>
+              <a:rPr sz="800">
+                <a:hlinkClick r:id="rId15"/>
+              </a:rPr>
+              <a:t>Lofar 3</a:t>
             </a:r>
           </a:p>
         </p:txBody>
@@ -8137,7 +6722,7 @@
           <p:cNvPr id="11" name="Rounded Rectangle 10"/>
           <p:cNvSpPr/>
           <p:nvPr>
-            <a:hlinkClick r:id="rId15"/>
+            <a:hlinkClick r:id="rId16"/>
           </p:nvPr>
         </p:nvSpPr>
         <p:spPr>
@@ -8182,7 +6767,7 @@
                   <a:srgbClr val="1F3A5F"/>
                 </a:solidFill>
               </a:rPr>
-              <a:t>Gram 61: FR Nebulon-B, Category 4, Hoth</a:t>
+              <a:t>Gram 44: FR X-wing, Category 4, Vulcan</a:t>
             </a:r>
           </a:p>
         </p:txBody>
@@ -8211,7 +6796,7 @@
           <a:p>
             <a:r>
               <a:rPr sz="800">
-                <a:hlinkClick r:id="rId16"/>
+                <a:hlinkClick r:id="rId17"/>
               </a:rPr>
               <a:t>Lofar 1</a:t>
             </a:r>
@@ -8219,7 +6804,7 @@
           <a:p>
             <a:r>
               <a:rPr sz="800">
-                <a:hlinkClick r:id="rId17"/>
+                <a:hlinkClick r:id="rId18"/>
               </a:rPr>
               <a:t>Lofar 2</a:t>
             </a:r>
@@ -8227,7 +6812,7 @@
           <a:p>
             <a:r>
               <a:rPr sz="800">
-                <a:hlinkClick r:id="rId18"/>
+                <a:hlinkClick r:id="rId19"/>
               </a:rPr>
               <a:t>Lofar 3</a:t>
             </a:r>
@@ -8239,7 +6824,7 @@
           <p:cNvPr id="13" name="Rounded Rectangle 12"/>
           <p:cNvSpPr/>
           <p:nvPr>
-            <a:hlinkClick r:id="rId19"/>
+            <a:hlinkClick r:id="rId20"/>
           </p:nvPr>
         </p:nvSpPr>
         <p:spPr>
@@ -8284,7 +6869,7 @@
                   <a:srgbClr val="1F3A5F"/>
                 </a:solidFill>
               </a:rPr>
-              <a:t>Gram 62: Millennium Falcon contact bearing 148, codename Cardassia</a:t>
+              <a:t>Gram 46: FR Lambda Shuttle, Category 2, Endor</a:t>
             </a:r>
           </a:p>
         </p:txBody>
@@ -8313,17 +6898,9 @@
           <a:p>
             <a:r>
               <a:rPr sz="800">
-                <a:hlinkClick r:id="rId20"/>
+                <a:hlinkClick r:id="rId21"/>
               </a:rPr>
               <a:t>Lofar 1</a:t>
-            </a:r>
-          </a:p>
-          <a:p>
-            <a:r>
-              <a:rPr sz="800">
-                <a:hlinkClick r:id="rId21"/>
-              </a:rPr>
-              <a:t>Lofar 2</a:t>
             </a:r>
           </a:p>
         </p:txBody>
@@ -8378,7 +6955,7 @@
                   <a:srgbClr val="1F3A5F"/>
                 </a:solidFill>
               </a:rPr>
-              <a:t>Gram 63: FR Defiant-class, Category 3, Yavin</a:t>
+              <a:t>Gram 47: Intrepid-class contact bearing 304, codename Hoth</a:t>
             </a:r>
           </a:p>
         </p:txBody>
@@ -8420,22 +6997,6 @@
               <a:t>Lofar 2</a:t>
             </a:r>
           </a:p>
-          <a:p>
-            <a:r>
-              <a:rPr sz="800">
-                <a:hlinkClick r:id="rId25"/>
-              </a:rPr>
-              <a:t>Lofar 3</a:t>
-            </a:r>
-          </a:p>
-          <a:p>
-            <a:r>
-              <a:rPr sz="800">
-                <a:hlinkClick r:id="rId26"/>
-              </a:rPr>
-              <a:t>Lofar 4</a:t>
-            </a:r>
-          </a:p>
         </p:txBody>
       </p:sp>
       <p:sp>
@@ -8443,7 +7004,7 @@
           <p:cNvPr id="17" name="Rounded Rectangle 16"/>
           <p:cNvSpPr/>
           <p:nvPr>
-            <a:hlinkClick r:id="rId27"/>
+            <a:hlinkClick r:id="rId25"/>
           </p:nvPr>
         </p:nvSpPr>
         <p:spPr>
@@ -8488,7 +7049,7 @@
                   <a:srgbClr val="1F3A5F"/>
                 </a:solidFill>
               </a:rPr>
-              <a:t>Gram 64: FR Excelsior, Category 4, Mustafar</a:t>
+              <a:t>Gram 48: FR Nebula-class, Category 2, Romulus</a:t>
             </a:r>
           </a:p>
         </p:txBody>
@@ -8517,25 +7078,9 @@
           <a:p>
             <a:r>
               <a:rPr sz="800">
-                <a:hlinkClick r:id="rId28"/>
+                <a:hlinkClick r:id="rId26"/>
               </a:rPr>
               <a:t>Lofar 1</a:t>
-            </a:r>
-          </a:p>
-          <a:p>
-            <a:r>
-              <a:rPr sz="800">
-                <a:hlinkClick r:id="rId29"/>
-              </a:rPr>
-              <a:t>Lofar 2</a:t>
-            </a:r>
-          </a:p>
-          <a:p>
-            <a:r>
-              <a:rPr sz="800">
-                <a:hlinkClick r:id="rId30"/>
-              </a:rPr>
-              <a:t>Lofar 3</a:t>
             </a:r>
           </a:p>
         </p:txBody>
@@ -8545,7 +7090,7 @@
           <p:cNvPr id="19" name="Rounded Rectangle 18"/>
           <p:cNvSpPr/>
           <p:nvPr>
-            <a:hlinkClick r:id="rId31"/>
+            <a:hlinkClick r:id="rId27"/>
           </p:nvPr>
         </p:nvSpPr>
         <p:spPr>
@@ -8590,7 +7135,7 @@
                   <a:srgbClr val="1F3A5F"/>
                 </a:solidFill>
               </a:rPr>
-              <a:t>Gram 65: Galaxy-class contact bearing 151, codename Gandalf</a:t>
+              <a:t>Gram 49: FR Stargazer, Category 4, Dagobah</a:t>
             </a:r>
           </a:p>
         </p:txBody>
@@ -8619,7 +7164,7 @@
           <a:p>
             <a:r>
               <a:rPr sz="800">
-                <a:hlinkClick r:id="rId32"/>
+                <a:hlinkClick r:id="rId28"/>
               </a:rPr>
               <a:t>Lofar 1</a:t>
             </a:r>
@@ -8627,7 +7172,7 @@
           <a:p>
             <a:r>
               <a:rPr sz="800">
-                <a:hlinkClick r:id="rId33"/>
+                <a:hlinkClick r:id="rId29"/>
               </a:rPr>
               <a:t>Lofar 2</a:t>
             </a:r>
@@ -8635,7 +7180,7 @@
           <a:p>
             <a:r>
               <a:rPr sz="800">
-                <a:hlinkClick r:id="rId34"/>
+                <a:hlinkClick r:id="rId30"/>
               </a:rPr>
               <a:t>Lofar 3</a:t>
             </a:r>
@@ -8647,7 +7192,7 @@
           <p:cNvPr id="21" name="Rounded Rectangle 20"/>
           <p:cNvSpPr/>
           <p:nvPr>
-            <a:hlinkClick r:id="rId35"/>
+            <a:hlinkClick r:id="rId31"/>
           </p:nvPr>
         </p:nvSpPr>
         <p:spPr>
@@ -8692,7 +7237,7 @@
                   <a:srgbClr val="1F3A5F"/>
                 </a:solidFill>
               </a:rPr>
-              <a:t>Gram 66: FR Venator-class, Category 4, Cardassia</a:t>
+              <a:t>Gram 50: FR Akira-class, Category 2, Coruscant</a:t>
             </a:r>
           </a:p>
         </p:txBody>
@@ -8721,7 +7266,7 @@
           <a:p>
             <a:r>
               <a:rPr sz="800">
-                <a:hlinkClick r:id="rId36"/>
+                <a:hlinkClick r:id="rId32"/>
               </a:rPr>
               <a:t>Lofar 1</a:t>
             </a:r>
@@ -8729,25 +7274,9 @@
           <a:p>
             <a:r>
               <a:rPr sz="800">
-                <a:hlinkClick r:id="rId37"/>
+                <a:hlinkClick r:id="rId33"/>
               </a:rPr>
               <a:t>Lofar 2</a:t>
-            </a:r>
-          </a:p>
-          <a:p>
-            <a:r>
-              <a:rPr sz="800">
-                <a:hlinkClick r:id="rId38"/>
-              </a:rPr>
-              <a:t>Lofar 3</a:t>
-            </a:r>
-          </a:p>
-          <a:p>
-            <a:r>
-              <a:rPr sz="800">
-                <a:hlinkClick r:id="rId39"/>
-              </a:rPr>
-              <a:t>Lofar 4</a:t>
             </a:r>
           </a:p>
         </p:txBody>
@@ -8757,7 +7286,7 @@
           <p:cNvPr id="23" name="Rounded Rectangle 22"/>
           <p:cNvSpPr/>
           <p:nvPr>
-            <a:hlinkClick r:id="rId40"/>
+            <a:hlinkClick r:id="rId34"/>
           </p:nvPr>
         </p:nvSpPr>
         <p:spPr>
@@ -8802,7 +7331,7 @@
                   <a:srgbClr val="1F3A5F"/>
                 </a:solidFill>
               </a:rPr>
-              <a:t>Gram 67: Voyager contact bearing 029, codename Vulcan</a:t>
+              <a:t>Gram 51: FR Slave I, Category 2, Naboo</a:t>
             </a:r>
           </a:p>
         </p:txBody>
@@ -8831,7 +7360,7 @@
           <a:p>
             <a:r>
               <a:rPr sz="800">
-                <a:hlinkClick r:id="rId41"/>
+                <a:hlinkClick r:id="rId35"/>
               </a:rPr>
               <a:t>Lofar 1</a:t>
             </a:r>
@@ -8839,7 +7368,7 @@
           <a:p>
             <a:r>
               <a:rPr sz="800">
-                <a:hlinkClick r:id="rId42"/>
+                <a:hlinkClick r:id="rId36"/>
               </a:rPr>
               <a:t>Lofar 2</a:t>
             </a:r>
@@ -8851,7 +7380,7 @@
           <p:cNvPr id="25" name="Rounded Rectangle 24"/>
           <p:cNvSpPr/>
           <p:nvPr>
-            <a:hlinkClick r:id="rId43"/>
+            <a:hlinkClick r:id="rId37"/>
           </p:nvPr>
         </p:nvSpPr>
         <p:spPr>
@@ -8896,7 +7425,7 @@
                   <a:srgbClr val="1F3A5F"/>
                 </a:solidFill>
               </a:rPr>
-              <a:t>Gram 68: FR Akira-class, Category 4, Dank</a:t>
+              <a:t>Gram 52: Nebula-class contact bearing 194, codename Dagobah</a:t>
             </a:r>
           </a:p>
         </p:txBody>
@@ -8925,7 +7454,7 @@
           <a:p>
             <a:r>
               <a:rPr sz="800">
-                <a:hlinkClick r:id="rId44"/>
+                <a:hlinkClick r:id="rId38"/>
               </a:rPr>
               <a:t>Lofar 1</a:t>
             </a:r>
@@ -8937,7 +7466,7 @@
           <p:cNvPr id="27" name="Rounded Rectangle 26"/>
           <p:cNvSpPr/>
           <p:nvPr>
-            <a:hlinkClick r:id="rId45"/>
+            <a:hlinkClick r:id="rId39"/>
           </p:nvPr>
         </p:nvSpPr>
         <p:spPr>
@@ -8982,7 +7511,7 @@
                   <a:srgbClr val="1F3A5F"/>
                 </a:solidFill>
               </a:rPr>
-              <a:t>Gram 69: FR Razor Crest, Category 3, Hoth</a:t>
+              <a:t>Gram 54: FR Cerritos, Category 3, Vulcan</a:t>
             </a:r>
           </a:p>
         </p:txBody>
@@ -9011,9 +7540,33 @@
           <a:p>
             <a:r>
               <a:rPr sz="800">
-                <a:hlinkClick r:id="rId46"/>
+                <a:hlinkClick r:id="rId40"/>
               </a:rPr>
               <a:t>Lofar 1</a:t>
+            </a:r>
+          </a:p>
+          <a:p>
+            <a:r>
+              <a:rPr sz="800">
+                <a:hlinkClick r:id="rId41"/>
+              </a:rPr>
+              <a:t>Lofar 2</a:t>
+            </a:r>
+          </a:p>
+          <a:p>
+            <a:r>
+              <a:rPr sz="800">
+                <a:hlinkClick r:id="rId42"/>
+              </a:rPr>
+              <a:t>Lofar 3</a:t>
+            </a:r>
+          </a:p>
+          <a:p>
+            <a:r>
+              <a:rPr sz="800">
+                <a:hlinkClick r:id="rId43"/>
+              </a:rPr>
+              <a:t>Lofar 4</a:t>
             </a:r>
           </a:p>
         </p:txBody>
@@ -9023,7 +7576,7 @@
           <p:cNvPr id="29" name="Rounded Rectangle 28"/>
           <p:cNvSpPr/>
           <p:nvPr>
-            <a:hlinkClick r:id="rId47"/>
+            <a:hlinkClick r:id="rId44"/>
           </p:nvPr>
         </p:nvSpPr>
         <p:spPr>
@@ -9068,7 +7621,7 @@
                   <a:srgbClr val="1F3A5F"/>
                 </a:solidFill>
               </a:rPr>
-              <a:t>Gram 70: FR Nebulon-B, Category 4, Vulcan</a:t>
+              <a:t>Gram 55: FR Akira-class, Category 3, Betazed</a:t>
             </a:r>
           </a:p>
         </p:txBody>
@@ -9097,7 +7650,7 @@
           <a:p>
             <a:r>
               <a:rPr sz="800">
-                <a:hlinkClick r:id="rId48"/>
+                <a:hlinkClick r:id="rId45"/>
               </a:rPr>
               <a:t>Lofar 1</a:t>
             </a:r>
@@ -9109,7 +7662,7 @@
           <p:cNvPr id="31" name="Rounded Rectangle 30"/>
           <p:cNvSpPr/>
           <p:nvPr>
-            <a:hlinkClick r:id="rId49"/>
+            <a:hlinkClick r:id="rId46"/>
           </p:nvPr>
         </p:nvSpPr>
         <p:spPr>
@@ -9154,7 +7707,7 @@
                   <a:srgbClr val="1F3A5F"/>
                 </a:solidFill>
               </a:rPr>
-              <a:t>Gram 72: FR A-wing, Category 1, Gandalf</a:t>
+              <a:t>Gram 56: FR Discovery, Category 3, Kobol</a:t>
             </a:r>
           </a:p>
         </p:txBody>
@@ -9183,9 +7736,33 @@
           <a:p>
             <a:r>
               <a:rPr sz="800">
+                <a:hlinkClick r:id="rId47"/>
+              </a:rPr>
+              <a:t>Lofar 1</a:t>
+            </a:r>
+          </a:p>
+          <a:p>
+            <a:r>
+              <a:rPr sz="800">
+                <a:hlinkClick r:id="rId48"/>
+              </a:rPr>
+              <a:t>Lofar 2</a:t>
+            </a:r>
+          </a:p>
+          <a:p>
+            <a:r>
+              <a:rPr sz="800">
+                <a:hlinkClick r:id="rId49"/>
+              </a:rPr>
+              <a:t>Lofar 3</a:t>
+            </a:r>
+          </a:p>
+          <a:p>
+            <a:r>
+              <a:rPr sz="800">
                 <a:hlinkClick r:id="rId50"/>
               </a:rPr>
-              <a:t>Lofar 1</a:t>
+              <a:t>Lofar 4</a:t>
             </a:r>
           </a:p>
         </p:txBody>
@@ -9254,7 +7831,7 @@
                   <a:srgbClr val="FFFFFF"/>
                 </a:solidFill>
               </a:rPr>
-              <a:t>Instructor Pub10_Ed22B_Updated — Page 5 of 5</a:t>
+              <a:t>Instructor Pub10_Ed22B_Updated — Page 4 of 5</a:t>
             </a:r>
           </a:p>
         </p:txBody>
@@ -9309,7 +7886,7 @@
                   <a:srgbClr val="1F3A5F"/>
                 </a:solidFill>
               </a:rPr>
-              <a:t>Gram 74: Star Destroyer contact bearing 169, codename Bespin</a:t>
+              <a:t>Gram 57: Imperial-class contact bearing 089, codename Dagobah</a:t>
             </a:r>
           </a:p>
         </p:txBody>
@@ -9351,6 +7928,14 @@
               <a:t>Lofar 2</a:t>
             </a:r>
           </a:p>
+          <a:p>
+            <a:r>
+              <a:rPr sz="800">
+                <a:hlinkClick r:id="rId5"/>
+              </a:rPr>
+              <a:t>Lofar 3</a:t>
+            </a:r>
+          </a:p>
         </p:txBody>
       </p:sp>
       <p:sp>
@@ -9358,7 +7943,7 @@
           <p:cNvPr id="5" name="Rounded Rectangle 4"/>
           <p:cNvSpPr/>
           <p:nvPr>
-            <a:hlinkClick r:id="rId5"/>
+            <a:hlinkClick r:id="rId6"/>
           </p:nvPr>
         </p:nvSpPr>
         <p:spPr>
@@ -9403,7 +7988,7 @@
                   <a:srgbClr val="1F3A5F"/>
                 </a:solidFill>
               </a:rPr>
-              <a:t>Gram 75: FR Intrepid-class, Category 1, Vulcan</a:t>
+              <a:t>Gram 58: FR Tantive IV, Category 3, Yavin</a:t>
             </a:r>
           </a:p>
         </p:txBody>
@@ -9432,9 +8017,17 @@
           <a:p>
             <a:r>
               <a:rPr sz="800">
-                <a:hlinkClick r:id="rId6"/>
+                <a:hlinkClick r:id="rId7"/>
               </a:rPr>
               <a:t>Lofar 1</a:t>
+            </a:r>
+          </a:p>
+          <a:p>
+            <a:r>
+              <a:rPr sz="800">
+                <a:hlinkClick r:id="rId8"/>
+              </a:rPr>
+              <a:t>Lofar 2</a:t>
             </a:r>
           </a:p>
         </p:txBody>
@@ -9444,7 +8037,7 @@
           <p:cNvPr id="7" name="Rounded Rectangle 6"/>
           <p:cNvSpPr/>
           <p:nvPr>
-            <a:hlinkClick r:id="rId7"/>
+            <a:hlinkClick r:id="rId9"/>
           </p:nvPr>
         </p:nvSpPr>
         <p:spPr>
@@ -9489,7 +8082,7 @@
                   <a:srgbClr val="1F3A5F"/>
                 </a:solidFill>
               </a:rPr>
-              <a:t>Gram 76: FR Y-wing, Category 4, Tatooine</a:t>
+              <a:t>Gram 59: FR Akira-class, Category 3, Kobol</a:t>
             </a:r>
           </a:p>
         </p:txBody>
@@ -9518,7 +8111,7 @@
           <a:p>
             <a:r>
               <a:rPr sz="800">
-                <a:hlinkClick r:id="rId8"/>
+                <a:hlinkClick r:id="rId10"/>
               </a:rPr>
               <a:t>Lofar 1</a:t>
             </a:r>
@@ -9526,9 +8119,17 @@
           <a:p>
             <a:r>
               <a:rPr sz="800">
-                <a:hlinkClick r:id="rId9"/>
+                <a:hlinkClick r:id="rId11"/>
               </a:rPr>
               <a:t>Lofar 2</a:t>
+            </a:r>
+          </a:p>
+          <a:p>
+            <a:r>
+              <a:rPr sz="800">
+                <a:hlinkClick r:id="rId12"/>
+              </a:rPr>
+              <a:t>Lofar 3</a:t>
             </a:r>
           </a:p>
         </p:txBody>
@@ -9538,7 +8139,7 @@
           <p:cNvPr id="9" name="Rounded Rectangle 8"/>
           <p:cNvSpPr/>
           <p:nvPr>
-            <a:hlinkClick r:id="rId10"/>
+            <a:hlinkClick r:id="rId13"/>
           </p:nvPr>
         </p:nvSpPr>
         <p:spPr>
@@ -9583,7 +8184,7 @@
                   <a:srgbClr val="1F3A5F"/>
                 </a:solidFill>
               </a:rPr>
-              <a:t>Gram 77: FR Miranda-class, Category 3, Coruscant</a:t>
+              <a:t>Gram 60: Constitution-class contact bearing 355, codename Dank</a:t>
             </a:r>
           </a:p>
         </p:txBody>
@@ -9612,17 +8213,9 @@
           <a:p>
             <a:r>
               <a:rPr sz="800">
-                <a:hlinkClick r:id="rId11"/>
+                <a:hlinkClick r:id="rId14"/>
               </a:rPr>
               <a:t>Lofar 1</a:t>
-            </a:r>
-          </a:p>
-          <a:p>
-            <a:r>
-              <a:rPr sz="800">
-                <a:hlinkClick r:id="rId12"/>
-              </a:rPr>
-              <a:t>Lofar 2</a:t>
             </a:r>
           </a:p>
         </p:txBody>
@@ -9632,7 +8225,7 @@
           <p:cNvPr id="11" name="Rounded Rectangle 10"/>
           <p:cNvSpPr/>
           <p:nvPr>
-            <a:hlinkClick r:id="rId13"/>
+            <a:hlinkClick r:id="rId15"/>
           </p:nvPr>
         </p:nvSpPr>
         <p:spPr>
@@ -9677,7 +8270,7 @@
                   <a:srgbClr val="1F3A5F"/>
                 </a:solidFill>
               </a:rPr>
-              <a:t>Gram 78: Defiant-class contact bearing 142, codename Risa</a:t>
+              <a:t>Gram 61: FR Nebulon-B, Category 4, Hoth</a:t>
             </a:r>
           </a:p>
         </p:txBody>
@@ -9706,9 +8299,25 @@
           <a:p>
             <a:r>
               <a:rPr sz="800">
-                <a:hlinkClick r:id="rId14"/>
+                <a:hlinkClick r:id="rId16"/>
               </a:rPr>
               <a:t>Lofar 1</a:t>
+            </a:r>
+          </a:p>
+          <a:p>
+            <a:r>
+              <a:rPr sz="800">
+                <a:hlinkClick r:id="rId17"/>
+              </a:rPr>
+              <a:t>Lofar 2</a:t>
+            </a:r>
+          </a:p>
+          <a:p>
+            <a:r>
+              <a:rPr sz="800">
+                <a:hlinkClick r:id="rId18"/>
+              </a:rPr>
+              <a:t>Lofar 3</a:t>
             </a:r>
           </a:p>
         </p:txBody>
@@ -9718,7 +8327,7 @@
           <p:cNvPr id="13" name="Rounded Rectangle 12"/>
           <p:cNvSpPr/>
           <p:nvPr>
-            <a:hlinkClick r:id="rId15"/>
+            <a:hlinkClick r:id="rId19"/>
           </p:nvPr>
         </p:nvSpPr>
         <p:spPr>
@@ -9763,7 +8372,7 @@
                   <a:srgbClr val="1F3A5F"/>
                 </a:solidFill>
               </a:rPr>
-              <a:t>Gram 79: FR Voyager, Category 1, Dank</a:t>
+              <a:t>Gram 62: Millennium Falcon contact bearing 148, codename Cardassia</a:t>
             </a:r>
           </a:p>
         </p:txBody>
@@ -9792,7 +8401,7 @@
           <a:p>
             <a:r>
               <a:rPr sz="800">
-                <a:hlinkClick r:id="rId16"/>
+                <a:hlinkClick r:id="rId20"/>
               </a:rPr>
               <a:t>Lofar 1</a:t>
             </a:r>
@@ -9800,25 +8409,9 @@
           <a:p>
             <a:r>
               <a:rPr sz="800">
-                <a:hlinkClick r:id="rId17"/>
+                <a:hlinkClick r:id="rId21"/>
               </a:rPr>
               <a:t>Lofar 2</a:t>
-            </a:r>
-          </a:p>
-          <a:p>
-            <a:r>
-              <a:rPr sz="800">
-                <a:hlinkClick r:id="rId18"/>
-              </a:rPr>
-              <a:t>Lofar 3</a:t>
-            </a:r>
-          </a:p>
-          <a:p>
-            <a:r>
-              <a:rPr sz="800">
-                <a:hlinkClick r:id="rId19"/>
-              </a:rPr>
-              <a:t>Lofar 4</a:t>
             </a:r>
           </a:p>
         </p:txBody>
@@ -9828,7 +8421,7 @@
           <p:cNvPr id="15" name="Rounded Rectangle 14"/>
           <p:cNvSpPr/>
           <p:nvPr>
-            <a:hlinkClick r:id="rId20"/>
+            <a:hlinkClick r:id="rId22"/>
           </p:nvPr>
         </p:nvSpPr>
         <p:spPr>
@@ -9873,7 +8466,7 @@
                   <a:srgbClr val="1F3A5F"/>
                 </a:solidFill>
               </a:rPr>
-              <a:t>Gram 80: FR Mon Calamari Cruiser, Category 3, Cardassia</a:t>
+              <a:t>Gram 63: FR Defiant-class, Category 3, Yavin</a:t>
             </a:r>
           </a:p>
         </p:txBody>
@@ -9902,7 +8495,7 @@
           <a:p>
             <a:r>
               <a:rPr sz="800">
-                <a:hlinkClick r:id="rId21"/>
+                <a:hlinkClick r:id="rId23"/>
               </a:rPr>
               <a:t>Lofar 1</a:t>
             </a:r>
@@ -9910,7 +8503,7 @@
           <a:p>
             <a:r>
               <a:rPr sz="800">
-                <a:hlinkClick r:id="rId22"/>
+                <a:hlinkClick r:id="rId24"/>
               </a:rPr>
               <a:t>Lofar 2</a:t>
             </a:r>
@@ -9918,7 +8511,7 @@
           <a:p>
             <a:r>
               <a:rPr sz="800">
-                <a:hlinkClick r:id="rId23"/>
+                <a:hlinkClick r:id="rId25"/>
               </a:rPr>
               <a:t>Lofar 3</a:t>
             </a:r>
@@ -9926,7 +8519,7 @@
           <a:p>
             <a:r>
               <a:rPr sz="800">
-                <a:hlinkClick r:id="rId24"/>
+                <a:hlinkClick r:id="rId26"/>
               </a:rPr>
               <a:t>Lofar 4</a:t>
             </a:r>
@@ -9938,7 +8531,7 @@
           <p:cNvPr id="17" name="Rounded Rectangle 16"/>
           <p:cNvSpPr/>
           <p:nvPr>
-            <a:hlinkClick r:id="rId25"/>
+            <a:hlinkClick r:id="rId27"/>
           </p:nvPr>
         </p:nvSpPr>
         <p:spPr>
@@ -9983,7 +8576,7 @@
                   <a:srgbClr val="1F3A5F"/>
                 </a:solidFill>
               </a:rPr>
-              <a:t>Gram 81: Prometheus contact bearing 167, codename Mustafar</a:t>
+              <a:t>Gram 64: FR Excelsior, Category 4, Mustafar</a:t>
             </a:r>
           </a:p>
         </p:txBody>
@@ -10012,7 +8605,7 @@
           <a:p>
             <a:r>
               <a:rPr sz="800">
-                <a:hlinkClick r:id="rId26"/>
+                <a:hlinkClick r:id="rId28"/>
               </a:rPr>
               <a:t>Lofar 1</a:t>
             </a:r>
@@ -10020,7 +8613,7 @@
           <a:p>
             <a:r>
               <a:rPr sz="800">
-                <a:hlinkClick r:id="rId27"/>
+                <a:hlinkClick r:id="rId29"/>
               </a:rPr>
               <a:t>Lofar 2</a:t>
             </a:r>
@@ -10028,17 +8621,9 @@
           <a:p>
             <a:r>
               <a:rPr sz="800">
-                <a:hlinkClick r:id="rId28"/>
+                <a:hlinkClick r:id="rId30"/>
               </a:rPr>
               <a:t>Lofar 3</a:t>
-            </a:r>
-          </a:p>
-          <a:p>
-            <a:r>
-              <a:rPr sz="800">
-                <a:hlinkClick r:id="rId29"/>
-              </a:rPr>
-              <a:t>Lofar 4</a:t>
             </a:r>
           </a:p>
         </p:txBody>
@@ -10048,7 +8633,7 @@
           <p:cNvPr id="19" name="Rounded Rectangle 18"/>
           <p:cNvSpPr/>
           <p:nvPr>
-            <a:hlinkClick r:id="rId30"/>
+            <a:hlinkClick r:id="rId31"/>
           </p:nvPr>
         </p:nvSpPr>
         <p:spPr>
@@ -10093,7 +8678,7 @@
                   <a:srgbClr val="1F3A5F"/>
                 </a:solidFill>
               </a:rPr>
-              <a:t>Gram 82: Constitution-class contact bearing 066, codename Kronos</a:t>
+              <a:t>Gram 65: Galaxy-class contact bearing 151, codename Gandalf</a:t>
             </a:r>
           </a:p>
         </p:txBody>
@@ -10122,7 +8707,7 @@
           <a:p>
             <a:r>
               <a:rPr sz="800">
-                <a:hlinkClick r:id="rId31"/>
+                <a:hlinkClick r:id="rId32"/>
               </a:rPr>
               <a:t>Lofar 1</a:t>
             </a:r>
@@ -10130,7 +8715,7 @@
           <a:p>
             <a:r>
               <a:rPr sz="800">
-                <a:hlinkClick r:id="rId32"/>
+                <a:hlinkClick r:id="rId33"/>
               </a:rPr>
               <a:t>Lofar 2</a:t>
             </a:r>
@@ -10138,7 +8723,7 @@
           <a:p>
             <a:r>
               <a:rPr sz="800">
-                <a:hlinkClick r:id="rId33"/>
+                <a:hlinkClick r:id="rId34"/>
               </a:rPr>
               <a:t>Lofar 3</a:t>
             </a:r>
@@ -10150,7 +8735,7 @@
           <p:cNvPr id="21" name="Rounded Rectangle 20"/>
           <p:cNvSpPr/>
           <p:nvPr>
-            <a:hlinkClick r:id="rId34"/>
+            <a:hlinkClick r:id="rId35"/>
           </p:nvPr>
         </p:nvSpPr>
         <p:spPr>
@@ -10195,7 +8780,7 @@
                   <a:srgbClr val="1F3A5F"/>
                 </a:solidFill>
               </a:rPr>
-              <a:t>Gram 83: FR A-wing, Category 2, Vulcan</a:t>
+              <a:t>Gram 66: FR Venator-class, Category 4, Cardassia</a:t>
             </a:r>
           </a:p>
         </p:txBody>
@@ -10224,9 +8809,33 @@
           <a:p>
             <a:r>
               <a:rPr sz="800">
-                <a:hlinkClick r:id="rId35"/>
+                <a:hlinkClick r:id="rId36"/>
               </a:rPr>
               <a:t>Lofar 1</a:t>
+            </a:r>
+          </a:p>
+          <a:p>
+            <a:r>
+              <a:rPr sz="800">
+                <a:hlinkClick r:id="rId37"/>
+              </a:rPr>
+              <a:t>Lofar 2</a:t>
+            </a:r>
+          </a:p>
+          <a:p>
+            <a:r>
+              <a:rPr sz="800">
+                <a:hlinkClick r:id="rId38"/>
+              </a:rPr>
+              <a:t>Lofar 3</a:t>
+            </a:r>
+          </a:p>
+          <a:p>
+            <a:r>
+              <a:rPr sz="800">
+                <a:hlinkClick r:id="rId39"/>
+              </a:rPr>
+              <a:t>Lofar 4</a:t>
             </a:r>
           </a:p>
         </p:txBody>
@@ -10236,7 +8845,7 @@
           <p:cNvPr id="23" name="Rounded Rectangle 22"/>
           <p:cNvSpPr/>
           <p:nvPr>
-            <a:hlinkClick r:id="rId36"/>
+            <a:hlinkClick r:id="rId40"/>
           </p:nvPr>
         </p:nvSpPr>
         <p:spPr>
@@ -10281,7 +8890,7 @@
                   <a:srgbClr val="1F3A5F"/>
                 </a:solidFill>
               </a:rPr>
-              <a:t>Gram 84: FR Slave I, Category 4, Risa</a:t>
+              <a:t>Gram 67: Voyager contact bearing 029, codename Vulcan</a:t>
             </a:r>
           </a:p>
         </p:txBody>
@@ -10310,7 +8919,7 @@
           <a:p>
             <a:r>
               <a:rPr sz="800">
-                <a:hlinkClick r:id="rId37"/>
+                <a:hlinkClick r:id="rId41"/>
               </a:rPr>
               <a:t>Lofar 1</a:t>
             </a:r>
@@ -10318,25 +8927,9 @@
           <a:p>
             <a:r>
               <a:rPr sz="800">
-                <a:hlinkClick r:id="rId38"/>
+                <a:hlinkClick r:id="rId42"/>
               </a:rPr>
               <a:t>Lofar 2</a:t>
-            </a:r>
-          </a:p>
-          <a:p>
-            <a:r>
-              <a:rPr sz="800">
-                <a:hlinkClick r:id="rId39"/>
-              </a:rPr>
-              <a:t>Lofar 3</a:t>
-            </a:r>
-          </a:p>
-          <a:p>
-            <a:r>
-              <a:rPr sz="800">
-                <a:hlinkClick r:id="rId40"/>
-              </a:rPr>
-              <a:t>Lofar 4</a:t>
             </a:r>
           </a:p>
         </p:txBody>
@@ -10346,7 +8939,7 @@
           <p:cNvPr id="25" name="Rounded Rectangle 24"/>
           <p:cNvSpPr/>
           <p:nvPr>
-            <a:hlinkClick r:id="rId41"/>
+            <a:hlinkClick r:id="rId43"/>
           </p:nvPr>
         </p:nvSpPr>
         <p:spPr>
@@ -10391,7 +8984,7 @@
                   <a:srgbClr val="1F3A5F"/>
                 </a:solidFill>
               </a:rPr>
-              <a:t>Gram 85: FR Razor Crest, Category 3, Bajor</a:t>
+              <a:t>Gram 68: FR Akira-class, Category 4, Dank</a:t>
             </a:r>
           </a:p>
         </p:txBody>
@@ -10420,17 +9013,9 @@
           <a:p>
             <a:r>
               <a:rPr sz="800">
-                <a:hlinkClick r:id="rId42"/>
+                <a:hlinkClick r:id="rId44"/>
               </a:rPr>
               <a:t>Lofar 1</a:t>
-            </a:r>
-          </a:p>
-          <a:p>
-            <a:r>
-              <a:rPr sz="800">
-                <a:hlinkClick r:id="rId43"/>
-              </a:rPr>
-              <a:t>Lofar 2</a:t>
             </a:r>
           </a:p>
         </p:txBody>
@@ -10440,7 +9025,7 @@
           <p:cNvPr id="27" name="Rounded Rectangle 26"/>
           <p:cNvSpPr/>
           <p:nvPr>
-            <a:hlinkClick r:id="rId44"/>
+            <a:hlinkClick r:id="rId45"/>
           </p:nvPr>
         </p:nvSpPr>
         <p:spPr>
@@ -10485,7 +9070,7 @@
                   <a:srgbClr val="1F3A5F"/>
                 </a:solidFill>
               </a:rPr>
-              <a:t>Gram 86: FR Devastator, Category 2, Betazed</a:t>
+              <a:t>Gram 69: FR Razor Crest, Category 3, Hoth</a:t>
             </a:r>
           </a:p>
         </p:txBody>
@@ -10514,7 +9099,7 @@
           <a:p>
             <a:r>
               <a:rPr sz="800">
-                <a:hlinkClick r:id="rId45"/>
+                <a:hlinkClick r:id="rId46"/>
               </a:rPr>
               <a:t>Lofar 1</a:t>
             </a:r>
@@ -10526,7 +9111,7 @@
           <p:cNvPr id="29" name="Rounded Rectangle 28"/>
           <p:cNvSpPr/>
           <p:nvPr>
-            <a:hlinkClick r:id="rId46"/>
+            <a:hlinkClick r:id="rId47"/>
           </p:nvPr>
         </p:nvSpPr>
         <p:spPr>
@@ -10571,7 +9156,7 @@
                   <a:srgbClr val="1F3A5F"/>
                 </a:solidFill>
               </a:rPr>
-              <a:t>Gram 87: FR Sovereign-class, Category 3, Dagobah</a:t>
+              <a:t>Gram 70: FR Nebulon-B, Category 4, Vulcan</a:t>
             </a:r>
           </a:p>
         </p:txBody>
@@ -10600,17 +9185,9 @@
           <a:p>
             <a:r>
               <a:rPr sz="800">
-                <a:hlinkClick r:id="rId47"/>
+                <a:hlinkClick r:id="rId48"/>
               </a:rPr>
               <a:t>Lofar 1</a:t>
-            </a:r>
-          </a:p>
-          <a:p>
-            <a:r>
-              <a:rPr sz="800">
-                <a:hlinkClick r:id="rId48"/>
-              </a:rPr>
-              <a:t>Lofar 2</a:t>
             </a:r>
           </a:p>
         </p:txBody>
@@ -10665,7 +9242,7 @@
                   <a:srgbClr val="1F3A5F"/>
                 </a:solidFill>
               </a:rPr>
-              <a:t>Gram 88: FR Nebula-class, Category 1, Cardassia</a:t>
+              <a:t>Gram 72: FR A-wing, Category 1, Gandalf</a:t>
             </a:r>
           </a:p>
         </p:txBody>
@@ -10699,12 +9276,1609 @@
               <a:t>Lofar 1</a:t>
             </a:r>
           </a:p>
+        </p:txBody>
+      </p:sp>
+    </p:spTree>
+  </p:cSld>
+  <p:clrMapOvr>
+    <a:masterClrMapping/>
+  </p:clrMapOvr>
+</p:sld>
+</file>
+
+<file path=ppt/slides/slide6.xml><?xml version="1.0" encoding="utf-8"?>
+<p:sld xmlns:a="http://schemas.openxmlformats.org/drawingml/2006/main" xmlns:p="http://schemas.openxmlformats.org/presentationml/2006/main" xmlns:r="http://schemas.openxmlformats.org/officeDocument/2006/relationships">
+  <p:cSld>
+    <p:spTree>
+      <p:nvGrpSpPr>
+        <p:cNvPr id="1" name=""/>
+        <p:cNvGrpSpPr/>
+        <p:nvPr/>
+      </p:nvGrpSpPr>
+      <p:grpSpPr/>
+      <p:sp>
+        <p:nvSpPr>
+          <p:cNvPr id="2" name="Rectangle 1"/>
+          <p:cNvSpPr/>
+          <p:nvPr/>
+        </p:nvSpPr>
+        <p:spPr>
+          <a:xfrm>
+            <a:off x="0" y="0"/>
+            <a:ext cx="12188952" cy="548640"/>
+          </a:xfrm>
+          <a:prstGeom prst="rect">
+            <a:avLst/>
+          </a:prstGeom>
+          <a:solidFill>
+            <a:srgbClr val="1F3A5F"/>
+          </a:solidFill>
+          <a:ln>
+            <a:noFill/>
+          </a:ln>
+        </p:spPr>
+        <p:style>
+          <a:lnRef idx="1">
+            <a:schemeClr val="accent1"/>
+          </a:lnRef>
+          <a:fillRef idx="3">
+            <a:schemeClr val="accent1"/>
+          </a:fillRef>
+          <a:effectRef idx="2">
+            <a:schemeClr val="accent1"/>
+          </a:effectRef>
+          <a:fontRef idx="minor">
+            <a:schemeClr val="lt1"/>
+          </a:fontRef>
+        </p:style>
+        <p:txBody>
+          <a:bodyPr rtlCol="0" anchor="ctr" lIns="182880" rIns="182880"/>
+          <a:lstStyle/>
+          <a:p>
+            <a:pPr algn="ctr"/>
+            <a:r>
+              <a:rPr sz="2000" b="1">
+                <a:solidFill>
+                  <a:srgbClr val="FFFFFF"/>
+                </a:solidFill>
+              </a:rPr>
+              <a:t>Instructor Pub10_Ed22B_Updated — Page 5 of 5</a:t>
+            </a:r>
+          </a:p>
+        </p:txBody>
+      </p:sp>
+      <p:sp>
+        <p:nvSpPr>
+          <p:cNvPr id="3" name="Rounded Rectangle 2"/>
+          <p:cNvSpPr/>
+          <p:nvPr>
+            <a:hlinkClick r:id="rId2"/>
+          </p:nvPr>
+        </p:nvSpPr>
+        <p:spPr>
+          <a:xfrm>
+            <a:off x="365760" y="731520"/>
+            <a:ext cx="2200046" cy="365760"/>
+          </a:xfrm>
+          <a:prstGeom prst="roundRect">
+            <a:avLst/>
+          </a:prstGeom>
+          <a:solidFill>
+            <a:srgbClr val="E8EEF7"/>
+          </a:solidFill>
+          <a:ln>
+            <a:solidFill>
+              <a:srgbClr val="1F3A5F"/>
+            </a:solidFill>
+          </a:ln>
+        </p:spPr>
+        <p:style>
+          <a:lnRef idx="1">
+            <a:schemeClr val="accent1"/>
+          </a:lnRef>
+          <a:fillRef idx="3">
+            <a:schemeClr val="accent1"/>
+          </a:fillRef>
+          <a:effectRef idx="2">
+            <a:schemeClr val="accent1"/>
+          </a:effectRef>
+          <a:fontRef idx="minor">
+            <a:schemeClr val="lt1"/>
+          </a:fontRef>
+        </p:style>
+        <p:txBody>
+          <a:bodyPr rtlCol="0" anchor="ctr" lIns="45720" rIns="45720"/>
+          <a:lstStyle/>
+          <a:p>
+            <a:pPr algn="ctr"/>
+            <a:r>
+              <a:rPr sz="900">
+                <a:solidFill>
+                  <a:srgbClr val="1F3A5F"/>
+                </a:solidFill>
+              </a:rPr>
+              <a:t>Gram 74: Star Destroyer contact bearing 169, codename Bespin</a:t>
+            </a:r>
+          </a:p>
+        </p:txBody>
+      </p:sp>
+      <p:sp>
+        <p:nvSpPr>
+          <p:cNvPr id="4" name="TextBox 3"/>
+          <p:cNvSpPr txBox="1"/>
+          <p:nvPr/>
+        </p:nvSpPr>
+        <p:spPr>
+          <a:xfrm>
+            <a:off x="365760" y="1115568"/>
+            <a:ext cx="2200046" cy="1447800"/>
+          </a:xfrm>
+          <a:prstGeom prst="rect">
+            <a:avLst/>
+          </a:prstGeom>
+          <a:noFill/>
+        </p:spPr>
+        <p:txBody>
+          <a:bodyPr wrap="square">
+            <a:spAutoFit/>
+          </a:bodyPr>
+          <a:lstStyle/>
+          <a:p>
+            <a:r>
+              <a:rPr sz="800">
+                <a:hlinkClick r:id="rId3"/>
+              </a:rPr>
+              <a:t>Lofar 1</a:t>
+            </a:r>
+          </a:p>
+          <a:p>
+            <a:r>
+              <a:rPr sz="800">
+                <a:hlinkClick r:id="rId4"/>
+              </a:rPr>
+              <a:t>Lofar 2</a:t>
+            </a:r>
+          </a:p>
+        </p:txBody>
+      </p:sp>
+      <p:sp>
+        <p:nvSpPr>
+          <p:cNvPr id="5" name="Rounded Rectangle 4"/>
+          <p:cNvSpPr/>
+          <p:nvPr>
+            <a:hlinkClick r:id="rId5"/>
+          </p:nvPr>
+        </p:nvSpPr>
+        <p:spPr>
+          <a:xfrm>
+            <a:off x="2657246" y="731520"/>
+            <a:ext cx="2200046" cy="365760"/>
+          </a:xfrm>
+          <a:prstGeom prst="roundRect">
+            <a:avLst/>
+          </a:prstGeom>
+          <a:solidFill>
+            <a:srgbClr val="E8EEF7"/>
+          </a:solidFill>
+          <a:ln>
+            <a:solidFill>
+              <a:srgbClr val="1F3A5F"/>
+            </a:solidFill>
+          </a:ln>
+        </p:spPr>
+        <p:style>
+          <a:lnRef idx="1">
+            <a:schemeClr val="accent1"/>
+          </a:lnRef>
+          <a:fillRef idx="3">
+            <a:schemeClr val="accent1"/>
+          </a:fillRef>
+          <a:effectRef idx="2">
+            <a:schemeClr val="accent1"/>
+          </a:effectRef>
+          <a:fontRef idx="minor">
+            <a:schemeClr val="lt1"/>
+          </a:fontRef>
+        </p:style>
+        <p:txBody>
+          <a:bodyPr rtlCol="0" anchor="ctr" lIns="45720" rIns="45720"/>
+          <a:lstStyle/>
+          <a:p>
+            <a:pPr algn="ctr"/>
+            <a:r>
+              <a:rPr sz="900">
+                <a:solidFill>
+                  <a:srgbClr val="1F3A5F"/>
+                </a:solidFill>
+              </a:rPr>
+              <a:t>Gram 75: FR Intrepid-class, Category 1, Vulcan</a:t>
+            </a:r>
+          </a:p>
+        </p:txBody>
+      </p:sp>
+      <p:sp>
+        <p:nvSpPr>
+          <p:cNvPr id="6" name="TextBox 5"/>
+          <p:cNvSpPr txBox="1"/>
+          <p:nvPr/>
+        </p:nvSpPr>
+        <p:spPr>
+          <a:xfrm>
+            <a:off x="2657246" y="1115568"/>
+            <a:ext cx="2200046" cy="1447800"/>
+          </a:xfrm>
+          <a:prstGeom prst="rect">
+            <a:avLst/>
+          </a:prstGeom>
+          <a:noFill/>
+        </p:spPr>
+        <p:txBody>
+          <a:bodyPr wrap="square">
+            <a:spAutoFit/>
+          </a:bodyPr>
+          <a:lstStyle/>
+          <a:p>
+            <a:r>
+              <a:rPr sz="800">
+                <a:hlinkClick r:id="rId6"/>
+              </a:rPr>
+              <a:t>Lofar 1</a:t>
+            </a:r>
+          </a:p>
+        </p:txBody>
+      </p:sp>
+      <p:sp>
+        <p:nvSpPr>
+          <p:cNvPr id="7" name="Rounded Rectangle 6"/>
+          <p:cNvSpPr/>
+          <p:nvPr>
+            <a:hlinkClick r:id="rId7"/>
+          </p:nvPr>
+        </p:nvSpPr>
+        <p:spPr>
+          <a:xfrm>
+            <a:off x="4948732" y="731520"/>
+            <a:ext cx="2200046" cy="365760"/>
+          </a:xfrm>
+          <a:prstGeom prst="roundRect">
+            <a:avLst/>
+          </a:prstGeom>
+          <a:solidFill>
+            <a:srgbClr val="E8EEF7"/>
+          </a:solidFill>
+          <a:ln>
+            <a:solidFill>
+              <a:srgbClr val="1F3A5F"/>
+            </a:solidFill>
+          </a:ln>
+        </p:spPr>
+        <p:style>
+          <a:lnRef idx="1">
+            <a:schemeClr val="accent1"/>
+          </a:lnRef>
+          <a:fillRef idx="3">
+            <a:schemeClr val="accent1"/>
+          </a:fillRef>
+          <a:effectRef idx="2">
+            <a:schemeClr val="accent1"/>
+          </a:effectRef>
+          <a:fontRef idx="minor">
+            <a:schemeClr val="lt1"/>
+          </a:fontRef>
+        </p:style>
+        <p:txBody>
+          <a:bodyPr rtlCol="0" anchor="ctr" lIns="45720" rIns="45720"/>
+          <a:lstStyle/>
+          <a:p>
+            <a:pPr algn="ctr"/>
+            <a:r>
+              <a:rPr sz="900">
+                <a:solidFill>
+                  <a:srgbClr val="1F3A5F"/>
+                </a:solidFill>
+              </a:rPr>
+              <a:t>Gram 76: FR Y-wing, Category 4, Tatooine</a:t>
+            </a:r>
+          </a:p>
+        </p:txBody>
+      </p:sp>
+      <p:sp>
+        <p:nvSpPr>
+          <p:cNvPr id="8" name="TextBox 7"/>
+          <p:cNvSpPr txBox="1"/>
+          <p:nvPr/>
+        </p:nvSpPr>
+        <p:spPr>
+          <a:xfrm>
+            <a:off x="4948732" y="1115568"/>
+            <a:ext cx="2200046" cy="1447800"/>
+          </a:xfrm>
+          <a:prstGeom prst="rect">
+            <a:avLst/>
+          </a:prstGeom>
+          <a:noFill/>
+        </p:spPr>
+        <p:txBody>
+          <a:bodyPr wrap="square">
+            <a:spAutoFit/>
+          </a:bodyPr>
+          <a:lstStyle/>
+          <a:p>
+            <a:r>
+              <a:rPr sz="800">
+                <a:hlinkClick r:id="rId8"/>
+              </a:rPr>
+              <a:t>Lofar 1</a:t>
+            </a:r>
+          </a:p>
+          <a:p>
+            <a:r>
+              <a:rPr sz="800">
+                <a:hlinkClick r:id="rId9"/>
+              </a:rPr>
+              <a:t>Lofar 2</a:t>
+            </a:r>
+          </a:p>
+        </p:txBody>
+      </p:sp>
+      <p:sp>
+        <p:nvSpPr>
+          <p:cNvPr id="9" name="Rounded Rectangle 8"/>
+          <p:cNvSpPr/>
+          <p:nvPr>
+            <a:hlinkClick r:id="rId10"/>
+          </p:nvPr>
+        </p:nvSpPr>
+        <p:spPr>
+          <a:xfrm>
+            <a:off x="7240219" y="731520"/>
+            <a:ext cx="2200046" cy="365760"/>
+          </a:xfrm>
+          <a:prstGeom prst="roundRect">
+            <a:avLst/>
+          </a:prstGeom>
+          <a:solidFill>
+            <a:srgbClr val="E8EEF7"/>
+          </a:solidFill>
+          <a:ln>
+            <a:solidFill>
+              <a:srgbClr val="1F3A5F"/>
+            </a:solidFill>
+          </a:ln>
+        </p:spPr>
+        <p:style>
+          <a:lnRef idx="1">
+            <a:schemeClr val="accent1"/>
+          </a:lnRef>
+          <a:fillRef idx="3">
+            <a:schemeClr val="accent1"/>
+          </a:fillRef>
+          <a:effectRef idx="2">
+            <a:schemeClr val="accent1"/>
+          </a:effectRef>
+          <a:fontRef idx="minor">
+            <a:schemeClr val="lt1"/>
+          </a:fontRef>
+        </p:style>
+        <p:txBody>
+          <a:bodyPr rtlCol="0" anchor="ctr" lIns="45720" rIns="45720"/>
+          <a:lstStyle/>
+          <a:p>
+            <a:pPr algn="ctr"/>
+            <a:r>
+              <a:rPr sz="900">
+                <a:solidFill>
+                  <a:srgbClr val="1F3A5F"/>
+                </a:solidFill>
+              </a:rPr>
+              <a:t>Gram 77: FR Miranda-class, Category 3, Coruscant</a:t>
+            </a:r>
+          </a:p>
+        </p:txBody>
+      </p:sp>
+      <p:sp>
+        <p:nvSpPr>
+          <p:cNvPr id="10" name="TextBox 9"/>
+          <p:cNvSpPr txBox="1"/>
+          <p:nvPr/>
+        </p:nvSpPr>
+        <p:spPr>
+          <a:xfrm>
+            <a:off x="7240219" y="1115568"/>
+            <a:ext cx="2200046" cy="1447800"/>
+          </a:xfrm>
+          <a:prstGeom prst="rect">
+            <a:avLst/>
+          </a:prstGeom>
+          <a:noFill/>
+        </p:spPr>
+        <p:txBody>
+          <a:bodyPr wrap="square">
+            <a:spAutoFit/>
+          </a:bodyPr>
+          <a:lstStyle/>
+          <a:p>
+            <a:r>
+              <a:rPr sz="800">
+                <a:hlinkClick r:id="rId11"/>
+              </a:rPr>
+              <a:t>Lofar 1</a:t>
+            </a:r>
+          </a:p>
+          <a:p>
+            <a:r>
+              <a:rPr sz="800">
+                <a:hlinkClick r:id="rId12"/>
+              </a:rPr>
+              <a:t>Lofar 2</a:t>
+            </a:r>
+          </a:p>
+        </p:txBody>
+      </p:sp>
+      <p:sp>
+        <p:nvSpPr>
+          <p:cNvPr id="11" name="Rounded Rectangle 10"/>
+          <p:cNvSpPr/>
+          <p:nvPr>
+            <a:hlinkClick r:id="rId13"/>
+          </p:nvPr>
+        </p:nvSpPr>
+        <p:spPr>
+          <a:xfrm>
+            <a:off x="9531705" y="731520"/>
+            <a:ext cx="2200046" cy="365760"/>
+          </a:xfrm>
+          <a:prstGeom prst="roundRect">
+            <a:avLst/>
+          </a:prstGeom>
+          <a:solidFill>
+            <a:srgbClr val="E8EEF7"/>
+          </a:solidFill>
+          <a:ln>
+            <a:solidFill>
+              <a:srgbClr val="1F3A5F"/>
+            </a:solidFill>
+          </a:ln>
+        </p:spPr>
+        <p:style>
+          <a:lnRef idx="1">
+            <a:schemeClr val="accent1"/>
+          </a:lnRef>
+          <a:fillRef idx="3">
+            <a:schemeClr val="accent1"/>
+          </a:fillRef>
+          <a:effectRef idx="2">
+            <a:schemeClr val="accent1"/>
+          </a:effectRef>
+          <a:fontRef idx="minor">
+            <a:schemeClr val="lt1"/>
+          </a:fontRef>
+        </p:style>
+        <p:txBody>
+          <a:bodyPr rtlCol="0" anchor="ctr" lIns="45720" rIns="45720"/>
+          <a:lstStyle/>
+          <a:p>
+            <a:pPr algn="ctr"/>
+            <a:r>
+              <a:rPr sz="900">
+                <a:solidFill>
+                  <a:srgbClr val="1F3A5F"/>
+                </a:solidFill>
+              </a:rPr>
+              <a:t>Gram 78: Defiant-class contact bearing 142, codename Risa</a:t>
+            </a:r>
+          </a:p>
+        </p:txBody>
+      </p:sp>
+      <p:sp>
+        <p:nvSpPr>
+          <p:cNvPr id="12" name="TextBox 11"/>
+          <p:cNvSpPr txBox="1"/>
+          <p:nvPr/>
+        </p:nvSpPr>
+        <p:spPr>
+          <a:xfrm>
+            <a:off x="9531705" y="1115568"/>
+            <a:ext cx="2200046" cy="1447800"/>
+          </a:xfrm>
+          <a:prstGeom prst="rect">
+            <a:avLst/>
+          </a:prstGeom>
+          <a:noFill/>
+        </p:spPr>
+        <p:txBody>
+          <a:bodyPr wrap="square">
+            <a:spAutoFit/>
+          </a:bodyPr>
+          <a:lstStyle/>
+          <a:p>
+            <a:r>
+              <a:rPr sz="800">
+                <a:hlinkClick r:id="rId14"/>
+              </a:rPr>
+              <a:t>Lofar 1</a:t>
+            </a:r>
+          </a:p>
+        </p:txBody>
+      </p:sp>
+      <p:sp>
+        <p:nvSpPr>
+          <p:cNvPr id="13" name="Rounded Rectangle 12"/>
+          <p:cNvSpPr/>
+          <p:nvPr>
+            <a:hlinkClick r:id="rId15"/>
+          </p:nvPr>
+        </p:nvSpPr>
+        <p:spPr>
+          <a:xfrm>
+            <a:off x="365760" y="2682240"/>
+            <a:ext cx="2200046" cy="365760"/>
+          </a:xfrm>
+          <a:prstGeom prst="roundRect">
+            <a:avLst/>
+          </a:prstGeom>
+          <a:solidFill>
+            <a:srgbClr val="E8EEF7"/>
+          </a:solidFill>
+          <a:ln>
+            <a:solidFill>
+              <a:srgbClr val="1F3A5F"/>
+            </a:solidFill>
+          </a:ln>
+        </p:spPr>
+        <p:style>
+          <a:lnRef idx="1">
+            <a:schemeClr val="accent1"/>
+          </a:lnRef>
+          <a:fillRef idx="3">
+            <a:schemeClr val="accent1"/>
+          </a:fillRef>
+          <a:effectRef idx="2">
+            <a:schemeClr val="accent1"/>
+          </a:effectRef>
+          <a:fontRef idx="minor">
+            <a:schemeClr val="lt1"/>
+          </a:fontRef>
+        </p:style>
+        <p:txBody>
+          <a:bodyPr rtlCol="0" anchor="ctr" lIns="45720" rIns="45720"/>
+          <a:lstStyle/>
+          <a:p>
+            <a:pPr algn="ctr"/>
+            <a:r>
+              <a:rPr sz="900">
+                <a:solidFill>
+                  <a:srgbClr val="1F3A5F"/>
+                </a:solidFill>
+              </a:rPr>
+              <a:t>Gram 79: FR Voyager, Category 1, Dank</a:t>
+            </a:r>
+          </a:p>
+        </p:txBody>
+      </p:sp>
+      <p:sp>
+        <p:nvSpPr>
+          <p:cNvPr id="14" name="TextBox 13"/>
+          <p:cNvSpPr txBox="1"/>
+          <p:nvPr/>
+        </p:nvSpPr>
+        <p:spPr>
+          <a:xfrm>
+            <a:off x="365760" y="3066288"/>
+            <a:ext cx="2200046" cy="1447800"/>
+          </a:xfrm>
+          <a:prstGeom prst="rect">
+            <a:avLst/>
+          </a:prstGeom>
+          <a:noFill/>
+        </p:spPr>
+        <p:txBody>
+          <a:bodyPr wrap="square">
+            <a:spAutoFit/>
+          </a:bodyPr>
+          <a:lstStyle/>
+          <a:p>
+            <a:r>
+              <a:rPr sz="800">
+                <a:hlinkClick r:id="rId16"/>
+              </a:rPr>
+              <a:t>Lofar 1</a:t>
+            </a:r>
+          </a:p>
+          <a:p>
+            <a:r>
+              <a:rPr sz="800">
+                <a:hlinkClick r:id="rId17"/>
+              </a:rPr>
+              <a:t>Lofar 2</a:t>
+            </a:r>
+          </a:p>
+          <a:p>
+            <a:r>
+              <a:rPr sz="800">
+                <a:hlinkClick r:id="rId18"/>
+              </a:rPr>
+              <a:t>Lofar 3</a:t>
+            </a:r>
+          </a:p>
+          <a:p>
+            <a:r>
+              <a:rPr sz="800">
+                <a:hlinkClick r:id="rId19"/>
+              </a:rPr>
+              <a:t>Lofar 4</a:t>
+            </a:r>
+          </a:p>
+        </p:txBody>
+      </p:sp>
+      <p:sp>
+        <p:nvSpPr>
+          <p:cNvPr id="15" name="Rounded Rectangle 14"/>
+          <p:cNvSpPr/>
+          <p:nvPr>
+            <a:hlinkClick r:id="rId20"/>
+          </p:nvPr>
+        </p:nvSpPr>
+        <p:spPr>
+          <a:xfrm>
+            <a:off x="2657246" y="2682240"/>
+            <a:ext cx="2200046" cy="365760"/>
+          </a:xfrm>
+          <a:prstGeom prst="roundRect">
+            <a:avLst/>
+          </a:prstGeom>
+          <a:solidFill>
+            <a:srgbClr val="E8EEF7"/>
+          </a:solidFill>
+          <a:ln>
+            <a:solidFill>
+              <a:srgbClr val="1F3A5F"/>
+            </a:solidFill>
+          </a:ln>
+        </p:spPr>
+        <p:style>
+          <a:lnRef idx="1">
+            <a:schemeClr val="accent1"/>
+          </a:lnRef>
+          <a:fillRef idx="3">
+            <a:schemeClr val="accent1"/>
+          </a:fillRef>
+          <a:effectRef idx="2">
+            <a:schemeClr val="accent1"/>
+          </a:effectRef>
+          <a:fontRef idx="minor">
+            <a:schemeClr val="lt1"/>
+          </a:fontRef>
+        </p:style>
+        <p:txBody>
+          <a:bodyPr rtlCol="0" anchor="ctr" lIns="45720" rIns="45720"/>
+          <a:lstStyle/>
+          <a:p>
+            <a:pPr algn="ctr"/>
+            <a:r>
+              <a:rPr sz="900">
+                <a:solidFill>
+                  <a:srgbClr val="1F3A5F"/>
+                </a:solidFill>
+              </a:rPr>
+              <a:t>Gram 80: FR Mon Calamari Cruiser, Category 3, Cardassia</a:t>
+            </a:r>
+          </a:p>
+        </p:txBody>
+      </p:sp>
+      <p:sp>
+        <p:nvSpPr>
+          <p:cNvPr id="16" name="TextBox 15"/>
+          <p:cNvSpPr txBox="1"/>
+          <p:nvPr/>
+        </p:nvSpPr>
+        <p:spPr>
+          <a:xfrm>
+            <a:off x="2657246" y="3066288"/>
+            <a:ext cx="2200046" cy="1447800"/>
+          </a:xfrm>
+          <a:prstGeom prst="rect">
+            <a:avLst/>
+          </a:prstGeom>
+          <a:noFill/>
+        </p:spPr>
+        <p:txBody>
+          <a:bodyPr wrap="square">
+            <a:spAutoFit/>
+          </a:bodyPr>
+          <a:lstStyle/>
+          <a:p>
+            <a:r>
+              <a:rPr sz="800">
+                <a:hlinkClick r:id="rId21"/>
+              </a:rPr>
+              <a:t>Lofar 1</a:t>
+            </a:r>
+          </a:p>
+          <a:p>
+            <a:r>
+              <a:rPr sz="800">
+                <a:hlinkClick r:id="rId22"/>
+              </a:rPr>
+              <a:t>Lofar 2</a:t>
+            </a:r>
+          </a:p>
+          <a:p>
+            <a:r>
+              <a:rPr sz="800">
+                <a:hlinkClick r:id="rId23"/>
+              </a:rPr>
+              <a:t>Lofar 3</a:t>
+            </a:r>
+          </a:p>
+          <a:p>
+            <a:r>
+              <a:rPr sz="800">
+                <a:hlinkClick r:id="rId24"/>
+              </a:rPr>
+              <a:t>Lofar 4</a:t>
+            </a:r>
+          </a:p>
+        </p:txBody>
+      </p:sp>
+      <p:sp>
+        <p:nvSpPr>
+          <p:cNvPr id="17" name="Rounded Rectangle 16"/>
+          <p:cNvSpPr/>
+          <p:nvPr>
+            <a:hlinkClick r:id="rId25"/>
+          </p:nvPr>
+        </p:nvSpPr>
+        <p:spPr>
+          <a:xfrm>
+            <a:off x="4948732" y="2682240"/>
+            <a:ext cx="2200046" cy="365760"/>
+          </a:xfrm>
+          <a:prstGeom prst="roundRect">
+            <a:avLst/>
+          </a:prstGeom>
+          <a:solidFill>
+            <a:srgbClr val="E8EEF7"/>
+          </a:solidFill>
+          <a:ln>
+            <a:solidFill>
+              <a:srgbClr val="1F3A5F"/>
+            </a:solidFill>
+          </a:ln>
+        </p:spPr>
+        <p:style>
+          <a:lnRef idx="1">
+            <a:schemeClr val="accent1"/>
+          </a:lnRef>
+          <a:fillRef idx="3">
+            <a:schemeClr val="accent1"/>
+          </a:fillRef>
+          <a:effectRef idx="2">
+            <a:schemeClr val="accent1"/>
+          </a:effectRef>
+          <a:fontRef idx="minor">
+            <a:schemeClr val="lt1"/>
+          </a:fontRef>
+        </p:style>
+        <p:txBody>
+          <a:bodyPr rtlCol="0" anchor="ctr" lIns="45720" rIns="45720"/>
+          <a:lstStyle/>
+          <a:p>
+            <a:pPr algn="ctr"/>
+            <a:r>
+              <a:rPr sz="900">
+                <a:solidFill>
+                  <a:srgbClr val="1F3A5F"/>
+                </a:solidFill>
+              </a:rPr>
+              <a:t>Gram 81: Prometheus contact bearing 167, codename Mustafar</a:t>
+            </a:r>
+          </a:p>
+        </p:txBody>
+      </p:sp>
+      <p:sp>
+        <p:nvSpPr>
+          <p:cNvPr id="18" name="TextBox 17"/>
+          <p:cNvSpPr txBox="1"/>
+          <p:nvPr/>
+        </p:nvSpPr>
+        <p:spPr>
+          <a:xfrm>
+            <a:off x="4948732" y="3066288"/>
+            <a:ext cx="2200046" cy="1447800"/>
+          </a:xfrm>
+          <a:prstGeom prst="rect">
+            <a:avLst/>
+          </a:prstGeom>
+          <a:noFill/>
+        </p:spPr>
+        <p:txBody>
+          <a:bodyPr wrap="square">
+            <a:spAutoFit/>
+          </a:bodyPr>
+          <a:lstStyle/>
+          <a:p>
+            <a:r>
+              <a:rPr sz="800">
+                <a:hlinkClick r:id="rId26"/>
+              </a:rPr>
+              <a:t>Lofar 1</a:t>
+            </a:r>
+          </a:p>
+          <a:p>
+            <a:r>
+              <a:rPr sz="800">
+                <a:hlinkClick r:id="rId27"/>
+              </a:rPr>
+              <a:t>Lofar 2</a:t>
+            </a:r>
+          </a:p>
+          <a:p>
+            <a:r>
+              <a:rPr sz="800">
+                <a:hlinkClick r:id="rId28"/>
+              </a:rPr>
+              <a:t>Lofar 3</a:t>
+            </a:r>
+          </a:p>
+          <a:p>
+            <a:r>
+              <a:rPr sz="800">
+                <a:hlinkClick r:id="rId29"/>
+              </a:rPr>
+              <a:t>Lofar 4</a:t>
+            </a:r>
+          </a:p>
+        </p:txBody>
+      </p:sp>
+      <p:sp>
+        <p:nvSpPr>
+          <p:cNvPr id="19" name="Rounded Rectangle 18"/>
+          <p:cNvSpPr/>
+          <p:nvPr>
+            <a:hlinkClick r:id="rId30"/>
+          </p:nvPr>
+        </p:nvSpPr>
+        <p:spPr>
+          <a:xfrm>
+            <a:off x="7240219" y="2682240"/>
+            <a:ext cx="2200046" cy="365760"/>
+          </a:xfrm>
+          <a:prstGeom prst="roundRect">
+            <a:avLst/>
+          </a:prstGeom>
+          <a:solidFill>
+            <a:srgbClr val="E8EEF7"/>
+          </a:solidFill>
+          <a:ln>
+            <a:solidFill>
+              <a:srgbClr val="1F3A5F"/>
+            </a:solidFill>
+          </a:ln>
+        </p:spPr>
+        <p:style>
+          <a:lnRef idx="1">
+            <a:schemeClr val="accent1"/>
+          </a:lnRef>
+          <a:fillRef idx="3">
+            <a:schemeClr val="accent1"/>
+          </a:fillRef>
+          <a:effectRef idx="2">
+            <a:schemeClr val="accent1"/>
+          </a:effectRef>
+          <a:fontRef idx="minor">
+            <a:schemeClr val="lt1"/>
+          </a:fontRef>
+        </p:style>
+        <p:txBody>
+          <a:bodyPr rtlCol="0" anchor="ctr" lIns="45720" rIns="45720"/>
+          <a:lstStyle/>
+          <a:p>
+            <a:pPr algn="ctr"/>
+            <a:r>
+              <a:rPr sz="900">
+                <a:solidFill>
+                  <a:srgbClr val="1F3A5F"/>
+                </a:solidFill>
+              </a:rPr>
+              <a:t>Gram 82: Constitution-class contact bearing 066, codename Kronos</a:t>
+            </a:r>
+          </a:p>
+        </p:txBody>
+      </p:sp>
+      <p:sp>
+        <p:nvSpPr>
+          <p:cNvPr id="20" name="TextBox 19"/>
+          <p:cNvSpPr txBox="1"/>
+          <p:nvPr/>
+        </p:nvSpPr>
+        <p:spPr>
+          <a:xfrm>
+            <a:off x="7240219" y="3066288"/>
+            <a:ext cx="2200046" cy="1447800"/>
+          </a:xfrm>
+          <a:prstGeom prst="rect">
+            <a:avLst/>
+          </a:prstGeom>
+          <a:noFill/>
+        </p:spPr>
+        <p:txBody>
+          <a:bodyPr wrap="square">
+            <a:spAutoFit/>
+          </a:bodyPr>
+          <a:lstStyle/>
+          <a:p>
+            <a:r>
+              <a:rPr sz="800">
+                <a:hlinkClick r:id="rId31"/>
+              </a:rPr>
+              <a:t>Lofar 1</a:t>
+            </a:r>
+          </a:p>
+          <a:p>
+            <a:r>
+              <a:rPr sz="800">
+                <a:hlinkClick r:id="rId32"/>
+              </a:rPr>
+              <a:t>Lofar 2</a:t>
+            </a:r>
+          </a:p>
+          <a:p>
+            <a:r>
+              <a:rPr sz="800">
+                <a:hlinkClick r:id="rId33"/>
+              </a:rPr>
+              <a:t>Lofar 3</a:t>
+            </a:r>
+          </a:p>
+        </p:txBody>
+      </p:sp>
+      <p:sp>
+        <p:nvSpPr>
+          <p:cNvPr id="21" name="Rounded Rectangle 20"/>
+          <p:cNvSpPr/>
+          <p:nvPr>
+            <a:hlinkClick r:id="rId34"/>
+          </p:nvPr>
+        </p:nvSpPr>
+        <p:spPr>
+          <a:xfrm>
+            <a:off x="9531705" y="2682240"/>
+            <a:ext cx="2200046" cy="365760"/>
+          </a:xfrm>
+          <a:prstGeom prst="roundRect">
+            <a:avLst/>
+          </a:prstGeom>
+          <a:solidFill>
+            <a:srgbClr val="E8EEF7"/>
+          </a:solidFill>
+          <a:ln>
+            <a:solidFill>
+              <a:srgbClr val="1F3A5F"/>
+            </a:solidFill>
+          </a:ln>
+        </p:spPr>
+        <p:style>
+          <a:lnRef idx="1">
+            <a:schemeClr val="accent1"/>
+          </a:lnRef>
+          <a:fillRef idx="3">
+            <a:schemeClr val="accent1"/>
+          </a:fillRef>
+          <a:effectRef idx="2">
+            <a:schemeClr val="accent1"/>
+          </a:effectRef>
+          <a:fontRef idx="minor">
+            <a:schemeClr val="lt1"/>
+          </a:fontRef>
+        </p:style>
+        <p:txBody>
+          <a:bodyPr rtlCol="0" anchor="ctr" lIns="45720" rIns="45720"/>
+          <a:lstStyle/>
+          <a:p>
+            <a:pPr algn="ctr"/>
+            <a:r>
+              <a:rPr sz="900">
+                <a:solidFill>
+                  <a:srgbClr val="1F3A5F"/>
+                </a:solidFill>
+              </a:rPr>
+              <a:t>Gram 83: FR A-wing, Category 2, Vulcan</a:t>
+            </a:r>
+          </a:p>
+        </p:txBody>
+      </p:sp>
+      <p:sp>
+        <p:nvSpPr>
+          <p:cNvPr id="22" name="TextBox 21"/>
+          <p:cNvSpPr txBox="1"/>
+          <p:nvPr/>
+        </p:nvSpPr>
+        <p:spPr>
+          <a:xfrm>
+            <a:off x="9531705" y="3066288"/>
+            <a:ext cx="2200046" cy="1447800"/>
+          </a:xfrm>
+          <a:prstGeom prst="rect">
+            <a:avLst/>
+          </a:prstGeom>
+          <a:noFill/>
+        </p:spPr>
+        <p:txBody>
+          <a:bodyPr wrap="square">
+            <a:spAutoFit/>
+          </a:bodyPr>
+          <a:lstStyle/>
+          <a:p>
+            <a:r>
+              <a:rPr sz="800">
+                <a:hlinkClick r:id="rId35"/>
+              </a:rPr>
+              <a:t>Lofar 1</a:t>
+            </a:r>
+          </a:p>
+        </p:txBody>
+      </p:sp>
+      <p:sp>
+        <p:nvSpPr>
+          <p:cNvPr id="23" name="Rounded Rectangle 22"/>
+          <p:cNvSpPr/>
+          <p:nvPr>
+            <a:hlinkClick r:id="rId36"/>
+          </p:nvPr>
+        </p:nvSpPr>
+        <p:spPr>
+          <a:xfrm>
+            <a:off x="365760" y="4632960"/>
+            <a:ext cx="2200046" cy="365760"/>
+          </a:xfrm>
+          <a:prstGeom prst="roundRect">
+            <a:avLst/>
+          </a:prstGeom>
+          <a:solidFill>
+            <a:srgbClr val="E8EEF7"/>
+          </a:solidFill>
+          <a:ln>
+            <a:solidFill>
+              <a:srgbClr val="1F3A5F"/>
+            </a:solidFill>
+          </a:ln>
+        </p:spPr>
+        <p:style>
+          <a:lnRef idx="1">
+            <a:schemeClr val="accent1"/>
+          </a:lnRef>
+          <a:fillRef idx="3">
+            <a:schemeClr val="accent1"/>
+          </a:fillRef>
+          <a:effectRef idx="2">
+            <a:schemeClr val="accent1"/>
+          </a:effectRef>
+          <a:fontRef idx="minor">
+            <a:schemeClr val="lt1"/>
+          </a:fontRef>
+        </p:style>
+        <p:txBody>
+          <a:bodyPr rtlCol="0" anchor="ctr" lIns="45720" rIns="45720"/>
+          <a:lstStyle/>
+          <a:p>
+            <a:pPr algn="ctr"/>
+            <a:r>
+              <a:rPr sz="900">
+                <a:solidFill>
+                  <a:srgbClr val="1F3A5F"/>
+                </a:solidFill>
+              </a:rPr>
+              <a:t>Gram 84: FR Slave I, Category 4, Risa</a:t>
+            </a:r>
+          </a:p>
+        </p:txBody>
+      </p:sp>
+      <p:sp>
+        <p:nvSpPr>
+          <p:cNvPr id="24" name="TextBox 23"/>
+          <p:cNvSpPr txBox="1"/>
+          <p:nvPr/>
+        </p:nvSpPr>
+        <p:spPr>
+          <a:xfrm>
+            <a:off x="365760" y="5017008"/>
+            <a:ext cx="2200046" cy="1447800"/>
+          </a:xfrm>
+          <a:prstGeom prst="rect">
+            <a:avLst/>
+          </a:prstGeom>
+          <a:noFill/>
+        </p:spPr>
+        <p:txBody>
+          <a:bodyPr wrap="square">
+            <a:spAutoFit/>
+          </a:bodyPr>
+          <a:lstStyle/>
+          <a:p>
+            <a:r>
+              <a:rPr sz="800">
+                <a:hlinkClick r:id="rId37"/>
+              </a:rPr>
+              <a:t>Lofar 1</a:t>
+            </a:r>
+          </a:p>
+          <a:p>
+            <a:r>
+              <a:rPr sz="800">
+                <a:hlinkClick r:id="rId38"/>
+              </a:rPr>
+              <a:t>Lofar 2</a:t>
+            </a:r>
+          </a:p>
+          <a:p>
+            <a:r>
+              <a:rPr sz="800">
+                <a:hlinkClick r:id="rId39"/>
+              </a:rPr>
+              <a:t>Lofar 3</a:t>
+            </a:r>
+          </a:p>
+          <a:p>
+            <a:r>
+              <a:rPr sz="800">
+                <a:hlinkClick r:id="rId40"/>
+              </a:rPr>
+              <a:t>Lofar 4</a:t>
+            </a:r>
+          </a:p>
+        </p:txBody>
+      </p:sp>
+      <p:sp>
+        <p:nvSpPr>
+          <p:cNvPr id="25" name="Rounded Rectangle 24"/>
+          <p:cNvSpPr/>
+          <p:nvPr>
+            <a:hlinkClick r:id="rId41"/>
+          </p:nvPr>
+        </p:nvSpPr>
+        <p:spPr>
+          <a:xfrm>
+            <a:off x="2657246" y="4632960"/>
+            <a:ext cx="2200046" cy="365760"/>
+          </a:xfrm>
+          <a:prstGeom prst="roundRect">
+            <a:avLst/>
+          </a:prstGeom>
+          <a:solidFill>
+            <a:srgbClr val="E8EEF7"/>
+          </a:solidFill>
+          <a:ln>
+            <a:solidFill>
+              <a:srgbClr val="1F3A5F"/>
+            </a:solidFill>
+          </a:ln>
+        </p:spPr>
+        <p:style>
+          <a:lnRef idx="1">
+            <a:schemeClr val="accent1"/>
+          </a:lnRef>
+          <a:fillRef idx="3">
+            <a:schemeClr val="accent1"/>
+          </a:fillRef>
+          <a:effectRef idx="2">
+            <a:schemeClr val="accent1"/>
+          </a:effectRef>
+          <a:fontRef idx="minor">
+            <a:schemeClr val="lt1"/>
+          </a:fontRef>
+        </p:style>
+        <p:txBody>
+          <a:bodyPr rtlCol="0" anchor="ctr" lIns="45720" rIns="45720"/>
+          <a:lstStyle/>
+          <a:p>
+            <a:pPr algn="ctr"/>
+            <a:r>
+              <a:rPr sz="900">
+                <a:solidFill>
+                  <a:srgbClr val="1F3A5F"/>
+                </a:solidFill>
+              </a:rPr>
+              <a:t>Gram 85: FR Razor Crest, Category 3, Bajor</a:t>
+            </a:r>
+          </a:p>
+        </p:txBody>
+      </p:sp>
+      <p:sp>
+        <p:nvSpPr>
+          <p:cNvPr id="26" name="TextBox 25"/>
+          <p:cNvSpPr txBox="1"/>
+          <p:nvPr/>
+        </p:nvSpPr>
+        <p:spPr>
+          <a:xfrm>
+            <a:off x="2657246" y="5017008"/>
+            <a:ext cx="2200046" cy="1447800"/>
+          </a:xfrm>
+          <a:prstGeom prst="rect">
+            <a:avLst/>
+          </a:prstGeom>
+          <a:noFill/>
+        </p:spPr>
+        <p:txBody>
+          <a:bodyPr wrap="square">
+            <a:spAutoFit/>
+          </a:bodyPr>
+          <a:lstStyle/>
+          <a:p>
+            <a:r>
+              <a:rPr sz="800">
+                <a:hlinkClick r:id="rId42"/>
+              </a:rPr>
+              <a:t>Lofar 1</a:t>
+            </a:r>
+          </a:p>
+          <a:p>
+            <a:r>
+              <a:rPr sz="800">
+                <a:hlinkClick r:id="rId43"/>
+              </a:rPr>
+              <a:t>Lofar 2</a:t>
+            </a:r>
+          </a:p>
+        </p:txBody>
+      </p:sp>
+      <p:sp>
+        <p:nvSpPr>
+          <p:cNvPr id="27" name="Rounded Rectangle 26"/>
+          <p:cNvSpPr/>
+          <p:nvPr>
+            <a:hlinkClick r:id="rId44"/>
+          </p:nvPr>
+        </p:nvSpPr>
+        <p:spPr>
+          <a:xfrm>
+            <a:off x="4948732" y="4632960"/>
+            <a:ext cx="2200046" cy="365760"/>
+          </a:xfrm>
+          <a:prstGeom prst="roundRect">
+            <a:avLst/>
+          </a:prstGeom>
+          <a:solidFill>
+            <a:srgbClr val="E8EEF7"/>
+          </a:solidFill>
+          <a:ln>
+            <a:solidFill>
+              <a:srgbClr val="1F3A5F"/>
+            </a:solidFill>
+          </a:ln>
+        </p:spPr>
+        <p:style>
+          <a:lnRef idx="1">
+            <a:schemeClr val="accent1"/>
+          </a:lnRef>
+          <a:fillRef idx="3">
+            <a:schemeClr val="accent1"/>
+          </a:fillRef>
+          <a:effectRef idx="2">
+            <a:schemeClr val="accent1"/>
+          </a:effectRef>
+          <a:fontRef idx="minor">
+            <a:schemeClr val="lt1"/>
+          </a:fontRef>
+        </p:style>
+        <p:txBody>
+          <a:bodyPr rtlCol="0" anchor="ctr" lIns="45720" rIns="45720"/>
+          <a:lstStyle/>
+          <a:p>
+            <a:pPr algn="ctr"/>
+            <a:r>
+              <a:rPr sz="900">
+                <a:solidFill>
+                  <a:srgbClr val="1F3A5F"/>
+                </a:solidFill>
+              </a:rPr>
+              <a:t>Gram 86: FR Devastator, Category 2, Betazed</a:t>
+            </a:r>
+          </a:p>
+        </p:txBody>
+      </p:sp>
+      <p:sp>
+        <p:nvSpPr>
+          <p:cNvPr id="28" name="TextBox 27"/>
+          <p:cNvSpPr txBox="1"/>
+          <p:nvPr/>
+        </p:nvSpPr>
+        <p:spPr>
+          <a:xfrm>
+            <a:off x="4948732" y="5017008"/>
+            <a:ext cx="2200046" cy="1447800"/>
+          </a:xfrm>
+          <a:prstGeom prst="rect">
+            <a:avLst/>
+          </a:prstGeom>
+          <a:noFill/>
+        </p:spPr>
+        <p:txBody>
+          <a:bodyPr wrap="square">
+            <a:spAutoFit/>
+          </a:bodyPr>
+          <a:lstStyle/>
+          <a:p>
+            <a:r>
+              <a:rPr sz="800">
+                <a:hlinkClick r:id="rId45"/>
+              </a:rPr>
+              <a:t>Lofar 1</a:t>
+            </a:r>
+          </a:p>
+        </p:txBody>
+      </p:sp>
+      <p:sp>
+        <p:nvSpPr>
+          <p:cNvPr id="29" name="Rounded Rectangle 28"/>
+          <p:cNvSpPr/>
+          <p:nvPr>
+            <a:hlinkClick r:id="rId46"/>
+          </p:nvPr>
+        </p:nvSpPr>
+        <p:spPr>
+          <a:xfrm>
+            <a:off x="7240219" y="4632960"/>
+            <a:ext cx="2200046" cy="365760"/>
+          </a:xfrm>
+          <a:prstGeom prst="roundRect">
+            <a:avLst/>
+          </a:prstGeom>
+          <a:solidFill>
+            <a:srgbClr val="E8EEF7"/>
+          </a:solidFill>
+          <a:ln>
+            <a:solidFill>
+              <a:srgbClr val="1F3A5F"/>
+            </a:solidFill>
+          </a:ln>
+        </p:spPr>
+        <p:style>
+          <a:lnRef idx="1">
+            <a:schemeClr val="accent1"/>
+          </a:lnRef>
+          <a:fillRef idx="3">
+            <a:schemeClr val="accent1"/>
+          </a:fillRef>
+          <a:effectRef idx="2">
+            <a:schemeClr val="accent1"/>
+          </a:effectRef>
+          <a:fontRef idx="minor">
+            <a:schemeClr val="lt1"/>
+          </a:fontRef>
+        </p:style>
+        <p:txBody>
+          <a:bodyPr rtlCol="0" anchor="ctr" lIns="45720" rIns="45720"/>
+          <a:lstStyle/>
+          <a:p>
+            <a:pPr algn="ctr"/>
+            <a:r>
+              <a:rPr sz="900">
+                <a:solidFill>
+                  <a:srgbClr val="1F3A5F"/>
+                </a:solidFill>
+              </a:rPr>
+              <a:t>Gram 87: FR Sovereign-class, Category 3, Dagobah</a:t>
+            </a:r>
+          </a:p>
+        </p:txBody>
+      </p:sp>
+      <p:sp>
+        <p:nvSpPr>
+          <p:cNvPr id="30" name="TextBox 29"/>
+          <p:cNvSpPr txBox="1"/>
+          <p:nvPr/>
+        </p:nvSpPr>
+        <p:spPr>
+          <a:xfrm>
+            <a:off x="7240219" y="5017008"/>
+            <a:ext cx="2200046" cy="1447800"/>
+          </a:xfrm>
+          <a:prstGeom prst="rect">
+            <a:avLst/>
+          </a:prstGeom>
+          <a:noFill/>
+        </p:spPr>
+        <p:txBody>
+          <a:bodyPr wrap="square">
+            <a:spAutoFit/>
+          </a:bodyPr>
+          <a:lstStyle/>
+          <a:p>
+            <a:r>
+              <a:rPr sz="800">
+                <a:hlinkClick r:id="rId47"/>
+              </a:rPr>
+              <a:t>Lofar 1</a:t>
+            </a:r>
+          </a:p>
+          <a:p>
+            <a:r>
+              <a:rPr sz="800">
+                <a:hlinkClick r:id="rId48"/>
+              </a:rPr>
+              <a:t>Lofar 2</a:t>
+            </a:r>
+          </a:p>
+        </p:txBody>
+      </p:sp>
+      <p:sp>
+        <p:nvSpPr>
+          <p:cNvPr id="31" name="Rounded Rectangle 30"/>
+          <p:cNvSpPr/>
+          <p:nvPr>
+            <a:hlinkClick r:id="rId49"/>
+          </p:nvPr>
+        </p:nvSpPr>
+        <p:spPr>
+          <a:xfrm>
+            <a:off x="9531705" y="4632960"/>
+            <a:ext cx="2200046" cy="365760"/>
+          </a:xfrm>
+          <a:prstGeom prst="roundRect">
+            <a:avLst/>
+          </a:prstGeom>
+          <a:solidFill>
+            <a:srgbClr val="E8EEF7"/>
+          </a:solidFill>
+          <a:ln>
+            <a:solidFill>
+              <a:srgbClr val="1F3A5F"/>
+            </a:solidFill>
+          </a:ln>
+        </p:spPr>
+        <p:style>
+          <a:lnRef idx="1">
+            <a:schemeClr val="accent1"/>
+          </a:lnRef>
+          <a:fillRef idx="3">
+            <a:schemeClr val="accent1"/>
+          </a:fillRef>
+          <a:effectRef idx="2">
+            <a:schemeClr val="accent1"/>
+          </a:effectRef>
+          <a:fontRef idx="minor">
+            <a:schemeClr val="lt1"/>
+          </a:fontRef>
+        </p:style>
+        <p:txBody>
+          <a:bodyPr rtlCol="0" anchor="ctr" lIns="45720" rIns="45720"/>
+          <a:lstStyle/>
+          <a:p>
+            <a:pPr algn="ctr"/>
+            <a:r>
+              <a:rPr sz="900">
+                <a:solidFill>
+                  <a:srgbClr val="1F3A5F"/>
+                </a:solidFill>
+              </a:rPr>
+              <a:t>Gram 88: FR Nebula-class, Category 1, Cardassia</a:t>
+            </a:r>
+          </a:p>
+        </p:txBody>
+      </p:sp>
+      <p:sp>
+        <p:nvSpPr>
+          <p:cNvPr id="32" name="TextBox 31"/>
+          <p:cNvSpPr txBox="1"/>
+          <p:nvPr/>
+        </p:nvSpPr>
+        <p:spPr>
+          <a:xfrm>
+            <a:off x="9531705" y="5017008"/>
+            <a:ext cx="2200046" cy="1447800"/>
+          </a:xfrm>
+          <a:prstGeom prst="rect">
+            <a:avLst/>
+          </a:prstGeom>
+          <a:noFill/>
+        </p:spPr>
+        <p:txBody>
+          <a:bodyPr wrap="square">
+            <a:spAutoFit/>
+          </a:bodyPr>
+          <a:lstStyle/>
+          <a:p>
+            <a:r>
+              <a:rPr sz="800">
+                <a:hlinkClick r:id="rId50"/>
+              </a:rPr>
+              <a:t>Lofar 1</a:t>
+            </a:r>
+          </a:p>
           <a:p>
             <a:r>
               <a:rPr sz="800">
                 <a:hlinkClick r:id="rId51"/>
               </a:rPr>
               <a:t>Lofar 2</a:t>
+            </a:r>
+          </a:p>
+        </p:txBody>
+      </p:sp>
+    </p:spTree>
+  </p:cSld>
+  <p:clrMapOvr>
+    <a:masterClrMapping/>
+  </p:clrMapOvr>
+</p:sld>
+</file>
+
+<file path=ppt/slides/slide7.xml><?xml version="1.0" encoding="utf-8"?>
+<p:sld xmlns:a="http://schemas.openxmlformats.org/drawingml/2006/main" xmlns:p="http://schemas.openxmlformats.org/presentationml/2006/main" xmlns:r="http://schemas.openxmlformats.org/officeDocument/2006/relationships">
+  <p:cSld>
+    <p:spTree>
+      <p:nvGrpSpPr>
+        <p:cNvPr id="1" name=""/>
+        <p:cNvGrpSpPr/>
+        <p:nvPr/>
+      </p:nvGrpSpPr>
+      <p:grpSpPr/>
+      <p:sp>
+        <p:nvSpPr>
+          <p:cNvPr id="2" name="TextBox 1"/>
+          <p:cNvSpPr txBox="1"/>
+          <p:nvPr/>
+        </p:nvSpPr>
+        <p:spPr>
+          <a:xfrm>
+            <a:off x="914400" y="2377440"/>
+            <a:ext cx="10360152" cy="1280160"/>
+          </a:xfrm>
+          <a:prstGeom prst="rect">
+            <a:avLst/>
+          </a:prstGeom>
+          <a:noFill/>
+        </p:spPr>
+        <p:txBody>
+          <a:bodyPr wrap="square">
+            <a:spAutoFit/>
+          </a:bodyPr>
+          <a:lstStyle/>
+          <a:p>
+            <a:pPr algn="ctr"/>
+            <a:r>
+              <a:rPr sz="4000" b="1">
+                <a:solidFill>
+                  <a:srgbClr val="1F3A5F"/>
+                </a:solidFill>
+              </a:rPr>
+              <a:t>End of Instructor Pub10_Ed22B_Updated</a:t>
+            </a:r>
+          </a:p>
+        </p:txBody>
+      </p:sp>
+      <p:sp>
+        <p:nvSpPr>
+          <p:cNvPr id="3" name="TextBox 2"/>
+          <p:cNvSpPr txBox="1"/>
+          <p:nvPr/>
+        </p:nvSpPr>
+        <p:spPr>
+          <a:xfrm>
+            <a:off x="914400" y="3840480"/>
+            <a:ext cx="10360152" cy="731520"/>
+          </a:xfrm>
+          <a:prstGeom prst="rect">
+            <a:avLst/>
+          </a:prstGeom>
+          <a:noFill/>
+        </p:spPr>
+        <p:txBody>
+          <a:bodyPr wrap="none">
+            <a:spAutoFit/>
+          </a:bodyPr>
+          <a:lstStyle/>
+          <a:p>
+            <a:pPr algn="ctr"/>
+            <a:r>
+              <a:rPr sz="2400">
+                <a:solidFill>
+                  <a:srgbClr val="1F3A5F"/>
+                </a:solidFill>
+              </a:rPr>
+              <a:t>Instructor Version</a:t>
             </a:r>
           </a:p>
         </p:txBody>

--- a/source/Instructor Pub10_Ed22B_Updated/Instructor Pub10_Ed22B_Updated.pptx
+++ b/source/Instructor Pub10_Ed22B_Updated/Instructor Pub10_Ed22B_Updated.pptx
@@ -10,8 +10,6 @@
     <p:sldId id="258" r:id="rId9"/>
     <p:sldId id="259" r:id="rId10"/>
     <p:sldId id="260" r:id="rId11"/>
-    <p:sldId id="261" r:id="rId12"/>
-    <p:sldId id="262" r:id="rId13"/>
   </p:sldIdLst>
   <p:sldSz cx="12188952" cy="6858000" type="screen4x3"/>
   <p:notesSz cx="6858000" cy="9144000"/>
@@ -3096,14 +3094,120 @@
       <p:grpSpPr/>
       <p:sp>
         <p:nvSpPr>
-          <p:cNvPr id="2" name="TextBox 1"/>
+          <p:cNvPr id="2" name="Rectangle 1"/>
+          <p:cNvSpPr/>
+          <p:nvPr/>
+        </p:nvSpPr>
+        <p:spPr>
+          <a:xfrm>
+            <a:off x="0" y="0"/>
+            <a:ext cx="12188952" cy="548640"/>
+          </a:xfrm>
+          <a:prstGeom prst="rect">
+            <a:avLst/>
+          </a:prstGeom>
+          <a:solidFill>
+            <a:srgbClr val="1F3A5F"/>
+          </a:solidFill>
+          <a:ln>
+            <a:noFill/>
+          </a:ln>
+        </p:spPr>
+        <p:style>
+          <a:lnRef idx="1">
+            <a:schemeClr val="accent1"/>
+          </a:lnRef>
+          <a:fillRef idx="3">
+            <a:schemeClr val="accent1"/>
+          </a:fillRef>
+          <a:effectRef idx="2">
+            <a:schemeClr val="accent1"/>
+          </a:effectRef>
+          <a:fontRef idx="minor">
+            <a:schemeClr val="lt1"/>
+          </a:fontRef>
+        </p:style>
+        <p:txBody>
+          <a:bodyPr rtlCol="0" anchor="ctr" lIns="182880" rIns="182880"/>
+          <a:lstStyle/>
+          <a:p>
+            <a:pPr algn="ctr"/>
+            <a:r>
+              <a:rPr sz="2000" b="1">
+                <a:solidFill>
+                  <a:srgbClr val="FFFFFF"/>
+                </a:solidFill>
+              </a:rPr>
+              <a:t>Instructor Pub10_Ed22B_Updated — Page 1 of 5</a:t>
+            </a:r>
+          </a:p>
+        </p:txBody>
+      </p:sp>
+      <p:sp>
+        <p:nvSpPr>
+          <p:cNvPr id="3" name="Rounded Rectangle 2">
+            <a:hlinkClick r:id="rId2"/>
+          </p:cNvPr>
+          <p:cNvSpPr/>
+          <p:nvPr/>
+        </p:nvSpPr>
+        <p:spPr>
+          <a:xfrm>
+            <a:off x="365760" y="731520"/>
+            <a:ext cx="2200046" cy="365760"/>
+          </a:xfrm>
+          <a:prstGeom prst="roundRect">
+            <a:avLst/>
+          </a:prstGeom>
+          <a:solidFill>
+            <a:srgbClr val="E8EEF7"/>
+          </a:solidFill>
+          <a:ln>
+            <a:solidFill>
+              <a:srgbClr val="1F3A5F"/>
+            </a:solidFill>
+          </a:ln>
+        </p:spPr>
+        <p:style>
+          <a:lnRef idx="1">
+            <a:schemeClr val="accent1"/>
+          </a:lnRef>
+          <a:fillRef idx="3">
+            <a:schemeClr val="accent1"/>
+          </a:fillRef>
+          <a:effectRef idx="2">
+            <a:schemeClr val="accent1"/>
+          </a:effectRef>
+          <a:fontRef idx="minor">
+            <a:schemeClr val="lt1"/>
+          </a:fontRef>
+        </p:style>
+        <p:txBody>
+          <a:bodyPr rtlCol="0" anchor="ctr" lIns="45720" rIns="45720"/>
+          <a:lstStyle/>
+          <a:p>
+            <a:pPr algn="ctr"/>
+            <a:r>
+              <a:rPr sz="900">
+                <a:solidFill>
+                  <a:srgbClr val="1F3A5F"/>
+                </a:solidFill>
+              </a:rPr>
+              <a:t>Gram 1: FR Outrider, Category 4, Tantive</a:t>
+            </a:r>
+          </a:p>
+        </p:txBody>
+      </p:sp>
+      <p:sp>
+        <p:nvSpPr>
+          <p:cNvPr id="4" name="TextBox 3"/>
           <p:cNvSpPr txBox="1"/>
           <p:nvPr/>
         </p:nvSpPr>
         <p:spPr>
           <a:xfrm>
-            <a:off x="914400" y="2377440"/>
-            <a:ext cx="10360152" cy="1280160"/>
+            <a:off x="365760" y="1115568"/>
+            <a:ext cx="2200046" cy="1447800"/>
           </a:xfrm>
           <a:prstGeom prst="rect">
             <a:avLst/>
@@ -3116,28 +3220,96 @@
           </a:bodyPr>
           <a:lstStyle/>
           <a:p>
+            <a:r>
+              <a:rPr sz="800">
+                <a:hlinkClick r:id="rId3"/>
+              </a:rPr>
+              <a:t>Lofar 1</a:t>
+            </a:r>
+          </a:p>
+          <a:p>
+            <a:r>
+              <a:rPr sz="800">
+                <a:hlinkClick r:id="rId4"/>
+              </a:rPr>
+              <a:t>Lofar 2</a:t>
+            </a:r>
+          </a:p>
+          <a:p>
+            <a:r>
+              <a:rPr sz="800">
+                <a:hlinkClick r:id="rId5"/>
+              </a:rPr>
+              <a:t>Lofar 3</a:t>
+            </a:r>
+          </a:p>
+        </p:txBody>
+      </p:sp>
+      <p:sp>
+        <p:nvSpPr>
+          <p:cNvPr id="5" name="Rounded Rectangle 4">
+            <a:hlinkClick r:id="rId6"/>
+          </p:cNvPr>
+          <p:cNvSpPr/>
+          <p:nvPr/>
+        </p:nvSpPr>
+        <p:spPr>
+          <a:xfrm>
+            <a:off x="2657246" y="731520"/>
+            <a:ext cx="2200046" cy="365760"/>
+          </a:xfrm>
+          <a:prstGeom prst="roundRect">
+            <a:avLst/>
+          </a:prstGeom>
+          <a:solidFill>
+            <a:srgbClr val="E8EEF7"/>
+          </a:solidFill>
+          <a:ln>
+            <a:solidFill>
+              <a:srgbClr val="1F3A5F"/>
+            </a:solidFill>
+          </a:ln>
+        </p:spPr>
+        <p:style>
+          <a:lnRef idx="1">
+            <a:schemeClr val="accent1"/>
+          </a:lnRef>
+          <a:fillRef idx="3">
+            <a:schemeClr val="accent1"/>
+          </a:fillRef>
+          <a:effectRef idx="2">
+            <a:schemeClr val="accent1"/>
+          </a:effectRef>
+          <a:fontRef idx="minor">
+            <a:schemeClr val="lt1"/>
+          </a:fontRef>
+        </p:style>
+        <p:txBody>
+          <a:bodyPr rtlCol="0" anchor="ctr" lIns="45720" rIns="45720"/>
+          <a:lstStyle/>
+          <a:p>
             <a:pPr algn="ctr"/>
             <a:r>
-              <a:rPr sz="4000" b="1">
+              <a:rPr sz="900">
                 <a:solidFill>
                   <a:srgbClr val="1F3A5F"/>
                 </a:solidFill>
               </a:rPr>
-              <a:t>Welcome to Instructor Pub10_Ed22B_Updated</a:t>
-            </a:r>
-          </a:p>
-        </p:txBody>
-      </p:sp>
-      <p:sp>
-        <p:nvSpPr>
-          <p:cNvPr id="3" name="TextBox 2"/>
+              <a:t>Gram 2: FR Millennium Falcon, Category 1, Hoth</a:t>
+            </a:r>
+          </a:p>
+        </p:txBody>
+      </p:sp>
+      <p:sp>
+        <p:nvSpPr>
+          <p:cNvPr id="6" name="TextBox 5"/>
           <p:cNvSpPr txBox="1"/>
           <p:nvPr/>
         </p:nvSpPr>
         <p:spPr>
           <a:xfrm>
-            <a:off x="914400" y="3840480"/>
-            <a:ext cx="10360152" cy="731520"/>
+            <a:off x="2657246" y="1115568"/>
+            <a:ext cx="2200046" cy="1447800"/>
           </a:xfrm>
           <a:prstGeom prst="rect">
             <a:avLst/>
@@ -3145,19 +3317,1310 @@
           <a:noFill/>
         </p:spPr>
         <p:txBody>
-          <a:bodyPr wrap="none">
+          <a:bodyPr wrap="square">
             <a:spAutoFit/>
           </a:bodyPr>
           <a:lstStyle/>
           <a:p>
+            <a:r>
+              <a:rPr sz="800">
+                <a:hlinkClick r:id="rId7"/>
+              </a:rPr>
+              <a:t>Lofar 1</a:t>
+            </a:r>
+          </a:p>
+          <a:p>
+            <a:r>
+              <a:rPr sz="800">
+                <a:hlinkClick r:id="rId8"/>
+              </a:rPr>
+              <a:t>Lofar 2</a:t>
+            </a:r>
+          </a:p>
+        </p:txBody>
+      </p:sp>
+      <p:sp>
+        <p:nvSpPr>
+          <p:cNvPr id="7" name="Rounded Rectangle 6">
+            <a:hlinkClick r:id="rId9"/>
+          </p:cNvPr>
+          <p:cNvSpPr/>
+          <p:nvPr/>
+        </p:nvSpPr>
+        <p:spPr>
+          <a:xfrm>
+            <a:off x="4948732" y="731520"/>
+            <a:ext cx="2200046" cy="365760"/>
+          </a:xfrm>
+          <a:prstGeom prst="roundRect">
+            <a:avLst/>
+          </a:prstGeom>
+          <a:solidFill>
+            <a:srgbClr val="E8EEF7"/>
+          </a:solidFill>
+          <a:ln>
+            <a:solidFill>
+              <a:srgbClr val="1F3A5F"/>
+            </a:solidFill>
+          </a:ln>
+        </p:spPr>
+        <p:style>
+          <a:lnRef idx="1">
+            <a:schemeClr val="accent1"/>
+          </a:lnRef>
+          <a:fillRef idx="3">
+            <a:schemeClr val="accent1"/>
+          </a:fillRef>
+          <a:effectRef idx="2">
+            <a:schemeClr val="accent1"/>
+          </a:effectRef>
+          <a:fontRef idx="minor">
+            <a:schemeClr val="lt1"/>
+          </a:fontRef>
+        </p:style>
+        <p:txBody>
+          <a:bodyPr rtlCol="0" anchor="ctr" lIns="45720" rIns="45720"/>
+          <a:lstStyle/>
+          <a:p>
             <a:pPr algn="ctr"/>
             <a:r>
-              <a:rPr sz="2400">
+              <a:rPr sz="900">
                 <a:solidFill>
                   <a:srgbClr val="1F3A5F"/>
                 </a:solidFill>
               </a:rPr>
-              <a:t>Instructor Version</a:t>
+              <a:t>Gram 3: Intrepid-class contact bearing 281, codename Dagobah</a:t>
+            </a:r>
+          </a:p>
+        </p:txBody>
+      </p:sp>
+      <p:sp>
+        <p:nvSpPr>
+          <p:cNvPr id="8" name="TextBox 7"/>
+          <p:cNvSpPr txBox="1"/>
+          <p:nvPr/>
+        </p:nvSpPr>
+        <p:spPr>
+          <a:xfrm>
+            <a:off x="4948732" y="1115568"/>
+            <a:ext cx="2200046" cy="1447800"/>
+          </a:xfrm>
+          <a:prstGeom prst="rect">
+            <a:avLst/>
+          </a:prstGeom>
+          <a:noFill/>
+        </p:spPr>
+        <p:txBody>
+          <a:bodyPr wrap="square">
+            <a:spAutoFit/>
+          </a:bodyPr>
+          <a:lstStyle/>
+          <a:p>
+            <a:r>
+              <a:rPr sz="800">
+                <a:hlinkClick r:id="rId10"/>
+              </a:rPr>
+              <a:t>Lofar 1</a:t>
+            </a:r>
+          </a:p>
+          <a:p>
+            <a:r>
+              <a:rPr sz="800">
+                <a:hlinkClick r:id="rId11"/>
+              </a:rPr>
+              <a:t>Lofar 2</a:t>
+            </a:r>
+          </a:p>
+          <a:p>
+            <a:r>
+              <a:rPr sz="800">
+                <a:hlinkClick r:id="rId12"/>
+              </a:rPr>
+              <a:t>Lofar 3</a:t>
+            </a:r>
+          </a:p>
+        </p:txBody>
+      </p:sp>
+      <p:sp>
+        <p:nvSpPr>
+          <p:cNvPr id="9" name="Rounded Rectangle 8">
+            <a:hlinkClick r:id="rId13"/>
+          </p:cNvPr>
+          <p:cNvSpPr/>
+          <p:nvPr/>
+        </p:nvSpPr>
+        <p:spPr>
+          <a:xfrm>
+            <a:off x="7240219" y="731520"/>
+            <a:ext cx="2200046" cy="365760"/>
+          </a:xfrm>
+          <a:prstGeom prst="roundRect">
+            <a:avLst/>
+          </a:prstGeom>
+          <a:solidFill>
+            <a:srgbClr val="E8EEF7"/>
+          </a:solidFill>
+          <a:ln>
+            <a:solidFill>
+              <a:srgbClr val="1F3A5F"/>
+            </a:solidFill>
+          </a:ln>
+        </p:spPr>
+        <p:style>
+          <a:lnRef idx="1">
+            <a:schemeClr val="accent1"/>
+          </a:lnRef>
+          <a:fillRef idx="3">
+            <a:schemeClr val="accent1"/>
+          </a:fillRef>
+          <a:effectRef idx="2">
+            <a:schemeClr val="accent1"/>
+          </a:effectRef>
+          <a:fontRef idx="minor">
+            <a:schemeClr val="lt1"/>
+          </a:fontRef>
+        </p:style>
+        <p:txBody>
+          <a:bodyPr rtlCol="0" anchor="ctr" lIns="45720" rIns="45720"/>
+          <a:lstStyle/>
+          <a:p>
+            <a:pPr algn="ctr"/>
+            <a:r>
+              <a:rPr sz="900">
+                <a:solidFill>
+                  <a:srgbClr val="1F3A5F"/>
+                </a:solidFill>
+              </a:rPr>
+              <a:t>Gram 6: TIE Bomber contact bearing 018, codename Dank</a:t>
+            </a:r>
+          </a:p>
+        </p:txBody>
+      </p:sp>
+      <p:sp>
+        <p:nvSpPr>
+          <p:cNvPr id="10" name="TextBox 9"/>
+          <p:cNvSpPr txBox="1"/>
+          <p:nvPr/>
+        </p:nvSpPr>
+        <p:spPr>
+          <a:xfrm>
+            <a:off x="7240219" y="1115568"/>
+            <a:ext cx="2200046" cy="1447800"/>
+          </a:xfrm>
+          <a:prstGeom prst="rect">
+            <a:avLst/>
+          </a:prstGeom>
+          <a:noFill/>
+        </p:spPr>
+        <p:txBody>
+          <a:bodyPr wrap="square">
+            <a:spAutoFit/>
+          </a:bodyPr>
+          <a:lstStyle/>
+          <a:p>
+            <a:r>
+              <a:rPr sz="800">
+                <a:hlinkClick r:id="rId14"/>
+              </a:rPr>
+              <a:t>Lofar 1</a:t>
+            </a:r>
+          </a:p>
+          <a:p>
+            <a:r>
+              <a:rPr sz="800">
+                <a:hlinkClick r:id="rId15"/>
+              </a:rPr>
+              <a:t>Lofar 2</a:t>
+            </a:r>
+          </a:p>
+          <a:p>
+            <a:r>
+              <a:rPr sz="800">
+                <a:hlinkClick r:id="rId16"/>
+              </a:rPr>
+              <a:t>Lofar 3</a:t>
+            </a:r>
+          </a:p>
+        </p:txBody>
+      </p:sp>
+      <p:sp>
+        <p:nvSpPr>
+          <p:cNvPr id="11" name="Rounded Rectangle 10">
+            <a:hlinkClick r:id="rId17"/>
+          </p:cNvPr>
+          <p:cNvSpPr/>
+          <p:nvPr/>
+        </p:nvSpPr>
+        <p:spPr>
+          <a:xfrm>
+            <a:off x="9531705" y="731520"/>
+            <a:ext cx="2200046" cy="365760"/>
+          </a:xfrm>
+          <a:prstGeom prst="roundRect">
+            <a:avLst/>
+          </a:prstGeom>
+          <a:solidFill>
+            <a:srgbClr val="E8EEF7"/>
+          </a:solidFill>
+          <a:ln>
+            <a:solidFill>
+              <a:srgbClr val="1F3A5F"/>
+            </a:solidFill>
+          </a:ln>
+        </p:spPr>
+        <p:style>
+          <a:lnRef idx="1">
+            <a:schemeClr val="accent1"/>
+          </a:lnRef>
+          <a:fillRef idx="3">
+            <a:schemeClr val="accent1"/>
+          </a:fillRef>
+          <a:effectRef idx="2">
+            <a:schemeClr val="accent1"/>
+          </a:effectRef>
+          <a:fontRef idx="minor">
+            <a:schemeClr val="lt1"/>
+          </a:fontRef>
+        </p:style>
+        <p:txBody>
+          <a:bodyPr rtlCol="0" anchor="ctr" lIns="45720" rIns="45720"/>
+          <a:lstStyle/>
+          <a:p>
+            <a:pPr algn="ctr"/>
+            <a:r>
+              <a:rPr sz="900">
+                <a:solidFill>
+                  <a:srgbClr val="1F3A5F"/>
+                </a:solidFill>
+              </a:rPr>
+              <a:t>Gram 7: FR Outrider, Category 1, Romulus</a:t>
+            </a:r>
+          </a:p>
+        </p:txBody>
+      </p:sp>
+      <p:sp>
+        <p:nvSpPr>
+          <p:cNvPr id="12" name="TextBox 11"/>
+          <p:cNvSpPr txBox="1"/>
+          <p:nvPr/>
+        </p:nvSpPr>
+        <p:spPr>
+          <a:xfrm>
+            <a:off x="9531705" y="1115568"/>
+            <a:ext cx="2200046" cy="1447800"/>
+          </a:xfrm>
+          <a:prstGeom prst="rect">
+            <a:avLst/>
+          </a:prstGeom>
+          <a:noFill/>
+        </p:spPr>
+        <p:txBody>
+          <a:bodyPr wrap="square">
+            <a:spAutoFit/>
+          </a:bodyPr>
+          <a:lstStyle/>
+          <a:p>
+            <a:r>
+              <a:rPr sz="800">
+                <a:hlinkClick r:id="rId18"/>
+              </a:rPr>
+              <a:t>Lofar 1</a:t>
+            </a:r>
+          </a:p>
+          <a:p>
+            <a:r>
+              <a:rPr sz="800">
+                <a:hlinkClick r:id="rId19"/>
+              </a:rPr>
+              <a:t>Lofar 2</a:t>
+            </a:r>
+          </a:p>
+          <a:p>
+            <a:r>
+              <a:rPr sz="800">
+                <a:hlinkClick r:id="rId20"/>
+              </a:rPr>
+              <a:t>Lofar 3</a:t>
+            </a:r>
+          </a:p>
+          <a:p>
+            <a:r>
+              <a:rPr sz="800">
+                <a:hlinkClick r:id="rId21"/>
+              </a:rPr>
+              <a:t>Lofar 4</a:t>
+            </a:r>
+          </a:p>
+        </p:txBody>
+      </p:sp>
+      <p:sp>
+        <p:nvSpPr>
+          <p:cNvPr id="13" name="Rounded Rectangle 12">
+            <a:hlinkClick r:id="rId22"/>
+          </p:cNvPr>
+          <p:cNvSpPr/>
+          <p:nvPr/>
+        </p:nvSpPr>
+        <p:spPr>
+          <a:xfrm>
+            <a:off x="365760" y="2682240"/>
+            <a:ext cx="2200046" cy="365760"/>
+          </a:xfrm>
+          <a:prstGeom prst="roundRect">
+            <a:avLst/>
+          </a:prstGeom>
+          <a:solidFill>
+            <a:srgbClr val="E8EEF7"/>
+          </a:solidFill>
+          <a:ln>
+            <a:solidFill>
+              <a:srgbClr val="1F3A5F"/>
+            </a:solidFill>
+          </a:ln>
+        </p:spPr>
+        <p:style>
+          <a:lnRef idx="1">
+            <a:schemeClr val="accent1"/>
+          </a:lnRef>
+          <a:fillRef idx="3">
+            <a:schemeClr val="accent1"/>
+          </a:fillRef>
+          <a:effectRef idx="2">
+            <a:schemeClr val="accent1"/>
+          </a:effectRef>
+          <a:fontRef idx="minor">
+            <a:schemeClr val="lt1"/>
+          </a:fontRef>
+        </p:style>
+        <p:txBody>
+          <a:bodyPr rtlCol="0" anchor="ctr" lIns="45720" rIns="45720"/>
+          <a:lstStyle/>
+          <a:p>
+            <a:pPr algn="ctr"/>
+            <a:r>
+              <a:rPr sz="900">
+                <a:solidFill>
+                  <a:srgbClr val="1F3A5F"/>
+                </a:solidFill>
+              </a:rPr>
+              <a:t>Gram 9: B-wing contact bearing 007, codename Bespin</a:t>
+            </a:r>
+          </a:p>
+        </p:txBody>
+      </p:sp>
+      <p:sp>
+        <p:nvSpPr>
+          <p:cNvPr id="14" name="TextBox 13"/>
+          <p:cNvSpPr txBox="1"/>
+          <p:nvPr/>
+        </p:nvSpPr>
+        <p:spPr>
+          <a:xfrm>
+            <a:off x="365760" y="3066288"/>
+            <a:ext cx="2200046" cy="1447800"/>
+          </a:xfrm>
+          <a:prstGeom prst="rect">
+            <a:avLst/>
+          </a:prstGeom>
+          <a:noFill/>
+        </p:spPr>
+        <p:txBody>
+          <a:bodyPr wrap="square">
+            <a:spAutoFit/>
+          </a:bodyPr>
+          <a:lstStyle/>
+          <a:p>
+            <a:r>
+              <a:rPr sz="800">
+                <a:hlinkClick r:id="rId23"/>
+              </a:rPr>
+              <a:t>Lofar 1</a:t>
+            </a:r>
+          </a:p>
+          <a:p>
+            <a:r>
+              <a:rPr sz="800">
+                <a:hlinkClick r:id="rId24"/>
+              </a:rPr>
+              <a:t>Lofar 2</a:t>
+            </a:r>
+          </a:p>
+        </p:txBody>
+      </p:sp>
+      <p:sp>
+        <p:nvSpPr>
+          <p:cNvPr id="15" name="Rounded Rectangle 14">
+            <a:hlinkClick r:id="rId25"/>
+          </p:cNvPr>
+          <p:cNvSpPr/>
+          <p:nvPr/>
+        </p:nvSpPr>
+        <p:spPr>
+          <a:xfrm>
+            <a:off x="2657246" y="2682240"/>
+            <a:ext cx="2200046" cy="365760"/>
+          </a:xfrm>
+          <a:prstGeom prst="roundRect">
+            <a:avLst/>
+          </a:prstGeom>
+          <a:solidFill>
+            <a:srgbClr val="E8EEF7"/>
+          </a:solidFill>
+          <a:ln>
+            <a:solidFill>
+              <a:srgbClr val="1F3A5F"/>
+            </a:solidFill>
+          </a:ln>
+        </p:spPr>
+        <p:style>
+          <a:lnRef idx="1">
+            <a:schemeClr val="accent1"/>
+          </a:lnRef>
+          <a:fillRef idx="3">
+            <a:schemeClr val="accent1"/>
+          </a:fillRef>
+          <a:effectRef idx="2">
+            <a:schemeClr val="accent1"/>
+          </a:effectRef>
+          <a:fontRef idx="minor">
+            <a:schemeClr val="lt1"/>
+          </a:fontRef>
+        </p:style>
+        <p:txBody>
+          <a:bodyPr rtlCol="0" anchor="ctr" lIns="45720" rIns="45720"/>
+          <a:lstStyle/>
+          <a:p>
+            <a:pPr algn="ctr"/>
+            <a:r>
+              <a:rPr sz="900">
+                <a:solidFill>
+                  <a:srgbClr val="1F3A5F"/>
+                </a:solidFill>
+              </a:rPr>
+              <a:t>Gram 10: FR Razor Crest, Category 3, Romulus</a:t>
+            </a:r>
+          </a:p>
+        </p:txBody>
+      </p:sp>
+      <p:sp>
+        <p:nvSpPr>
+          <p:cNvPr id="16" name="TextBox 15"/>
+          <p:cNvSpPr txBox="1"/>
+          <p:nvPr/>
+        </p:nvSpPr>
+        <p:spPr>
+          <a:xfrm>
+            <a:off x="2657246" y="3066288"/>
+            <a:ext cx="2200046" cy="1447800"/>
+          </a:xfrm>
+          <a:prstGeom prst="rect">
+            <a:avLst/>
+          </a:prstGeom>
+          <a:noFill/>
+        </p:spPr>
+        <p:txBody>
+          <a:bodyPr wrap="square">
+            <a:spAutoFit/>
+          </a:bodyPr>
+          <a:lstStyle/>
+          <a:p>
+            <a:r>
+              <a:rPr sz="800">
+                <a:hlinkClick r:id="rId26"/>
+              </a:rPr>
+              <a:t>Lofar 1</a:t>
+            </a:r>
+          </a:p>
+        </p:txBody>
+      </p:sp>
+      <p:sp>
+        <p:nvSpPr>
+          <p:cNvPr id="17" name="Rounded Rectangle 16">
+            <a:hlinkClick r:id="rId27"/>
+          </p:cNvPr>
+          <p:cNvSpPr/>
+          <p:nvPr/>
+        </p:nvSpPr>
+        <p:spPr>
+          <a:xfrm>
+            <a:off x="4948732" y="2682240"/>
+            <a:ext cx="2200046" cy="365760"/>
+          </a:xfrm>
+          <a:prstGeom prst="roundRect">
+            <a:avLst/>
+          </a:prstGeom>
+          <a:solidFill>
+            <a:srgbClr val="E8EEF7"/>
+          </a:solidFill>
+          <a:ln>
+            <a:solidFill>
+              <a:srgbClr val="1F3A5F"/>
+            </a:solidFill>
+          </a:ln>
+        </p:spPr>
+        <p:style>
+          <a:lnRef idx="1">
+            <a:schemeClr val="accent1"/>
+          </a:lnRef>
+          <a:fillRef idx="3">
+            <a:schemeClr val="accent1"/>
+          </a:fillRef>
+          <a:effectRef idx="2">
+            <a:schemeClr val="accent1"/>
+          </a:effectRef>
+          <a:fontRef idx="minor">
+            <a:schemeClr val="lt1"/>
+          </a:fontRef>
+        </p:style>
+        <p:txBody>
+          <a:bodyPr rtlCol="0" anchor="ctr" lIns="45720" rIns="45720"/>
+          <a:lstStyle/>
+          <a:p>
+            <a:pPr algn="ctr"/>
+            <a:r>
+              <a:rPr sz="900">
+                <a:solidFill>
+                  <a:srgbClr val="1F3A5F"/>
+                </a:solidFill>
+              </a:rPr>
+              <a:t>Gram 11: FR Constitution-class, Category 1, Defiant</a:t>
+            </a:r>
+          </a:p>
+        </p:txBody>
+      </p:sp>
+      <p:sp>
+        <p:nvSpPr>
+          <p:cNvPr id="18" name="TextBox 17"/>
+          <p:cNvSpPr txBox="1"/>
+          <p:nvPr/>
+        </p:nvSpPr>
+        <p:spPr>
+          <a:xfrm>
+            <a:off x="4948732" y="3066288"/>
+            <a:ext cx="2200046" cy="1447800"/>
+          </a:xfrm>
+          <a:prstGeom prst="rect">
+            <a:avLst/>
+          </a:prstGeom>
+          <a:noFill/>
+        </p:spPr>
+        <p:txBody>
+          <a:bodyPr wrap="square">
+            <a:spAutoFit/>
+          </a:bodyPr>
+          <a:lstStyle/>
+          <a:p>
+            <a:r>
+              <a:rPr sz="800">
+                <a:hlinkClick r:id="rId28"/>
+              </a:rPr>
+              <a:t>Lofar 1</a:t>
+            </a:r>
+          </a:p>
+          <a:p>
+            <a:r>
+              <a:rPr sz="800">
+                <a:hlinkClick r:id="rId29"/>
+              </a:rPr>
+              <a:t>Lofar 2</a:t>
+            </a:r>
+          </a:p>
+          <a:p>
+            <a:r>
+              <a:rPr sz="800">
+                <a:hlinkClick r:id="rId30"/>
+              </a:rPr>
+              <a:t>Lofar 3</a:t>
+            </a:r>
+          </a:p>
+          <a:p>
+            <a:r>
+              <a:rPr sz="800">
+                <a:hlinkClick r:id="rId31"/>
+              </a:rPr>
+              <a:t>Lofar 4</a:t>
+            </a:r>
+          </a:p>
+        </p:txBody>
+      </p:sp>
+      <p:sp>
+        <p:nvSpPr>
+          <p:cNvPr id="19" name="Rounded Rectangle 18">
+            <a:hlinkClick r:id="rId32"/>
+          </p:cNvPr>
+          <p:cNvSpPr/>
+          <p:nvPr/>
+        </p:nvSpPr>
+        <p:spPr>
+          <a:xfrm>
+            <a:off x="7240219" y="2682240"/>
+            <a:ext cx="2200046" cy="365760"/>
+          </a:xfrm>
+          <a:prstGeom prst="roundRect">
+            <a:avLst/>
+          </a:prstGeom>
+          <a:solidFill>
+            <a:srgbClr val="E8EEF7"/>
+          </a:solidFill>
+          <a:ln>
+            <a:solidFill>
+              <a:srgbClr val="1F3A5F"/>
+            </a:solidFill>
+          </a:ln>
+        </p:spPr>
+        <p:style>
+          <a:lnRef idx="1">
+            <a:schemeClr val="accent1"/>
+          </a:lnRef>
+          <a:fillRef idx="3">
+            <a:schemeClr val="accent1"/>
+          </a:fillRef>
+          <a:effectRef idx="2">
+            <a:schemeClr val="accent1"/>
+          </a:effectRef>
+          <a:fontRef idx="minor">
+            <a:schemeClr val="lt1"/>
+          </a:fontRef>
+        </p:style>
+        <p:txBody>
+          <a:bodyPr rtlCol="0" anchor="ctr" lIns="45720" rIns="45720"/>
+          <a:lstStyle/>
+          <a:p>
+            <a:pPr algn="ctr"/>
+            <a:r>
+              <a:rPr sz="900">
+                <a:solidFill>
+                  <a:srgbClr val="1F3A5F"/>
+                </a:solidFill>
+              </a:rPr>
+              <a:t>Gram 13: FR Equinox, Category 4, Naboo</a:t>
+            </a:r>
+          </a:p>
+        </p:txBody>
+      </p:sp>
+      <p:sp>
+        <p:nvSpPr>
+          <p:cNvPr id="20" name="TextBox 19"/>
+          <p:cNvSpPr txBox="1"/>
+          <p:nvPr/>
+        </p:nvSpPr>
+        <p:spPr>
+          <a:xfrm>
+            <a:off x="7240219" y="3066288"/>
+            <a:ext cx="2200046" cy="1447800"/>
+          </a:xfrm>
+          <a:prstGeom prst="rect">
+            <a:avLst/>
+          </a:prstGeom>
+          <a:noFill/>
+        </p:spPr>
+        <p:txBody>
+          <a:bodyPr wrap="square">
+            <a:spAutoFit/>
+          </a:bodyPr>
+          <a:lstStyle/>
+          <a:p>
+            <a:r>
+              <a:rPr sz="800">
+                <a:hlinkClick r:id="rId33"/>
+              </a:rPr>
+              <a:t>Lofar 1</a:t>
+            </a:r>
+          </a:p>
+        </p:txBody>
+      </p:sp>
+      <p:sp>
+        <p:nvSpPr>
+          <p:cNvPr id="21" name="Rounded Rectangle 20">
+            <a:hlinkClick r:id="rId34"/>
+          </p:cNvPr>
+          <p:cNvSpPr/>
+          <p:nvPr/>
+        </p:nvSpPr>
+        <p:spPr>
+          <a:xfrm>
+            <a:off x="9531705" y="2682240"/>
+            <a:ext cx="2200046" cy="365760"/>
+          </a:xfrm>
+          <a:prstGeom prst="roundRect">
+            <a:avLst/>
+          </a:prstGeom>
+          <a:solidFill>
+            <a:srgbClr val="E8EEF7"/>
+          </a:solidFill>
+          <a:ln>
+            <a:solidFill>
+              <a:srgbClr val="1F3A5F"/>
+            </a:solidFill>
+          </a:ln>
+        </p:spPr>
+        <p:style>
+          <a:lnRef idx="1">
+            <a:schemeClr val="accent1"/>
+          </a:lnRef>
+          <a:fillRef idx="3">
+            <a:schemeClr val="accent1"/>
+          </a:fillRef>
+          <a:effectRef idx="2">
+            <a:schemeClr val="accent1"/>
+          </a:effectRef>
+          <a:fontRef idx="minor">
+            <a:schemeClr val="lt1"/>
+          </a:fontRef>
+        </p:style>
+        <p:txBody>
+          <a:bodyPr rtlCol="0" anchor="ctr" lIns="45720" rIns="45720"/>
+          <a:lstStyle/>
+          <a:p>
+            <a:pPr algn="ctr"/>
+            <a:r>
+              <a:rPr sz="900">
+                <a:solidFill>
+                  <a:srgbClr val="1F3A5F"/>
+                </a:solidFill>
+              </a:rPr>
+              <a:t>Gram 14: FR A-wing, Category 2, Tatooine</a:t>
+            </a:r>
+          </a:p>
+        </p:txBody>
+      </p:sp>
+      <p:sp>
+        <p:nvSpPr>
+          <p:cNvPr id="22" name="TextBox 21"/>
+          <p:cNvSpPr txBox="1"/>
+          <p:nvPr/>
+        </p:nvSpPr>
+        <p:spPr>
+          <a:xfrm>
+            <a:off x="9531705" y="3066288"/>
+            <a:ext cx="2200046" cy="1447800"/>
+          </a:xfrm>
+          <a:prstGeom prst="rect">
+            <a:avLst/>
+          </a:prstGeom>
+          <a:noFill/>
+        </p:spPr>
+        <p:txBody>
+          <a:bodyPr wrap="square">
+            <a:spAutoFit/>
+          </a:bodyPr>
+          <a:lstStyle/>
+          <a:p>
+            <a:r>
+              <a:rPr sz="800">
+                <a:hlinkClick r:id="rId35"/>
+              </a:rPr>
+              <a:t>Lofar 1</a:t>
+            </a:r>
+          </a:p>
+          <a:p>
+            <a:r>
+              <a:rPr sz="800">
+                <a:hlinkClick r:id="rId36"/>
+              </a:rPr>
+              <a:t>Lofar 2</a:t>
+            </a:r>
+          </a:p>
+          <a:p>
+            <a:r>
+              <a:rPr sz="800">
+                <a:hlinkClick r:id="rId37"/>
+              </a:rPr>
+              <a:t>Lofar 3</a:t>
+            </a:r>
+          </a:p>
+          <a:p>
+            <a:r>
+              <a:rPr sz="800">
+                <a:hlinkClick r:id="rId38"/>
+              </a:rPr>
+              <a:t>Lofar 4</a:t>
+            </a:r>
+          </a:p>
+        </p:txBody>
+      </p:sp>
+      <p:sp>
+        <p:nvSpPr>
+          <p:cNvPr id="23" name="Rounded Rectangle 22">
+            <a:hlinkClick r:id="rId39"/>
+          </p:cNvPr>
+          <p:cNvSpPr/>
+          <p:nvPr/>
+        </p:nvSpPr>
+        <p:spPr>
+          <a:xfrm>
+            <a:off x="365760" y="4632960"/>
+            <a:ext cx="2200046" cy="365760"/>
+          </a:xfrm>
+          <a:prstGeom prst="roundRect">
+            <a:avLst/>
+          </a:prstGeom>
+          <a:solidFill>
+            <a:srgbClr val="E8EEF7"/>
+          </a:solidFill>
+          <a:ln>
+            <a:solidFill>
+              <a:srgbClr val="1F3A5F"/>
+            </a:solidFill>
+          </a:ln>
+        </p:spPr>
+        <p:style>
+          <a:lnRef idx="1">
+            <a:schemeClr val="accent1"/>
+          </a:lnRef>
+          <a:fillRef idx="3">
+            <a:schemeClr val="accent1"/>
+          </a:fillRef>
+          <a:effectRef idx="2">
+            <a:schemeClr val="accent1"/>
+          </a:effectRef>
+          <a:fontRef idx="minor">
+            <a:schemeClr val="lt1"/>
+          </a:fontRef>
+        </p:style>
+        <p:txBody>
+          <a:bodyPr rtlCol="0" anchor="ctr" lIns="45720" rIns="45720"/>
+          <a:lstStyle/>
+          <a:p>
+            <a:pPr algn="ctr"/>
+            <a:r>
+              <a:rPr sz="900">
+                <a:solidFill>
+                  <a:srgbClr val="1F3A5F"/>
+                </a:solidFill>
+              </a:rPr>
+              <a:t>Gram 15: FR B-wing, Category 1, Mustafar</a:t>
+            </a:r>
+          </a:p>
+        </p:txBody>
+      </p:sp>
+      <p:sp>
+        <p:nvSpPr>
+          <p:cNvPr id="24" name="TextBox 23"/>
+          <p:cNvSpPr txBox="1"/>
+          <p:nvPr/>
+        </p:nvSpPr>
+        <p:spPr>
+          <a:xfrm>
+            <a:off x="365760" y="5017008"/>
+            <a:ext cx="2200046" cy="1447800"/>
+          </a:xfrm>
+          <a:prstGeom prst="rect">
+            <a:avLst/>
+          </a:prstGeom>
+          <a:noFill/>
+        </p:spPr>
+        <p:txBody>
+          <a:bodyPr wrap="square">
+            <a:spAutoFit/>
+          </a:bodyPr>
+          <a:lstStyle/>
+          <a:p>
+            <a:r>
+              <a:rPr sz="800">
+                <a:hlinkClick r:id="rId40"/>
+              </a:rPr>
+              <a:t>Lofar 1</a:t>
+            </a:r>
+          </a:p>
+          <a:p>
+            <a:r>
+              <a:rPr sz="800">
+                <a:hlinkClick r:id="rId41"/>
+              </a:rPr>
+              <a:t>Lofar 2</a:t>
+            </a:r>
+          </a:p>
+          <a:p>
+            <a:r>
+              <a:rPr sz="800">
+                <a:hlinkClick r:id="rId42"/>
+              </a:rPr>
+              <a:t>Lofar 3</a:t>
+            </a:r>
+          </a:p>
+          <a:p>
+            <a:r>
+              <a:rPr sz="800">
+                <a:hlinkClick r:id="rId43"/>
+              </a:rPr>
+              <a:t>Lofar 4</a:t>
+            </a:r>
+          </a:p>
+        </p:txBody>
+      </p:sp>
+      <p:sp>
+        <p:nvSpPr>
+          <p:cNvPr id="25" name="Rounded Rectangle 24">
+            <a:hlinkClick r:id="rId44"/>
+          </p:cNvPr>
+          <p:cNvSpPr/>
+          <p:nvPr/>
+        </p:nvSpPr>
+        <p:spPr>
+          <a:xfrm>
+            <a:off x="2657246" y="4632960"/>
+            <a:ext cx="2200046" cy="365760"/>
+          </a:xfrm>
+          <a:prstGeom prst="roundRect">
+            <a:avLst/>
+          </a:prstGeom>
+          <a:solidFill>
+            <a:srgbClr val="E8EEF7"/>
+          </a:solidFill>
+          <a:ln>
+            <a:solidFill>
+              <a:srgbClr val="1F3A5F"/>
+            </a:solidFill>
+          </a:ln>
+        </p:spPr>
+        <p:style>
+          <a:lnRef idx="1">
+            <a:schemeClr val="accent1"/>
+          </a:lnRef>
+          <a:fillRef idx="3">
+            <a:schemeClr val="accent1"/>
+          </a:fillRef>
+          <a:effectRef idx="2">
+            <a:schemeClr val="accent1"/>
+          </a:effectRef>
+          <a:fontRef idx="minor">
+            <a:schemeClr val="lt1"/>
+          </a:fontRef>
+        </p:style>
+        <p:txBody>
+          <a:bodyPr rtlCol="0" anchor="ctr" lIns="45720" rIns="45720"/>
+          <a:lstStyle/>
+          <a:p>
+            <a:pPr algn="ctr"/>
+            <a:r>
+              <a:rPr sz="900">
+                <a:solidFill>
+                  <a:srgbClr val="1F3A5F"/>
+                </a:solidFill>
+              </a:rPr>
+              <a:t>Gram 16: FR Equinox, Category 1, Kobol</a:t>
+            </a:r>
+          </a:p>
+        </p:txBody>
+      </p:sp>
+      <p:sp>
+        <p:nvSpPr>
+          <p:cNvPr id="26" name="TextBox 25"/>
+          <p:cNvSpPr txBox="1"/>
+          <p:nvPr/>
+        </p:nvSpPr>
+        <p:spPr>
+          <a:xfrm>
+            <a:off x="2657246" y="5017008"/>
+            <a:ext cx="2200046" cy="1447800"/>
+          </a:xfrm>
+          <a:prstGeom prst="rect">
+            <a:avLst/>
+          </a:prstGeom>
+          <a:noFill/>
+        </p:spPr>
+        <p:txBody>
+          <a:bodyPr wrap="square">
+            <a:spAutoFit/>
+          </a:bodyPr>
+          <a:lstStyle/>
+          <a:p>
+            <a:r>
+              <a:rPr sz="800">
+                <a:hlinkClick r:id="rId45"/>
+              </a:rPr>
+              <a:t>Lofar 1</a:t>
+            </a:r>
+          </a:p>
+          <a:p>
+            <a:r>
+              <a:rPr sz="800">
+                <a:hlinkClick r:id="rId46"/>
+              </a:rPr>
+              <a:t>Lofar 2</a:t>
+            </a:r>
+          </a:p>
+        </p:txBody>
+      </p:sp>
+      <p:sp>
+        <p:nvSpPr>
+          <p:cNvPr id="27" name="Rounded Rectangle 26">
+            <a:hlinkClick r:id="rId47"/>
+          </p:cNvPr>
+          <p:cNvSpPr/>
+          <p:nvPr/>
+        </p:nvSpPr>
+        <p:spPr>
+          <a:xfrm>
+            <a:off x="4948732" y="4632960"/>
+            <a:ext cx="2200046" cy="365760"/>
+          </a:xfrm>
+          <a:prstGeom prst="roundRect">
+            <a:avLst/>
+          </a:prstGeom>
+          <a:solidFill>
+            <a:srgbClr val="E8EEF7"/>
+          </a:solidFill>
+          <a:ln>
+            <a:solidFill>
+              <a:srgbClr val="1F3A5F"/>
+            </a:solidFill>
+          </a:ln>
+        </p:spPr>
+        <p:style>
+          <a:lnRef idx="1">
+            <a:schemeClr val="accent1"/>
+          </a:lnRef>
+          <a:fillRef idx="3">
+            <a:schemeClr val="accent1"/>
+          </a:fillRef>
+          <a:effectRef idx="2">
+            <a:schemeClr val="accent1"/>
+          </a:effectRef>
+          <a:fontRef idx="minor">
+            <a:schemeClr val="lt1"/>
+          </a:fontRef>
+        </p:style>
+        <p:txBody>
+          <a:bodyPr rtlCol="0" anchor="ctr" lIns="45720" rIns="45720"/>
+          <a:lstStyle/>
+          <a:p>
+            <a:pPr algn="ctr"/>
+            <a:r>
+              <a:rPr sz="900">
+                <a:solidFill>
+                  <a:srgbClr val="1F3A5F"/>
+                </a:solidFill>
+              </a:rPr>
+              <a:t>Gram 17: Acclamator-class contact bearing 199, codename Vulcan</a:t>
+            </a:r>
+          </a:p>
+        </p:txBody>
+      </p:sp>
+      <p:sp>
+        <p:nvSpPr>
+          <p:cNvPr id="28" name="TextBox 27"/>
+          <p:cNvSpPr txBox="1"/>
+          <p:nvPr/>
+        </p:nvSpPr>
+        <p:spPr>
+          <a:xfrm>
+            <a:off x="4948732" y="5017008"/>
+            <a:ext cx="2200046" cy="1447800"/>
+          </a:xfrm>
+          <a:prstGeom prst="rect">
+            <a:avLst/>
+          </a:prstGeom>
+          <a:noFill/>
+        </p:spPr>
+        <p:txBody>
+          <a:bodyPr wrap="square">
+            <a:spAutoFit/>
+          </a:bodyPr>
+          <a:lstStyle/>
+          <a:p>
+            <a:r>
+              <a:rPr sz="800">
+                <a:hlinkClick r:id="rId48"/>
+              </a:rPr>
+              <a:t>Lofar 1</a:t>
+            </a:r>
+          </a:p>
+          <a:p>
+            <a:r>
+              <a:rPr sz="800">
+                <a:hlinkClick r:id="rId49"/>
+              </a:rPr>
+              <a:t>Lofar 2</a:t>
+            </a:r>
+          </a:p>
+        </p:txBody>
+      </p:sp>
+      <p:sp>
+        <p:nvSpPr>
+          <p:cNvPr id="29" name="Rounded Rectangle 28">
+            <a:hlinkClick r:id="rId50"/>
+          </p:cNvPr>
+          <p:cNvSpPr/>
+          <p:nvPr/>
+        </p:nvSpPr>
+        <p:spPr>
+          <a:xfrm>
+            <a:off x="7240219" y="4632960"/>
+            <a:ext cx="2200046" cy="365760"/>
+          </a:xfrm>
+          <a:prstGeom prst="roundRect">
+            <a:avLst/>
+          </a:prstGeom>
+          <a:solidFill>
+            <a:srgbClr val="E8EEF7"/>
+          </a:solidFill>
+          <a:ln>
+            <a:solidFill>
+              <a:srgbClr val="1F3A5F"/>
+            </a:solidFill>
+          </a:ln>
+        </p:spPr>
+        <p:style>
+          <a:lnRef idx="1">
+            <a:schemeClr val="accent1"/>
+          </a:lnRef>
+          <a:fillRef idx="3">
+            <a:schemeClr val="accent1"/>
+          </a:fillRef>
+          <a:effectRef idx="2">
+            <a:schemeClr val="accent1"/>
+          </a:effectRef>
+          <a:fontRef idx="minor">
+            <a:schemeClr val="lt1"/>
+          </a:fontRef>
+        </p:style>
+        <p:txBody>
+          <a:bodyPr rtlCol="0" anchor="ctr" lIns="45720" rIns="45720"/>
+          <a:lstStyle/>
+          <a:p>
+            <a:pPr algn="ctr"/>
+            <a:r>
+              <a:rPr sz="900">
+                <a:solidFill>
+                  <a:srgbClr val="1F3A5F"/>
+                </a:solidFill>
+              </a:rPr>
+              <a:t>Gram 18: Enterprise contact bearing 015, codename Betazed</a:t>
+            </a:r>
+          </a:p>
+        </p:txBody>
+      </p:sp>
+      <p:sp>
+        <p:nvSpPr>
+          <p:cNvPr id="30" name="TextBox 29"/>
+          <p:cNvSpPr txBox="1"/>
+          <p:nvPr/>
+        </p:nvSpPr>
+        <p:spPr>
+          <a:xfrm>
+            <a:off x="7240219" y="5017008"/>
+            <a:ext cx="2200046" cy="1447800"/>
+          </a:xfrm>
+          <a:prstGeom prst="rect">
+            <a:avLst/>
+          </a:prstGeom>
+          <a:noFill/>
+        </p:spPr>
+        <p:txBody>
+          <a:bodyPr wrap="square">
+            <a:spAutoFit/>
+          </a:bodyPr>
+          <a:lstStyle/>
+          <a:p>
+            <a:r>
+              <a:rPr sz="800">
+                <a:hlinkClick r:id="rId51"/>
+              </a:rPr>
+              <a:t>Lofar 1</a:t>
+            </a:r>
+          </a:p>
+        </p:txBody>
+      </p:sp>
+      <p:sp>
+        <p:nvSpPr>
+          <p:cNvPr id="31" name="Rounded Rectangle 30">
+            <a:hlinkClick r:id="rId52"/>
+          </p:cNvPr>
+          <p:cNvSpPr/>
+          <p:nvPr/>
+        </p:nvSpPr>
+        <p:spPr>
+          <a:xfrm>
+            <a:off x="9531705" y="4632960"/>
+            <a:ext cx="2200046" cy="365760"/>
+          </a:xfrm>
+          <a:prstGeom prst="roundRect">
+            <a:avLst/>
+          </a:prstGeom>
+          <a:solidFill>
+            <a:srgbClr val="E8EEF7"/>
+          </a:solidFill>
+          <a:ln>
+            <a:solidFill>
+              <a:srgbClr val="1F3A5F"/>
+            </a:solidFill>
+          </a:ln>
+        </p:spPr>
+        <p:style>
+          <a:lnRef idx="1">
+            <a:schemeClr val="accent1"/>
+          </a:lnRef>
+          <a:fillRef idx="3">
+            <a:schemeClr val="accent1"/>
+          </a:fillRef>
+          <a:effectRef idx="2">
+            <a:schemeClr val="accent1"/>
+          </a:effectRef>
+          <a:fontRef idx="minor">
+            <a:schemeClr val="lt1"/>
+          </a:fontRef>
+        </p:style>
+        <p:txBody>
+          <a:bodyPr rtlCol="0" anchor="ctr" lIns="45720" rIns="45720"/>
+          <a:lstStyle/>
+          <a:p>
+            <a:pPr algn="ctr"/>
+            <a:r>
+              <a:rPr sz="900">
+                <a:solidFill>
+                  <a:srgbClr val="1F3A5F"/>
+                </a:solidFill>
+              </a:rPr>
+              <a:t>Gram 19: FR Rebel One, Category 1, Tatooine</a:t>
+            </a:r>
+          </a:p>
+        </p:txBody>
+      </p:sp>
+      <p:sp>
+        <p:nvSpPr>
+          <p:cNvPr id="32" name="TextBox 31"/>
+          <p:cNvSpPr txBox="1"/>
+          <p:nvPr/>
+        </p:nvSpPr>
+        <p:spPr>
+          <a:xfrm>
+            <a:off x="9531705" y="5017008"/>
+            <a:ext cx="2200046" cy="1447800"/>
+          </a:xfrm>
+          <a:prstGeom prst="rect">
+            <a:avLst/>
+          </a:prstGeom>
+          <a:noFill/>
+        </p:spPr>
+        <p:txBody>
+          <a:bodyPr wrap="square">
+            <a:spAutoFit/>
+          </a:bodyPr>
+          <a:lstStyle/>
+          <a:p>
+            <a:r>
+              <a:rPr sz="800">
+                <a:hlinkClick r:id="rId53"/>
+              </a:rPr>
+              <a:t>Lofar 1</a:t>
+            </a:r>
+          </a:p>
+          <a:p>
+            <a:r>
+              <a:rPr sz="800">
+                <a:hlinkClick r:id="rId54"/>
+              </a:rPr>
+              <a:t>Lofar 2</a:t>
+            </a:r>
+          </a:p>
+          <a:p>
+            <a:r>
+              <a:rPr sz="800">
+                <a:hlinkClick r:id="rId55"/>
+              </a:rPr>
+              <a:t>Lofar 3</a:t>
             </a:r>
           </a:p>
         </p:txBody>
@@ -3226,18 +4689,18 @@
                   <a:srgbClr val="FFFFFF"/>
                 </a:solidFill>
               </a:rPr>
-              <a:t>Instructor Pub10_Ed22B_Updated — Page 1 of 5</a:t>
-            </a:r>
-          </a:p>
-        </p:txBody>
-      </p:sp>
-      <p:sp>
-        <p:nvSpPr>
-          <p:cNvPr id="3" name="Rounded Rectangle 2"/>
+              <a:t>Instructor Pub10_Ed22B_Updated — Page 2 of 5</a:t>
+            </a:r>
+          </a:p>
+        </p:txBody>
+      </p:sp>
+      <p:sp>
+        <p:nvSpPr>
+          <p:cNvPr id="3" name="Rounded Rectangle 2">
+            <a:hlinkClick r:id="rId2"/>
+          </p:cNvPr>
           <p:cNvSpPr/>
-          <p:nvPr>
-            <a:hlinkClick r:id="rId2"/>
-          </p:nvPr>
+          <p:nvPr/>
         </p:nvSpPr>
         <p:spPr>
           <a:xfrm>
@@ -3281,7 +4744,7 @@
                   <a:srgbClr val="1F3A5F"/>
                 </a:solidFill>
               </a:rPr>
-              <a:t>Gram 1: FR Outrider, Category 4, Tantive</a:t>
+              <a:t>Gram 20: FR Defiant-class, Category 2, Cardassia</a:t>
             </a:r>
           </a:p>
         </p:txBody>
@@ -3335,11 +4798,11 @@
       </p:sp>
       <p:sp>
         <p:nvSpPr>
-          <p:cNvPr id="5" name="Rounded Rectangle 4"/>
+          <p:cNvPr id="5" name="Rounded Rectangle 4">
+            <a:hlinkClick r:id="rId6"/>
+          </p:cNvPr>
           <p:cNvSpPr/>
-          <p:nvPr>
-            <a:hlinkClick r:id="rId6"/>
-          </p:nvPr>
+          <p:nvPr/>
         </p:nvSpPr>
         <p:spPr>
           <a:xfrm>
@@ -3383,7 +4846,7 @@
                   <a:srgbClr val="1F3A5F"/>
                 </a:solidFill>
               </a:rPr>
-              <a:t>Gram 2: FR Millennium Falcon, Category 1, Hoth</a:t>
+              <a:t>Gram 21: FR Outrider, Category 1, Naboo</a:t>
             </a:r>
           </a:p>
         </p:txBody>
@@ -3425,15 +4888,23 @@
               <a:t>Lofar 2</a:t>
             </a:r>
           </a:p>
-        </p:txBody>
-      </p:sp>
-      <p:sp>
-        <p:nvSpPr>
-          <p:cNvPr id="7" name="Rounded Rectangle 6"/>
+          <a:p>
+            <a:r>
+              <a:rPr sz="800">
+                <a:hlinkClick r:id="rId9"/>
+              </a:rPr>
+              <a:t>Lofar 3</a:t>
+            </a:r>
+          </a:p>
+        </p:txBody>
+      </p:sp>
+      <p:sp>
+        <p:nvSpPr>
+          <p:cNvPr id="7" name="Rounded Rectangle 6">
+            <a:hlinkClick r:id="rId10"/>
+          </p:cNvPr>
           <p:cNvSpPr/>
-          <p:nvPr>
-            <a:hlinkClick r:id="rId9"/>
-          </p:nvPr>
+          <p:nvPr/>
         </p:nvSpPr>
         <p:spPr>
           <a:xfrm>
@@ -3477,7 +4948,7 @@
                   <a:srgbClr val="1F3A5F"/>
                 </a:solidFill>
               </a:rPr>
-              <a:t>Gram 3: Intrepid-class contact bearing 281, codename Dagobah</a:t>
+              <a:t>Gram 23: Star Destroyer contact bearing 214, codename Mustafar</a:t>
             </a:r>
           </a:p>
         </p:txBody>
@@ -3506,7 +4977,7 @@
           <a:p>
             <a:r>
               <a:rPr sz="800">
-                <a:hlinkClick r:id="rId10"/>
+                <a:hlinkClick r:id="rId11"/>
               </a:rPr>
               <a:t>Lofar 1</a:t>
             </a:r>
@@ -3514,7 +4985,7 @@
           <a:p>
             <a:r>
               <a:rPr sz="800">
-                <a:hlinkClick r:id="rId11"/>
+                <a:hlinkClick r:id="rId12"/>
               </a:rPr>
               <a:t>Lofar 2</a:t>
             </a:r>
@@ -3522,7 +4993,7 @@
           <a:p>
             <a:r>
               <a:rPr sz="800">
-                <a:hlinkClick r:id="rId12"/>
+                <a:hlinkClick r:id="rId13"/>
               </a:rPr>
               <a:t>Lofar 3</a:t>
             </a:r>
@@ -3531,11 +5002,11 @@
       </p:sp>
       <p:sp>
         <p:nvSpPr>
-          <p:cNvPr id="9" name="Rounded Rectangle 8"/>
+          <p:cNvPr id="9" name="Rounded Rectangle 8">
+            <a:hlinkClick r:id="rId14"/>
+          </p:cNvPr>
           <p:cNvSpPr/>
-          <p:nvPr>
-            <a:hlinkClick r:id="rId13"/>
-          </p:nvPr>
+          <p:nvPr/>
         </p:nvSpPr>
         <p:spPr>
           <a:xfrm>
@@ -3579,7 +5050,7 @@
                   <a:srgbClr val="1F3A5F"/>
                 </a:solidFill>
               </a:rPr>
-              <a:t>Gram 6: TIE Bomber contact bearing 018, codename Dank</a:t>
+              <a:t>Gram 24: Corellian Corvette contact bearing 131, codename Caprica</a:t>
             </a:r>
           </a:p>
         </p:txBody>
@@ -3608,7 +5079,7 @@
           <a:p>
             <a:r>
               <a:rPr sz="800">
-                <a:hlinkClick r:id="rId14"/>
+                <a:hlinkClick r:id="rId15"/>
               </a:rPr>
               <a:t>Lofar 1</a:t>
             </a:r>
@@ -3616,7 +5087,7 @@
           <a:p>
             <a:r>
               <a:rPr sz="800">
-                <a:hlinkClick r:id="rId15"/>
+                <a:hlinkClick r:id="rId16"/>
               </a:rPr>
               <a:t>Lofar 2</a:t>
             </a:r>
@@ -3624,7 +5095,7 @@
           <a:p>
             <a:r>
               <a:rPr sz="800">
-                <a:hlinkClick r:id="rId16"/>
+                <a:hlinkClick r:id="rId17"/>
               </a:rPr>
               <a:t>Lofar 3</a:t>
             </a:r>
@@ -3633,11 +5104,11 @@
       </p:sp>
       <p:sp>
         <p:nvSpPr>
-          <p:cNvPr id="11" name="Rounded Rectangle 10"/>
+          <p:cNvPr id="11" name="Rounded Rectangle 10">
+            <a:hlinkClick r:id="rId18"/>
+          </p:cNvPr>
           <p:cNvSpPr/>
-          <p:nvPr>
-            <a:hlinkClick r:id="rId17"/>
-          </p:nvPr>
+          <p:nvPr/>
         </p:nvSpPr>
         <p:spPr>
           <a:xfrm>
@@ -3681,7 +5152,7 @@
                   <a:srgbClr val="1F3A5F"/>
                 </a:solidFill>
               </a:rPr>
-              <a:t>Gram 7: FR Outrider, Category 1, Romulus</a:t>
+              <a:t>Gram 25: FR Akira-class, Category 2, Risa</a:t>
             </a:r>
           </a:p>
         </p:txBody>
@@ -3710,44 +5181,20 @@
           <a:p>
             <a:r>
               <a:rPr sz="800">
-                <a:hlinkClick r:id="rId18"/>
+                <a:hlinkClick r:id="rId19"/>
               </a:rPr>
               <a:t>Lofar 1</a:t>
             </a:r>
           </a:p>
-          <a:p>
-            <a:r>
-              <a:rPr sz="800">
-                <a:hlinkClick r:id="rId19"/>
-              </a:rPr>
-              <a:t>Lofar 2</a:t>
-            </a:r>
-          </a:p>
-          <a:p>
-            <a:r>
-              <a:rPr sz="800">
-                <a:hlinkClick r:id="rId20"/>
-              </a:rPr>
-              <a:t>Lofar 3</a:t>
-            </a:r>
-          </a:p>
-          <a:p>
-            <a:r>
-              <a:rPr sz="800">
-                <a:hlinkClick r:id="rId21"/>
-              </a:rPr>
-              <a:t>Lofar 4</a:t>
-            </a:r>
-          </a:p>
-        </p:txBody>
-      </p:sp>
-      <p:sp>
-        <p:nvSpPr>
-          <p:cNvPr id="13" name="Rounded Rectangle 12"/>
+        </p:txBody>
+      </p:sp>
+      <p:sp>
+        <p:nvSpPr>
+          <p:cNvPr id="13" name="Rounded Rectangle 12">
+            <a:hlinkClick r:id="rId20"/>
+          </p:cNvPr>
           <p:cNvSpPr/>
-          <p:nvPr>
-            <a:hlinkClick r:id="rId22"/>
-          </p:nvPr>
+          <p:nvPr/>
         </p:nvSpPr>
         <p:spPr>
           <a:xfrm>
@@ -3791,7 +5238,7 @@
                   <a:srgbClr val="1F3A5F"/>
                 </a:solidFill>
               </a:rPr>
-              <a:t>Gram 9: B-wing contact bearing 007, codename Bespin</a:t>
+              <a:t>Gram 26: FR Intrepid-class, Category 4, Kronos</a:t>
             </a:r>
           </a:p>
         </p:txBody>
@@ -3820,7 +5267,7 @@
           <a:p>
             <a:r>
               <a:rPr sz="800">
-                <a:hlinkClick r:id="rId23"/>
+                <a:hlinkClick r:id="rId21"/>
               </a:rPr>
               <a:t>Lofar 1</a:t>
             </a:r>
@@ -3828,7 +5275,7 @@
           <a:p>
             <a:r>
               <a:rPr sz="800">
-                <a:hlinkClick r:id="rId24"/>
+                <a:hlinkClick r:id="rId22"/>
               </a:rPr>
               <a:t>Lofar 2</a:t>
             </a:r>
@@ -3837,11 +5284,11 @@
       </p:sp>
       <p:sp>
         <p:nvSpPr>
-          <p:cNvPr id="15" name="Rounded Rectangle 14"/>
+          <p:cNvPr id="15" name="Rounded Rectangle 14">
+            <a:hlinkClick r:id="rId23"/>
+          </p:cNvPr>
           <p:cNvSpPr/>
-          <p:nvPr>
-            <a:hlinkClick r:id="rId25"/>
-          </p:nvPr>
+          <p:nvPr/>
         </p:nvSpPr>
         <p:spPr>
           <a:xfrm>
@@ -3885,7 +5332,7 @@
                   <a:srgbClr val="1F3A5F"/>
                 </a:solidFill>
               </a:rPr>
-              <a:t>Gram 10: FR Razor Crest, Category 3, Romulus</a:t>
+              <a:t>Gram 27: Slave I contact bearing 006, codename Risa</a:t>
             </a:r>
           </a:p>
         </p:txBody>
@@ -3914,20 +5361,36 @@
           <a:p>
             <a:r>
               <a:rPr sz="800">
+                <a:hlinkClick r:id="rId24"/>
+              </a:rPr>
+              <a:t>Lofar 1</a:t>
+            </a:r>
+          </a:p>
+          <a:p>
+            <a:r>
+              <a:rPr sz="800">
+                <a:hlinkClick r:id="rId25"/>
+              </a:rPr>
+              <a:t>Lofar 2</a:t>
+            </a:r>
+          </a:p>
+          <a:p>
+            <a:r>
+              <a:rPr sz="800">
                 <a:hlinkClick r:id="rId26"/>
               </a:rPr>
-              <a:t>Lofar 1</a:t>
-            </a:r>
-          </a:p>
-        </p:txBody>
-      </p:sp>
-      <p:sp>
-        <p:nvSpPr>
-          <p:cNvPr id="17" name="Rounded Rectangle 16"/>
+              <a:t>Lofar 3</a:t>
+            </a:r>
+          </a:p>
+        </p:txBody>
+      </p:sp>
+      <p:sp>
+        <p:nvSpPr>
+          <p:cNvPr id="17" name="Rounded Rectangle 16">
+            <a:hlinkClick r:id="rId27"/>
+          </p:cNvPr>
           <p:cNvSpPr/>
-          <p:nvPr>
-            <a:hlinkClick r:id="rId27"/>
-          </p:nvPr>
+          <p:nvPr/>
         </p:nvSpPr>
         <p:spPr>
           <a:xfrm>
@@ -3971,7 +5434,7 @@
                   <a:srgbClr val="1F3A5F"/>
                 </a:solidFill>
               </a:rPr>
-              <a:t>Gram 11: FR Constitution-class, Category 1, Defiant</a:t>
+              <a:t>Gram 28: FR Nebula-class, Category 3, Coruscant</a:t>
             </a:r>
           </a:p>
         </p:txBody>
@@ -4033,11 +5496,11 @@
       </p:sp>
       <p:sp>
         <p:nvSpPr>
-          <p:cNvPr id="19" name="Rounded Rectangle 18"/>
+          <p:cNvPr id="19" name="Rounded Rectangle 18">
+            <a:hlinkClick r:id="rId32"/>
+          </p:cNvPr>
           <p:cNvSpPr/>
-          <p:nvPr>
-            <a:hlinkClick r:id="rId32"/>
-          </p:nvPr>
+          <p:nvPr/>
         </p:nvSpPr>
         <p:spPr>
           <a:xfrm>
@@ -4081,7 +5544,7 @@
                   <a:srgbClr val="1F3A5F"/>
                 </a:solidFill>
               </a:rPr>
-              <a:t>Gram 13: FR Equinox, Category 4, Naboo</a:t>
+              <a:t>Gram 29: FR Reliant, Category 2, Kobol</a:t>
             </a:r>
           </a:p>
         </p:txBody>
@@ -4119,11 +5582,11 @@
       </p:sp>
       <p:sp>
         <p:nvSpPr>
-          <p:cNvPr id="21" name="Rounded Rectangle 20"/>
+          <p:cNvPr id="21" name="Rounded Rectangle 20">
+            <a:hlinkClick r:id="rId34"/>
+          </p:cNvPr>
           <p:cNvSpPr/>
-          <p:nvPr>
-            <a:hlinkClick r:id="rId34"/>
-          </p:nvPr>
+          <p:nvPr/>
         </p:nvSpPr>
         <p:spPr>
           <a:xfrm>
@@ -4167,7 +5630,7 @@
                   <a:srgbClr val="1F3A5F"/>
                 </a:solidFill>
               </a:rPr>
-              <a:t>Gram 14: FR A-wing, Category 2, Tatooine</a:t>
+              <a:t>Gram 30: FR Corellian Corvette, Category 1, Dank</a:t>
             </a:r>
           </a:p>
         </p:txBody>
@@ -4229,11 +5692,11 @@
       </p:sp>
       <p:sp>
         <p:nvSpPr>
-          <p:cNvPr id="23" name="Rounded Rectangle 22"/>
+          <p:cNvPr id="23" name="Rounded Rectangle 22">
+            <a:hlinkClick r:id="rId39"/>
+          </p:cNvPr>
           <p:cNvSpPr/>
-          <p:nvPr>
-            <a:hlinkClick r:id="rId39"/>
-          </p:nvPr>
+          <p:nvPr/>
         </p:nvSpPr>
         <p:spPr>
           <a:xfrm>
@@ -4277,7 +5740,7 @@
                   <a:srgbClr val="1F3A5F"/>
                 </a:solidFill>
               </a:rPr>
-              <a:t>Gram 15: FR B-wing, Category 1, Mustafar</a:t>
+              <a:t>Gram 31: A-wing contact bearing 298, codename Dank</a:t>
             </a:r>
           </a:p>
         </p:txBody>
@@ -4311,39 +5774,15 @@
               <a:t>Lofar 1</a:t>
             </a:r>
           </a:p>
-          <a:p>
-            <a:r>
-              <a:rPr sz="800">
-                <a:hlinkClick r:id="rId41"/>
-              </a:rPr>
-              <a:t>Lofar 2</a:t>
-            </a:r>
-          </a:p>
-          <a:p>
-            <a:r>
-              <a:rPr sz="800">
-                <a:hlinkClick r:id="rId42"/>
-              </a:rPr>
-              <a:t>Lofar 3</a:t>
-            </a:r>
-          </a:p>
-          <a:p>
-            <a:r>
-              <a:rPr sz="800">
-                <a:hlinkClick r:id="rId43"/>
-              </a:rPr>
-              <a:t>Lofar 4</a:t>
-            </a:r>
-          </a:p>
-        </p:txBody>
-      </p:sp>
-      <p:sp>
-        <p:nvSpPr>
-          <p:cNvPr id="25" name="Rounded Rectangle 24"/>
+        </p:txBody>
+      </p:sp>
+      <p:sp>
+        <p:nvSpPr>
+          <p:cNvPr id="25" name="Rounded Rectangle 24">
+            <a:hlinkClick r:id="rId41"/>
+          </p:cNvPr>
           <p:cNvSpPr/>
-          <p:nvPr>
-            <a:hlinkClick r:id="rId44"/>
-          </p:nvPr>
+          <p:nvPr/>
         </p:nvSpPr>
         <p:spPr>
           <a:xfrm>
@@ -4387,7 +5826,7 @@
                   <a:srgbClr val="1F3A5F"/>
                 </a:solidFill>
               </a:rPr>
-              <a:t>Gram 16: FR Equinox, Category 1, Kobol</a:t>
+              <a:t>Gram 32: FR Ghost, Category 1, Dank</a:t>
             </a:r>
           </a:p>
         </p:txBody>
@@ -4416,7 +5855,7 @@
           <a:p>
             <a:r>
               <a:rPr sz="800">
-                <a:hlinkClick r:id="rId45"/>
+                <a:hlinkClick r:id="rId42"/>
               </a:rPr>
               <a:t>Lofar 1</a:t>
             </a:r>
@@ -4424,20 +5863,28 @@
           <a:p>
             <a:r>
               <a:rPr sz="800">
-                <a:hlinkClick r:id="rId46"/>
+                <a:hlinkClick r:id="rId43"/>
               </a:rPr>
               <a:t>Lofar 2</a:t>
             </a:r>
           </a:p>
-        </p:txBody>
-      </p:sp>
-      <p:sp>
-        <p:nvSpPr>
-          <p:cNvPr id="27" name="Rounded Rectangle 26"/>
+          <a:p>
+            <a:r>
+              <a:rPr sz="800">
+                <a:hlinkClick r:id="rId44"/>
+              </a:rPr>
+              <a:t>Lofar 3</a:t>
+            </a:r>
+          </a:p>
+        </p:txBody>
+      </p:sp>
+      <p:sp>
+        <p:nvSpPr>
+          <p:cNvPr id="27" name="Rounded Rectangle 26">
+            <a:hlinkClick r:id="rId45"/>
+          </p:cNvPr>
           <p:cNvSpPr/>
-          <p:nvPr>
-            <a:hlinkClick r:id="rId47"/>
-          </p:nvPr>
+          <p:nvPr/>
         </p:nvSpPr>
         <p:spPr>
           <a:xfrm>
@@ -4481,7 +5928,7 @@
                   <a:srgbClr val="1F3A5F"/>
                 </a:solidFill>
               </a:rPr>
-              <a:t>Gram 17: Acclamator-class contact bearing 199, codename Vulcan</a:t>
+              <a:t>Gram 33: FR Nebulon-B, Category 2, Mustafar</a:t>
             </a:r>
           </a:p>
         </p:txBody>
@@ -4510,28 +5957,36 @@
           <a:p>
             <a:r>
               <a:rPr sz="800">
+                <a:hlinkClick r:id="rId46"/>
+              </a:rPr>
+              <a:t>Lofar 1</a:t>
+            </a:r>
+          </a:p>
+          <a:p>
+            <a:r>
+              <a:rPr sz="800">
+                <a:hlinkClick r:id="rId47"/>
+              </a:rPr>
+              <a:t>Lofar 2</a:t>
+            </a:r>
+          </a:p>
+          <a:p>
+            <a:r>
+              <a:rPr sz="800">
                 <a:hlinkClick r:id="rId48"/>
               </a:rPr>
-              <a:t>Lofar 1</a:t>
-            </a:r>
-          </a:p>
-          <a:p>
-            <a:r>
-              <a:rPr sz="800">
-                <a:hlinkClick r:id="rId49"/>
-              </a:rPr>
-              <a:t>Lofar 2</a:t>
-            </a:r>
-          </a:p>
-        </p:txBody>
-      </p:sp>
-      <p:sp>
-        <p:nvSpPr>
-          <p:cNvPr id="29" name="Rounded Rectangle 28"/>
+              <a:t>Lofar 3</a:t>
+            </a:r>
+          </a:p>
+        </p:txBody>
+      </p:sp>
+      <p:sp>
+        <p:nvSpPr>
+          <p:cNvPr id="29" name="Rounded Rectangle 28">
+            <a:hlinkClick r:id="rId49"/>
+          </p:cNvPr>
           <p:cNvSpPr/>
-          <p:nvPr>
-            <a:hlinkClick r:id="rId50"/>
-          </p:nvPr>
+          <p:nvPr/>
         </p:nvSpPr>
         <p:spPr>
           <a:xfrm>
@@ -4575,7 +6030,7 @@
                   <a:srgbClr val="1F3A5F"/>
                 </a:solidFill>
               </a:rPr>
-              <a:t>Gram 18: Enterprise contact bearing 015, codename Betazed</a:t>
+              <a:t>Gram 34: FR Discovery, Category 3, Dank</a:t>
             </a:r>
           </a:p>
         </p:txBody>
@@ -4604,7 +6059,7 @@
           <a:p>
             <a:r>
               <a:rPr sz="800">
-                <a:hlinkClick r:id="rId51"/>
+                <a:hlinkClick r:id="rId50"/>
               </a:rPr>
               <a:t>Lofar 1</a:t>
             </a:r>
@@ -4613,11 +6068,11 @@
       </p:sp>
       <p:sp>
         <p:nvSpPr>
-          <p:cNvPr id="31" name="Rounded Rectangle 30"/>
+          <p:cNvPr id="31" name="Rounded Rectangle 30">
+            <a:hlinkClick r:id="rId51"/>
+          </p:cNvPr>
           <p:cNvSpPr/>
-          <p:nvPr>
-            <a:hlinkClick r:id="rId52"/>
-          </p:nvPr>
+          <p:nvPr/>
         </p:nvSpPr>
         <p:spPr>
           <a:xfrm>
@@ -4661,7 +6116,7 @@
                   <a:srgbClr val="1F3A5F"/>
                 </a:solidFill>
               </a:rPr>
-              <a:t>Gram 19: FR Rebel One, Category 1, Tatooine</a:t>
+              <a:t>Gram 35: FR Cerritos, Category 3, Naboo</a:t>
             </a:r>
           </a:p>
         </p:txBody>
@@ -4690,23 +6145,23 @@
           <a:p>
             <a:r>
               <a:rPr sz="800">
+                <a:hlinkClick r:id="rId52"/>
+              </a:rPr>
+              <a:t>Lofar 1</a:t>
+            </a:r>
+          </a:p>
+          <a:p>
+            <a:r>
+              <a:rPr sz="800">
                 <a:hlinkClick r:id="rId53"/>
               </a:rPr>
-              <a:t>Lofar 1</a:t>
+              <a:t>Lofar 2</a:t>
             </a:r>
           </a:p>
           <a:p>
             <a:r>
               <a:rPr sz="800">
                 <a:hlinkClick r:id="rId54"/>
-              </a:rPr>
-              <a:t>Lofar 2</a:t>
-            </a:r>
-          </a:p>
-          <a:p>
-            <a:r>
-              <a:rPr sz="800">
-                <a:hlinkClick r:id="rId55"/>
               </a:rPr>
               <a:t>Lofar 3</a:t>
             </a:r>
@@ -4777,18 +6232,18 @@
                   <a:srgbClr val="FFFFFF"/>
                 </a:solidFill>
               </a:rPr>
-              <a:t>Instructor Pub10_Ed22B_Updated — Page 2 of 5</a:t>
-            </a:r>
-          </a:p>
-        </p:txBody>
-      </p:sp>
-      <p:sp>
-        <p:nvSpPr>
-          <p:cNvPr id="3" name="Rounded Rectangle 2"/>
+              <a:t>Instructor Pub10_Ed22B_Updated — Page 3 of 5</a:t>
+            </a:r>
+          </a:p>
+        </p:txBody>
+      </p:sp>
+      <p:sp>
+        <p:nvSpPr>
+          <p:cNvPr id="3" name="Rounded Rectangle 2">
+            <a:hlinkClick r:id="rId2"/>
+          </p:cNvPr>
           <p:cNvSpPr/>
-          <p:nvPr>
-            <a:hlinkClick r:id="rId2"/>
-          </p:nvPr>
+          <p:nvPr/>
         </p:nvSpPr>
         <p:spPr>
           <a:xfrm>
@@ -4832,7 +6287,7 @@
                   <a:srgbClr val="1F3A5F"/>
                 </a:solidFill>
               </a:rPr>
-              <a:t>Gram 20: FR Defiant-class, Category 2, Cardassia</a:t>
+              <a:t>Gram 37: FR Discovery, Category 1, Gandalf</a:t>
             </a:r>
           </a:p>
         </p:txBody>
@@ -4886,11 +6341,11 @@
       </p:sp>
       <p:sp>
         <p:nvSpPr>
-          <p:cNvPr id="5" name="Rounded Rectangle 4"/>
+          <p:cNvPr id="5" name="Rounded Rectangle 4">
+            <a:hlinkClick r:id="rId6"/>
+          </p:cNvPr>
           <p:cNvSpPr/>
-          <p:nvPr>
-            <a:hlinkClick r:id="rId6"/>
-          </p:nvPr>
+          <p:nvPr/>
         </p:nvSpPr>
         <p:spPr>
           <a:xfrm>
@@ -4934,7 +6389,7 @@
                   <a:srgbClr val="1F3A5F"/>
                 </a:solidFill>
               </a:rPr>
-              <a:t>Gram 21: FR Outrider, Category 1, Naboo</a:t>
+              <a:t>Gram 39: FR Defiant-class, Category 1, Coruscant</a:t>
             </a:r>
           </a:p>
         </p:txBody>
@@ -4976,23 +6431,15 @@
               <a:t>Lofar 2</a:t>
             </a:r>
           </a:p>
-          <a:p>
-            <a:r>
-              <a:rPr sz="800">
-                <a:hlinkClick r:id="rId9"/>
-              </a:rPr>
-              <a:t>Lofar 3</a:t>
-            </a:r>
-          </a:p>
-        </p:txBody>
-      </p:sp>
-      <p:sp>
-        <p:nvSpPr>
-          <p:cNvPr id="7" name="Rounded Rectangle 6"/>
+        </p:txBody>
+      </p:sp>
+      <p:sp>
+        <p:nvSpPr>
+          <p:cNvPr id="7" name="Rounded Rectangle 6">
+            <a:hlinkClick r:id="rId9"/>
+          </p:cNvPr>
           <p:cNvSpPr/>
-          <p:nvPr>
-            <a:hlinkClick r:id="rId10"/>
-          </p:nvPr>
+          <p:nvPr/>
         </p:nvSpPr>
         <p:spPr>
           <a:xfrm>
@@ -5036,7 +6483,7 @@
                   <a:srgbClr val="1F3A5F"/>
                 </a:solidFill>
               </a:rPr>
-              <a:t>Gram 23: Star Destroyer contact bearing 214, codename Mustafar</a:t>
+              <a:t>Gram 40: FR Outrider, Category 1, Hoth</a:t>
             </a:r>
           </a:p>
         </p:txBody>
@@ -5065,36 +6512,28 @@
           <a:p>
             <a:r>
               <a:rPr sz="800">
+                <a:hlinkClick r:id="rId10"/>
+              </a:rPr>
+              <a:t>Lofar 1</a:t>
+            </a:r>
+          </a:p>
+          <a:p>
+            <a:r>
+              <a:rPr sz="800">
                 <a:hlinkClick r:id="rId11"/>
               </a:rPr>
-              <a:t>Lofar 1</a:t>
-            </a:r>
-          </a:p>
-          <a:p>
-            <a:r>
-              <a:rPr sz="800">
-                <a:hlinkClick r:id="rId12"/>
-              </a:rPr>
               <a:t>Lofar 2</a:t>
             </a:r>
           </a:p>
-          <a:p>
-            <a:r>
-              <a:rPr sz="800">
-                <a:hlinkClick r:id="rId13"/>
-              </a:rPr>
-              <a:t>Lofar 3</a:t>
-            </a:r>
-          </a:p>
-        </p:txBody>
-      </p:sp>
-      <p:sp>
-        <p:nvSpPr>
-          <p:cNvPr id="9" name="Rounded Rectangle 8"/>
+        </p:txBody>
+      </p:sp>
+      <p:sp>
+        <p:nvSpPr>
+          <p:cNvPr id="9" name="Rounded Rectangle 8">
+            <a:hlinkClick r:id="rId12"/>
+          </p:cNvPr>
           <p:cNvSpPr/>
-          <p:nvPr>
-            <a:hlinkClick r:id="rId14"/>
-          </p:nvPr>
+          <p:nvPr/>
         </p:nvSpPr>
         <p:spPr>
           <a:xfrm>
@@ -5138,7 +6577,7 @@
                   <a:srgbClr val="1F3A5F"/>
                 </a:solidFill>
               </a:rPr>
-              <a:t>Gram 24: Corellian Corvette contact bearing 131, codename Caprica</a:t>
+              <a:t>Gram 43: Nebulon-B contact bearing 034, codename Kronos</a:t>
             </a:r>
           </a:p>
         </p:txBody>
@@ -5167,24 +6606,24 @@
           <a:p>
             <a:r>
               <a:rPr sz="800">
+                <a:hlinkClick r:id="rId13"/>
+              </a:rPr>
+              <a:t>Lofar 1</a:t>
+            </a:r>
+          </a:p>
+          <a:p>
+            <a:r>
+              <a:rPr sz="800">
+                <a:hlinkClick r:id="rId14"/>
+              </a:rPr>
+              <a:t>Lofar 2</a:t>
+            </a:r>
+          </a:p>
+          <a:p>
+            <a:r>
+              <a:rPr sz="800">
                 <a:hlinkClick r:id="rId15"/>
               </a:rPr>
-              <a:t>Lofar 1</a:t>
-            </a:r>
-          </a:p>
-          <a:p>
-            <a:r>
-              <a:rPr sz="800">
-                <a:hlinkClick r:id="rId16"/>
-              </a:rPr>
-              <a:t>Lofar 2</a:t>
-            </a:r>
-          </a:p>
-          <a:p>
-            <a:r>
-              <a:rPr sz="800">
-                <a:hlinkClick r:id="rId17"/>
-              </a:rPr>
               <a:t>Lofar 3</a:t>
             </a:r>
           </a:p>
@@ -5192,11 +6631,11 @@
       </p:sp>
       <p:sp>
         <p:nvSpPr>
-          <p:cNvPr id="11" name="Rounded Rectangle 10"/>
+          <p:cNvPr id="11" name="Rounded Rectangle 10">
+            <a:hlinkClick r:id="rId16"/>
+          </p:cNvPr>
           <p:cNvSpPr/>
-          <p:nvPr>
-            <a:hlinkClick r:id="rId18"/>
-          </p:nvPr>
+          <p:nvPr/>
         </p:nvSpPr>
         <p:spPr>
           <a:xfrm>
@@ -5240,7 +6679,7 @@
                   <a:srgbClr val="1F3A5F"/>
                 </a:solidFill>
               </a:rPr>
-              <a:t>Gram 25: FR Akira-class, Category 2, Risa</a:t>
+              <a:t>Gram 44: FR X-wing, Category 4, Vulcan</a:t>
             </a:r>
           </a:p>
         </p:txBody>
@@ -5269,20 +6708,36 @@
           <a:p>
             <a:r>
               <a:rPr sz="800">
+                <a:hlinkClick r:id="rId17"/>
+              </a:rPr>
+              <a:t>Lofar 1</a:t>
+            </a:r>
+          </a:p>
+          <a:p>
+            <a:r>
+              <a:rPr sz="800">
+                <a:hlinkClick r:id="rId18"/>
+              </a:rPr>
+              <a:t>Lofar 2</a:t>
+            </a:r>
+          </a:p>
+          <a:p>
+            <a:r>
+              <a:rPr sz="800">
                 <a:hlinkClick r:id="rId19"/>
               </a:rPr>
-              <a:t>Lofar 1</a:t>
-            </a:r>
-          </a:p>
-        </p:txBody>
-      </p:sp>
-      <p:sp>
-        <p:nvSpPr>
-          <p:cNvPr id="13" name="Rounded Rectangle 12"/>
+              <a:t>Lofar 3</a:t>
+            </a:r>
+          </a:p>
+        </p:txBody>
+      </p:sp>
+      <p:sp>
+        <p:nvSpPr>
+          <p:cNvPr id="13" name="Rounded Rectangle 12">
+            <a:hlinkClick r:id="rId20"/>
+          </p:cNvPr>
           <p:cNvSpPr/>
-          <p:nvPr>
-            <a:hlinkClick r:id="rId20"/>
-          </p:nvPr>
+          <p:nvPr/>
         </p:nvSpPr>
         <p:spPr>
           <a:xfrm>
@@ -5326,7 +6781,7 @@
                   <a:srgbClr val="1F3A5F"/>
                 </a:solidFill>
               </a:rPr>
-              <a:t>Gram 26: FR Intrepid-class, Category 4, Kronos</a:t>
+              <a:t>Gram 46: FR Lambda Shuttle, Category 2, Endor</a:t>
             </a:r>
           </a:p>
         </p:txBody>
@@ -5360,23 +6815,15 @@
               <a:t>Lofar 1</a:t>
             </a:r>
           </a:p>
-          <a:p>
-            <a:r>
-              <a:rPr sz="800">
-                <a:hlinkClick r:id="rId22"/>
-              </a:rPr>
-              <a:t>Lofar 2</a:t>
-            </a:r>
-          </a:p>
-        </p:txBody>
-      </p:sp>
-      <p:sp>
-        <p:nvSpPr>
-          <p:cNvPr id="15" name="Rounded Rectangle 14"/>
+        </p:txBody>
+      </p:sp>
+      <p:sp>
+        <p:nvSpPr>
+          <p:cNvPr id="15" name="Rounded Rectangle 14">
+            <a:hlinkClick r:id="rId22"/>
+          </p:cNvPr>
           <p:cNvSpPr/>
-          <p:nvPr>
-            <a:hlinkClick r:id="rId23"/>
-          </p:nvPr>
+          <p:nvPr/>
         </p:nvSpPr>
         <p:spPr>
           <a:xfrm>
@@ -5420,7 +6867,7 @@
                   <a:srgbClr val="1F3A5F"/>
                 </a:solidFill>
               </a:rPr>
-              <a:t>Gram 27: Slave I contact bearing 006, codename Risa</a:t>
+              <a:t>Gram 47: Intrepid-class contact bearing 304, codename Hoth</a:t>
             </a:r>
           </a:p>
         </p:txBody>
@@ -5449,36 +6896,28 @@
           <a:p>
             <a:r>
               <a:rPr sz="800">
+                <a:hlinkClick r:id="rId23"/>
+              </a:rPr>
+              <a:t>Lofar 1</a:t>
+            </a:r>
+          </a:p>
+          <a:p>
+            <a:r>
+              <a:rPr sz="800">
                 <a:hlinkClick r:id="rId24"/>
               </a:rPr>
-              <a:t>Lofar 1</a:t>
-            </a:r>
-          </a:p>
-          <a:p>
-            <a:r>
-              <a:rPr sz="800">
-                <a:hlinkClick r:id="rId25"/>
-              </a:rPr>
               <a:t>Lofar 2</a:t>
             </a:r>
           </a:p>
-          <a:p>
-            <a:r>
-              <a:rPr sz="800">
-                <a:hlinkClick r:id="rId26"/>
-              </a:rPr>
-              <a:t>Lofar 3</a:t>
-            </a:r>
-          </a:p>
-        </p:txBody>
-      </p:sp>
-      <p:sp>
-        <p:nvSpPr>
-          <p:cNvPr id="17" name="Rounded Rectangle 16"/>
+        </p:txBody>
+      </p:sp>
+      <p:sp>
+        <p:nvSpPr>
+          <p:cNvPr id="17" name="Rounded Rectangle 16">
+            <a:hlinkClick r:id="rId25"/>
+          </p:cNvPr>
           <p:cNvSpPr/>
-          <p:nvPr>
-            <a:hlinkClick r:id="rId27"/>
-          </p:nvPr>
+          <p:nvPr/>
         </p:nvSpPr>
         <p:spPr>
           <a:xfrm>
@@ -5522,7 +6961,7 @@
                   <a:srgbClr val="1F3A5F"/>
                 </a:solidFill>
               </a:rPr>
-              <a:t>Gram 28: FR Nebula-class, Category 3, Coruscant</a:t>
+              <a:t>Gram 48: FR Nebula-class, Category 2, Romulus</a:t>
             </a:r>
           </a:p>
         </p:txBody>
@@ -5551,44 +6990,20 @@
           <a:p>
             <a:r>
               <a:rPr sz="800">
-                <a:hlinkClick r:id="rId28"/>
+                <a:hlinkClick r:id="rId26"/>
               </a:rPr>
               <a:t>Lofar 1</a:t>
             </a:r>
           </a:p>
-          <a:p>
-            <a:r>
-              <a:rPr sz="800">
-                <a:hlinkClick r:id="rId29"/>
-              </a:rPr>
-              <a:t>Lofar 2</a:t>
-            </a:r>
-          </a:p>
-          <a:p>
-            <a:r>
-              <a:rPr sz="800">
-                <a:hlinkClick r:id="rId30"/>
-              </a:rPr>
-              <a:t>Lofar 3</a:t>
-            </a:r>
-          </a:p>
-          <a:p>
-            <a:r>
-              <a:rPr sz="800">
-                <a:hlinkClick r:id="rId31"/>
-              </a:rPr>
-              <a:t>Lofar 4</a:t>
-            </a:r>
-          </a:p>
-        </p:txBody>
-      </p:sp>
-      <p:sp>
-        <p:nvSpPr>
-          <p:cNvPr id="19" name="Rounded Rectangle 18"/>
+        </p:txBody>
+      </p:sp>
+      <p:sp>
+        <p:nvSpPr>
+          <p:cNvPr id="19" name="Rounded Rectangle 18">
+            <a:hlinkClick r:id="rId27"/>
+          </p:cNvPr>
           <p:cNvSpPr/>
-          <p:nvPr>
-            <a:hlinkClick r:id="rId32"/>
-          </p:nvPr>
+          <p:nvPr/>
         </p:nvSpPr>
         <p:spPr>
           <a:xfrm>
@@ -5632,7 +7047,7 @@
                   <a:srgbClr val="1F3A5F"/>
                 </a:solidFill>
               </a:rPr>
-              <a:t>Gram 29: FR Reliant, Category 2, Kobol</a:t>
+              <a:t>Gram 49: FR Stargazer, Category 4, Dagobah</a:t>
             </a:r>
           </a:p>
         </p:txBody>
@@ -5661,20 +7076,36 @@
           <a:p>
             <a:r>
               <a:rPr sz="800">
-                <a:hlinkClick r:id="rId33"/>
+                <a:hlinkClick r:id="rId28"/>
               </a:rPr>
               <a:t>Lofar 1</a:t>
             </a:r>
           </a:p>
-        </p:txBody>
-      </p:sp>
-      <p:sp>
-        <p:nvSpPr>
-          <p:cNvPr id="21" name="Rounded Rectangle 20"/>
+          <a:p>
+            <a:r>
+              <a:rPr sz="800">
+                <a:hlinkClick r:id="rId29"/>
+              </a:rPr>
+              <a:t>Lofar 2</a:t>
+            </a:r>
+          </a:p>
+          <a:p>
+            <a:r>
+              <a:rPr sz="800">
+                <a:hlinkClick r:id="rId30"/>
+              </a:rPr>
+              <a:t>Lofar 3</a:t>
+            </a:r>
+          </a:p>
+        </p:txBody>
+      </p:sp>
+      <p:sp>
+        <p:nvSpPr>
+          <p:cNvPr id="21" name="Rounded Rectangle 20">
+            <a:hlinkClick r:id="rId31"/>
+          </p:cNvPr>
           <p:cNvSpPr/>
-          <p:nvPr>
-            <a:hlinkClick r:id="rId34"/>
-          </p:nvPr>
+          <p:nvPr/>
         </p:nvSpPr>
         <p:spPr>
           <a:xfrm>
@@ -5718,7 +7149,7 @@
                   <a:srgbClr val="1F3A5F"/>
                 </a:solidFill>
               </a:rPr>
-              <a:t>Gram 30: FR Corellian Corvette, Category 1, Dank</a:t>
+              <a:t>Gram 50: FR Akira-class, Category 2, Coruscant</a:t>
             </a:r>
           </a:p>
         </p:txBody>
@@ -5747,7 +7178,7 @@
           <a:p>
             <a:r>
               <a:rPr sz="800">
-                <a:hlinkClick r:id="rId35"/>
+                <a:hlinkClick r:id="rId32"/>
               </a:rPr>
               <a:t>Lofar 1</a:t>
             </a:r>
@@ -5755,36 +7186,20 @@
           <a:p>
             <a:r>
               <a:rPr sz="800">
-                <a:hlinkClick r:id="rId36"/>
+                <a:hlinkClick r:id="rId33"/>
               </a:rPr>
               <a:t>Lofar 2</a:t>
             </a:r>
           </a:p>
-          <a:p>
-            <a:r>
-              <a:rPr sz="800">
-                <a:hlinkClick r:id="rId37"/>
-              </a:rPr>
-              <a:t>Lofar 3</a:t>
-            </a:r>
-          </a:p>
-          <a:p>
-            <a:r>
-              <a:rPr sz="800">
-                <a:hlinkClick r:id="rId38"/>
-              </a:rPr>
-              <a:t>Lofar 4</a:t>
-            </a:r>
-          </a:p>
-        </p:txBody>
-      </p:sp>
-      <p:sp>
-        <p:nvSpPr>
-          <p:cNvPr id="23" name="Rounded Rectangle 22"/>
+        </p:txBody>
+      </p:sp>
+      <p:sp>
+        <p:nvSpPr>
+          <p:cNvPr id="23" name="Rounded Rectangle 22">
+            <a:hlinkClick r:id="rId34"/>
+          </p:cNvPr>
           <p:cNvSpPr/>
-          <p:nvPr>
-            <a:hlinkClick r:id="rId39"/>
-          </p:nvPr>
+          <p:nvPr/>
         </p:nvSpPr>
         <p:spPr>
           <a:xfrm>
@@ -5828,7 +7243,7 @@
                   <a:srgbClr val="1F3A5F"/>
                 </a:solidFill>
               </a:rPr>
-              <a:t>Gram 31: A-wing contact bearing 298, codename Dank</a:t>
+              <a:t>Gram 51: FR Slave I, Category 2, Naboo</a:t>
             </a:r>
           </a:p>
         </p:txBody>
@@ -5857,20 +7272,28 @@
           <a:p>
             <a:r>
               <a:rPr sz="800">
-                <a:hlinkClick r:id="rId40"/>
+                <a:hlinkClick r:id="rId35"/>
               </a:rPr>
               <a:t>Lofar 1</a:t>
             </a:r>
           </a:p>
-        </p:txBody>
-      </p:sp>
-      <p:sp>
-        <p:nvSpPr>
-          <p:cNvPr id="25" name="Rounded Rectangle 24"/>
+          <a:p>
+            <a:r>
+              <a:rPr sz="800">
+                <a:hlinkClick r:id="rId36"/>
+              </a:rPr>
+              <a:t>Lofar 2</a:t>
+            </a:r>
+          </a:p>
+        </p:txBody>
+      </p:sp>
+      <p:sp>
+        <p:nvSpPr>
+          <p:cNvPr id="25" name="Rounded Rectangle 24">
+            <a:hlinkClick r:id="rId37"/>
+          </p:cNvPr>
           <p:cNvSpPr/>
-          <p:nvPr>
-            <a:hlinkClick r:id="rId41"/>
-          </p:nvPr>
+          <p:nvPr/>
         </p:nvSpPr>
         <p:spPr>
           <a:xfrm>
@@ -5914,7 +7337,7 @@
                   <a:srgbClr val="1F3A5F"/>
                 </a:solidFill>
               </a:rPr>
-              <a:t>Gram 32: FR Ghost, Category 1, Dank</a:t>
+              <a:t>Gram 52: Nebula-class contact bearing 194, codename Dagobah</a:t>
             </a:r>
           </a:p>
         </p:txBody>
@@ -5943,36 +7366,20 @@
           <a:p>
             <a:r>
               <a:rPr sz="800">
-                <a:hlinkClick r:id="rId42"/>
+                <a:hlinkClick r:id="rId38"/>
               </a:rPr>
               <a:t>Lofar 1</a:t>
             </a:r>
           </a:p>
-          <a:p>
-            <a:r>
-              <a:rPr sz="800">
-                <a:hlinkClick r:id="rId43"/>
-              </a:rPr>
-              <a:t>Lofar 2</a:t>
-            </a:r>
-          </a:p>
-          <a:p>
-            <a:r>
-              <a:rPr sz="800">
-                <a:hlinkClick r:id="rId44"/>
-              </a:rPr>
-              <a:t>Lofar 3</a:t>
-            </a:r>
-          </a:p>
-        </p:txBody>
-      </p:sp>
-      <p:sp>
-        <p:nvSpPr>
-          <p:cNvPr id="27" name="Rounded Rectangle 26"/>
+        </p:txBody>
+      </p:sp>
+      <p:sp>
+        <p:nvSpPr>
+          <p:cNvPr id="27" name="Rounded Rectangle 26">
+            <a:hlinkClick r:id="rId39"/>
+          </p:cNvPr>
           <p:cNvSpPr/>
-          <p:nvPr>
-            <a:hlinkClick r:id="rId45"/>
-          </p:nvPr>
+          <p:nvPr/>
         </p:nvSpPr>
         <p:spPr>
           <a:xfrm>
@@ -6016,7 +7423,7 @@
                   <a:srgbClr val="1F3A5F"/>
                 </a:solidFill>
               </a:rPr>
-              <a:t>Gram 33: FR Nebulon-B, Category 2, Mustafar</a:t>
+              <a:t>Gram 54: FR Cerritos, Category 3, Vulcan</a:t>
             </a:r>
           </a:p>
         </p:txBody>
@@ -6045,7 +7452,7 @@
           <a:p>
             <a:r>
               <a:rPr sz="800">
-                <a:hlinkClick r:id="rId46"/>
+                <a:hlinkClick r:id="rId40"/>
               </a:rPr>
               <a:t>Lofar 1</a:t>
             </a:r>
@@ -6053,7 +7460,7 @@
           <a:p>
             <a:r>
               <a:rPr sz="800">
-                <a:hlinkClick r:id="rId47"/>
+                <a:hlinkClick r:id="rId41"/>
               </a:rPr>
               <a:t>Lofar 2</a:t>
             </a:r>
@@ -6061,20 +7468,28 @@
           <a:p>
             <a:r>
               <a:rPr sz="800">
-                <a:hlinkClick r:id="rId48"/>
+                <a:hlinkClick r:id="rId42"/>
               </a:rPr>
               <a:t>Lofar 3</a:t>
             </a:r>
           </a:p>
-        </p:txBody>
-      </p:sp>
-      <p:sp>
-        <p:nvSpPr>
-          <p:cNvPr id="29" name="Rounded Rectangle 28"/>
+          <a:p>
+            <a:r>
+              <a:rPr sz="800">
+                <a:hlinkClick r:id="rId43"/>
+              </a:rPr>
+              <a:t>Lofar 4</a:t>
+            </a:r>
+          </a:p>
+        </p:txBody>
+      </p:sp>
+      <p:sp>
+        <p:nvSpPr>
+          <p:cNvPr id="29" name="Rounded Rectangle 28">
+            <a:hlinkClick r:id="rId44"/>
+          </p:cNvPr>
           <p:cNvSpPr/>
-          <p:nvPr>
-            <a:hlinkClick r:id="rId49"/>
-          </p:nvPr>
+          <p:nvPr/>
         </p:nvSpPr>
         <p:spPr>
           <a:xfrm>
@@ -6118,7 +7533,7 @@
                   <a:srgbClr val="1F3A5F"/>
                 </a:solidFill>
               </a:rPr>
-              <a:t>Gram 34: FR Discovery, Category 3, Dank</a:t>
+              <a:t>Gram 55: FR Akira-class, Category 3, Betazed</a:t>
             </a:r>
           </a:p>
         </p:txBody>
@@ -6147,7 +7562,7 @@
           <a:p>
             <a:r>
               <a:rPr sz="800">
-                <a:hlinkClick r:id="rId50"/>
+                <a:hlinkClick r:id="rId45"/>
               </a:rPr>
               <a:t>Lofar 1</a:t>
             </a:r>
@@ -6156,11 +7571,11 @@
       </p:sp>
       <p:sp>
         <p:nvSpPr>
-          <p:cNvPr id="31" name="Rounded Rectangle 30"/>
+          <p:cNvPr id="31" name="Rounded Rectangle 30">
+            <a:hlinkClick r:id="rId46"/>
+          </p:cNvPr>
           <p:cNvSpPr/>
-          <p:nvPr>
-            <a:hlinkClick r:id="rId51"/>
-          </p:nvPr>
+          <p:nvPr/>
         </p:nvSpPr>
         <p:spPr>
           <a:xfrm>
@@ -6204,7 +7619,7 @@
                   <a:srgbClr val="1F3A5F"/>
                 </a:solidFill>
               </a:rPr>
-              <a:t>Gram 35: FR Cerritos, Category 3, Naboo</a:t>
+              <a:t>Gram 56: FR Discovery, Category 3, Kobol</a:t>
             </a:r>
           </a:p>
         </p:txBody>
@@ -6233,7 +7648,7 @@
           <a:p>
             <a:r>
               <a:rPr sz="800">
-                <a:hlinkClick r:id="rId52"/>
+                <a:hlinkClick r:id="rId47"/>
               </a:rPr>
               <a:t>Lofar 1</a:t>
             </a:r>
@@ -6241,7 +7656,7 @@
           <a:p>
             <a:r>
               <a:rPr sz="800">
-                <a:hlinkClick r:id="rId53"/>
+                <a:hlinkClick r:id="rId48"/>
               </a:rPr>
               <a:t>Lofar 2</a:t>
             </a:r>
@@ -6249,9 +7664,17 @@
           <a:p>
             <a:r>
               <a:rPr sz="800">
-                <a:hlinkClick r:id="rId54"/>
+                <a:hlinkClick r:id="rId49"/>
               </a:rPr>
               <a:t>Lofar 3</a:t>
+            </a:r>
+          </a:p>
+          <a:p>
+            <a:r>
+              <a:rPr sz="800">
+                <a:hlinkClick r:id="rId50"/>
+              </a:rPr>
+              <a:t>Lofar 4</a:t>
             </a:r>
           </a:p>
         </p:txBody>
@@ -6320,18 +7743,18 @@
                   <a:srgbClr val="FFFFFF"/>
                 </a:solidFill>
               </a:rPr>
-              <a:t>Instructor Pub10_Ed22B_Updated — Page 3 of 5</a:t>
-            </a:r>
-          </a:p>
-        </p:txBody>
-      </p:sp>
-      <p:sp>
-        <p:nvSpPr>
-          <p:cNvPr id="3" name="Rounded Rectangle 2"/>
+              <a:t>Instructor Pub10_Ed22B_Updated — Page 4 of 5</a:t>
+            </a:r>
+          </a:p>
+        </p:txBody>
+      </p:sp>
+      <p:sp>
+        <p:nvSpPr>
+          <p:cNvPr id="3" name="Rounded Rectangle 2">
+            <a:hlinkClick r:id="rId2"/>
+          </p:cNvPr>
           <p:cNvSpPr/>
-          <p:nvPr>
-            <a:hlinkClick r:id="rId2"/>
-          </p:nvPr>
+          <p:nvPr/>
         </p:nvSpPr>
         <p:spPr>
           <a:xfrm>
@@ -6375,7 +7798,7 @@
                   <a:srgbClr val="1F3A5F"/>
                 </a:solidFill>
               </a:rPr>
-              <a:t>Gram 37: FR Discovery, Category 1, Gandalf</a:t>
+              <a:t>Gram 57: Imperial-class contact bearing 089, codename Dagobah</a:t>
             </a:r>
           </a:p>
         </p:txBody>
@@ -6429,11 +7852,11 @@
       </p:sp>
       <p:sp>
         <p:nvSpPr>
-          <p:cNvPr id="5" name="Rounded Rectangle 4"/>
+          <p:cNvPr id="5" name="Rounded Rectangle 4">
+            <a:hlinkClick r:id="rId6"/>
+          </p:cNvPr>
           <p:cNvSpPr/>
-          <p:nvPr>
-            <a:hlinkClick r:id="rId6"/>
-          </p:nvPr>
+          <p:nvPr/>
         </p:nvSpPr>
         <p:spPr>
           <a:xfrm>
@@ -6477,7 +7900,7 @@
                   <a:srgbClr val="1F3A5F"/>
                 </a:solidFill>
               </a:rPr>
-              <a:t>Gram 39: FR Defiant-class, Category 1, Coruscant</a:t>
+              <a:t>Gram 58: FR Tantive IV, Category 3, Yavin</a:t>
             </a:r>
           </a:p>
         </p:txBody>
@@ -6523,11 +7946,11 @@
       </p:sp>
       <p:sp>
         <p:nvSpPr>
-          <p:cNvPr id="7" name="Rounded Rectangle 6"/>
+          <p:cNvPr id="7" name="Rounded Rectangle 6">
+            <a:hlinkClick r:id="rId9"/>
+          </p:cNvPr>
           <p:cNvSpPr/>
-          <p:nvPr>
-            <a:hlinkClick r:id="rId9"/>
-          </p:nvPr>
+          <p:nvPr/>
         </p:nvSpPr>
         <p:spPr>
           <a:xfrm>
@@ -6571,7 +7994,7 @@
                   <a:srgbClr val="1F3A5F"/>
                 </a:solidFill>
               </a:rPr>
-              <a:t>Gram 40: FR Outrider, Category 1, Hoth</a:t>
+              <a:t>Gram 59: FR Akira-class, Category 3, Kobol</a:t>
             </a:r>
           </a:p>
         </p:txBody>
@@ -6613,15 +8036,23 @@
               <a:t>Lofar 2</a:t>
             </a:r>
           </a:p>
-        </p:txBody>
-      </p:sp>
-      <p:sp>
-        <p:nvSpPr>
-          <p:cNvPr id="9" name="Rounded Rectangle 8"/>
+          <a:p>
+            <a:r>
+              <a:rPr sz="800">
+                <a:hlinkClick r:id="rId12"/>
+              </a:rPr>
+              <a:t>Lofar 3</a:t>
+            </a:r>
+          </a:p>
+        </p:txBody>
+      </p:sp>
+      <p:sp>
+        <p:nvSpPr>
+          <p:cNvPr id="9" name="Rounded Rectangle 8">
+            <a:hlinkClick r:id="rId13"/>
+          </p:cNvPr>
           <p:cNvSpPr/>
-          <p:nvPr>
-            <a:hlinkClick r:id="rId12"/>
-          </p:nvPr>
+          <p:nvPr/>
         </p:nvSpPr>
         <p:spPr>
           <a:xfrm>
@@ -6665,7 +8096,7 @@
                   <a:srgbClr val="1F3A5F"/>
                 </a:solidFill>
               </a:rPr>
-              <a:t>Gram 43: Nebulon-B contact bearing 034, codename Kronos</a:t>
+              <a:t>Gram 60: Constitution-class contact bearing 355, codename Dank</a:t>
             </a:r>
           </a:p>
         </p:txBody>
@@ -6694,36 +8125,20 @@
           <a:p>
             <a:r>
               <a:rPr sz="800">
-                <a:hlinkClick r:id="rId13"/>
+                <a:hlinkClick r:id="rId14"/>
               </a:rPr>
               <a:t>Lofar 1</a:t>
             </a:r>
           </a:p>
-          <a:p>
-            <a:r>
-              <a:rPr sz="800">
-                <a:hlinkClick r:id="rId14"/>
-              </a:rPr>
-              <a:t>Lofar 2</a:t>
-            </a:r>
-          </a:p>
-          <a:p>
-            <a:r>
-              <a:rPr sz="800">
-                <a:hlinkClick r:id="rId15"/>
-              </a:rPr>
-              <a:t>Lofar 3</a:t>
-            </a:r>
-          </a:p>
-        </p:txBody>
-      </p:sp>
-      <p:sp>
-        <p:nvSpPr>
-          <p:cNvPr id="11" name="Rounded Rectangle 10"/>
+        </p:txBody>
+      </p:sp>
+      <p:sp>
+        <p:nvSpPr>
+          <p:cNvPr id="11" name="Rounded Rectangle 10">
+            <a:hlinkClick r:id="rId15"/>
+          </p:cNvPr>
           <p:cNvSpPr/>
-          <p:nvPr>
-            <a:hlinkClick r:id="rId16"/>
-          </p:nvPr>
+          <p:nvPr/>
         </p:nvSpPr>
         <p:spPr>
           <a:xfrm>
@@ -6767,7 +8182,7 @@
                   <a:srgbClr val="1F3A5F"/>
                 </a:solidFill>
               </a:rPr>
-              <a:t>Gram 44: FR X-wing, Category 4, Vulcan</a:t>
+              <a:t>Gram 61: FR Nebulon-B, Category 4, Hoth</a:t>
             </a:r>
           </a:p>
         </p:txBody>
@@ -6796,9 +8211,17 @@
           <a:p>
             <a:r>
               <a:rPr sz="800">
+                <a:hlinkClick r:id="rId16"/>
+              </a:rPr>
+              <a:t>Lofar 1</a:t>
+            </a:r>
+          </a:p>
+          <a:p>
+            <a:r>
+              <a:rPr sz="800">
                 <a:hlinkClick r:id="rId17"/>
               </a:rPr>
-              <a:t>Lofar 1</a:t>
+              <a:t>Lofar 2</a:t>
             </a:r>
           </a:p>
           <a:p>
@@ -6806,14 +8229,6 @@
               <a:rPr sz="800">
                 <a:hlinkClick r:id="rId18"/>
               </a:rPr>
-              <a:t>Lofar 2</a:t>
-            </a:r>
-          </a:p>
-          <a:p>
-            <a:r>
-              <a:rPr sz="800">
-                <a:hlinkClick r:id="rId19"/>
-              </a:rPr>
               <a:t>Lofar 3</a:t>
             </a:r>
           </a:p>
@@ -6821,11 +8236,11 @@
       </p:sp>
       <p:sp>
         <p:nvSpPr>
-          <p:cNvPr id="13" name="Rounded Rectangle 12"/>
+          <p:cNvPr id="13" name="Rounded Rectangle 12">
+            <a:hlinkClick r:id="rId19"/>
+          </p:cNvPr>
           <p:cNvSpPr/>
-          <p:nvPr>
-            <a:hlinkClick r:id="rId20"/>
-          </p:nvPr>
+          <p:nvPr/>
         </p:nvSpPr>
         <p:spPr>
           <a:xfrm>
@@ -6869,7 +8284,7 @@
                   <a:srgbClr val="1F3A5F"/>
                 </a:solidFill>
               </a:rPr>
-              <a:t>Gram 46: FR Lambda Shuttle, Category 2, Endor</a:t>
+              <a:t>Gram 62: Millennium Falcon contact bearing 148, codename Cardassia</a:t>
             </a:r>
           </a:p>
         </p:txBody>
@@ -6898,20 +8313,28 @@
           <a:p>
             <a:r>
               <a:rPr sz="800">
+                <a:hlinkClick r:id="rId20"/>
+              </a:rPr>
+              <a:t>Lofar 1</a:t>
+            </a:r>
+          </a:p>
+          <a:p>
+            <a:r>
+              <a:rPr sz="800">
                 <a:hlinkClick r:id="rId21"/>
               </a:rPr>
-              <a:t>Lofar 1</a:t>
-            </a:r>
-          </a:p>
-        </p:txBody>
-      </p:sp>
-      <p:sp>
-        <p:nvSpPr>
-          <p:cNvPr id="15" name="Rounded Rectangle 14"/>
+              <a:t>Lofar 2</a:t>
+            </a:r>
+          </a:p>
+        </p:txBody>
+      </p:sp>
+      <p:sp>
+        <p:nvSpPr>
+          <p:cNvPr id="15" name="Rounded Rectangle 14">
+            <a:hlinkClick r:id="rId22"/>
+          </p:cNvPr>
           <p:cNvSpPr/>
-          <p:nvPr>
-            <a:hlinkClick r:id="rId22"/>
-          </p:nvPr>
+          <p:nvPr/>
         </p:nvSpPr>
         <p:spPr>
           <a:xfrm>
@@ -6955,7 +8378,7 @@
                   <a:srgbClr val="1F3A5F"/>
                 </a:solidFill>
               </a:rPr>
-              <a:t>Gram 47: Intrepid-class contact bearing 304, codename Hoth</a:t>
+              <a:t>Gram 63: FR Defiant-class, Category 3, Yavin</a:t>
             </a:r>
           </a:p>
         </p:txBody>
@@ -6997,15 +8420,31 @@
               <a:t>Lofar 2</a:t>
             </a:r>
           </a:p>
-        </p:txBody>
-      </p:sp>
-      <p:sp>
-        <p:nvSpPr>
-          <p:cNvPr id="17" name="Rounded Rectangle 16"/>
+          <a:p>
+            <a:r>
+              <a:rPr sz="800">
+                <a:hlinkClick r:id="rId25"/>
+              </a:rPr>
+              <a:t>Lofar 3</a:t>
+            </a:r>
+          </a:p>
+          <a:p>
+            <a:r>
+              <a:rPr sz="800">
+                <a:hlinkClick r:id="rId26"/>
+              </a:rPr>
+              <a:t>Lofar 4</a:t>
+            </a:r>
+          </a:p>
+        </p:txBody>
+      </p:sp>
+      <p:sp>
+        <p:nvSpPr>
+          <p:cNvPr id="17" name="Rounded Rectangle 16">
+            <a:hlinkClick r:id="rId27"/>
+          </p:cNvPr>
           <p:cNvSpPr/>
-          <p:nvPr>
-            <a:hlinkClick r:id="rId25"/>
-          </p:nvPr>
+          <p:nvPr/>
         </p:nvSpPr>
         <p:spPr>
           <a:xfrm>
@@ -7049,7 +8488,7 @@
                   <a:srgbClr val="1F3A5F"/>
                 </a:solidFill>
               </a:rPr>
-              <a:t>Gram 48: FR Nebula-class, Category 2, Romulus</a:t>
+              <a:t>Gram 64: FR Excelsior, Category 4, Mustafar</a:t>
             </a:r>
           </a:p>
         </p:txBody>
@@ -7078,20 +8517,36 @@
           <a:p>
             <a:r>
               <a:rPr sz="800">
-                <a:hlinkClick r:id="rId26"/>
+                <a:hlinkClick r:id="rId28"/>
               </a:rPr>
               <a:t>Lofar 1</a:t>
             </a:r>
           </a:p>
-        </p:txBody>
-      </p:sp>
-      <p:sp>
-        <p:nvSpPr>
-          <p:cNvPr id="19" name="Rounded Rectangle 18"/>
+          <a:p>
+            <a:r>
+              <a:rPr sz="800">
+                <a:hlinkClick r:id="rId29"/>
+              </a:rPr>
+              <a:t>Lofar 2</a:t>
+            </a:r>
+          </a:p>
+          <a:p>
+            <a:r>
+              <a:rPr sz="800">
+                <a:hlinkClick r:id="rId30"/>
+              </a:rPr>
+              <a:t>Lofar 3</a:t>
+            </a:r>
+          </a:p>
+        </p:txBody>
+      </p:sp>
+      <p:sp>
+        <p:nvSpPr>
+          <p:cNvPr id="19" name="Rounded Rectangle 18">
+            <a:hlinkClick r:id="rId31"/>
+          </p:cNvPr>
           <p:cNvSpPr/>
-          <p:nvPr>
-            <a:hlinkClick r:id="rId27"/>
-          </p:nvPr>
+          <p:nvPr/>
         </p:nvSpPr>
         <p:spPr>
           <a:xfrm>
@@ -7135,7 +8590,7 @@
                   <a:srgbClr val="1F3A5F"/>
                 </a:solidFill>
               </a:rPr>
-              <a:t>Gram 49: FR Stargazer, Category 4, Dagobah</a:t>
+              <a:t>Gram 65: Galaxy-class contact bearing 151, codename Gandalf</a:t>
             </a:r>
           </a:p>
         </p:txBody>
@@ -7164,7 +8619,7 @@
           <a:p>
             <a:r>
               <a:rPr sz="800">
-                <a:hlinkClick r:id="rId28"/>
+                <a:hlinkClick r:id="rId32"/>
               </a:rPr>
               <a:t>Lofar 1</a:t>
             </a:r>
@@ -7172,7 +8627,7 @@
           <a:p>
             <a:r>
               <a:rPr sz="800">
-                <a:hlinkClick r:id="rId29"/>
+                <a:hlinkClick r:id="rId33"/>
               </a:rPr>
               <a:t>Lofar 2</a:t>
             </a:r>
@@ -7180,7 +8635,7 @@
           <a:p>
             <a:r>
               <a:rPr sz="800">
-                <a:hlinkClick r:id="rId30"/>
+                <a:hlinkClick r:id="rId34"/>
               </a:rPr>
               <a:t>Lofar 3</a:t>
             </a:r>
@@ -7189,11 +8644,11 @@
       </p:sp>
       <p:sp>
         <p:nvSpPr>
-          <p:cNvPr id="21" name="Rounded Rectangle 20"/>
+          <p:cNvPr id="21" name="Rounded Rectangle 20">
+            <a:hlinkClick r:id="rId35"/>
+          </p:cNvPr>
           <p:cNvSpPr/>
-          <p:nvPr>
-            <a:hlinkClick r:id="rId31"/>
-          </p:nvPr>
+          <p:nvPr/>
         </p:nvSpPr>
         <p:spPr>
           <a:xfrm>
@@ -7237,7 +8692,7 @@
                   <a:srgbClr val="1F3A5F"/>
                 </a:solidFill>
               </a:rPr>
-              <a:t>Gram 50: FR Akira-class, Category 2, Coruscant</a:t>
+              <a:t>Gram 66: FR Venator-class, Category 4, Cardassia</a:t>
             </a:r>
           </a:p>
         </p:txBody>
@@ -7266,7 +8721,7 @@
           <a:p>
             <a:r>
               <a:rPr sz="800">
-                <a:hlinkClick r:id="rId32"/>
+                <a:hlinkClick r:id="rId36"/>
               </a:rPr>
               <a:t>Lofar 1</a:t>
             </a:r>
@@ -7274,20 +8729,36 @@
           <a:p>
             <a:r>
               <a:rPr sz="800">
-                <a:hlinkClick r:id="rId33"/>
+                <a:hlinkClick r:id="rId37"/>
               </a:rPr>
               <a:t>Lofar 2</a:t>
             </a:r>
           </a:p>
-        </p:txBody>
-      </p:sp>
-      <p:sp>
-        <p:nvSpPr>
-          <p:cNvPr id="23" name="Rounded Rectangle 22"/>
+          <a:p>
+            <a:r>
+              <a:rPr sz="800">
+                <a:hlinkClick r:id="rId38"/>
+              </a:rPr>
+              <a:t>Lofar 3</a:t>
+            </a:r>
+          </a:p>
+          <a:p>
+            <a:r>
+              <a:rPr sz="800">
+                <a:hlinkClick r:id="rId39"/>
+              </a:rPr>
+              <a:t>Lofar 4</a:t>
+            </a:r>
+          </a:p>
+        </p:txBody>
+      </p:sp>
+      <p:sp>
+        <p:nvSpPr>
+          <p:cNvPr id="23" name="Rounded Rectangle 22">
+            <a:hlinkClick r:id="rId40"/>
+          </p:cNvPr>
           <p:cNvSpPr/>
-          <p:nvPr>
-            <a:hlinkClick r:id="rId34"/>
-          </p:nvPr>
+          <p:nvPr/>
         </p:nvSpPr>
         <p:spPr>
           <a:xfrm>
@@ -7331,7 +8802,7 @@
                   <a:srgbClr val="1F3A5F"/>
                 </a:solidFill>
               </a:rPr>
-              <a:t>Gram 51: FR Slave I, Category 2, Naboo</a:t>
+              <a:t>Gram 67: Voyager contact bearing 029, codename Vulcan</a:t>
             </a:r>
           </a:p>
         </p:txBody>
@@ -7360,7 +8831,7 @@
           <a:p>
             <a:r>
               <a:rPr sz="800">
-                <a:hlinkClick r:id="rId35"/>
+                <a:hlinkClick r:id="rId41"/>
               </a:rPr>
               <a:t>Lofar 1</a:t>
             </a:r>
@@ -7368,7 +8839,7 @@
           <a:p>
             <a:r>
               <a:rPr sz="800">
-                <a:hlinkClick r:id="rId36"/>
+                <a:hlinkClick r:id="rId42"/>
               </a:rPr>
               <a:t>Lofar 2</a:t>
             </a:r>
@@ -7377,11 +8848,11 @@
       </p:sp>
       <p:sp>
         <p:nvSpPr>
-          <p:cNvPr id="25" name="Rounded Rectangle 24"/>
+          <p:cNvPr id="25" name="Rounded Rectangle 24">
+            <a:hlinkClick r:id="rId43"/>
+          </p:cNvPr>
           <p:cNvSpPr/>
-          <p:nvPr>
-            <a:hlinkClick r:id="rId37"/>
-          </p:nvPr>
+          <p:nvPr/>
         </p:nvSpPr>
         <p:spPr>
           <a:xfrm>
@@ -7425,7 +8896,7 @@
                   <a:srgbClr val="1F3A5F"/>
                 </a:solidFill>
               </a:rPr>
-              <a:t>Gram 52: Nebula-class contact bearing 194, codename Dagobah</a:t>
+              <a:t>Gram 68: FR Akira-class, Category 4, Dank</a:t>
             </a:r>
           </a:p>
         </p:txBody>
@@ -7454,7 +8925,7 @@
           <a:p>
             <a:r>
               <a:rPr sz="800">
-                <a:hlinkClick r:id="rId38"/>
+                <a:hlinkClick r:id="rId44"/>
               </a:rPr>
               <a:t>Lofar 1</a:t>
             </a:r>
@@ -7463,11 +8934,11 @@
       </p:sp>
       <p:sp>
         <p:nvSpPr>
-          <p:cNvPr id="27" name="Rounded Rectangle 26"/>
+          <p:cNvPr id="27" name="Rounded Rectangle 26">
+            <a:hlinkClick r:id="rId45"/>
+          </p:cNvPr>
           <p:cNvSpPr/>
-          <p:nvPr>
-            <a:hlinkClick r:id="rId39"/>
-          </p:nvPr>
+          <p:nvPr/>
         </p:nvSpPr>
         <p:spPr>
           <a:xfrm>
@@ -7511,7 +8982,7 @@
                   <a:srgbClr val="1F3A5F"/>
                 </a:solidFill>
               </a:rPr>
-              <a:t>Gram 54: FR Cerritos, Category 3, Vulcan</a:t>
+              <a:t>Gram 69: FR Razor Crest, Category 3, Hoth</a:t>
             </a:r>
           </a:p>
         </p:txBody>
@@ -7540,44 +9011,20 @@
           <a:p>
             <a:r>
               <a:rPr sz="800">
-                <a:hlinkClick r:id="rId40"/>
+                <a:hlinkClick r:id="rId46"/>
               </a:rPr>
               <a:t>Lofar 1</a:t>
             </a:r>
           </a:p>
-          <a:p>
-            <a:r>
-              <a:rPr sz="800">
-                <a:hlinkClick r:id="rId41"/>
-              </a:rPr>
-              <a:t>Lofar 2</a:t>
-            </a:r>
-          </a:p>
-          <a:p>
-            <a:r>
-              <a:rPr sz="800">
-                <a:hlinkClick r:id="rId42"/>
-              </a:rPr>
-              <a:t>Lofar 3</a:t>
-            </a:r>
-          </a:p>
-          <a:p>
-            <a:r>
-              <a:rPr sz="800">
-                <a:hlinkClick r:id="rId43"/>
-              </a:rPr>
-              <a:t>Lofar 4</a:t>
-            </a:r>
-          </a:p>
-        </p:txBody>
-      </p:sp>
-      <p:sp>
-        <p:nvSpPr>
-          <p:cNvPr id="29" name="Rounded Rectangle 28"/>
+        </p:txBody>
+      </p:sp>
+      <p:sp>
+        <p:nvSpPr>
+          <p:cNvPr id="29" name="Rounded Rectangle 28">
+            <a:hlinkClick r:id="rId47"/>
+          </p:cNvPr>
           <p:cNvSpPr/>
-          <p:nvPr>
-            <a:hlinkClick r:id="rId44"/>
-          </p:nvPr>
+          <p:nvPr/>
         </p:nvSpPr>
         <p:spPr>
           <a:xfrm>
@@ -7621,7 +9068,7 @@
                   <a:srgbClr val="1F3A5F"/>
                 </a:solidFill>
               </a:rPr>
-              <a:t>Gram 55: FR Akira-class, Category 3, Betazed</a:t>
+              <a:t>Gram 70: FR Nebulon-B, Category 4, Vulcan</a:t>
             </a:r>
           </a:p>
         </p:txBody>
@@ -7650,7 +9097,7 @@
           <a:p>
             <a:r>
               <a:rPr sz="800">
-                <a:hlinkClick r:id="rId45"/>
+                <a:hlinkClick r:id="rId48"/>
               </a:rPr>
               <a:t>Lofar 1</a:t>
             </a:r>
@@ -7659,11 +9106,11 @@
       </p:sp>
       <p:sp>
         <p:nvSpPr>
-          <p:cNvPr id="31" name="Rounded Rectangle 30"/>
+          <p:cNvPr id="31" name="Rounded Rectangle 30">
+            <a:hlinkClick r:id="rId49"/>
+          </p:cNvPr>
           <p:cNvSpPr/>
-          <p:nvPr>
-            <a:hlinkClick r:id="rId46"/>
-          </p:nvPr>
+          <p:nvPr/>
         </p:nvSpPr>
         <p:spPr>
           <a:xfrm>
@@ -7707,7 +9154,7 @@
                   <a:srgbClr val="1F3A5F"/>
                 </a:solidFill>
               </a:rPr>
-              <a:t>Gram 56: FR Discovery, Category 3, Kobol</a:t>
+              <a:t>Gram 72: FR A-wing, Category 1, Gandalf</a:t>
             </a:r>
           </a:p>
         </p:txBody>
@@ -7736,33 +9183,9 @@
           <a:p>
             <a:r>
               <a:rPr sz="800">
-                <a:hlinkClick r:id="rId47"/>
+                <a:hlinkClick r:id="rId50"/>
               </a:rPr>
               <a:t>Lofar 1</a:t>
-            </a:r>
-          </a:p>
-          <a:p>
-            <a:r>
-              <a:rPr sz="800">
-                <a:hlinkClick r:id="rId48"/>
-              </a:rPr>
-              <a:t>Lofar 2</a:t>
-            </a:r>
-          </a:p>
-          <a:p>
-            <a:r>
-              <a:rPr sz="800">
-                <a:hlinkClick r:id="rId49"/>
-              </a:rPr>
-              <a:t>Lofar 3</a:t>
-            </a:r>
-          </a:p>
-          <a:p>
-            <a:r>
-              <a:rPr sz="800">
-                <a:hlinkClick r:id="rId50"/>
-              </a:rPr>
-              <a:t>Lofar 4</a:t>
             </a:r>
           </a:p>
         </p:txBody>
@@ -7831,18 +9254,18 @@
                   <a:srgbClr val="FFFFFF"/>
                 </a:solidFill>
               </a:rPr>
-              <a:t>Instructor Pub10_Ed22B_Updated — Page 4 of 5</a:t>
-            </a:r>
-          </a:p>
-        </p:txBody>
-      </p:sp>
-      <p:sp>
-        <p:nvSpPr>
-          <p:cNvPr id="3" name="Rounded Rectangle 2"/>
+              <a:t>Instructor Pub10_Ed22B_Updated — Page 5 of 5</a:t>
+            </a:r>
+          </a:p>
+        </p:txBody>
+      </p:sp>
+      <p:sp>
+        <p:nvSpPr>
+          <p:cNvPr id="3" name="Rounded Rectangle 2">
+            <a:hlinkClick r:id="rId2"/>
+          </p:cNvPr>
           <p:cNvSpPr/>
-          <p:nvPr>
-            <a:hlinkClick r:id="rId2"/>
-          </p:nvPr>
+          <p:nvPr/>
         </p:nvSpPr>
         <p:spPr>
           <a:xfrm>
@@ -7886,7 +9309,7 @@
                   <a:srgbClr val="1F3A5F"/>
                 </a:solidFill>
               </a:rPr>
-              <a:t>Gram 57: Imperial-class contact bearing 089, codename Dagobah</a:t>
+              <a:t>Gram 74: Star Destroyer contact bearing 169, codename Bespin</a:t>
             </a:r>
           </a:p>
         </p:txBody>
@@ -7928,23 +9351,15 @@
               <a:t>Lofar 2</a:t>
             </a:r>
           </a:p>
-          <a:p>
-            <a:r>
-              <a:rPr sz="800">
-                <a:hlinkClick r:id="rId5"/>
-              </a:rPr>
-              <a:t>Lofar 3</a:t>
-            </a:r>
-          </a:p>
-        </p:txBody>
-      </p:sp>
-      <p:sp>
-        <p:nvSpPr>
-          <p:cNvPr id="5" name="Rounded Rectangle 4"/>
+        </p:txBody>
+      </p:sp>
+      <p:sp>
+        <p:nvSpPr>
+          <p:cNvPr id="5" name="Rounded Rectangle 4">
+            <a:hlinkClick r:id="rId5"/>
+          </p:cNvPr>
           <p:cNvSpPr/>
-          <p:nvPr>
-            <a:hlinkClick r:id="rId6"/>
-          </p:nvPr>
+          <p:nvPr/>
         </p:nvSpPr>
         <p:spPr>
           <a:xfrm>
@@ -7988,7 +9403,7 @@
                   <a:srgbClr val="1F3A5F"/>
                 </a:solidFill>
               </a:rPr>
-              <a:t>Gram 58: FR Tantive IV, Category 3, Yavin</a:t>
+              <a:t>Gram 75: FR Intrepid-class, Category 1, Vulcan</a:t>
             </a:r>
           </a:p>
         </p:txBody>
@@ -8017,28 +9432,20 @@
           <a:p>
             <a:r>
               <a:rPr sz="800">
-                <a:hlinkClick r:id="rId7"/>
+                <a:hlinkClick r:id="rId6"/>
               </a:rPr>
               <a:t>Lofar 1</a:t>
             </a:r>
           </a:p>
-          <a:p>
-            <a:r>
-              <a:rPr sz="800">
-                <a:hlinkClick r:id="rId8"/>
-              </a:rPr>
-              <a:t>Lofar 2</a:t>
-            </a:r>
-          </a:p>
-        </p:txBody>
-      </p:sp>
-      <p:sp>
-        <p:nvSpPr>
-          <p:cNvPr id="7" name="Rounded Rectangle 6"/>
+        </p:txBody>
+      </p:sp>
+      <p:sp>
+        <p:nvSpPr>
+          <p:cNvPr id="7" name="Rounded Rectangle 6">
+            <a:hlinkClick r:id="rId7"/>
+          </p:cNvPr>
           <p:cNvSpPr/>
-          <p:nvPr>
-            <a:hlinkClick r:id="rId9"/>
-          </p:nvPr>
+          <p:nvPr/>
         </p:nvSpPr>
         <p:spPr>
           <a:xfrm>
@@ -8082,7 +9489,7 @@
                   <a:srgbClr val="1F3A5F"/>
                 </a:solidFill>
               </a:rPr>
-              <a:t>Gram 59: FR Akira-class, Category 3, Kobol</a:t>
+              <a:t>Gram 76: FR Y-wing, Category 4, Tatooine</a:t>
             </a:r>
           </a:p>
         </p:txBody>
@@ -8111,7 +9518,7 @@
           <a:p>
             <a:r>
               <a:rPr sz="800">
-                <a:hlinkClick r:id="rId10"/>
+                <a:hlinkClick r:id="rId8"/>
               </a:rPr>
               <a:t>Lofar 1</a:t>
             </a:r>
@@ -8119,28 +9526,20 @@
           <a:p>
             <a:r>
               <a:rPr sz="800">
-                <a:hlinkClick r:id="rId11"/>
+                <a:hlinkClick r:id="rId9"/>
               </a:rPr>
               <a:t>Lofar 2</a:t>
             </a:r>
           </a:p>
-          <a:p>
-            <a:r>
-              <a:rPr sz="800">
-                <a:hlinkClick r:id="rId12"/>
-              </a:rPr>
-              <a:t>Lofar 3</a:t>
-            </a:r>
-          </a:p>
-        </p:txBody>
-      </p:sp>
-      <p:sp>
-        <p:nvSpPr>
-          <p:cNvPr id="9" name="Rounded Rectangle 8"/>
+        </p:txBody>
+      </p:sp>
+      <p:sp>
+        <p:nvSpPr>
+          <p:cNvPr id="9" name="Rounded Rectangle 8">
+            <a:hlinkClick r:id="rId10"/>
+          </p:cNvPr>
           <p:cNvSpPr/>
-          <p:nvPr>
-            <a:hlinkClick r:id="rId13"/>
-          </p:nvPr>
+          <p:nvPr/>
         </p:nvSpPr>
         <p:spPr>
           <a:xfrm>
@@ -8184,7 +9583,7 @@
                   <a:srgbClr val="1F3A5F"/>
                 </a:solidFill>
               </a:rPr>
-              <a:t>Gram 60: Constitution-class contact bearing 355, codename Dank</a:t>
+              <a:t>Gram 77: FR Miranda-class, Category 3, Coruscant</a:t>
             </a:r>
           </a:p>
         </p:txBody>
@@ -8213,20 +9612,28 @@
           <a:p>
             <a:r>
               <a:rPr sz="800">
-                <a:hlinkClick r:id="rId14"/>
+                <a:hlinkClick r:id="rId11"/>
               </a:rPr>
               <a:t>Lofar 1</a:t>
             </a:r>
           </a:p>
-        </p:txBody>
-      </p:sp>
-      <p:sp>
-        <p:nvSpPr>
-          <p:cNvPr id="11" name="Rounded Rectangle 10"/>
+          <a:p>
+            <a:r>
+              <a:rPr sz="800">
+                <a:hlinkClick r:id="rId12"/>
+              </a:rPr>
+              <a:t>Lofar 2</a:t>
+            </a:r>
+          </a:p>
+        </p:txBody>
+      </p:sp>
+      <p:sp>
+        <p:nvSpPr>
+          <p:cNvPr id="11" name="Rounded Rectangle 10">
+            <a:hlinkClick r:id="rId13"/>
+          </p:cNvPr>
           <p:cNvSpPr/>
-          <p:nvPr>
-            <a:hlinkClick r:id="rId15"/>
-          </p:nvPr>
+          <p:nvPr/>
         </p:nvSpPr>
         <p:spPr>
           <a:xfrm>
@@ -8270,7 +9677,7 @@
                   <a:srgbClr val="1F3A5F"/>
                 </a:solidFill>
               </a:rPr>
-              <a:t>Gram 61: FR Nebulon-B, Category 4, Hoth</a:t>
+              <a:t>Gram 78: Defiant-class contact bearing 142, codename Risa</a:t>
             </a:r>
           </a:p>
         </p:txBody>
@@ -8299,36 +9706,20 @@
           <a:p>
             <a:r>
               <a:rPr sz="800">
-                <a:hlinkClick r:id="rId16"/>
+                <a:hlinkClick r:id="rId14"/>
               </a:rPr>
               <a:t>Lofar 1</a:t>
             </a:r>
           </a:p>
-          <a:p>
-            <a:r>
-              <a:rPr sz="800">
-                <a:hlinkClick r:id="rId17"/>
-              </a:rPr>
-              <a:t>Lofar 2</a:t>
-            </a:r>
-          </a:p>
-          <a:p>
-            <a:r>
-              <a:rPr sz="800">
-                <a:hlinkClick r:id="rId18"/>
-              </a:rPr>
-              <a:t>Lofar 3</a:t>
-            </a:r>
-          </a:p>
-        </p:txBody>
-      </p:sp>
-      <p:sp>
-        <p:nvSpPr>
-          <p:cNvPr id="13" name="Rounded Rectangle 12"/>
+        </p:txBody>
+      </p:sp>
+      <p:sp>
+        <p:nvSpPr>
+          <p:cNvPr id="13" name="Rounded Rectangle 12">
+            <a:hlinkClick r:id="rId15"/>
+          </p:cNvPr>
           <p:cNvSpPr/>
-          <p:nvPr>
-            <a:hlinkClick r:id="rId19"/>
-          </p:nvPr>
+          <p:nvPr/>
         </p:nvSpPr>
         <p:spPr>
           <a:xfrm>
@@ -8372,7 +9763,7 @@
                   <a:srgbClr val="1F3A5F"/>
                 </a:solidFill>
               </a:rPr>
-              <a:t>Gram 62: Millennium Falcon contact bearing 148, codename Cardassia</a:t>
+              <a:t>Gram 79: FR Voyager, Category 1, Dank</a:t>
             </a:r>
           </a:p>
         </p:txBody>
@@ -8401,7 +9792,7 @@
           <a:p>
             <a:r>
               <a:rPr sz="800">
-                <a:hlinkClick r:id="rId20"/>
+                <a:hlinkClick r:id="rId16"/>
               </a:rPr>
               <a:t>Lofar 1</a:t>
             </a:r>
@@ -8409,20 +9800,36 @@
           <a:p>
             <a:r>
               <a:rPr sz="800">
-                <a:hlinkClick r:id="rId21"/>
+                <a:hlinkClick r:id="rId17"/>
               </a:rPr>
               <a:t>Lofar 2</a:t>
             </a:r>
           </a:p>
-        </p:txBody>
-      </p:sp>
-      <p:sp>
-        <p:nvSpPr>
-          <p:cNvPr id="15" name="Rounded Rectangle 14"/>
+          <a:p>
+            <a:r>
+              <a:rPr sz="800">
+                <a:hlinkClick r:id="rId18"/>
+              </a:rPr>
+              <a:t>Lofar 3</a:t>
+            </a:r>
+          </a:p>
+          <a:p>
+            <a:r>
+              <a:rPr sz="800">
+                <a:hlinkClick r:id="rId19"/>
+              </a:rPr>
+              <a:t>Lofar 4</a:t>
+            </a:r>
+          </a:p>
+        </p:txBody>
+      </p:sp>
+      <p:sp>
+        <p:nvSpPr>
+          <p:cNvPr id="15" name="Rounded Rectangle 14">
+            <a:hlinkClick r:id="rId20"/>
+          </p:cNvPr>
           <p:cNvSpPr/>
-          <p:nvPr>
-            <a:hlinkClick r:id="rId22"/>
-          </p:nvPr>
+          <p:nvPr/>
         </p:nvSpPr>
         <p:spPr>
           <a:xfrm>
@@ -8466,7 +9873,7 @@
                   <a:srgbClr val="1F3A5F"/>
                 </a:solidFill>
               </a:rPr>
-              <a:t>Gram 63: FR Defiant-class, Category 3, Yavin</a:t>
+              <a:t>Gram 80: FR Mon Calamari Cruiser, Category 3, Cardassia</a:t>
             </a:r>
           </a:p>
         </p:txBody>
@@ -8495,9 +9902,25 @@
           <a:p>
             <a:r>
               <a:rPr sz="800">
+                <a:hlinkClick r:id="rId21"/>
+              </a:rPr>
+              <a:t>Lofar 1</a:t>
+            </a:r>
+          </a:p>
+          <a:p>
+            <a:r>
+              <a:rPr sz="800">
+                <a:hlinkClick r:id="rId22"/>
+              </a:rPr>
+              <a:t>Lofar 2</a:t>
+            </a:r>
+          </a:p>
+          <a:p>
+            <a:r>
+              <a:rPr sz="800">
                 <a:hlinkClick r:id="rId23"/>
               </a:rPr>
-              <a:t>Lofar 1</a:t>
+              <a:t>Lofar 3</a:t>
             </a:r>
           </a:p>
           <a:p>
@@ -8505,22 +9928,6 @@
               <a:rPr sz="800">
                 <a:hlinkClick r:id="rId24"/>
               </a:rPr>
-              <a:t>Lofar 2</a:t>
-            </a:r>
-          </a:p>
-          <a:p>
-            <a:r>
-              <a:rPr sz="800">
-                <a:hlinkClick r:id="rId25"/>
-              </a:rPr>
-              <a:t>Lofar 3</a:t>
-            </a:r>
-          </a:p>
-          <a:p>
-            <a:r>
-              <a:rPr sz="800">
-                <a:hlinkClick r:id="rId26"/>
-              </a:rPr>
               <a:t>Lofar 4</a:t>
             </a:r>
           </a:p>
@@ -8528,11 +9935,11 @@
       </p:sp>
       <p:sp>
         <p:nvSpPr>
-          <p:cNvPr id="17" name="Rounded Rectangle 16"/>
+          <p:cNvPr id="17" name="Rounded Rectangle 16">
+            <a:hlinkClick r:id="rId25"/>
+          </p:cNvPr>
           <p:cNvSpPr/>
-          <p:nvPr>
-            <a:hlinkClick r:id="rId27"/>
-          </p:nvPr>
+          <p:nvPr/>
         </p:nvSpPr>
         <p:spPr>
           <a:xfrm>
@@ -8576,7 +9983,7 @@
                   <a:srgbClr val="1F3A5F"/>
                 </a:solidFill>
               </a:rPr>
-              <a:t>Gram 64: FR Excelsior, Category 4, Mustafar</a:t>
+              <a:t>Gram 81: Prometheus contact bearing 167, codename Mustafar</a:t>
             </a:r>
           </a:p>
         </p:txBody>
@@ -8605,9 +10012,25 @@
           <a:p>
             <a:r>
               <a:rPr sz="800">
+                <a:hlinkClick r:id="rId26"/>
+              </a:rPr>
+              <a:t>Lofar 1</a:t>
+            </a:r>
+          </a:p>
+          <a:p>
+            <a:r>
+              <a:rPr sz="800">
+                <a:hlinkClick r:id="rId27"/>
+              </a:rPr>
+              <a:t>Lofar 2</a:t>
+            </a:r>
+          </a:p>
+          <a:p>
+            <a:r>
+              <a:rPr sz="800">
                 <a:hlinkClick r:id="rId28"/>
               </a:rPr>
-              <a:t>Lofar 1</a:t>
+              <a:t>Lofar 3</a:t>
             </a:r>
           </a:p>
           <a:p>
@@ -8615,26 +10038,18 @@
               <a:rPr sz="800">
                 <a:hlinkClick r:id="rId29"/>
               </a:rPr>
-              <a:t>Lofar 2</a:t>
-            </a:r>
-          </a:p>
-          <a:p>
-            <a:r>
-              <a:rPr sz="800">
-                <a:hlinkClick r:id="rId30"/>
-              </a:rPr>
-              <a:t>Lofar 3</a:t>
-            </a:r>
-          </a:p>
-        </p:txBody>
-      </p:sp>
-      <p:sp>
-        <p:nvSpPr>
-          <p:cNvPr id="19" name="Rounded Rectangle 18"/>
+              <a:t>Lofar 4</a:t>
+            </a:r>
+          </a:p>
+        </p:txBody>
+      </p:sp>
+      <p:sp>
+        <p:nvSpPr>
+          <p:cNvPr id="19" name="Rounded Rectangle 18">
+            <a:hlinkClick r:id="rId30"/>
+          </p:cNvPr>
           <p:cNvSpPr/>
-          <p:nvPr>
-            <a:hlinkClick r:id="rId31"/>
-          </p:nvPr>
+          <p:nvPr/>
         </p:nvSpPr>
         <p:spPr>
           <a:xfrm>
@@ -8678,7 +10093,7 @@
                   <a:srgbClr val="1F3A5F"/>
                 </a:solidFill>
               </a:rPr>
-              <a:t>Gram 65: Galaxy-class contact bearing 151, codename Gandalf</a:t>
+              <a:t>Gram 82: Constitution-class contact bearing 066, codename Kronos</a:t>
             </a:r>
           </a:p>
         </p:txBody>
@@ -8707,9 +10122,17 @@
           <a:p>
             <a:r>
               <a:rPr sz="800">
+                <a:hlinkClick r:id="rId31"/>
+              </a:rPr>
+              <a:t>Lofar 1</a:t>
+            </a:r>
+          </a:p>
+          <a:p>
+            <a:r>
+              <a:rPr sz="800">
                 <a:hlinkClick r:id="rId32"/>
               </a:rPr>
-              <a:t>Lofar 1</a:t>
+              <a:t>Lofar 2</a:t>
             </a:r>
           </a:p>
           <a:p>
@@ -8717,14 +10140,6 @@
               <a:rPr sz="800">
                 <a:hlinkClick r:id="rId33"/>
               </a:rPr>
-              <a:t>Lofar 2</a:t>
-            </a:r>
-          </a:p>
-          <a:p>
-            <a:r>
-              <a:rPr sz="800">
-                <a:hlinkClick r:id="rId34"/>
-              </a:rPr>
               <a:t>Lofar 3</a:t>
             </a:r>
           </a:p>
@@ -8732,11 +10147,11 @@
       </p:sp>
       <p:sp>
         <p:nvSpPr>
-          <p:cNvPr id="21" name="Rounded Rectangle 20"/>
+          <p:cNvPr id="21" name="Rounded Rectangle 20">
+            <a:hlinkClick r:id="rId34"/>
+          </p:cNvPr>
           <p:cNvSpPr/>
-          <p:nvPr>
-            <a:hlinkClick r:id="rId35"/>
-          </p:nvPr>
+          <p:nvPr/>
         </p:nvSpPr>
         <p:spPr>
           <a:xfrm>
@@ -8780,7 +10195,7 @@
                   <a:srgbClr val="1F3A5F"/>
                 </a:solidFill>
               </a:rPr>
-              <a:t>Gram 66: FR Venator-class, Category 4, Cardassia</a:t>
+              <a:t>Gram 83: FR A-wing, Category 2, Vulcan</a:t>
             </a:r>
           </a:p>
         </p:txBody>
@@ -8809,44 +10224,20 @@
           <a:p>
             <a:r>
               <a:rPr sz="800">
-                <a:hlinkClick r:id="rId36"/>
+                <a:hlinkClick r:id="rId35"/>
               </a:rPr>
               <a:t>Lofar 1</a:t>
             </a:r>
           </a:p>
-          <a:p>
-            <a:r>
-              <a:rPr sz="800">
-                <a:hlinkClick r:id="rId37"/>
-              </a:rPr>
-              <a:t>Lofar 2</a:t>
-            </a:r>
-          </a:p>
-          <a:p>
-            <a:r>
-              <a:rPr sz="800">
-                <a:hlinkClick r:id="rId38"/>
-              </a:rPr>
-              <a:t>Lofar 3</a:t>
-            </a:r>
-          </a:p>
-          <a:p>
-            <a:r>
-              <a:rPr sz="800">
-                <a:hlinkClick r:id="rId39"/>
-              </a:rPr>
-              <a:t>Lofar 4</a:t>
-            </a:r>
-          </a:p>
-        </p:txBody>
-      </p:sp>
-      <p:sp>
-        <p:nvSpPr>
-          <p:cNvPr id="23" name="Rounded Rectangle 22"/>
+        </p:txBody>
+      </p:sp>
+      <p:sp>
+        <p:nvSpPr>
+          <p:cNvPr id="23" name="Rounded Rectangle 22">
+            <a:hlinkClick r:id="rId36"/>
+          </p:cNvPr>
           <p:cNvSpPr/>
-          <p:nvPr>
-            <a:hlinkClick r:id="rId40"/>
-          </p:nvPr>
+          <p:nvPr/>
         </p:nvSpPr>
         <p:spPr>
           <a:xfrm>
@@ -8890,7 +10281,7 @@
                   <a:srgbClr val="1F3A5F"/>
                 </a:solidFill>
               </a:rPr>
-              <a:t>Gram 67: Voyager contact bearing 029, codename Vulcan</a:t>
+              <a:t>Gram 84: FR Slave I, Category 4, Risa</a:t>
             </a:r>
           </a:p>
         </p:txBody>
@@ -8919,7 +10310,7 @@
           <a:p>
             <a:r>
               <a:rPr sz="800">
-                <a:hlinkClick r:id="rId41"/>
+                <a:hlinkClick r:id="rId37"/>
               </a:rPr>
               <a:t>Lofar 1</a:t>
             </a:r>
@@ -8927,20 +10318,36 @@
           <a:p>
             <a:r>
               <a:rPr sz="800">
-                <a:hlinkClick r:id="rId42"/>
+                <a:hlinkClick r:id="rId38"/>
               </a:rPr>
               <a:t>Lofar 2</a:t>
             </a:r>
           </a:p>
-        </p:txBody>
-      </p:sp>
-      <p:sp>
-        <p:nvSpPr>
-          <p:cNvPr id="25" name="Rounded Rectangle 24"/>
+          <a:p>
+            <a:r>
+              <a:rPr sz="800">
+                <a:hlinkClick r:id="rId39"/>
+              </a:rPr>
+              <a:t>Lofar 3</a:t>
+            </a:r>
+          </a:p>
+          <a:p>
+            <a:r>
+              <a:rPr sz="800">
+                <a:hlinkClick r:id="rId40"/>
+              </a:rPr>
+              <a:t>Lofar 4</a:t>
+            </a:r>
+          </a:p>
+        </p:txBody>
+      </p:sp>
+      <p:sp>
+        <p:nvSpPr>
+          <p:cNvPr id="25" name="Rounded Rectangle 24">
+            <a:hlinkClick r:id="rId41"/>
+          </p:cNvPr>
           <p:cNvSpPr/>
-          <p:nvPr>
-            <a:hlinkClick r:id="rId43"/>
-          </p:nvPr>
+          <p:nvPr/>
         </p:nvSpPr>
         <p:spPr>
           <a:xfrm>
@@ -8984,7 +10391,7 @@
                   <a:srgbClr val="1F3A5F"/>
                 </a:solidFill>
               </a:rPr>
-              <a:t>Gram 68: FR Akira-class, Category 4, Dank</a:t>
+              <a:t>Gram 85: FR Razor Crest, Category 3, Bajor</a:t>
             </a:r>
           </a:p>
         </p:txBody>
@@ -9013,20 +10420,28 @@
           <a:p>
             <a:r>
               <a:rPr sz="800">
-                <a:hlinkClick r:id="rId44"/>
+                <a:hlinkClick r:id="rId42"/>
               </a:rPr>
               <a:t>Lofar 1</a:t>
             </a:r>
           </a:p>
-        </p:txBody>
-      </p:sp>
-      <p:sp>
-        <p:nvSpPr>
-          <p:cNvPr id="27" name="Rounded Rectangle 26"/>
+          <a:p>
+            <a:r>
+              <a:rPr sz="800">
+                <a:hlinkClick r:id="rId43"/>
+              </a:rPr>
+              <a:t>Lofar 2</a:t>
+            </a:r>
+          </a:p>
+        </p:txBody>
+      </p:sp>
+      <p:sp>
+        <p:nvSpPr>
+          <p:cNvPr id="27" name="Rounded Rectangle 26">
+            <a:hlinkClick r:id="rId44"/>
+          </p:cNvPr>
           <p:cNvSpPr/>
-          <p:nvPr>
-            <a:hlinkClick r:id="rId45"/>
-          </p:nvPr>
+          <p:nvPr/>
         </p:nvSpPr>
         <p:spPr>
           <a:xfrm>
@@ -9070,7 +10485,7 @@
                   <a:srgbClr val="1F3A5F"/>
                 </a:solidFill>
               </a:rPr>
-              <a:t>Gram 69: FR Razor Crest, Category 3, Hoth</a:t>
+              <a:t>Gram 86: FR Devastator, Category 2, Betazed</a:t>
             </a:r>
           </a:p>
         </p:txBody>
@@ -9099,7 +10514,7 @@
           <a:p>
             <a:r>
               <a:rPr sz="800">
-                <a:hlinkClick r:id="rId46"/>
+                <a:hlinkClick r:id="rId45"/>
               </a:rPr>
               <a:t>Lofar 1</a:t>
             </a:r>
@@ -9108,11 +10523,11 @@
       </p:sp>
       <p:sp>
         <p:nvSpPr>
-          <p:cNvPr id="29" name="Rounded Rectangle 28"/>
+          <p:cNvPr id="29" name="Rounded Rectangle 28">
+            <a:hlinkClick r:id="rId46"/>
+          </p:cNvPr>
           <p:cNvSpPr/>
-          <p:nvPr>
-            <a:hlinkClick r:id="rId47"/>
-          </p:nvPr>
+          <p:nvPr/>
         </p:nvSpPr>
         <p:spPr>
           <a:xfrm>
@@ -9156,7 +10571,7 @@
                   <a:srgbClr val="1F3A5F"/>
                 </a:solidFill>
               </a:rPr>
-              <a:t>Gram 70: FR Nebulon-B, Category 4, Vulcan</a:t>
+              <a:t>Gram 87: FR Sovereign-class, Category 3, Dagobah</a:t>
             </a:r>
           </a:p>
         </p:txBody>
@@ -9185,20 +10600,28 @@
           <a:p>
             <a:r>
               <a:rPr sz="800">
+                <a:hlinkClick r:id="rId47"/>
+              </a:rPr>
+              <a:t>Lofar 1</a:t>
+            </a:r>
+          </a:p>
+          <a:p>
+            <a:r>
+              <a:rPr sz="800">
                 <a:hlinkClick r:id="rId48"/>
               </a:rPr>
-              <a:t>Lofar 1</a:t>
-            </a:r>
-          </a:p>
-        </p:txBody>
-      </p:sp>
-      <p:sp>
-        <p:nvSpPr>
-          <p:cNvPr id="31" name="Rounded Rectangle 30"/>
+              <a:t>Lofar 2</a:t>
+            </a:r>
+          </a:p>
+        </p:txBody>
+      </p:sp>
+      <p:sp>
+        <p:nvSpPr>
+          <p:cNvPr id="31" name="Rounded Rectangle 30">
+            <a:hlinkClick r:id="rId49"/>
+          </p:cNvPr>
           <p:cNvSpPr/>
-          <p:nvPr>
-            <a:hlinkClick r:id="rId49"/>
-          </p:nvPr>
+          <p:nvPr/>
         </p:nvSpPr>
         <p:spPr>
           <a:xfrm>
@@ -9242,7 +10665,7 @@
                   <a:srgbClr val="1F3A5F"/>
                 </a:solidFill>
               </a:rPr>
-              <a:t>Gram 72: FR A-wing, Category 1, Gandalf</a:t>
+              <a:t>Gram 88: FR Nebula-class, Category 1, Cardassia</a:t>
             </a:r>
           </a:p>
         </p:txBody>
@@ -9276,1609 +10699,12 @@
               <a:t>Lofar 1</a:t>
             </a:r>
           </a:p>
-        </p:txBody>
-      </p:sp>
-    </p:spTree>
-  </p:cSld>
-  <p:clrMapOvr>
-    <a:masterClrMapping/>
-  </p:clrMapOvr>
-</p:sld>
-</file>
-
-<file path=ppt/slides/slide6.xml><?xml version="1.0" encoding="utf-8"?>
-<p:sld xmlns:a="http://schemas.openxmlformats.org/drawingml/2006/main" xmlns:p="http://schemas.openxmlformats.org/presentationml/2006/main" xmlns:r="http://schemas.openxmlformats.org/officeDocument/2006/relationships">
-  <p:cSld>
-    <p:spTree>
-      <p:nvGrpSpPr>
-        <p:cNvPr id="1" name=""/>
-        <p:cNvGrpSpPr/>
-        <p:nvPr/>
-      </p:nvGrpSpPr>
-      <p:grpSpPr/>
-      <p:sp>
-        <p:nvSpPr>
-          <p:cNvPr id="2" name="Rectangle 1"/>
-          <p:cNvSpPr/>
-          <p:nvPr/>
-        </p:nvSpPr>
-        <p:spPr>
-          <a:xfrm>
-            <a:off x="0" y="0"/>
-            <a:ext cx="12188952" cy="548640"/>
-          </a:xfrm>
-          <a:prstGeom prst="rect">
-            <a:avLst/>
-          </a:prstGeom>
-          <a:solidFill>
-            <a:srgbClr val="1F3A5F"/>
-          </a:solidFill>
-          <a:ln>
-            <a:noFill/>
-          </a:ln>
-        </p:spPr>
-        <p:style>
-          <a:lnRef idx="1">
-            <a:schemeClr val="accent1"/>
-          </a:lnRef>
-          <a:fillRef idx="3">
-            <a:schemeClr val="accent1"/>
-          </a:fillRef>
-          <a:effectRef idx="2">
-            <a:schemeClr val="accent1"/>
-          </a:effectRef>
-          <a:fontRef idx="minor">
-            <a:schemeClr val="lt1"/>
-          </a:fontRef>
-        </p:style>
-        <p:txBody>
-          <a:bodyPr rtlCol="0" anchor="ctr" lIns="182880" rIns="182880"/>
-          <a:lstStyle/>
-          <a:p>
-            <a:pPr algn="ctr"/>
-            <a:r>
-              <a:rPr sz="2000" b="1">
-                <a:solidFill>
-                  <a:srgbClr val="FFFFFF"/>
-                </a:solidFill>
-              </a:rPr>
-              <a:t>Instructor Pub10_Ed22B_Updated — Page 5 of 5</a:t>
-            </a:r>
-          </a:p>
-        </p:txBody>
-      </p:sp>
-      <p:sp>
-        <p:nvSpPr>
-          <p:cNvPr id="3" name="Rounded Rectangle 2"/>
-          <p:cNvSpPr/>
-          <p:nvPr>
-            <a:hlinkClick r:id="rId2"/>
-          </p:nvPr>
-        </p:nvSpPr>
-        <p:spPr>
-          <a:xfrm>
-            <a:off x="365760" y="731520"/>
-            <a:ext cx="2200046" cy="365760"/>
-          </a:xfrm>
-          <a:prstGeom prst="roundRect">
-            <a:avLst/>
-          </a:prstGeom>
-          <a:solidFill>
-            <a:srgbClr val="E8EEF7"/>
-          </a:solidFill>
-          <a:ln>
-            <a:solidFill>
-              <a:srgbClr val="1F3A5F"/>
-            </a:solidFill>
-          </a:ln>
-        </p:spPr>
-        <p:style>
-          <a:lnRef idx="1">
-            <a:schemeClr val="accent1"/>
-          </a:lnRef>
-          <a:fillRef idx="3">
-            <a:schemeClr val="accent1"/>
-          </a:fillRef>
-          <a:effectRef idx="2">
-            <a:schemeClr val="accent1"/>
-          </a:effectRef>
-          <a:fontRef idx="minor">
-            <a:schemeClr val="lt1"/>
-          </a:fontRef>
-        </p:style>
-        <p:txBody>
-          <a:bodyPr rtlCol="0" anchor="ctr" lIns="45720" rIns="45720"/>
-          <a:lstStyle/>
-          <a:p>
-            <a:pPr algn="ctr"/>
-            <a:r>
-              <a:rPr sz="900">
-                <a:solidFill>
-                  <a:srgbClr val="1F3A5F"/>
-                </a:solidFill>
-              </a:rPr>
-              <a:t>Gram 74: Star Destroyer contact bearing 169, codename Bespin</a:t>
-            </a:r>
-          </a:p>
-        </p:txBody>
-      </p:sp>
-      <p:sp>
-        <p:nvSpPr>
-          <p:cNvPr id="4" name="TextBox 3"/>
-          <p:cNvSpPr txBox="1"/>
-          <p:nvPr/>
-        </p:nvSpPr>
-        <p:spPr>
-          <a:xfrm>
-            <a:off x="365760" y="1115568"/>
-            <a:ext cx="2200046" cy="1447800"/>
-          </a:xfrm>
-          <a:prstGeom prst="rect">
-            <a:avLst/>
-          </a:prstGeom>
-          <a:noFill/>
-        </p:spPr>
-        <p:txBody>
-          <a:bodyPr wrap="square">
-            <a:spAutoFit/>
-          </a:bodyPr>
-          <a:lstStyle/>
-          <a:p>
-            <a:r>
-              <a:rPr sz="800">
-                <a:hlinkClick r:id="rId3"/>
-              </a:rPr>
-              <a:t>Lofar 1</a:t>
-            </a:r>
-          </a:p>
-          <a:p>
-            <a:r>
-              <a:rPr sz="800">
-                <a:hlinkClick r:id="rId4"/>
+          <a:p>
+            <a:r>
+              <a:rPr sz="800">
+                <a:hlinkClick r:id="rId51"/>
               </a:rPr>
               <a:t>Lofar 2</a:t>
-            </a:r>
-          </a:p>
-        </p:txBody>
-      </p:sp>
-      <p:sp>
-        <p:nvSpPr>
-          <p:cNvPr id="5" name="Rounded Rectangle 4"/>
-          <p:cNvSpPr/>
-          <p:nvPr>
-            <a:hlinkClick r:id="rId5"/>
-          </p:nvPr>
-        </p:nvSpPr>
-        <p:spPr>
-          <a:xfrm>
-            <a:off x="2657246" y="731520"/>
-            <a:ext cx="2200046" cy="365760"/>
-          </a:xfrm>
-          <a:prstGeom prst="roundRect">
-            <a:avLst/>
-          </a:prstGeom>
-          <a:solidFill>
-            <a:srgbClr val="E8EEF7"/>
-          </a:solidFill>
-          <a:ln>
-            <a:solidFill>
-              <a:srgbClr val="1F3A5F"/>
-            </a:solidFill>
-          </a:ln>
-        </p:spPr>
-        <p:style>
-          <a:lnRef idx="1">
-            <a:schemeClr val="accent1"/>
-          </a:lnRef>
-          <a:fillRef idx="3">
-            <a:schemeClr val="accent1"/>
-          </a:fillRef>
-          <a:effectRef idx="2">
-            <a:schemeClr val="accent1"/>
-          </a:effectRef>
-          <a:fontRef idx="minor">
-            <a:schemeClr val="lt1"/>
-          </a:fontRef>
-        </p:style>
-        <p:txBody>
-          <a:bodyPr rtlCol="0" anchor="ctr" lIns="45720" rIns="45720"/>
-          <a:lstStyle/>
-          <a:p>
-            <a:pPr algn="ctr"/>
-            <a:r>
-              <a:rPr sz="900">
-                <a:solidFill>
-                  <a:srgbClr val="1F3A5F"/>
-                </a:solidFill>
-              </a:rPr>
-              <a:t>Gram 75: FR Intrepid-class, Category 1, Vulcan</a:t>
-            </a:r>
-          </a:p>
-        </p:txBody>
-      </p:sp>
-      <p:sp>
-        <p:nvSpPr>
-          <p:cNvPr id="6" name="TextBox 5"/>
-          <p:cNvSpPr txBox="1"/>
-          <p:nvPr/>
-        </p:nvSpPr>
-        <p:spPr>
-          <a:xfrm>
-            <a:off x="2657246" y="1115568"/>
-            <a:ext cx="2200046" cy="1447800"/>
-          </a:xfrm>
-          <a:prstGeom prst="rect">
-            <a:avLst/>
-          </a:prstGeom>
-          <a:noFill/>
-        </p:spPr>
-        <p:txBody>
-          <a:bodyPr wrap="square">
-            <a:spAutoFit/>
-          </a:bodyPr>
-          <a:lstStyle/>
-          <a:p>
-            <a:r>
-              <a:rPr sz="800">
-                <a:hlinkClick r:id="rId6"/>
-              </a:rPr>
-              <a:t>Lofar 1</a:t>
-            </a:r>
-          </a:p>
-        </p:txBody>
-      </p:sp>
-      <p:sp>
-        <p:nvSpPr>
-          <p:cNvPr id="7" name="Rounded Rectangle 6"/>
-          <p:cNvSpPr/>
-          <p:nvPr>
-            <a:hlinkClick r:id="rId7"/>
-          </p:nvPr>
-        </p:nvSpPr>
-        <p:spPr>
-          <a:xfrm>
-            <a:off x="4948732" y="731520"/>
-            <a:ext cx="2200046" cy="365760"/>
-          </a:xfrm>
-          <a:prstGeom prst="roundRect">
-            <a:avLst/>
-          </a:prstGeom>
-          <a:solidFill>
-            <a:srgbClr val="E8EEF7"/>
-          </a:solidFill>
-          <a:ln>
-            <a:solidFill>
-              <a:srgbClr val="1F3A5F"/>
-            </a:solidFill>
-          </a:ln>
-        </p:spPr>
-        <p:style>
-          <a:lnRef idx="1">
-            <a:schemeClr val="accent1"/>
-          </a:lnRef>
-          <a:fillRef idx="3">
-            <a:schemeClr val="accent1"/>
-          </a:fillRef>
-          <a:effectRef idx="2">
-            <a:schemeClr val="accent1"/>
-          </a:effectRef>
-          <a:fontRef idx="minor">
-            <a:schemeClr val="lt1"/>
-          </a:fontRef>
-        </p:style>
-        <p:txBody>
-          <a:bodyPr rtlCol="0" anchor="ctr" lIns="45720" rIns="45720"/>
-          <a:lstStyle/>
-          <a:p>
-            <a:pPr algn="ctr"/>
-            <a:r>
-              <a:rPr sz="900">
-                <a:solidFill>
-                  <a:srgbClr val="1F3A5F"/>
-                </a:solidFill>
-              </a:rPr>
-              <a:t>Gram 76: FR Y-wing, Category 4, Tatooine</a:t>
-            </a:r>
-          </a:p>
-        </p:txBody>
-      </p:sp>
-      <p:sp>
-        <p:nvSpPr>
-          <p:cNvPr id="8" name="TextBox 7"/>
-          <p:cNvSpPr txBox="1"/>
-          <p:nvPr/>
-        </p:nvSpPr>
-        <p:spPr>
-          <a:xfrm>
-            <a:off x="4948732" y="1115568"/>
-            <a:ext cx="2200046" cy="1447800"/>
-          </a:xfrm>
-          <a:prstGeom prst="rect">
-            <a:avLst/>
-          </a:prstGeom>
-          <a:noFill/>
-        </p:spPr>
-        <p:txBody>
-          <a:bodyPr wrap="square">
-            <a:spAutoFit/>
-          </a:bodyPr>
-          <a:lstStyle/>
-          <a:p>
-            <a:r>
-              <a:rPr sz="800">
-                <a:hlinkClick r:id="rId8"/>
-              </a:rPr>
-              <a:t>Lofar 1</a:t>
-            </a:r>
-          </a:p>
-          <a:p>
-            <a:r>
-              <a:rPr sz="800">
-                <a:hlinkClick r:id="rId9"/>
-              </a:rPr>
-              <a:t>Lofar 2</a:t>
-            </a:r>
-          </a:p>
-        </p:txBody>
-      </p:sp>
-      <p:sp>
-        <p:nvSpPr>
-          <p:cNvPr id="9" name="Rounded Rectangle 8"/>
-          <p:cNvSpPr/>
-          <p:nvPr>
-            <a:hlinkClick r:id="rId10"/>
-          </p:nvPr>
-        </p:nvSpPr>
-        <p:spPr>
-          <a:xfrm>
-            <a:off x="7240219" y="731520"/>
-            <a:ext cx="2200046" cy="365760"/>
-          </a:xfrm>
-          <a:prstGeom prst="roundRect">
-            <a:avLst/>
-          </a:prstGeom>
-          <a:solidFill>
-            <a:srgbClr val="E8EEF7"/>
-          </a:solidFill>
-          <a:ln>
-            <a:solidFill>
-              <a:srgbClr val="1F3A5F"/>
-            </a:solidFill>
-          </a:ln>
-        </p:spPr>
-        <p:style>
-          <a:lnRef idx="1">
-            <a:schemeClr val="accent1"/>
-          </a:lnRef>
-          <a:fillRef idx="3">
-            <a:schemeClr val="accent1"/>
-          </a:fillRef>
-          <a:effectRef idx="2">
-            <a:schemeClr val="accent1"/>
-          </a:effectRef>
-          <a:fontRef idx="minor">
-            <a:schemeClr val="lt1"/>
-          </a:fontRef>
-        </p:style>
-        <p:txBody>
-          <a:bodyPr rtlCol="0" anchor="ctr" lIns="45720" rIns="45720"/>
-          <a:lstStyle/>
-          <a:p>
-            <a:pPr algn="ctr"/>
-            <a:r>
-              <a:rPr sz="900">
-                <a:solidFill>
-                  <a:srgbClr val="1F3A5F"/>
-                </a:solidFill>
-              </a:rPr>
-              <a:t>Gram 77: FR Miranda-class, Category 3, Coruscant</a:t>
-            </a:r>
-          </a:p>
-        </p:txBody>
-      </p:sp>
-      <p:sp>
-        <p:nvSpPr>
-          <p:cNvPr id="10" name="TextBox 9"/>
-          <p:cNvSpPr txBox="1"/>
-          <p:nvPr/>
-        </p:nvSpPr>
-        <p:spPr>
-          <a:xfrm>
-            <a:off x="7240219" y="1115568"/>
-            <a:ext cx="2200046" cy="1447800"/>
-          </a:xfrm>
-          <a:prstGeom prst="rect">
-            <a:avLst/>
-          </a:prstGeom>
-          <a:noFill/>
-        </p:spPr>
-        <p:txBody>
-          <a:bodyPr wrap="square">
-            <a:spAutoFit/>
-          </a:bodyPr>
-          <a:lstStyle/>
-          <a:p>
-            <a:r>
-              <a:rPr sz="800">
-                <a:hlinkClick r:id="rId11"/>
-              </a:rPr>
-              <a:t>Lofar 1</a:t>
-            </a:r>
-          </a:p>
-          <a:p>
-            <a:r>
-              <a:rPr sz="800">
-                <a:hlinkClick r:id="rId12"/>
-              </a:rPr>
-              <a:t>Lofar 2</a:t>
-            </a:r>
-          </a:p>
-        </p:txBody>
-      </p:sp>
-      <p:sp>
-        <p:nvSpPr>
-          <p:cNvPr id="11" name="Rounded Rectangle 10"/>
-          <p:cNvSpPr/>
-          <p:nvPr>
-            <a:hlinkClick r:id="rId13"/>
-          </p:nvPr>
-        </p:nvSpPr>
-        <p:spPr>
-          <a:xfrm>
-            <a:off x="9531705" y="731520"/>
-            <a:ext cx="2200046" cy="365760"/>
-          </a:xfrm>
-          <a:prstGeom prst="roundRect">
-            <a:avLst/>
-          </a:prstGeom>
-          <a:solidFill>
-            <a:srgbClr val="E8EEF7"/>
-          </a:solidFill>
-          <a:ln>
-            <a:solidFill>
-              <a:srgbClr val="1F3A5F"/>
-            </a:solidFill>
-          </a:ln>
-        </p:spPr>
-        <p:style>
-          <a:lnRef idx="1">
-            <a:schemeClr val="accent1"/>
-          </a:lnRef>
-          <a:fillRef idx="3">
-            <a:schemeClr val="accent1"/>
-          </a:fillRef>
-          <a:effectRef idx="2">
-            <a:schemeClr val="accent1"/>
-          </a:effectRef>
-          <a:fontRef idx="minor">
-            <a:schemeClr val="lt1"/>
-          </a:fontRef>
-        </p:style>
-        <p:txBody>
-          <a:bodyPr rtlCol="0" anchor="ctr" lIns="45720" rIns="45720"/>
-          <a:lstStyle/>
-          <a:p>
-            <a:pPr algn="ctr"/>
-            <a:r>
-              <a:rPr sz="900">
-                <a:solidFill>
-                  <a:srgbClr val="1F3A5F"/>
-                </a:solidFill>
-              </a:rPr>
-              <a:t>Gram 78: Defiant-class contact bearing 142, codename Risa</a:t>
-            </a:r>
-          </a:p>
-        </p:txBody>
-      </p:sp>
-      <p:sp>
-        <p:nvSpPr>
-          <p:cNvPr id="12" name="TextBox 11"/>
-          <p:cNvSpPr txBox="1"/>
-          <p:nvPr/>
-        </p:nvSpPr>
-        <p:spPr>
-          <a:xfrm>
-            <a:off x="9531705" y="1115568"/>
-            <a:ext cx="2200046" cy="1447800"/>
-          </a:xfrm>
-          <a:prstGeom prst="rect">
-            <a:avLst/>
-          </a:prstGeom>
-          <a:noFill/>
-        </p:spPr>
-        <p:txBody>
-          <a:bodyPr wrap="square">
-            <a:spAutoFit/>
-          </a:bodyPr>
-          <a:lstStyle/>
-          <a:p>
-            <a:r>
-              <a:rPr sz="800">
-                <a:hlinkClick r:id="rId14"/>
-              </a:rPr>
-              <a:t>Lofar 1</a:t>
-            </a:r>
-          </a:p>
-        </p:txBody>
-      </p:sp>
-      <p:sp>
-        <p:nvSpPr>
-          <p:cNvPr id="13" name="Rounded Rectangle 12"/>
-          <p:cNvSpPr/>
-          <p:nvPr>
-            <a:hlinkClick r:id="rId15"/>
-          </p:nvPr>
-        </p:nvSpPr>
-        <p:spPr>
-          <a:xfrm>
-            <a:off x="365760" y="2682240"/>
-            <a:ext cx="2200046" cy="365760"/>
-          </a:xfrm>
-          <a:prstGeom prst="roundRect">
-            <a:avLst/>
-          </a:prstGeom>
-          <a:solidFill>
-            <a:srgbClr val="E8EEF7"/>
-          </a:solidFill>
-          <a:ln>
-            <a:solidFill>
-              <a:srgbClr val="1F3A5F"/>
-            </a:solidFill>
-          </a:ln>
-        </p:spPr>
-        <p:style>
-          <a:lnRef idx="1">
-            <a:schemeClr val="accent1"/>
-          </a:lnRef>
-          <a:fillRef idx="3">
-            <a:schemeClr val="accent1"/>
-          </a:fillRef>
-          <a:effectRef idx="2">
-            <a:schemeClr val="accent1"/>
-          </a:effectRef>
-          <a:fontRef idx="minor">
-            <a:schemeClr val="lt1"/>
-          </a:fontRef>
-        </p:style>
-        <p:txBody>
-          <a:bodyPr rtlCol="0" anchor="ctr" lIns="45720" rIns="45720"/>
-          <a:lstStyle/>
-          <a:p>
-            <a:pPr algn="ctr"/>
-            <a:r>
-              <a:rPr sz="900">
-                <a:solidFill>
-                  <a:srgbClr val="1F3A5F"/>
-                </a:solidFill>
-              </a:rPr>
-              <a:t>Gram 79: FR Voyager, Category 1, Dank</a:t>
-            </a:r>
-          </a:p>
-        </p:txBody>
-      </p:sp>
-      <p:sp>
-        <p:nvSpPr>
-          <p:cNvPr id="14" name="TextBox 13"/>
-          <p:cNvSpPr txBox="1"/>
-          <p:nvPr/>
-        </p:nvSpPr>
-        <p:spPr>
-          <a:xfrm>
-            <a:off x="365760" y="3066288"/>
-            <a:ext cx="2200046" cy="1447800"/>
-          </a:xfrm>
-          <a:prstGeom prst="rect">
-            <a:avLst/>
-          </a:prstGeom>
-          <a:noFill/>
-        </p:spPr>
-        <p:txBody>
-          <a:bodyPr wrap="square">
-            <a:spAutoFit/>
-          </a:bodyPr>
-          <a:lstStyle/>
-          <a:p>
-            <a:r>
-              <a:rPr sz="800">
-                <a:hlinkClick r:id="rId16"/>
-              </a:rPr>
-              <a:t>Lofar 1</a:t>
-            </a:r>
-          </a:p>
-          <a:p>
-            <a:r>
-              <a:rPr sz="800">
-                <a:hlinkClick r:id="rId17"/>
-              </a:rPr>
-              <a:t>Lofar 2</a:t>
-            </a:r>
-          </a:p>
-          <a:p>
-            <a:r>
-              <a:rPr sz="800">
-                <a:hlinkClick r:id="rId18"/>
-              </a:rPr>
-              <a:t>Lofar 3</a:t>
-            </a:r>
-          </a:p>
-          <a:p>
-            <a:r>
-              <a:rPr sz="800">
-                <a:hlinkClick r:id="rId19"/>
-              </a:rPr>
-              <a:t>Lofar 4</a:t>
-            </a:r>
-          </a:p>
-        </p:txBody>
-      </p:sp>
-      <p:sp>
-        <p:nvSpPr>
-          <p:cNvPr id="15" name="Rounded Rectangle 14"/>
-          <p:cNvSpPr/>
-          <p:nvPr>
-            <a:hlinkClick r:id="rId20"/>
-          </p:nvPr>
-        </p:nvSpPr>
-        <p:spPr>
-          <a:xfrm>
-            <a:off x="2657246" y="2682240"/>
-            <a:ext cx="2200046" cy="365760"/>
-          </a:xfrm>
-          <a:prstGeom prst="roundRect">
-            <a:avLst/>
-          </a:prstGeom>
-          <a:solidFill>
-            <a:srgbClr val="E8EEF7"/>
-          </a:solidFill>
-          <a:ln>
-            <a:solidFill>
-              <a:srgbClr val="1F3A5F"/>
-            </a:solidFill>
-          </a:ln>
-        </p:spPr>
-        <p:style>
-          <a:lnRef idx="1">
-            <a:schemeClr val="accent1"/>
-          </a:lnRef>
-          <a:fillRef idx="3">
-            <a:schemeClr val="accent1"/>
-          </a:fillRef>
-          <a:effectRef idx="2">
-            <a:schemeClr val="accent1"/>
-          </a:effectRef>
-          <a:fontRef idx="minor">
-            <a:schemeClr val="lt1"/>
-          </a:fontRef>
-        </p:style>
-        <p:txBody>
-          <a:bodyPr rtlCol="0" anchor="ctr" lIns="45720" rIns="45720"/>
-          <a:lstStyle/>
-          <a:p>
-            <a:pPr algn="ctr"/>
-            <a:r>
-              <a:rPr sz="900">
-                <a:solidFill>
-                  <a:srgbClr val="1F3A5F"/>
-                </a:solidFill>
-              </a:rPr>
-              <a:t>Gram 80: FR Mon Calamari Cruiser, Category 3, Cardassia</a:t>
-            </a:r>
-          </a:p>
-        </p:txBody>
-      </p:sp>
-      <p:sp>
-        <p:nvSpPr>
-          <p:cNvPr id="16" name="TextBox 15"/>
-          <p:cNvSpPr txBox="1"/>
-          <p:nvPr/>
-        </p:nvSpPr>
-        <p:spPr>
-          <a:xfrm>
-            <a:off x="2657246" y="3066288"/>
-            <a:ext cx="2200046" cy="1447800"/>
-          </a:xfrm>
-          <a:prstGeom prst="rect">
-            <a:avLst/>
-          </a:prstGeom>
-          <a:noFill/>
-        </p:spPr>
-        <p:txBody>
-          <a:bodyPr wrap="square">
-            <a:spAutoFit/>
-          </a:bodyPr>
-          <a:lstStyle/>
-          <a:p>
-            <a:r>
-              <a:rPr sz="800">
-                <a:hlinkClick r:id="rId21"/>
-              </a:rPr>
-              <a:t>Lofar 1</a:t>
-            </a:r>
-          </a:p>
-          <a:p>
-            <a:r>
-              <a:rPr sz="800">
-                <a:hlinkClick r:id="rId22"/>
-              </a:rPr>
-              <a:t>Lofar 2</a:t>
-            </a:r>
-          </a:p>
-          <a:p>
-            <a:r>
-              <a:rPr sz="800">
-                <a:hlinkClick r:id="rId23"/>
-              </a:rPr>
-              <a:t>Lofar 3</a:t>
-            </a:r>
-          </a:p>
-          <a:p>
-            <a:r>
-              <a:rPr sz="800">
-                <a:hlinkClick r:id="rId24"/>
-              </a:rPr>
-              <a:t>Lofar 4</a:t>
-            </a:r>
-          </a:p>
-        </p:txBody>
-      </p:sp>
-      <p:sp>
-        <p:nvSpPr>
-          <p:cNvPr id="17" name="Rounded Rectangle 16"/>
-          <p:cNvSpPr/>
-          <p:nvPr>
-            <a:hlinkClick r:id="rId25"/>
-          </p:nvPr>
-        </p:nvSpPr>
-        <p:spPr>
-          <a:xfrm>
-            <a:off x="4948732" y="2682240"/>
-            <a:ext cx="2200046" cy="365760"/>
-          </a:xfrm>
-          <a:prstGeom prst="roundRect">
-            <a:avLst/>
-          </a:prstGeom>
-          <a:solidFill>
-            <a:srgbClr val="E8EEF7"/>
-          </a:solidFill>
-          <a:ln>
-            <a:solidFill>
-              <a:srgbClr val="1F3A5F"/>
-            </a:solidFill>
-          </a:ln>
-        </p:spPr>
-        <p:style>
-          <a:lnRef idx="1">
-            <a:schemeClr val="accent1"/>
-          </a:lnRef>
-          <a:fillRef idx="3">
-            <a:schemeClr val="accent1"/>
-          </a:fillRef>
-          <a:effectRef idx="2">
-            <a:schemeClr val="accent1"/>
-          </a:effectRef>
-          <a:fontRef idx="minor">
-            <a:schemeClr val="lt1"/>
-          </a:fontRef>
-        </p:style>
-        <p:txBody>
-          <a:bodyPr rtlCol="0" anchor="ctr" lIns="45720" rIns="45720"/>
-          <a:lstStyle/>
-          <a:p>
-            <a:pPr algn="ctr"/>
-            <a:r>
-              <a:rPr sz="900">
-                <a:solidFill>
-                  <a:srgbClr val="1F3A5F"/>
-                </a:solidFill>
-              </a:rPr>
-              <a:t>Gram 81: Prometheus contact bearing 167, codename Mustafar</a:t>
-            </a:r>
-          </a:p>
-        </p:txBody>
-      </p:sp>
-      <p:sp>
-        <p:nvSpPr>
-          <p:cNvPr id="18" name="TextBox 17"/>
-          <p:cNvSpPr txBox="1"/>
-          <p:nvPr/>
-        </p:nvSpPr>
-        <p:spPr>
-          <a:xfrm>
-            <a:off x="4948732" y="3066288"/>
-            <a:ext cx="2200046" cy="1447800"/>
-          </a:xfrm>
-          <a:prstGeom prst="rect">
-            <a:avLst/>
-          </a:prstGeom>
-          <a:noFill/>
-        </p:spPr>
-        <p:txBody>
-          <a:bodyPr wrap="square">
-            <a:spAutoFit/>
-          </a:bodyPr>
-          <a:lstStyle/>
-          <a:p>
-            <a:r>
-              <a:rPr sz="800">
-                <a:hlinkClick r:id="rId26"/>
-              </a:rPr>
-              <a:t>Lofar 1</a:t>
-            </a:r>
-          </a:p>
-          <a:p>
-            <a:r>
-              <a:rPr sz="800">
-                <a:hlinkClick r:id="rId27"/>
-              </a:rPr>
-              <a:t>Lofar 2</a:t>
-            </a:r>
-          </a:p>
-          <a:p>
-            <a:r>
-              <a:rPr sz="800">
-                <a:hlinkClick r:id="rId28"/>
-              </a:rPr>
-              <a:t>Lofar 3</a:t>
-            </a:r>
-          </a:p>
-          <a:p>
-            <a:r>
-              <a:rPr sz="800">
-                <a:hlinkClick r:id="rId29"/>
-              </a:rPr>
-              <a:t>Lofar 4</a:t>
-            </a:r>
-          </a:p>
-        </p:txBody>
-      </p:sp>
-      <p:sp>
-        <p:nvSpPr>
-          <p:cNvPr id="19" name="Rounded Rectangle 18"/>
-          <p:cNvSpPr/>
-          <p:nvPr>
-            <a:hlinkClick r:id="rId30"/>
-          </p:nvPr>
-        </p:nvSpPr>
-        <p:spPr>
-          <a:xfrm>
-            <a:off x="7240219" y="2682240"/>
-            <a:ext cx="2200046" cy="365760"/>
-          </a:xfrm>
-          <a:prstGeom prst="roundRect">
-            <a:avLst/>
-          </a:prstGeom>
-          <a:solidFill>
-            <a:srgbClr val="E8EEF7"/>
-          </a:solidFill>
-          <a:ln>
-            <a:solidFill>
-              <a:srgbClr val="1F3A5F"/>
-            </a:solidFill>
-          </a:ln>
-        </p:spPr>
-        <p:style>
-          <a:lnRef idx="1">
-            <a:schemeClr val="accent1"/>
-          </a:lnRef>
-          <a:fillRef idx="3">
-            <a:schemeClr val="accent1"/>
-          </a:fillRef>
-          <a:effectRef idx="2">
-            <a:schemeClr val="accent1"/>
-          </a:effectRef>
-          <a:fontRef idx="minor">
-            <a:schemeClr val="lt1"/>
-          </a:fontRef>
-        </p:style>
-        <p:txBody>
-          <a:bodyPr rtlCol="0" anchor="ctr" lIns="45720" rIns="45720"/>
-          <a:lstStyle/>
-          <a:p>
-            <a:pPr algn="ctr"/>
-            <a:r>
-              <a:rPr sz="900">
-                <a:solidFill>
-                  <a:srgbClr val="1F3A5F"/>
-                </a:solidFill>
-              </a:rPr>
-              <a:t>Gram 82: Constitution-class contact bearing 066, codename Kronos</a:t>
-            </a:r>
-          </a:p>
-        </p:txBody>
-      </p:sp>
-      <p:sp>
-        <p:nvSpPr>
-          <p:cNvPr id="20" name="TextBox 19"/>
-          <p:cNvSpPr txBox="1"/>
-          <p:nvPr/>
-        </p:nvSpPr>
-        <p:spPr>
-          <a:xfrm>
-            <a:off x="7240219" y="3066288"/>
-            <a:ext cx="2200046" cy="1447800"/>
-          </a:xfrm>
-          <a:prstGeom prst="rect">
-            <a:avLst/>
-          </a:prstGeom>
-          <a:noFill/>
-        </p:spPr>
-        <p:txBody>
-          <a:bodyPr wrap="square">
-            <a:spAutoFit/>
-          </a:bodyPr>
-          <a:lstStyle/>
-          <a:p>
-            <a:r>
-              <a:rPr sz="800">
-                <a:hlinkClick r:id="rId31"/>
-              </a:rPr>
-              <a:t>Lofar 1</a:t>
-            </a:r>
-          </a:p>
-          <a:p>
-            <a:r>
-              <a:rPr sz="800">
-                <a:hlinkClick r:id="rId32"/>
-              </a:rPr>
-              <a:t>Lofar 2</a:t>
-            </a:r>
-          </a:p>
-          <a:p>
-            <a:r>
-              <a:rPr sz="800">
-                <a:hlinkClick r:id="rId33"/>
-              </a:rPr>
-              <a:t>Lofar 3</a:t>
-            </a:r>
-          </a:p>
-        </p:txBody>
-      </p:sp>
-      <p:sp>
-        <p:nvSpPr>
-          <p:cNvPr id="21" name="Rounded Rectangle 20"/>
-          <p:cNvSpPr/>
-          <p:nvPr>
-            <a:hlinkClick r:id="rId34"/>
-          </p:nvPr>
-        </p:nvSpPr>
-        <p:spPr>
-          <a:xfrm>
-            <a:off x="9531705" y="2682240"/>
-            <a:ext cx="2200046" cy="365760"/>
-          </a:xfrm>
-          <a:prstGeom prst="roundRect">
-            <a:avLst/>
-          </a:prstGeom>
-          <a:solidFill>
-            <a:srgbClr val="E8EEF7"/>
-          </a:solidFill>
-          <a:ln>
-            <a:solidFill>
-              <a:srgbClr val="1F3A5F"/>
-            </a:solidFill>
-          </a:ln>
-        </p:spPr>
-        <p:style>
-          <a:lnRef idx="1">
-            <a:schemeClr val="accent1"/>
-          </a:lnRef>
-          <a:fillRef idx="3">
-            <a:schemeClr val="accent1"/>
-          </a:fillRef>
-          <a:effectRef idx="2">
-            <a:schemeClr val="accent1"/>
-          </a:effectRef>
-          <a:fontRef idx="minor">
-            <a:schemeClr val="lt1"/>
-          </a:fontRef>
-        </p:style>
-        <p:txBody>
-          <a:bodyPr rtlCol="0" anchor="ctr" lIns="45720" rIns="45720"/>
-          <a:lstStyle/>
-          <a:p>
-            <a:pPr algn="ctr"/>
-            <a:r>
-              <a:rPr sz="900">
-                <a:solidFill>
-                  <a:srgbClr val="1F3A5F"/>
-                </a:solidFill>
-              </a:rPr>
-              <a:t>Gram 83: FR A-wing, Category 2, Vulcan</a:t>
-            </a:r>
-          </a:p>
-        </p:txBody>
-      </p:sp>
-      <p:sp>
-        <p:nvSpPr>
-          <p:cNvPr id="22" name="TextBox 21"/>
-          <p:cNvSpPr txBox="1"/>
-          <p:nvPr/>
-        </p:nvSpPr>
-        <p:spPr>
-          <a:xfrm>
-            <a:off x="9531705" y="3066288"/>
-            <a:ext cx="2200046" cy="1447800"/>
-          </a:xfrm>
-          <a:prstGeom prst="rect">
-            <a:avLst/>
-          </a:prstGeom>
-          <a:noFill/>
-        </p:spPr>
-        <p:txBody>
-          <a:bodyPr wrap="square">
-            <a:spAutoFit/>
-          </a:bodyPr>
-          <a:lstStyle/>
-          <a:p>
-            <a:r>
-              <a:rPr sz="800">
-                <a:hlinkClick r:id="rId35"/>
-              </a:rPr>
-              <a:t>Lofar 1</a:t>
-            </a:r>
-          </a:p>
-        </p:txBody>
-      </p:sp>
-      <p:sp>
-        <p:nvSpPr>
-          <p:cNvPr id="23" name="Rounded Rectangle 22"/>
-          <p:cNvSpPr/>
-          <p:nvPr>
-            <a:hlinkClick r:id="rId36"/>
-          </p:nvPr>
-        </p:nvSpPr>
-        <p:spPr>
-          <a:xfrm>
-            <a:off x="365760" y="4632960"/>
-            <a:ext cx="2200046" cy="365760"/>
-          </a:xfrm>
-          <a:prstGeom prst="roundRect">
-            <a:avLst/>
-          </a:prstGeom>
-          <a:solidFill>
-            <a:srgbClr val="E8EEF7"/>
-          </a:solidFill>
-          <a:ln>
-            <a:solidFill>
-              <a:srgbClr val="1F3A5F"/>
-            </a:solidFill>
-          </a:ln>
-        </p:spPr>
-        <p:style>
-          <a:lnRef idx="1">
-            <a:schemeClr val="accent1"/>
-          </a:lnRef>
-          <a:fillRef idx="3">
-            <a:schemeClr val="accent1"/>
-          </a:fillRef>
-          <a:effectRef idx="2">
-            <a:schemeClr val="accent1"/>
-          </a:effectRef>
-          <a:fontRef idx="minor">
-            <a:schemeClr val="lt1"/>
-          </a:fontRef>
-        </p:style>
-        <p:txBody>
-          <a:bodyPr rtlCol="0" anchor="ctr" lIns="45720" rIns="45720"/>
-          <a:lstStyle/>
-          <a:p>
-            <a:pPr algn="ctr"/>
-            <a:r>
-              <a:rPr sz="900">
-                <a:solidFill>
-                  <a:srgbClr val="1F3A5F"/>
-                </a:solidFill>
-              </a:rPr>
-              <a:t>Gram 84: FR Slave I, Category 4, Risa</a:t>
-            </a:r>
-          </a:p>
-        </p:txBody>
-      </p:sp>
-      <p:sp>
-        <p:nvSpPr>
-          <p:cNvPr id="24" name="TextBox 23"/>
-          <p:cNvSpPr txBox="1"/>
-          <p:nvPr/>
-        </p:nvSpPr>
-        <p:spPr>
-          <a:xfrm>
-            <a:off x="365760" y="5017008"/>
-            <a:ext cx="2200046" cy="1447800"/>
-          </a:xfrm>
-          <a:prstGeom prst="rect">
-            <a:avLst/>
-          </a:prstGeom>
-          <a:noFill/>
-        </p:spPr>
-        <p:txBody>
-          <a:bodyPr wrap="square">
-            <a:spAutoFit/>
-          </a:bodyPr>
-          <a:lstStyle/>
-          <a:p>
-            <a:r>
-              <a:rPr sz="800">
-                <a:hlinkClick r:id="rId37"/>
-              </a:rPr>
-              <a:t>Lofar 1</a:t>
-            </a:r>
-          </a:p>
-          <a:p>
-            <a:r>
-              <a:rPr sz="800">
-                <a:hlinkClick r:id="rId38"/>
-              </a:rPr>
-              <a:t>Lofar 2</a:t>
-            </a:r>
-          </a:p>
-          <a:p>
-            <a:r>
-              <a:rPr sz="800">
-                <a:hlinkClick r:id="rId39"/>
-              </a:rPr>
-              <a:t>Lofar 3</a:t>
-            </a:r>
-          </a:p>
-          <a:p>
-            <a:r>
-              <a:rPr sz="800">
-                <a:hlinkClick r:id="rId40"/>
-              </a:rPr>
-              <a:t>Lofar 4</a:t>
-            </a:r>
-          </a:p>
-        </p:txBody>
-      </p:sp>
-      <p:sp>
-        <p:nvSpPr>
-          <p:cNvPr id="25" name="Rounded Rectangle 24"/>
-          <p:cNvSpPr/>
-          <p:nvPr>
-            <a:hlinkClick r:id="rId41"/>
-          </p:nvPr>
-        </p:nvSpPr>
-        <p:spPr>
-          <a:xfrm>
-            <a:off x="2657246" y="4632960"/>
-            <a:ext cx="2200046" cy="365760"/>
-          </a:xfrm>
-          <a:prstGeom prst="roundRect">
-            <a:avLst/>
-          </a:prstGeom>
-          <a:solidFill>
-            <a:srgbClr val="E8EEF7"/>
-          </a:solidFill>
-          <a:ln>
-            <a:solidFill>
-              <a:srgbClr val="1F3A5F"/>
-            </a:solidFill>
-          </a:ln>
-        </p:spPr>
-        <p:style>
-          <a:lnRef idx="1">
-            <a:schemeClr val="accent1"/>
-          </a:lnRef>
-          <a:fillRef idx="3">
-            <a:schemeClr val="accent1"/>
-          </a:fillRef>
-          <a:effectRef idx="2">
-            <a:schemeClr val="accent1"/>
-          </a:effectRef>
-          <a:fontRef idx="minor">
-            <a:schemeClr val="lt1"/>
-          </a:fontRef>
-        </p:style>
-        <p:txBody>
-          <a:bodyPr rtlCol="0" anchor="ctr" lIns="45720" rIns="45720"/>
-          <a:lstStyle/>
-          <a:p>
-            <a:pPr algn="ctr"/>
-            <a:r>
-              <a:rPr sz="900">
-                <a:solidFill>
-                  <a:srgbClr val="1F3A5F"/>
-                </a:solidFill>
-              </a:rPr>
-              <a:t>Gram 85: FR Razor Crest, Category 3, Bajor</a:t>
-            </a:r>
-          </a:p>
-        </p:txBody>
-      </p:sp>
-      <p:sp>
-        <p:nvSpPr>
-          <p:cNvPr id="26" name="TextBox 25"/>
-          <p:cNvSpPr txBox="1"/>
-          <p:nvPr/>
-        </p:nvSpPr>
-        <p:spPr>
-          <a:xfrm>
-            <a:off x="2657246" y="5017008"/>
-            <a:ext cx="2200046" cy="1447800"/>
-          </a:xfrm>
-          <a:prstGeom prst="rect">
-            <a:avLst/>
-          </a:prstGeom>
-          <a:noFill/>
-        </p:spPr>
-        <p:txBody>
-          <a:bodyPr wrap="square">
-            <a:spAutoFit/>
-          </a:bodyPr>
-          <a:lstStyle/>
-          <a:p>
-            <a:r>
-              <a:rPr sz="800">
-                <a:hlinkClick r:id="rId42"/>
-              </a:rPr>
-              <a:t>Lofar 1</a:t>
-            </a:r>
-          </a:p>
-          <a:p>
-            <a:r>
-              <a:rPr sz="800">
-                <a:hlinkClick r:id="rId43"/>
-              </a:rPr>
-              <a:t>Lofar 2</a:t>
-            </a:r>
-          </a:p>
-        </p:txBody>
-      </p:sp>
-      <p:sp>
-        <p:nvSpPr>
-          <p:cNvPr id="27" name="Rounded Rectangle 26"/>
-          <p:cNvSpPr/>
-          <p:nvPr>
-            <a:hlinkClick r:id="rId44"/>
-          </p:nvPr>
-        </p:nvSpPr>
-        <p:spPr>
-          <a:xfrm>
-            <a:off x="4948732" y="4632960"/>
-            <a:ext cx="2200046" cy="365760"/>
-          </a:xfrm>
-          <a:prstGeom prst="roundRect">
-            <a:avLst/>
-          </a:prstGeom>
-          <a:solidFill>
-            <a:srgbClr val="E8EEF7"/>
-          </a:solidFill>
-          <a:ln>
-            <a:solidFill>
-              <a:srgbClr val="1F3A5F"/>
-            </a:solidFill>
-          </a:ln>
-        </p:spPr>
-        <p:style>
-          <a:lnRef idx="1">
-            <a:schemeClr val="accent1"/>
-          </a:lnRef>
-          <a:fillRef idx="3">
-            <a:schemeClr val="accent1"/>
-          </a:fillRef>
-          <a:effectRef idx="2">
-            <a:schemeClr val="accent1"/>
-          </a:effectRef>
-          <a:fontRef idx="minor">
-            <a:schemeClr val="lt1"/>
-          </a:fontRef>
-        </p:style>
-        <p:txBody>
-          <a:bodyPr rtlCol="0" anchor="ctr" lIns="45720" rIns="45720"/>
-          <a:lstStyle/>
-          <a:p>
-            <a:pPr algn="ctr"/>
-            <a:r>
-              <a:rPr sz="900">
-                <a:solidFill>
-                  <a:srgbClr val="1F3A5F"/>
-                </a:solidFill>
-              </a:rPr>
-              <a:t>Gram 86: FR Devastator, Category 2, Betazed</a:t>
-            </a:r>
-          </a:p>
-        </p:txBody>
-      </p:sp>
-      <p:sp>
-        <p:nvSpPr>
-          <p:cNvPr id="28" name="TextBox 27"/>
-          <p:cNvSpPr txBox="1"/>
-          <p:nvPr/>
-        </p:nvSpPr>
-        <p:spPr>
-          <a:xfrm>
-            <a:off x="4948732" y="5017008"/>
-            <a:ext cx="2200046" cy="1447800"/>
-          </a:xfrm>
-          <a:prstGeom prst="rect">
-            <a:avLst/>
-          </a:prstGeom>
-          <a:noFill/>
-        </p:spPr>
-        <p:txBody>
-          <a:bodyPr wrap="square">
-            <a:spAutoFit/>
-          </a:bodyPr>
-          <a:lstStyle/>
-          <a:p>
-            <a:r>
-              <a:rPr sz="800">
-                <a:hlinkClick r:id="rId45"/>
-              </a:rPr>
-              <a:t>Lofar 1</a:t>
-            </a:r>
-          </a:p>
-        </p:txBody>
-      </p:sp>
-      <p:sp>
-        <p:nvSpPr>
-          <p:cNvPr id="29" name="Rounded Rectangle 28"/>
-          <p:cNvSpPr/>
-          <p:nvPr>
-            <a:hlinkClick r:id="rId46"/>
-          </p:nvPr>
-        </p:nvSpPr>
-        <p:spPr>
-          <a:xfrm>
-            <a:off x="7240219" y="4632960"/>
-            <a:ext cx="2200046" cy="365760"/>
-          </a:xfrm>
-          <a:prstGeom prst="roundRect">
-            <a:avLst/>
-          </a:prstGeom>
-          <a:solidFill>
-            <a:srgbClr val="E8EEF7"/>
-          </a:solidFill>
-          <a:ln>
-            <a:solidFill>
-              <a:srgbClr val="1F3A5F"/>
-            </a:solidFill>
-          </a:ln>
-        </p:spPr>
-        <p:style>
-          <a:lnRef idx="1">
-            <a:schemeClr val="accent1"/>
-          </a:lnRef>
-          <a:fillRef idx="3">
-            <a:schemeClr val="accent1"/>
-          </a:fillRef>
-          <a:effectRef idx="2">
-            <a:schemeClr val="accent1"/>
-          </a:effectRef>
-          <a:fontRef idx="minor">
-            <a:schemeClr val="lt1"/>
-          </a:fontRef>
-        </p:style>
-        <p:txBody>
-          <a:bodyPr rtlCol="0" anchor="ctr" lIns="45720" rIns="45720"/>
-          <a:lstStyle/>
-          <a:p>
-            <a:pPr algn="ctr"/>
-            <a:r>
-              <a:rPr sz="900">
-                <a:solidFill>
-                  <a:srgbClr val="1F3A5F"/>
-                </a:solidFill>
-              </a:rPr>
-              <a:t>Gram 87: FR Sovereign-class, Category 3, Dagobah</a:t>
-            </a:r>
-          </a:p>
-        </p:txBody>
-      </p:sp>
-      <p:sp>
-        <p:nvSpPr>
-          <p:cNvPr id="30" name="TextBox 29"/>
-          <p:cNvSpPr txBox="1"/>
-          <p:nvPr/>
-        </p:nvSpPr>
-        <p:spPr>
-          <a:xfrm>
-            <a:off x="7240219" y="5017008"/>
-            <a:ext cx="2200046" cy="1447800"/>
-          </a:xfrm>
-          <a:prstGeom prst="rect">
-            <a:avLst/>
-          </a:prstGeom>
-          <a:noFill/>
-        </p:spPr>
-        <p:txBody>
-          <a:bodyPr wrap="square">
-            <a:spAutoFit/>
-          </a:bodyPr>
-          <a:lstStyle/>
-          <a:p>
-            <a:r>
-              <a:rPr sz="800">
-                <a:hlinkClick r:id="rId47"/>
-              </a:rPr>
-              <a:t>Lofar 1</a:t>
-            </a:r>
-          </a:p>
-          <a:p>
-            <a:r>
-              <a:rPr sz="800">
-                <a:hlinkClick r:id="rId48"/>
-              </a:rPr>
-              <a:t>Lofar 2</a:t>
-            </a:r>
-          </a:p>
-        </p:txBody>
-      </p:sp>
-      <p:sp>
-        <p:nvSpPr>
-          <p:cNvPr id="31" name="Rounded Rectangle 30"/>
-          <p:cNvSpPr/>
-          <p:nvPr>
-            <a:hlinkClick r:id="rId49"/>
-          </p:nvPr>
-        </p:nvSpPr>
-        <p:spPr>
-          <a:xfrm>
-            <a:off x="9531705" y="4632960"/>
-            <a:ext cx="2200046" cy="365760"/>
-          </a:xfrm>
-          <a:prstGeom prst="roundRect">
-            <a:avLst/>
-          </a:prstGeom>
-          <a:solidFill>
-            <a:srgbClr val="E8EEF7"/>
-          </a:solidFill>
-          <a:ln>
-            <a:solidFill>
-              <a:srgbClr val="1F3A5F"/>
-            </a:solidFill>
-          </a:ln>
-        </p:spPr>
-        <p:style>
-          <a:lnRef idx="1">
-            <a:schemeClr val="accent1"/>
-          </a:lnRef>
-          <a:fillRef idx="3">
-            <a:schemeClr val="accent1"/>
-          </a:fillRef>
-          <a:effectRef idx="2">
-            <a:schemeClr val="accent1"/>
-          </a:effectRef>
-          <a:fontRef idx="minor">
-            <a:schemeClr val="lt1"/>
-          </a:fontRef>
-        </p:style>
-        <p:txBody>
-          <a:bodyPr rtlCol="0" anchor="ctr" lIns="45720" rIns="45720"/>
-          <a:lstStyle/>
-          <a:p>
-            <a:pPr algn="ctr"/>
-            <a:r>
-              <a:rPr sz="900">
-                <a:solidFill>
-                  <a:srgbClr val="1F3A5F"/>
-                </a:solidFill>
-              </a:rPr>
-              <a:t>Gram 88: FR Nebula-class, Category 1, Cardassia</a:t>
-            </a:r>
-          </a:p>
-        </p:txBody>
-      </p:sp>
-      <p:sp>
-        <p:nvSpPr>
-          <p:cNvPr id="32" name="TextBox 31"/>
-          <p:cNvSpPr txBox="1"/>
-          <p:nvPr/>
-        </p:nvSpPr>
-        <p:spPr>
-          <a:xfrm>
-            <a:off x="9531705" y="5017008"/>
-            <a:ext cx="2200046" cy="1447800"/>
-          </a:xfrm>
-          <a:prstGeom prst="rect">
-            <a:avLst/>
-          </a:prstGeom>
-          <a:noFill/>
-        </p:spPr>
-        <p:txBody>
-          <a:bodyPr wrap="square">
-            <a:spAutoFit/>
-          </a:bodyPr>
-          <a:lstStyle/>
-          <a:p>
-            <a:r>
-              <a:rPr sz="800">
-                <a:hlinkClick r:id="rId50"/>
-              </a:rPr>
-              <a:t>Lofar 1</a:t>
-            </a:r>
-          </a:p>
-          <a:p>
-            <a:r>
-              <a:rPr sz="800">
-                <a:hlinkClick r:id="rId51"/>
-              </a:rPr>
-              <a:t>Lofar 2</a:t>
-            </a:r>
-          </a:p>
-        </p:txBody>
-      </p:sp>
-    </p:spTree>
-  </p:cSld>
-  <p:clrMapOvr>
-    <a:masterClrMapping/>
-  </p:clrMapOvr>
-</p:sld>
-</file>
-
-<file path=ppt/slides/slide7.xml><?xml version="1.0" encoding="utf-8"?>
-<p:sld xmlns:a="http://schemas.openxmlformats.org/drawingml/2006/main" xmlns:p="http://schemas.openxmlformats.org/presentationml/2006/main" xmlns:r="http://schemas.openxmlformats.org/officeDocument/2006/relationships">
-  <p:cSld>
-    <p:spTree>
-      <p:nvGrpSpPr>
-        <p:cNvPr id="1" name=""/>
-        <p:cNvGrpSpPr/>
-        <p:nvPr/>
-      </p:nvGrpSpPr>
-      <p:grpSpPr/>
-      <p:sp>
-        <p:nvSpPr>
-          <p:cNvPr id="2" name="TextBox 1"/>
-          <p:cNvSpPr txBox="1"/>
-          <p:nvPr/>
-        </p:nvSpPr>
-        <p:spPr>
-          <a:xfrm>
-            <a:off x="914400" y="2377440"/>
-            <a:ext cx="10360152" cy="1280160"/>
-          </a:xfrm>
-          <a:prstGeom prst="rect">
-            <a:avLst/>
-          </a:prstGeom>
-          <a:noFill/>
-        </p:spPr>
-        <p:txBody>
-          <a:bodyPr wrap="square">
-            <a:spAutoFit/>
-          </a:bodyPr>
-          <a:lstStyle/>
-          <a:p>
-            <a:pPr algn="ctr"/>
-            <a:r>
-              <a:rPr sz="4000" b="1">
-                <a:solidFill>
-                  <a:srgbClr val="1F3A5F"/>
-                </a:solidFill>
-              </a:rPr>
-              <a:t>End of Instructor Pub10_Ed22B_Updated</a:t>
-            </a:r>
-          </a:p>
-        </p:txBody>
-      </p:sp>
-      <p:sp>
-        <p:nvSpPr>
-          <p:cNvPr id="3" name="TextBox 2"/>
-          <p:cNvSpPr txBox="1"/>
-          <p:nvPr/>
-        </p:nvSpPr>
-        <p:spPr>
-          <a:xfrm>
-            <a:off x="914400" y="3840480"/>
-            <a:ext cx="10360152" cy="731520"/>
-          </a:xfrm>
-          <a:prstGeom prst="rect">
-            <a:avLst/>
-          </a:prstGeom>
-          <a:noFill/>
-        </p:spPr>
-        <p:txBody>
-          <a:bodyPr wrap="none">
-            <a:spAutoFit/>
-          </a:bodyPr>
-          <a:lstStyle/>
-          <a:p>
-            <a:pPr algn="ctr"/>
-            <a:r>
-              <a:rPr sz="2400">
-                <a:solidFill>
-                  <a:srgbClr val="1F3A5F"/>
-                </a:solidFill>
-              </a:rPr>
-              <a:t>Instructor Version</a:t>
             </a:r>
           </a:p>
         </p:txBody>

--- a/source/Instructor Pub10_Ed22B_Updated/Instructor Pub10_Ed22B_Updated.pptx
+++ b/source/Instructor Pub10_Ed22B_Updated/Instructor Pub10_Ed22B_Updated.pptx
@@ -10,6 +10,8 @@
     <p:sldId id="258" r:id="rId9"/>
     <p:sldId id="259" r:id="rId10"/>
     <p:sldId id="260" r:id="rId11"/>
+    <p:sldId id="261" r:id="rId12"/>
+    <p:sldId id="262" r:id="rId13"/>
   </p:sldIdLst>
   <p:sldSz cx="12188952" cy="6858000" type="screen4x3"/>
   <p:notesSz cx="6858000" cy="9144000"/>
@@ -3094,120 +3096,48 @@
       <p:grpSpPr/>
       <p:sp>
         <p:nvSpPr>
-          <p:cNvPr id="2" name="Rectangle 1"/>
-          <p:cNvSpPr/>
-          <p:nvPr/>
-        </p:nvSpPr>
-        <p:spPr>
-          <a:xfrm>
-            <a:off x="0" y="0"/>
-            <a:ext cx="12188952" cy="548640"/>
+          <p:cNvPr id="2" name="TextBox 1"/>
+          <p:cNvSpPr txBox="1"/>
+          <p:nvPr/>
+        </p:nvSpPr>
+        <p:spPr>
+          <a:xfrm>
+            <a:off x="914400" y="2377440"/>
+            <a:ext cx="10360152" cy="1280160"/>
           </a:xfrm>
           <a:prstGeom prst="rect">
             <a:avLst/>
           </a:prstGeom>
-          <a:solidFill>
-            <a:srgbClr val="1F3A5F"/>
-          </a:solidFill>
-          <a:ln>
-            <a:noFill/>
-          </a:ln>
-        </p:spPr>
-        <p:style>
-          <a:lnRef idx="1">
-            <a:schemeClr val="accent1"/>
-          </a:lnRef>
-          <a:fillRef idx="3">
-            <a:schemeClr val="accent1"/>
-          </a:fillRef>
-          <a:effectRef idx="2">
-            <a:schemeClr val="accent1"/>
-          </a:effectRef>
-          <a:fontRef idx="minor">
-            <a:schemeClr val="lt1"/>
-          </a:fontRef>
-        </p:style>
-        <p:txBody>
-          <a:bodyPr rtlCol="0" anchor="ctr" lIns="182880" rIns="182880"/>
+          <a:noFill/>
+        </p:spPr>
+        <p:txBody>
+          <a:bodyPr wrap="square">
+            <a:spAutoFit/>
+          </a:bodyPr>
           <a:lstStyle/>
           <a:p>
             <a:pPr algn="ctr"/>
             <a:r>
-              <a:rPr sz="2000" b="1">
-                <a:solidFill>
-                  <a:srgbClr val="FFFFFF"/>
-                </a:solidFill>
-              </a:rPr>
-              <a:t>Instructor Pub10_Ed22B_Updated — Page 1 of 5</a:t>
-            </a:r>
-          </a:p>
-        </p:txBody>
-      </p:sp>
-      <p:sp>
-        <p:nvSpPr>
-          <p:cNvPr id="3" name="Rounded Rectangle 2">
-            <a:hlinkClick r:id="rId2"/>
-          </p:cNvPr>
-          <p:cNvSpPr/>
-          <p:nvPr/>
-        </p:nvSpPr>
-        <p:spPr>
-          <a:xfrm>
-            <a:off x="365760" y="731520"/>
-            <a:ext cx="2200046" cy="365760"/>
-          </a:xfrm>
-          <a:prstGeom prst="roundRect">
-            <a:avLst/>
-          </a:prstGeom>
-          <a:solidFill>
-            <a:srgbClr val="E8EEF7"/>
-          </a:solidFill>
-          <a:ln>
-            <a:solidFill>
-              <a:srgbClr val="1F3A5F"/>
-            </a:solidFill>
-          </a:ln>
-        </p:spPr>
-        <p:style>
-          <a:lnRef idx="1">
-            <a:schemeClr val="accent1"/>
-          </a:lnRef>
-          <a:fillRef idx="3">
-            <a:schemeClr val="accent1"/>
-          </a:fillRef>
-          <a:effectRef idx="2">
-            <a:schemeClr val="accent1"/>
-          </a:effectRef>
-          <a:fontRef idx="minor">
-            <a:schemeClr val="lt1"/>
-          </a:fontRef>
-        </p:style>
-        <p:txBody>
-          <a:bodyPr rtlCol="0" anchor="ctr" lIns="45720" rIns="45720"/>
-          <a:lstStyle/>
-          <a:p>
-            <a:pPr algn="ctr"/>
-            <a:r>
-              <a:rPr sz="900">
+              <a:rPr sz="4000" b="1">
                 <a:solidFill>
                   <a:srgbClr val="1F3A5F"/>
                 </a:solidFill>
               </a:rPr>
-              <a:t>Gram 1: FR Outrider, Category 4, Tantive</a:t>
-            </a:r>
-          </a:p>
-        </p:txBody>
-      </p:sp>
-      <p:sp>
-        <p:nvSpPr>
-          <p:cNvPr id="4" name="TextBox 3"/>
+              <a:t>Welcome to Instructor Pub10_Ed22B_Updated</a:t>
+            </a:r>
+          </a:p>
+        </p:txBody>
+      </p:sp>
+      <p:sp>
+        <p:nvSpPr>
+          <p:cNvPr id="3" name="TextBox 2"/>
           <p:cNvSpPr txBox="1"/>
           <p:nvPr/>
         </p:nvSpPr>
         <p:spPr>
           <a:xfrm>
-            <a:off x="365760" y="1115568"/>
-            <a:ext cx="2200046" cy="1447800"/>
+            <a:off x="914400" y="3840480"/>
+            <a:ext cx="10360152" cy="731520"/>
           </a:xfrm>
           <a:prstGeom prst="rect">
             <a:avLst/>
@@ -3215,1412 +3145,19 @@
           <a:noFill/>
         </p:spPr>
         <p:txBody>
-          <a:bodyPr wrap="square">
+          <a:bodyPr wrap="none">
             <a:spAutoFit/>
           </a:bodyPr>
           <a:lstStyle/>
           <a:p>
-            <a:r>
-              <a:rPr sz="800">
-                <a:hlinkClick r:id="rId3"/>
-              </a:rPr>
-              <a:t>Lofar 1</a:t>
-            </a:r>
-          </a:p>
-          <a:p>
-            <a:r>
-              <a:rPr sz="800">
-                <a:hlinkClick r:id="rId4"/>
-              </a:rPr>
-              <a:t>Lofar 2</a:t>
-            </a:r>
-          </a:p>
-          <a:p>
-            <a:r>
-              <a:rPr sz="800">
-                <a:hlinkClick r:id="rId5"/>
-              </a:rPr>
-              <a:t>Lofar 3</a:t>
-            </a:r>
-          </a:p>
-        </p:txBody>
-      </p:sp>
-      <p:sp>
-        <p:nvSpPr>
-          <p:cNvPr id="5" name="Rounded Rectangle 4">
-            <a:hlinkClick r:id="rId6"/>
-          </p:cNvPr>
-          <p:cNvSpPr/>
-          <p:nvPr/>
-        </p:nvSpPr>
-        <p:spPr>
-          <a:xfrm>
-            <a:off x="2657246" y="731520"/>
-            <a:ext cx="2200046" cy="365760"/>
-          </a:xfrm>
-          <a:prstGeom prst="roundRect">
-            <a:avLst/>
-          </a:prstGeom>
-          <a:solidFill>
-            <a:srgbClr val="E8EEF7"/>
-          </a:solidFill>
-          <a:ln>
-            <a:solidFill>
-              <a:srgbClr val="1F3A5F"/>
-            </a:solidFill>
-          </a:ln>
-        </p:spPr>
-        <p:style>
-          <a:lnRef idx="1">
-            <a:schemeClr val="accent1"/>
-          </a:lnRef>
-          <a:fillRef idx="3">
-            <a:schemeClr val="accent1"/>
-          </a:fillRef>
-          <a:effectRef idx="2">
-            <a:schemeClr val="accent1"/>
-          </a:effectRef>
-          <a:fontRef idx="minor">
-            <a:schemeClr val="lt1"/>
-          </a:fontRef>
-        </p:style>
-        <p:txBody>
-          <a:bodyPr rtlCol="0" anchor="ctr" lIns="45720" rIns="45720"/>
-          <a:lstStyle/>
-          <a:p>
             <a:pPr algn="ctr"/>
             <a:r>
-              <a:rPr sz="900">
+              <a:rPr sz="2400">
                 <a:solidFill>
                   <a:srgbClr val="1F3A5F"/>
                 </a:solidFill>
               </a:rPr>
-              <a:t>Gram 2: FR Millennium Falcon, Category 1, Hoth</a:t>
-            </a:r>
-          </a:p>
-        </p:txBody>
-      </p:sp>
-      <p:sp>
-        <p:nvSpPr>
-          <p:cNvPr id="6" name="TextBox 5"/>
-          <p:cNvSpPr txBox="1"/>
-          <p:nvPr/>
-        </p:nvSpPr>
-        <p:spPr>
-          <a:xfrm>
-            <a:off x="2657246" y="1115568"/>
-            <a:ext cx="2200046" cy="1447800"/>
-          </a:xfrm>
-          <a:prstGeom prst="rect">
-            <a:avLst/>
-          </a:prstGeom>
-          <a:noFill/>
-        </p:spPr>
-        <p:txBody>
-          <a:bodyPr wrap="square">
-            <a:spAutoFit/>
-          </a:bodyPr>
-          <a:lstStyle/>
-          <a:p>
-            <a:r>
-              <a:rPr sz="800">
-                <a:hlinkClick r:id="rId7"/>
-              </a:rPr>
-              <a:t>Lofar 1</a:t>
-            </a:r>
-          </a:p>
-          <a:p>
-            <a:r>
-              <a:rPr sz="800">
-                <a:hlinkClick r:id="rId8"/>
-              </a:rPr>
-              <a:t>Lofar 2</a:t>
-            </a:r>
-          </a:p>
-        </p:txBody>
-      </p:sp>
-      <p:sp>
-        <p:nvSpPr>
-          <p:cNvPr id="7" name="Rounded Rectangle 6">
-            <a:hlinkClick r:id="rId9"/>
-          </p:cNvPr>
-          <p:cNvSpPr/>
-          <p:nvPr/>
-        </p:nvSpPr>
-        <p:spPr>
-          <a:xfrm>
-            <a:off x="4948732" y="731520"/>
-            <a:ext cx="2200046" cy="365760"/>
-          </a:xfrm>
-          <a:prstGeom prst="roundRect">
-            <a:avLst/>
-          </a:prstGeom>
-          <a:solidFill>
-            <a:srgbClr val="E8EEF7"/>
-          </a:solidFill>
-          <a:ln>
-            <a:solidFill>
-              <a:srgbClr val="1F3A5F"/>
-            </a:solidFill>
-          </a:ln>
-        </p:spPr>
-        <p:style>
-          <a:lnRef idx="1">
-            <a:schemeClr val="accent1"/>
-          </a:lnRef>
-          <a:fillRef idx="3">
-            <a:schemeClr val="accent1"/>
-          </a:fillRef>
-          <a:effectRef idx="2">
-            <a:schemeClr val="accent1"/>
-          </a:effectRef>
-          <a:fontRef idx="minor">
-            <a:schemeClr val="lt1"/>
-          </a:fontRef>
-        </p:style>
-        <p:txBody>
-          <a:bodyPr rtlCol="0" anchor="ctr" lIns="45720" rIns="45720"/>
-          <a:lstStyle/>
-          <a:p>
-            <a:pPr algn="ctr"/>
-            <a:r>
-              <a:rPr sz="900">
-                <a:solidFill>
-                  <a:srgbClr val="1F3A5F"/>
-                </a:solidFill>
-              </a:rPr>
-              <a:t>Gram 3: Intrepid-class contact bearing 281, codename Dagobah</a:t>
-            </a:r>
-          </a:p>
-        </p:txBody>
-      </p:sp>
-      <p:sp>
-        <p:nvSpPr>
-          <p:cNvPr id="8" name="TextBox 7"/>
-          <p:cNvSpPr txBox="1"/>
-          <p:nvPr/>
-        </p:nvSpPr>
-        <p:spPr>
-          <a:xfrm>
-            <a:off x="4948732" y="1115568"/>
-            <a:ext cx="2200046" cy="1447800"/>
-          </a:xfrm>
-          <a:prstGeom prst="rect">
-            <a:avLst/>
-          </a:prstGeom>
-          <a:noFill/>
-        </p:spPr>
-        <p:txBody>
-          <a:bodyPr wrap="square">
-            <a:spAutoFit/>
-          </a:bodyPr>
-          <a:lstStyle/>
-          <a:p>
-            <a:r>
-              <a:rPr sz="800">
-                <a:hlinkClick r:id="rId10"/>
-              </a:rPr>
-              <a:t>Lofar 1</a:t>
-            </a:r>
-          </a:p>
-          <a:p>
-            <a:r>
-              <a:rPr sz="800">
-                <a:hlinkClick r:id="rId11"/>
-              </a:rPr>
-              <a:t>Lofar 2</a:t>
-            </a:r>
-          </a:p>
-          <a:p>
-            <a:r>
-              <a:rPr sz="800">
-                <a:hlinkClick r:id="rId12"/>
-              </a:rPr>
-              <a:t>Lofar 3</a:t>
-            </a:r>
-          </a:p>
-        </p:txBody>
-      </p:sp>
-      <p:sp>
-        <p:nvSpPr>
-          <p:cNvPr id="9" name="Rounded Rectangle 8">
-            <a:hlinkClick r:id="rId13"/>
-          </p:cNvPr>
-          <p:cNvSpPr/>
-          <p:nvPr/>
-        </p:nvSpPr>
-        <p:spPr>
-          <a:xfrm>
-            <a:off x="7240219" y="731520"/>
-            <a:ext cx="2200046" cy="365760"/>
-          </a:xfrm>
-          <a:prstGeom prst="roundRect">
-            <a:avLst/>
-          </a:prstGeom>
-          <a:solidFill>
-            <a:srgbClr val="E8EEF7"/>
-          </a:solidFill>
-          <a:ln>
-            <a:solidFill>
-              <a:srgbClr val="1F3A5F"/>
-            </a:solidFill>
-          </a:ln>
-        </p:spPr>
-        <p:style>
-          <a:lnRef idx="1">
-            <a:schemeClr val="accent1"/>
-          </a:lnRef>
-          <a:fillRef idx="3">
-            <a:schemeClr val="accent1"/>
-          </a:fillRef>
-          <a:effectRef idx="2">
-            <a:schemeClr val="accent1"/>
-          </a:effectRef>
-          <a:fontRef idx="minor">
-            <a:schemeClr val="lt1"/>
-          </a:fontRef>
-        </p:style>
-        <p:txBody>
-          <a:bodyPr rtlCol="0" anchor="ctr" lIns="45720" rIns="45720"/>
-          <a:lstStyle/>
-          <a:p>
-            <a:pPr algn="ctr"/>
-            <a:r>
-              <a:rPr sz="900">
-                <a:solidFill>
-                  <a:srgbClr val="1F3A5F"/>
-                </a:solidFill>
-              </a:rPr>
-              <a:t>Gram 6: TIE Bomber contact bearing 018, codename Dank</a:t>
-            </a:r>
-          </a:p>
-        </p:txBody>
-      </p:sp>
-      <p:sp>
-        <p:nvSpPr>
-          <p:cNvPr id="10" name="TextBox 9"/>
-          <p:cNvSpPr txBox="1"/>
-          <p:nvPr/>
-        </p:nvSpPr>
-        <p:spPr>
-          <a:xfrm>
-            <a:off x="7240219" y="1115568"/>
-            <a:ext cx="2200046" cy="1447800"/>
-          </a:xfrm>
-          <a:prstGeom prst="rect">
-            <a:avLst/>
-          </a:prstGeom>
-          <a:noFill/>
-        </p:spPr>
-        <p:txBody>
-          <a:bodyPr wrap="square">
-            <a:spAutoFit/>
-          </a:bodyPr>
-          <a:lstStyle/>
-          <a:p>
-            <a:r>
-              <a:rPr sz="800">
-                <a:hlinkClick r:id="rId14"/>
-              </a:rPr>
-              <a:t>Lofar 1</a:t>
-            </a:r>
-          </a:p>
-          <a:p>
-            <a:r>
-              <a:rPr sz="800">
-                <a:hlinkClick r:id="rId15"/>
-              </a:rPr>
-              <a:t>Lofar 2</a:t>
-            </a:r>
-          </a:p>
-          <a:p>
-            <a:r>
-              <a:rPr sz="800">
-                <a:hlinkClick r:id="rId16"/>
-              </a:rPr>
-              <a:t>Lofar 3</a:t>
-            </a:r>
-          </a:p>
-        </p:txBody>
-      </p:sp>
-      <p:sp>
-        <p:nvSpPr>
-          <p:cNvPr id="11" name="Rounded Rectangle 10">
-            <a:hlinkClick r:id="rId17"/>
-          </p:cNvPr>
-          <p:cNvSpPr/>
-          <p:nvPr/>
-        </p:nvSpPr>
-        <p:spPr>
-          <a:xfrm>
-            <a:off x="9531705" y="731520"/>
-            <a:ext cx="2200046" cy="365760"/>
-          </a:xfrm>
-          <a:prstGeom prst="roundRect">
-            <a:avLst/>
-          </a:prstGeom>
-          <a:solidFill>
-            <a:srgbClr val="E8EEF7"/>
-          </a:solidFill>
-          <a:ln>
-            <a:solidFill>
-              <a:srgbClr val="1F3A5F"/>
-            </a:solidFill>
-          </a:ln>
-        </p:spPr>
-        <p:style>
-          <a:lnRef idx="1">
-            <a:schemeClr val="accent1"/>
-          </a:lnRef>
-          <a:fillRef idx="3">
-            <a:schemeClr val="accent1"/>
-          </a:fillRef>
-          <a:effectRef idx="2">
-            <a:schemeClr val="accent1"/>
-          </a:effectRef>
-          <a:fontRef idx="minor">
-            <a:schemeClr val="lt1"/>
-          </a:fontRef>
-        </p:style>
-        <p:txBody>
-          <a:bodyPr rtlCol="0" anchor="ctr" lIns="45720" rIns="45720"/>
-          <a:lstStyle/>
-          <a:p>
-            <a:pPr algn="ctr"/>
-            <a:r>
-              <a:rPr sz="900">
-                <a:solidFill>
-                  <a:srgbClr val="1F3A5F"/>
-                </a:solidFill>
-              </a:rPr>
-              <a:t>Gram 7: FR Outrider, Category 1, Romulus</a:t>
-            </a:r>
-          </a:p>
-        </p:txBody>
-      </p:sp>
-      <p:sp>
-        <p:nvSpPr>
-          <p:cNvPr id="12" name="TextBox 11"/>
-          <p:cNvSpPr txBox="1"/>
-          <p:nvPr/>
-        </p:nvSpPr>
-        <p:spPr>
-          <a:xfrm>
-            <a:off x="9531705" y="1115568"/>
-            <a:ext cx="2200046" cy="1447800"/>
-          </a:xfrm>
-          <a:prstGeom prst="rect">
-            <a:avLst/>
-          </a:prstGeom>
-          <a:noFill/>
-        </p:spPr>
-        <p:txBody>
-          <a:bodyPr wrap="square">
-            <a:spAutoFit/>
-          </a:bodyPr>
-          <a:lstStyle/>
-          <a:p>
-            <a:r>
-              <a:rPr sz="800">
-                <a:hlinkClick r:id="rId18"/>
-              </a:rPr>
-              <a:t>Lofar 1</a:t>
-            </a:r>
-          </a:p>
-          <a:p>
-            <a:r>
-              <a:rPr sz="800">
-                <a:hlinkClick r:id="rId19"/>
-              </a:rPr>
-              <a:t>Lofar 2</a:t>
-            </a:r>
-          </a:p>
-          <a:p>
-            <a:r>
-              <a:rPr sz="800">
-                <a:hlinkClick r:id="rId20"/>
-              </a:rPr>
-              <a:t>Lofar 3</a:t>
-            </a:r>
-          </a:p>
-          <a:p>
-            <a:r>
-              <a:rPr sz="800">
-                <a:hlinkClick r:id="rId21"/>
-              </a:rPr>
-              <a:t>Lofar 4</a:t>
-            </a:r>
-          </a:p>
-        </p:txBody>
-      </p:sp>
-      <p:sp>
-        <p:nvSpPr>
-          <p:cNvPr id="13" name="Rounded Rectangle 12">
-            <a:hlinkClick r:id="rId22"/>
-          </p:cNvPr>
-          <p:cNvSpPr/>
-          <p:nvPr/>
-        </p:nvSpPr>
-        <p:spPr>
-          <a:xfrm>
-            <a:off x="365760" y="2682240"/>
-            <a:ext cx="2200046" cy="365760"/>
-          </a:xfrm>
-          <a:prstGeom prst="roundRect">
-            <a:avLst/>
-          </a:prstGeom>
-          <a:solidFill>
-            <a:srgbClr val="E8EEF7"/>
-          </a:solidFill>
-          <a:ln>
-            <a:solidFill>
-              <a:srgbClr val="1F3A5F"/>
-            </a:solidFill>
-          </a:ln>
-        </p:spPr>
-        <p:style>
-          <a:lnRef idx="1">
-            <a:schemeClr val="accent1"/>
-          </a:lnRef>
-          <a:fillRef idx="3">
-            <a:schemeClr val="accent1"/>
-          </a:fillRef>
-          <a:effectRef idx="2">
-            <a:schemeClr val="accent1"/>
-          </a:effectRef>
-          <a:fontRef idx="minor">
-            <a:schemeClr val="lt1"/>
-          </a:fontRef>
-        </p:style>
-        <p:txBody>
-          <a:bodyPr rtlCol="0" anchor="ctr" lIns="45720" rIns="45720"/>
-          <a:lstStyle/>
-          <a:p>
-            <a:pPr algn="ctr"/>
-            <a:r>
-              <a:rPr sz="900">
-                <a:solidFill>
-                  <a:srgbClr val="1F3A5F"/>
-                </a:solidFill>
-              </a:rPr>
-              <a:t>Gram 9: B-wing contact bearing 007, codename Bespin</a:t>
-            </a:r>
-          </a:p>
-        </p:txBody>
-      </p:sp>
-      <p:sp>
-        <p:nvSpPr>
-          <p:cNvPr id="14" name="TextBox 13"/>
-          <p:cNvSpPr txBox="1"/>
-          <p:nvPr/>
-        </p:nvSpPr>
-        <p:spPr>
-          <a:xfrm>
-            <a:off x="365760" y="3066288"/>
-            <a:ext cx="2200046" cy="1447800"/>
-          </a:xfrm>
-          <a:prstGeom prst="rect">
-            <a:avLst/>
-          </a:prstGeom>
-          <a:noFill/>
-        </p:spPr>
-        <p:txBody>
-          <a:bodyPr wrap="square">
-            <a:spAutoFit/>
-          </a:bodyPr>
-          <a:lstStyle/>
-          <a:p>
-            <a:r>
-              <a:rPr sz="800">
-                <a:hlinkClick r:id="rId23"/>
-              </a:rPr>
-              <a:t>Lofar 1</a:t>
-            </a:r>
-          </a:p>
-          <a:p>
-            <a:r>
-              <a:rPr sz="800">
-                <a:hlinkClick r:id="rId24"/>
-              </a:rPr>
-              <a:t>Lofar 2</a:t>
-            </a:r>
-          </a:p>
-        </p:txBody>
-      </p:sp>
-      <p:sp>
-        <p:nvSpPr>
-          <p:cNvPr id="15" name="Rounded Rectangle 14">
-            <a:hlinkClick r:id="rId25"/>
-          </p:cNvPr>
-          <p:cNvSpPr/>
-          <p:nvPr/>
-        </p:nvSpPr>
-        <p:spPr>
-          <a:xfrm>
-            <a:off x="2657246" y="2682240"/>
-            <a:ext cx="2200046" cy="365760"/>
-          </a:xfrm>
-          <a:prstGeom prst="roundRect">
-            <a:avLst/>
-          </a:prstGeom>
-          <a:solidFill>
-            <a:srgbClr val="E8EEF7"/>
-          </a:solidFill>
-          <a:ln>
-            <a:solidFill>
-              <a:srgbClr val="1F3A5F"/>
-            </a:solidFill>
-          </a:ln>
-        </p:spPr>
-        <p:style>
-          <a:lnRef idx="1">
-            <a:schemeClr val="accent1"/>
-          </a:lnRef>
-          <a:fillRef idx="3">
-            <a:schemeClr val="accent1"/>
-          </a:fillRef>
-          <a:effectRef idx="2">
-            <a:schemeClr val="accent1"/>
-          </a:effectRef>
-          <a:fontRef idx="minor">
-            <a:schemeClr val="lt1"/>
-          </a:fontRef>
-        </p:style>
-        <p:txBody>
-          <a:bodyPr rtlCol="0" anchor="ctr" lIns="45720" rIns="45720"/>
-          <a:lstStyle/>
-          <a:p>
-            <a:pPr algn="ctr"/>
-            <a:r>
-              <a:rPr sz="900">
-                <a:solidFill>
-                  <a:srgbClr val="1F3A5F"/>
-                </a:solidFill>
-              </a:rPr>
-              <a:t>Gram 10: FR Razor Crest, Category 3, Romulus</a:t>
-            </a:r>
-          </a:p>
-        </p:txBody>
-      </p:sp>
-      <p:sp>
-        <p:nvSpPr>
-          <p:cNvPr id="16" name="TextBox 15"/>
-          <p:cNvSpPr txBox="1"/>
-          <p:nvPr/>
-        </p:nvSpPr>
-        <p:spPr>
-          <a:xfrm>
-            <a:off x="2657246" y="3066288"/>
-            <a:ext cx="2200046" cy="1447800"/>
-          </a:xfrm>
-          <a:prstGeom prst="rect">
-            <a:avLst/>
-          </a:prstGeom>
-          <a:noFill/>
-        </p:spPr>
-        <p:txBody>
-          <a:bodyPr wrap="square">
-            <a:spAutoFit/>
-          </a:bodyPr>
-          <a:lstStyle/>
-          <a:p>
-            <a:r>
-              <a:rPr sz="800">
-                <a:hlinkClick r:id="rId26"/>
-              </a:rPr>
-              <a:t>Lofar 1</a:t>
-            </a:r>
-          </a:p>
-        </p:txBody>
-      </p:sp>
-      <p:sp>
-        <p:nvSpPr>
-          <p:cNvPr id="17" name="Rounded Rectangle 16">
-            <a:hlinkClick r:id="rId27"/>
-          </p:cNvPr>
-          <p:cNvSpPr/>
-          <p:nvPr/>
-        </p:nvSpPr>
-        <p:spPr>
-          <a:xfrm>
-            <a:off x="4948732" y="2682240"/>
-            <a:ext cx="2200046" cy="365760"/>
-          </a:xfrm>
-          <a:prstGeom prst="roundRect">
-            <a:avLst/>
-          </a:prstGeom>
-          <a:solidFill>
-            <a:srgbClr val="E8EEF7"/>
-          </a:solidFill>
-          <a:ln>
-            <a:solidFill>
-              <a:srgbClr val="1F3A5F"/>
-            </a:solidFill>
-          </a:ln>
-        </p:spPr>
-        <p:style>
-          <a:lnRef idx="1">
-            <a:schemeClr val="accent1"/>
-          </a:lnRef>
-          <a:fillRef idx="3">
-            <a:schemeClr val="accent1"/>
-          </a:fillRef>
-          <a:effectRef idx="2">
-            <a:schemeClr val="accent1"/>
-          </a:effectRef>
-          <a:fontRef idx="minor">
-            <a:schemeClr val="lt1"/>
-          </a:fontRef>
-        </p:style>
-        <p:txBody>
-          <a:bodyPr rtlCol="0" anchor="ctr" lIns="45720" rIns="45720"/>
-          <a:lstStyle/>
-          <a:p>
-            <a:pPr algn="ctr"/>
-            <a:r>
-              <a:rPr sz="900">
-                <a:solidFill>
-                  <a:srgbClr val="1F3A5F"/>
-                </a:solidFill>
-              </a:rPr>
-              <a:t>Gram 11: FR Constitution-class, Category 1, Defiant</a:t>
-            </a:r>
-          </a:p>
-        </p:txBody>
-      </p:sp>
-      <p:sp>
-        <p:nvSpPr>
-          <p:cNvPr id="18" name="TextBox 17"/>
-          <p:cNvSpPr txBox="1"/>
-          <p:nvPr/>
-        </p:nvSpPr>
-        <p:spPr>
-          <a:xfrm>
-            <a:off x="4948732" y="3066288"/>
-            <a:ext cx="2200046" cy="1447800"/>
-          </a:xfrm>
-          <a:prstGeom prst="rect">
-            <a:avLst/>
-          </a:prstGeom>
-          <a:noFill/>
-        </p:spPr>
-        <p:txBody>
-          <a:bodyPr wrap="square">
-            <a:spAutoFit/>
-          </a:bodyPr>
-          <a:lstStyle/>
-          <a:p>
-            <a:r>
-              <a:rPr sz="800">
-                <a:hlinkClick r:id="rId28"/>
-              </a:rPr>
-              <a:t>Lofar 1</a:t>
-            </a:r>
-          </a:p>
-          <a:p>
-            <a:r>
-              <a:rPr sz="800">
-                <a:hlinkClick r:id="rId29"/>
-              </a:rPr>
-              <a:t>Lofar 2</a:t>
-            </a:r>
-          </a:p>
-          <a:p>
-            <a:r>
-              <a:rPr sz="800">
-                <a:hlinkClick r:id="rId30"/>
-              </a:rPr>
-              <a:t>Lofar 3</a:t>
-            </a:r>
-          </a:p>
-          <a:p>
-            <a:r>
-              <a:rPr sz="800">
-                <a:hlinkClick r:id="rId31"/>
-              </a:rPr>
-              <a:t>Lofar 4</a:t>
-            </a:r>
-          </a:p>
-        </p:txBody>
-      </p:sp>
-      <p:sp>
-        <p:nvSpPr>
-          <p:cNvPr id="19" name="Rounded Rectangle 18">
-            <a:hlinkClick r:id="rId32"/>
-          </p:cNvPr>
-          <p:cNvSpPr/>
-          <p:nvPr/>
-        </p:nvSpPr>
-        <p:spPr>
-          <a:xfrm>
-            <a:off x="7240219" y="2682240"/>
-            <a:ext cx="2200046" cy="365760"/>
-          </a:xfrm>
-          <a:prstGeom prst="roundRect">
-            <a:avLst/>
-          </a:prstGeom>
-          <a:solidFill>
-            <a:srgbClr val="E8EEF7"/>
-          </a:solidFill>
-          <a:ln>
-            <a:solidFill>
-              <a:srgbClr val="1F3A5F"/>
-            </a:solidFill>
-          </a:ln>
-        </p:spPr>
-        <p:style>
-          <a:lnRef idx="1">
-            <a:schemeClr val="accent1"/>
-          </a:lnRef>
-          <a:fillRef idx="3">
-            <a:schemeClr val="accent1"/>
-          </a:fillRef>
-          <a:effectRef idx="2">
-            <a:schemeClr val="accent1"/>
-          </a:effectRef>
-          <a:fontRef idx="minor">
-            <a:schemeClr val="lt1"/>
-          </a:fontRef>
-        </p:style>
-        <p:txBody>
-          <a:bodyPr rtlCol="0" anchor="ctr" lIns="45720" rIns="45720"/>
-          <a:lstStyle/>
-          <a:p>
-            <a:pPr algn="ctr"/>
-            <a:r>
-              <a:rPr sz="900">
-                <a:solidFill>
-                  <a:srgbClr val="1F3A5F"/>
-                </a:solidFill>
-              </a:rPr>
-              <a:t>Gram 13: FR Equinox, Category 4, Naboo</a:t>
-            </a:r>
-          </a:p>
-        </p:txBody>
-      </p:sp>
-      <p:sp>
-        <p:nvSpPr>
-          <p:cNvPr id="20" name="TextBox 19"/>
-          <p:cNvSpPr txBox="1"/>
-          <p:nvPr/>
-        </p:nvSpPr>
-        <p:spPr>
-          <a:xfrm>
-            <a:off x="7240219" y="3066288"/>
-            <a:ext cx="2200046" cy="1447800"/>
-          </a:xfrm>
-          <a:prstGeom prst="rect">
-            <a:avLst/>
-          </a:prstGeom>
-          <a:noFill/>
-        </p:spPr>
-        <p:txBody>
-          <a:bodyPr wrap="square">
-            <a:spAutoFit/>
-          </a:bodyPr>
-          <a:lstStyle/>
-          <a:p>
-            <a:r>
-              <a:rPr sz="800">
-                <a:hlinkClick r:id="rId33"/>
-              </a:rPr>
-              <a:t>Lofar 1</a:t>
-            </a:r>
-          </a:p>
-        </p:txBody>
-      </p:sp>
-      <p:sp>
-        <p:nvSpPr>
-          <p:cNvPr id="21" name="Rounded Rectangle 20">
-            <a:hlinkClick r:id="rId34"/>
-          </p:cNvPr>
-          <p:cNvSpPr/>
-          <p:nvPr/>
-        </p:nvSpPr>
-        <p:spPr>
-          <a:xfrm>
-            <a:off x="9531705" y="2682240"/>
-            <a:ext cx="2200046" cy="365760"/>
-          </a:xfrm>
-          <a:prstGeom prst="roundRect">
-            <a:avLst/>
-          </a:prstGeom>
-          <a:solidFill>
-            <a:srgbClr val="E8EEF7"/>
-          </a:solidFill>
-          <a:ln>
-            <a:solidFill>
-              <a:srgbClr val="1F3A5F"/>
-            </a:solidFill>
-          </a:ln>
-        </p:spPr>
-        <p:style>
-          <a:lnRef idx="1">
-            <a:schemeClr val="accent1"/>
-          </a:lnRef>
-          <a:fillRef idx="3">
-            <a:schemeClr val="accent1"/>
-          </a:fillRef>
-          <a:effectRef idx="2">
-            <a:schemeClr val="accent1"/>
-          </a:effectRef>
-          <a:fontRef idx="minor">
-            <a:schemeClr val="lt1"/>
-          </a:fontRef>
-        </p:style>
-        <p:txBody>
-          <a:bodyPr rtlCol="0" anchor="ctr" lIns="45720" rIns="45720"/>
-          <a:lstStyle/>
-          <a:p>
-            <a:pPr algn="ctr"/>
-            <a:r>
-              <a:rPr sz="900">
-                <a:solidFill>
-                  <a:srgbClr val="1F3A5F"/>
-                </a:solidFill>
-              </a:rPr>
-              <a:t>Gram 14: FR A-wing, Category 2, Tatooine</a:t>
-            </a:r>
-          </a:p>
-        </p:txBody>
-      </p:sp>
-      <p:sp>
-        <p:nvSpPr>
-          <p:cNvPr id="22" name="TextBox 21"/>
-          <p:cNvSpPr txBox="1"/>
-          <p:nvPr/>
-        </p:nvSpPr>
-        <p:spPr>
-          <a:xfrm>
-            <a:off x="9531705" y="3066288"/>
-            <a:ext cx="2200046" cy="1447800"/>
-          </a:xfrm>
-          <a:prstGeom prst="rect">
-            <a:avLst/>
-          </a:prstGeom>
-          <a:noFill/>
-        </p:spPr>
-        <p:txBody>
-          <a:bodyPr wrap="square">
-            <a:spAutoFit/>
-          </a:bodyPr>
-          <a:lstStyle/>
-          <a:p>
-            <a:r>
-              <a:rPr sz="800">
-                <a:hlinkClick r:id="rId35"/>
-              </a:rPr>
-              <a:t>Lofar 1</a:t>
-            </a:r>
-          </a:p>
-          <a:p>
-            <a:r>
-              <a:rPr sz="800">
-                <a:hlinkClick r:id="rId36"/>
-              </a:rPr>
-              <a:t>Lofar 2</a:t>
-            </a:r>
-          </a:p>
-          <a:p>
-            <a:r>
-              <a:rPr sz="800">
-                <a:hlinkClick r:id="rId37"/>
-              </a:rPr>
-              <a:t>Lofar 3</a:t>
-            </a:r>
-          </a:p>
-          <a:p>
-            <a:r>
-              <a:rPr sz="800">
-                <a:hlinkClick r:id="rId38"/>
-              </a:rPr>
-              <a:t>Lofar 4</a:t>
-            </a:r>
-          </a:p>
-        </p:txBody>
-      </p:sp>
-      <p:sp>
-        <p:nvSpPr>
-          <p:cNvPr id="23" name="Rounded Rectangle 22">
-            <a:hlinkClick r:id="rId39"/>
-          </p:cNvPr>
-          <p:cNvSpPr/>
-          <p:nvPr/>
-        </p:nvSpPr>
-        <p:spPr>
-          <a:xfrm>
-            <a:off x="365760" y="4632960"/>
-            <a:ext cx="2200046" cy="365760"/>
-          </a:xfrm>
-          <a:prstGeom prst="roundRect">
-            <a:avLst/>
-          </a:prstGeom>
-          <a:solidFill>
-            <a:srgbClr val="E8EEF7"/>
-          </a:solidFill>
-          <a:ln>
-            <a:solidFill>
-              <a:srgbClr val="1F3A5F"/>
-            </a:solidFill>
-          </a:ln>
-        </p:spPr>
-        <p:style>
-          <a:lnRef idx="1">
-            <a:schemeClr val="accent1"/>
-          </a:lnRef>
-          <a:fillRef idx="3">
-            <a:schemeClr val="accent1"/>
-          </a:fillRef>
-          <a:effectRef idx="2">
-            <a:schemeClr val="accent1"/>
-          </a:effectRef>
-          <a:fontRef idx="minor">
-            <a:schemeClr val="lt1"/>
-          </a:fontRef>
-        </p:style>
-        <p:txBody>
-          <a:bodyPr rtlCol="0" anchor="ctr" lIns="45720" rIns="45720"/>
-          <a:lstStyle/>
-          <a:p>
-            <a:pPr algn="ctr"/>
-            <a:r>
-              <a:rPr sz="900">
-                <a:solidFill>
-                  <a:srgbClr val="1F3A5F"/>
-                </a:solidFill>
-              </a:rPr>
-              <a:t>Gram 15: FR B-wing, Category 1, Mustafar</a:t>
-            </a:r>
-          </a:p>
-        </p:txBody>
-      </p:sp>
-      <p:sp>
-        <p:nvSpPr>
-          <p:cNvPr id="24" name="TextBox 23"/>
-          <p:cNvSpPr txBox="1"/>
-          <p:nvPr/>
-        </p:nvSpPr>
-        <p:spPr>
-          <a:xfrm>
-            <a:off x="365760" y="5017008"/>
-            <a:ext cx="2200046" cy="1447800"/>
-          </a:xfrm>
-          <a:prstGeom prst="rect">
-            <a:avLst/>
-          </a:prstGeom>
-          <a:noFill/>
-        </p:spPr>
-        <p:txBody>
-          <a:bodyPr wrap="square">
-            <a:spAutoFit/>
-          </a:bodyPr>
-          <a:lstStyle/>
-          <a:p>
-            <a:r>
-              <a:rPr sz="800">
-                <a:hlinkClick r:id="rId40"/>
-              </a:rPr>
-              <a:t>Lofar 1</a:t>
-            </a:r>
-          </a:p>
-          <a:p>
-            <a:r>
-              <a:rPr sz="800">
-                <a:hlinkClick r:id="rId41"/>
-              </a:rPr>
-              <a:t>Lofar 2</a:t>
-            </a:r>
-          </a:p>
-          <a:p>
-            <a:r>
-              <a:rPr sz="800">
-                <a:hlinkClick r:id="rId42"/>
-              </a:rPr>
-              <a:t>Lofar 3</a:t>
-            </a:r>
-          </a:p>
-          <a:p>
-            <a:r>
-              <a:rPr sz="800">
-                <a:hlinkClick r:id="rId43"/>
-              </a:rPr>
-              <a:t>Lofar 4</a:t>
-            </a:r>
-          </a:p>
-        </p:txBody>
-      </p:sp>
-      <p:sp>
-        <p:nvSpPr>
-          <p:cNvPr id="25" name="Rounded Rectangle 24">
-            <a:hlinkClick r:id="rId44"/>
-          </p:cNvPr>
-          <p:cNvSpPr/>
-          <p:nvPr/>
-        </p:nvSpPr>
-        <p:spPr>
-          <a:xfrm>
-            <a:off x="2657246" y="4632960"/>
-            <a:ext cx="2200046" cy="365760"/>
-          </a:xfrm>
-          <a:prstGeom prst="roundRect">
-            <a:avLst/>
-          </a:prstGeom>
-          <a:solidFill>
-            <a:srgbClr val="E8EEF7"/>
-          </a:solidFill>
-          <a:ln>
-            <a:solidFill>
-              <a:srgbClr val="1F3A5F"/>
-            </a:solidFill>
-          </a:ln>
-        </p:spPr>
-        <p:style>
-          <a:lnRef idx="1">
-            <a:schemeClr val="accent1"/>
-          </a:lnRef>
-          <a:fillRef idx="3">
-            <a:schemeClr val="accent1"/>
-          </a:fillRef>
-          <a:effectRef idx="2">
-            <a:schemeClr val="accent1"/>
-          </a:effectRef>
-          <a:fontRef idx="minor">
-            <a:schemeClr val="lt1"/>
-          </a:fontRef>
-        </p:style>
-        <p:txBody>
-          <a:bodyPr rtlCol="0" anchor="ctr" lIns="45720" rIns="45720"/>
-          <a:lstStyle/>
-          <a:p>
-            <a:pPr algn="ctr"/>
-            <a:r>
-              <a:rPr sz="900">
-                <a:solidFill>
-                  <a:srgbClr val="1F3A5F"/>
-                </a:solidFill>
-              </a:rPr>
-              <a:t>Gram 16: FR Equinox, Category 1, Kobol</a:t>
-            </a:r>
-          </a:p>
-        </p:txBody>
-      </p:sp>
-      <p:sp>
-        <p:nvSpPr>
-          <p:cNvPr id="26" name="TextBox 25"/>
-          <p:cNvSpPr txBox="1"/>
-          <p:nvPr/>
-        </p:nvSpPr>
-        <p:spPr>
-          <a:xfrm>
-            <a:off x="2657246" y="5017008"/>
-            <a:ext cx="2200046" cy="1447800"/>
-          </a:xfrm>
-          <a:prstGeom prst="rect">
-            <a:avLst/>
-          </a:prstGeom>
-          <a:noFill/>
-        </p:spPr>
-        <p:txBody>
-          <a:bodyPr wrap="square">
-            <a:spAutoFit/>
-          </a:bodyPr>
-          <a:lstStyle/>
-          <a:p>
-            <a:r>
-              <a:rPr sz="800">
-                <a:hlinkClick r:id="rId45"/>
-              </a:rPr>
-              <a:t>Lofar 1</a:t>
-            </a:r>
-          </a:p>
-          <a:p>
-            <a:r>
-              <a:rPr sz="800">
-                <a:hlinkClick r:id="rId46"/>
-              </a:rPr>
-              <a:t>Lofar 2</a:t>
-            </a:r>
-          </a:p>
-        </p:txBody>
-      </p:sp>
-      <p:sp>
-        <p:nvSpPr>
-          <p:cNvPr id="27" name="Rounded Rectangle 26">
-            <a:hlinkClick r:id="rId47"/>
-          </p:cNvPr>
-          <p:cNvSpPr/>
-          <p:nvPr/>
-        </p:nvSpPr>
-        <p:spPr>
-          <a:xfrm>
-            <a:off x="4948732" y="4632960"/>
-            <a:ext cx="2200046" cy="365760"/>
-          </a:xfrm>
-          <a:prstGeom prst="roundRect">
-            <a:avLst/>
-          </a:prstGeom>
-          <a:solidFill>
-            <a:srgbClr val="E8EEF7"/>
-          </a:solidFill>
-          <a:ln>
-            <a:solidFill>
-              <a:srgbClr val="1F3A5F"/>
-            </a:solidFill>
-          </a:ln>
-        </p:spPr>
-        <p:style>
-          <a:lnRef idx="1">
-            <a:schemeClr val="accent1"/>
-          </a:lnRef>
-          <a:fillRef idx="3">
-            <a:schemeClr val="accent1"/>
-          </a:fillRef>
-          <a:effectRef idx="2">
-            <a:schemeClr val="accent1"/>
-          </a:effectRef>
-          <a:fontRef idx="minor">
-            <a:schemeClr val="lt1"/>
-          </a:fontRef>
-        </p:style>
-        <p:txBody>
-          <a:bodyPr rtlCol="0" anchor="ctr" lIns="45720" rIns="45720"/>
-          <a:lstStyle/>
-          <a:p>
-            <a:pPr algn="ctr"/>
-            <a:r>
-              <a:rPr sz="900">
-                <a:solidFill>
-                  <a:srgbClr val="1F3A5F"/>
-                </a:solidFill>
-              </a:rPr>
-              <a:t>Gram 17: Acclamator-class contact bearing 199, codename Vulcan</a:t>
-            </a:r>
-          </a:p>
-        </p:txBody>
-      </p:sp>
-      <p:sp>
-        <p:nvSpPr>
-          <p:cNvPr id="28" name="TextBox 27"/>
-          <p:cNvSpPr txBox="1"/>
-          <p:nvPr/>
-        </p:nvSpPr>
-        <p:spPr>
-          <a:xfrm>
-            <a:off x="4948732" y="5017008"/>
-            <a:ext cx="2200046" cy="1447800"/>
-          </a:xfrm>
-          <a:prstGeom prst="rect">
-            <a:avLst/>
-          </a:prstGeom>
-          <a:noFill/>
-        </p:spPr>
-        <p:txBody>
-          <a:bodyPr wrap="square">
-            <a:spAutoFit/>
-          </a:bodyPr>
-          <a:lstStyle/>
-          <a:p>
-            <a:r>
-              <a:rPr sz="800">
-                <a:hlinkClick r:id="rId48"/>
-              </a:rPr>
-              <a:t>Lofar 1</a:t>
-            </a:r>
-          </a:p>
-          <a:p>
-            <a:r>
-              <a:rPr sz="800">
-                <a:hlinkClick r:id="rId49"/>
-              </a:rPr>
-              <a:t>Lofar 2</a:t>
-            </a:r>
-          </a:p>
-        </p:txBody>
-      </p:sp>
-      <p:sp>
-        <p:nvSpPr>
-          <p:cNvPr id="29" name="Rounded Rectangle 28">
-            <a:hlinkClick r:id="rId50"/>
-          </p:cNvPr>
-          <p:cNvSpPr/>
-          <p:nvPr/>
-        </p:nvSpPr>
-        <p:spPr>
-          <a:xfrm>
-            <a:off x="7240219" y="4632960"/>
-            <a:ext cx="2200046" cy="365760"/>
-          </a:xfrm>
-          <a:prstGeom prst="roundRect">
-            <a:avLst/>
-          </a:prstGeom>
-          <a:solidFill>
-            <a:srgbClr val="E8EEF7"/>
-          </a:solidFill>
-          <a:ln>
-            <a:solidFill>
-              <a:srgbClr val="1F3A5F"/>
-            </a:solidFill>
-          </a:ln>
-        </p:spPr>
-        <p:style>
-          <a:lnRef idx="1">
-            <a:schemeClr val="accent1"/>
-          </a:lnRef>
-          <a:fillRef idx="3">
-            <a:schemeClr val="accent1"/>
-          </a:fillRef>
-          <a:effectRef idx="2">
-            <a:schemeClr val="accent1"/>
-          </a:effectRef>
-          <a:fontRef idx="minor">
-            <a:schemeClr val="lt1"/>
-          </a:fontRef>
-        </p:style>
-        <p:txBody>
-          <a:bodyPr rtlCol="0" anchor="ctr" lIns="45720" rIns="45720"/>
-          <a:lstStyle/>
-          <a:p>
-            <a:pPr algn="ctr"/>
-            <a:r>
-              <a:rPr sz="900">
-                <a:solidFill>
-                  <a:srgbClr val="1F3A5F"/>
-                </a:solidFill>
-              </a:rPr>
-              <a:t>Gram 18: Enterprise contact bearing 015, codename Betazed</a:t>
-            </a:r>
-          </a:p>
-        </p:txBody>
-      </p:sp>
-      <p:sp>
-        <p:nvSpPr>
-          <p:cNvPr id="30" name="TextBox 29"/>
-          <p:cNvSpPr txBox="1"/>
-          <p:nvPr/>
-        </p:nvSpPr>
-        <p:spPr>
-          <a:xfrm>
-            <a:off x="7240219" y="5017008"/>
-            <a:ext cx="2200046" cy="1447800"/>
-          </a:xfrm>
-          <a:prstGeom prst="rect">
-            <a:avLst/>
-          </a:prstGeom>
-          <a:noFill/>
-        </p:spPr>
-        <p:txBody>
-          <a:bodyPr wrap="square">
-            <a:spAutoFit/>
-          </a:bodyPr>
-          <a:lstStyle/>
-          <a:p>
-            <a:r>
-              <a:rPr sz="800">
-                <a:hlinkClick r:id="rId51"/>
-              </a:rPr>
-              <a:t>Lofar 1</a:t>
-            </a:r>
-          </a:p>
-        </p:txBody>
-      </p:sp>
-      <p:sp>
-        <p:nvSpPr>
-          <p:cNvPr id="31" name="Rounded Rectangle 30">
-            <a:hlinkClick r:id="rId52"/>
-          </p:cNvPr>
-          <p:cNvSpPr/>
-          <p:nvPr/>
-        </p:nvSpPr>
-        <p:spPr>
-          <a:xfrm>
-            <a:off x="9531705" y="4632960"/>
-            <a:ext cx="2200046" cy="365760"/>
-          </a:xfrm>
-          <a:prstGeom prst="roundRect">
-            <a:avLst/>
-          </a:prstGeom>
-          <a:solidFill>
-            <a:srgbClr val="E8EEF7"/>
-          </a:solidFill>
-          <a:ln>
-            <a:solidFill>
-              <a:srgbClr val="1F3A5F"/>
-            </a:solidFill>
-          </a:ln>
-        </p:spPr>
-        <p:style>
-          <a:lnRef idx="1">
-            <a:schemeClr val="accent1"/>
-          </a:lnRef>
-          <a:fillRef idx="3">
-            <a:schemeClr val="accent1"/>
-          </a:fillRef>
-          <a:effectRef idx="2">
-            <a:schemeClr val="accent1"/>
-          </a:effectRef>
-          <a:fontRef idx="minor">
-            <a:schemeClr val="lt1"/>
-          </a:fontRef>
-        </p:style>
-        <p:txBody>
-          <a:bodyPr rtlCol="0" anchor="ctr" lIns="45720" rIns="45720"/>
-          <a:lstStyle/>
-          <a:p>
-            <a:pPr algn="ctr"/>
-            <a:r>
-              <a:rPr sz="900">
-                <a:solidFill>
-                  <a:srgbClr val="1F3A5F"/>
-                </a:solidFill>
-              </a:rPr>
-              <a:t>Gram 19: FR Rebel One, Category 1, Tatooine</a:t>
-            </a:r>
-          </a:p>
-        </p:txBody>
-      </p:sp>
-      <p:sp>
-        <p:nvSpPr>
-          <p:cNvPr id="32" name="TextBox 31"/>
-          <p:cNvSpPr txBox="1"/>
-          <p:nvPr/>
-        </p:nvSpPr>
-        <p:spPr>
-          <a:xfrm>
-            <a:off x="9531705" y="5017008"/>
-            <a:ext cx="2200046" cy="1447800"/>
-          </a:xfrm>
-          <a:prstGeom prst="rect">
-            <a:avLst/>
-          </a:prstGeom>
-          <a:noFill/>
-        </p:spPr>
-        <p:txBody>
-          <a:bodyPr wrap="square">
-            <a:spAutoFit/>
-          </a:bodyPr>
-          <a:lstStyle/>
-          <a:p>
-            <a:r>
-              <a:rPr sz="800">
-                <a:hlinkClick r:id="rId53"/>
-              </a:rPr>
-              <a:t>Lofar 1</a:t>
-            </a:r>
-          </a:p>
-          <a:p>
-            <a:r>
-              <a:rPr sz="800">
-                <a:hlinkClick r:id="rId54"/>
-              </a:rPr>
-              <a:t>Lofar 2</a:t>
-            </a:r>
-          </a:p>
-          <a:p>
-            <a:r>
-              <a:rPr sz="800">
-                <a:hlinkClick r:id="rId55"/>
-              </a:rPr>
-              <a:t>Lofar 3</a:t>
+              <a:t>Instructor Version</a:t>
             </a:r>
           </a:p>
         </p:txBody>
@@ -4689,7 +3226,7 @@
                   <a:srgbClr val="FFFFFF"/>
                 </a:solidFill>
               </a:rPr>
-              <a:t>Instructor Pub10_Ed22B_Updated — Page 2 of 5</a:t>
+              <a:t>Instructor Pub10_Ed22B_Updated — Page 1 of 5</a:t>
             </a:r>
           </a:p>
         </p:txBody>
@@ -4744,7 +3281,7 @@
                   <a:srgbClr val="1F3A5F"/>
                 </a:solidFill>
               </a:rPr>
-              <a:t>Gram 20: FR Defiant-class, Category 2, Cardassia</a:t>
+              <a:t>Gram 1: FR Outrider, Category 4, Tantive</a:t>
             </a:r>
           </a:p>
         </p:txBody>
@@ -4846,7 +3383,7 @@
                   <a:srgbClr val="1F3A5F"/>
                 </a:solidFill>
               </a:rPr>
-              <a:t>Gram 21: FR Outrider, Category 1, Naboo</a:t>
+              <a:t>Gram 2: FR Millennium Falcon, Category 1, Hoth</a:t>
             </a:r>
           </a:p>
         </p:txBody>
@@ -4888,20 +3425,12 @@
               <a:t>Lofar 2</a:t>
             </a:r>
           </a:p>
-          <a:p>
-            <a:r>
-              <a:rPr sz="800">
-                <a:hlinkClick r:id="rId9"/>
-              </a:rPr>
-              <a:t>Lofar 3</a:t>
-            </a:r>
-          </a:p>
         </p:txBody>
       </p:sp>
       <p:sp>
         <p:nvSpPr>
           <p:cNvPr id="7" name="Rounded Rectangle 6">
-            <a:hlinkClick r:id="rId10"/>
+            <a:hlinkClick r:id="rId9"/>
           </p:cNvPr>
           <p:cNvSpPr/>
           <p:nvPr/>
@@ -4948,7 +3477,7 @@
                   <a:srgbClr val="1F3A5F"/>
                 </a:solidFill>
               </a:rPr>
-              <a:t>Gram 23: Star Destroyer contact bearing 214, codename Mustafar</a:t>
+              <a:t>Gram 3: Intrepid-class contact bearing 281, codename Dagobah</a:t>
             </a:r>
           </a:p>
         </p:txBody>
@@ -4977,9 +3506,17 @@
           <a:p>
             <a:r>
               <a:rPr sz="800">
+                <a:hlinkClick r:id="rId10"/>
+              </a:rPr>
+              <a:t>Lofar 1</a:t>
+            </a:r>
+          </a:p>
+          <a:p>
+            <a:r>
+              <a:rPr sz="800">
                 <a:hlinkClick r:id="rId11"/>
               </a:rPr>
-              <a:t>Lofar 1</a:t>
+              <a:t>Lofar 2</a:t>
             </a:r>
           </a:p>
           <a:p>
@@ -4987,14 +3524,6 @@
               <a:rPr sz="800">
                 <a:hlinkClick r:id="rId12"/>
               </a:rPr>
-              <a:t>Lofar 2</a:t>
-            </a:r>
-          </a:p>
-          <a:p>
-            <a:r>
-              <a:rPr sz="800">
-                <a:hlinkClick r:id="rId13"/>
-              </a:rPr>
               <a:t>Lofar 3</a:t>
             </a:r>
           </a:p>
@@ -5003,7 +3532,7 @@
       <p:sp>
         <p:nvSpPr>
           <p:cNvPr id="9" name="Rounded Rectangle 8">
-            <a:hlinkClick r:id="rId14"/>
+            <a:hlinkClick r:id="rId13"/>
           </p:cNvPr>
           <p:cNvSpPr/>
           <p:nvPr/>
@@ -5050,7 +3579,7 @@
                   <a:srgbClr val="1F3A5F"/>
                 </a:solidFill>
               </a:rPr>
-              <a:t>Gram 24: Corellian Corvette contact bearing 131, codename Caprica</a:t>
+              <a:t>Gram 6: TIE Bomber contact bearing 018, codename Dank</a:t>
             </a:r>
           </a:p>
         </p:txBody>
@@ -5079,9 +3608,17 @@
           <a:p>
             <a:r>
               <a:rPr sz="800">
+                <a:hlinkClick r:id="rId14"/>
+              </a:rPr>
+              <a:t>Lofar 1</a:t>
+            </a:r>
+          </a:p>
+          <a:p>
+            <a:r>
+              <a:rPr sz="800">
                 <a:hlinkClick r:id="rId15"/>
               </a:rPr>
-              <a:t>Lofar 1</a:t>
+              <a:t>Lofar 2</a:t>
             </a:r>
           </a:p>
           <a:p>
@@ -5089,14 +3626,6 @@
               <a:rPr sz="800">
                 <a:hlinkClick r:id="rId16"/>
               </a:rPr>
-              <a:t>Lofar 2</a:t>
-            </a:r>
-          </a:p>
-          <a:p>
-            <a:r>
-              <a:rPr sz="800">
-                <a:hlinkClick r:id="rId17"/>
-              </a:rPr>
               <a:t>Lofar 3</a:t>
             </a:r>
           </a:p>
@@ -5105,7 +3634,7 @@
       <p:sp>
         <p:nvSpPr>
           <p:cNvPr id="11" name="Rounded Rectangle 10">
-            <a:hlinkClick r:id="rId18"/>
+            <a:hlinkClick r:id="rId17"/>
           </p:cNvPr>
           <p:cNvSpPr/>
           <p:nvPr/>
@@ -5152,7 +3681,7 @@
                   <a:srgbClr val="1F3A5F"/>
                 </a:solidFill>
               </a:rPr>
-              <a:t>Gram 25: FR Akira-class, Category 2, Risa</a:t>
+              <a:t>Gram 7: FR Outrider, Category 1, Romulus</a:t>
             </a:r>
           </a:p>
         </p:txBody>
@@ -5181,9 +3710,33 @@
           <a:p>
             <a:r>
               <a:rPr sz="800">
+                <a:hlinkClick r:id="rId18"/>
+              </a:rPr>
+              <a:t>Lofar 1</a:t>
+            </a:r>
+          </a:p>
+          <a:p>
+            <a:r>
+              <a:rPr sz="800">
                 <a:hlinkClick r:id="rId19"/>
               </a:rPr>
-              <a:t>Lofar 1</a:t>
+              <a:t>Lofar 2</a:t>
+            </a:r>
+          </a:p>
+          <a:p>
+            <a:r>
+              <a:rPr sz="800">
+                <a:hlinkClick r:id="rId20"/>
+              </a:rPr>
+              <a:t>Lofar 3</a:t>
+            </a:r>
+          </a:p>
+          <a:p>
+            <a:r>
+              <a:rPr sz="800">
+                <a:hlinkClick r:id="rId21"/>
+              </a:rPr>
+              <a:t>Lofar 4</a:t>
             </a:r>
           </a:p>
         </p:txBody>
@@ -5191,7 +3744,7 @@
       <p:sp>
         <p:nvSpPr>
           <p:cNvPr id="13" name="Rounded Rectangle 12">
-            <a:hlinkClick r:id="rId20"/>
+            <a:hlinkClick r:id="rId22"/>
           </p:cNvPr>
           <p:cNvSpPr/>
           <p:nvPr/>
@@ -5238,7 +3791,7 @@
                   <a:srgbClr val="1F3A5F"/>
                 </a:solidFill>
               </a:rPr>
-              <a:t>Gram 26: FR Intrepid-class, Category 4, Kronos</a:t>
+              <a:t>Gram 9: B-wing contact bearing 007, codename Bespin</a:t>
             </a:r>
           </a:p>
         </p:txBody>
@@ -5267,7 +3820,7 @@
           <a:p>
             <a:r>
               <a:rPr sz="800">
-                <a:hlinkClick r:id="rId21"/>
+                <a:hlinkClick r:id="rId23"/>
               </a:rPr>
               <a:t>Lofar 1</a:t>
             </a:r>
@@ -5275,7 +3828,7 @@
           <a:p>
             <a:r>
               <a:rPr sz="800">
-                <a:hlinkClick r:id="rId22"/>
+                <a:hlinkClick r:id="rId24"/>
               </a:rPr>
               <a:t>Lofar 2</a:t>
             </a:r>
@@ -5285,7 +3838,7 @@
       <p:sp>
         <p:nvSpPr>
           <p:cNvPr id="15" name="Rounded Rectangle 14">
-            <a:hlinkClick r:id="rId23"/>
+            <a:hlinkClick r:id="rId25"/>
           </p:cNvPr>
           <p:cNvSpPr/>
           <p:nvPr/>
@@ -5332,7 +3885,7 @@
                   <a:srgbClr val="1F3A5F"/>
                 </a:solidFill>
               </a:rPr>
-              <a:t>Gram 27: Slave I contact bearing 006, codename Risa</a:t>
+              <a:t>Gram 10: FR Razor Crest, Category 3, Romulus</a:t>
             </a:r>
           </a:p>
         </p:txBody>
@@ -5361,25 +3914,9 @@
           <a:p>
             <a:r>
               <a:rPr sz="800">
-                <a:hlinkClick r:id="rId24"/>
+                <a:hlinkClick r:id="rId26"/>
               </a:rPr>
               <a:t>Lofar 1</a:t>
-            </a:r>
-          </a:p>
-          <a:p>
-            <a:r>
-              <a:rPr sz="800">
-                <a:hlinkClick r:id="rId25"/>
-              </a:rPr>
-              <a:t>Lofar 2</a:t>
-            </a:r>
-          </a:p>
-          <a:p>
-            <a:r>
-              <a:rPr sz="800">
-                <a:hlinkClick r:id="rId26"/>
-              </a:rPr>
-              <a:t>Lofar 3</a:t>
             </a:r>
           </a:p>
         </p:txBody>
@@ -5434,7 +3971,7 @@
                   <a:srgbClr val="1F3A5F"/>
                 </a:solidFill>
               </a:rPr>
-              <a:t>Gram 28: FR Nebula-class, Category 3, Coruscant</a:t>
+              <a:t>Gram 11: FR Constitution-class, Category 1, Defiant</a:t>
             </a:r>
           </a:p>
         </p:txBody>
@@ -5544,7 +4081,7 @@
                   <a:srgbClr val="1F3A5F"/>
                 </a:solidFill>
               </a:rPr>
-              <a:t>Gram 29: FR Reliant, Category 2, Kobol</a:t>
+              <a:t>Gram 13: FR Equinox, Category 4, Naboo</a:t>
             </a:r>
           </a:p>
         </p:txBody>
@@ -5630,7 +4167,7 @@
                   <a:srgbClr val="1F3A5F"/>
                 </a:solidFill>
               </a:rPr>
-              <a:t>Gram 30: FR Corellian Corvette, Category 1, Dank</a:t>
+              <a:t>Gram 14: FR A-wing, Category 2, Tatooine</a:t>
             </a:r>
           </a:p>
         </p:txBody>
@@ -5740,7 +4277,7 @@
                   <a:srgbClr val="1F3A5F"/>
                 </a:solidFill>
               </a:rPr>
-              <a:t>Gram 31: A-wing contact bearing 298, codename Dank</a:t>
+              <a:t>Gram 15: FR B-wing, Category 1, Mustafar</a:t>
             </a:r>
           </a:p>
         </p:txBody>
@@ -5774,12 +4311,36 @@
               <a:t>Lofar 1</a:t>
             </a:r>
           </a:p>
+          <a:p>
+            <a:r>
+              <a:rPr sz="800">
+                <a:hlinkClick r:id="rId41"/>
+              </a:rPr>
+              <a:t>Lofar 2</a:t>
+            </a:r>
+          </a:p>
+          <a:p>
+            <a:r>
+              <a:rPr sz="800">
+                <a:hlinkClick r:id="rId42"/>
+              </a:rPr>
+              <a:t>Lofar 3</a:t>
+            </a:r>
+          </a:p>
+          <a:p>
+            <a:r>
+              <a:rPr sz="800">
+                <a:hlinkClick r:id="rId43"/>
+              </a:rPr>
+              <a:t>Lofar 4</a:t>
+            </a:r>
+          </a:p>
         </p:txBody>
       </p:sp>
       <p:sp>
         <p:nvSpPr>
           <p:cNvPr id="25" name="Rounded Rectangle 24">
-            <a:hlinkClick r:id="rId41"/>
+            <a:hlinkClick r:id="rId44"/>
           </p:cNvPr>
           <p:cNvSpPr/>
           <p:nvPr/>
@@ -5826,7 +4387,7 @@
                   <a:srgbClr val="1F3A5F"/>
                 </a:solidFill>
               </a:rPr>
-              <a:t>Gram 32: FR Ghost, Category 1, Dank</a:t>
+              <a:t>Gram 16: FR Equinox, Category 1, Kobol</a:t>
             </a:r>
           </a:p>
         </p:txBody>
@@ -5855,7 +4416,7 @@
           <a:p>
             <a:r>
               <a:rPr sz="800">
-                <a:hlinkClick r:id="rId42"/>
+                <a:hlinkClick r:id="rId45"/>
               </a:rPr>
               <a:t>Lofar 1</a:t>
             </a:r>
@@ -5863,25 +4424,17 @@
           <a:p>
             <a:r>
               <a:rPr sz="800">
-                <a:hlinkClick r:id="rId43"/>
+                <a:hlinkClick r:id="rId46"/>
               </a:rPr>
               <a:t>Lofar 2</a:t>
             </a:r>
           </a:p>
-          <a:p>
-            <a:r>
-              <a:rPr sz="800">
-                <a:hlinkClick r:id="rId44"/>
-              </a:rPr>
-              <a:t>Lofar 3</a:t>
-            </a:r>
-          </a:p>
         </p:txBody>
       </p:sp>
       <p:sp>
         <p:nvSpPr>
           <p:cNvPr id="27" name="Rounded Rectangle 26">
-            <a:hlinkClick r:id="rId45"/>
+            <a:hlinkClick r:id="rId47"/>
           </p:cNvPr>
           <p:cNvSpPr/>
           <p:nvPr/>
@@ -5928,7 +4481,7 @@
                   <a:srgbClr val="1F3A5F"/>
                 </a:solidFill>
               </a:rPr>
-              <a:t>Gram 33: FR Nebulon-B, Category 2, Mustafar</a:t>
+              <a:t>Gram 17: Acclamator-class contact bearing 199, codename Vulcan</a:t>
             </a:r>
           </a:p>
         </p:txBody>
@@ -5957,7 +4510,7 @@
           <a:p>
             <a:r>
               <a:rPr sz="800">
-                <a:hlinkClick r:id="rId46"/>
+                <a:hlinkClick r:id="rId48"/>
               </a:rPr>
               <a:t>Lofar 1</a:t>
             </a:r>
@@ -5965,25 +4518,17 @@
           <a:p>
             <a:r>
               <a:rPr sz="800">
-                <a:hlinkClick r:id="rId47"/>
+                <a:hlinkClick r:id="rId49"/>
               </a:rPr>
               <a:t>Lofar 2</a:t>
             </a:r>
           </a:p>
-          <a:p>
-            <a:r>
-              <a:rPr sz="800">
-                <a:hlinkClick r:id="rId48"/>
-              </a:rPr>
-              <a:t>Lofar 3</a:t>
-            </a:r>
-          </a:p>
         </p:txBody>
       </p:sp>
       <p:sp>
         <p:nvSpPr>
           <p:cNvPr id="29" name="Rounded Rectangle 28">
-            <a:hlinkClick r:id="rId49"/>
+            <a:hlinkClick r:id="rId50"/>
           </p:cNvPr>
           <p:cNvSpPr/>
           <p:nvPr/>
@@ -6030,7 +4575,7 @@
                   <a:srgbClr val="1F3A5F"/>
                 </a:solidFill>
               </a:rPr>
-              <a:t>Gram 34: FR Discovery, Category 3, Dank</a:t>
+              <a:t>Gram 18: Enterprise contact bearing 015, codename Betazed</a:t>
             </a:r>
           </a:p>
         </p:txBody>
@@ -6059,7 +4604,7 @@
           <a:p>
             <a:r>
               <a:rPr sz="800">
-                <a:hlinkClick r:id="rId50"/>
+                <a:hlinkClick r:id="rId51"/>
               </a:rPr>
               <a:t>Lofar 1</a:t>
             </a:r>
@@ -6069,7 +4614,7 @@
       <p:sp>
         <p:nvSpPr>
           <p:cNvPr id="31" name="Rounded Rectangle 30">
-            <a:hlinkClick r:id="rId51"/>
+            <a:hlinkClick r:id="rId52"/>
           </p:cNvPr>
           <p:cNvSpPr/>
           <p:nvPr/>
@@ -6116,7 +4661,7 @@
                   <a:srgbClr val="1F3A5F"/>
                 </a:solidFill>
               </a:rPr>
-              <a:t>Gram 35: FR Cerritos, Category 3, Naboo</a:t>
+              <a:t>Gram 19: FR Rebel One, Category 1, Tatooine</a:t>
             </a:r>
           </a:p>
         </p:txBody>
@@ -6145,7 +4690,7 @@
           <a:p>
             <a:r>
               <a:rPr sz="800">
-                <a:hlinkClick r:id="rId52"/>
+                <a:hlinkClick r:id="rId53"/>
               </a:rPr>
               <a:t>Lofar 1</a:t>
             </a:r>
@@ -6153,7 +4698,7 @@
           <a:p>
             <a:r>
               <a:rPr sz="800">
-                <a:hlinkClick r:id="rId53"/>
+                <a:hlinkClick r:id="rId54"/>
               </a:rPr>
               <a:t>Lofar 2</a:t>
             </a:r>
@@ -6161,7 +4706,7 @@
           <a:p>
             <a:r>
               <a:rPr sz="800">
-                <a:hlinkClick r:id="rId54"/>
+                <a:hlinkClick r:id="rId55"/>
               </a:rPr>
               <a:t>Lofar 3</a:t>
             </a:r>
@@ -6232,7 +4777,7 @@
                   <a:srgbClr val="FFFFFF"/>
                 </a:solidFill>
               </a:rPr>
-              <a:t>Instructor Pub10_Ed22B_Updated — Page 3 of 5</a:t>
+              <a:t>Instructor Pub10_Ed22B_Updated — Page 2 of 5</a:t>
             </a:r>
           </a:p>
         </p:txBody>
@@ -6287,7 +4832,7 @@
                   <a:srgbClr val="1F3A5F"/>
                 </a:solidFill>
               </a:rPr>
-              <a:t>Gram 37: FR Discovery, Category 1, Gandalf</a:t>
+              <a:t>Gram 20: FR Defiant-class, Category 2, Cardassia</a:t>
             </a:r>
           </a:p>
         </p:txBody>
@@ -6389,7 +4934,7 @@
                   <a:srgbClr val="1F3A5F"/>
                 </a:solidFill>
               </a:rPr>
-              <a:t>Gram 39: FR Defiant-class, Category 1, Coruscant</a:t>
+              <a:t>Gram 21: FR Outrider, Category 1, Naboo</a:t>
             </a:r>
           </a:p>
         </p:txBody>
@@ -6431,12 +4976,20 @@
               <a:t>Lofar 2</a:t>
             </a:r>
           </a:p>
+          <a:p>
+            <a:r>
+              <a:rPr sz="800">
+                <a:hlinkClick r:id="rId9"/>
+              </a:rPr>
+              <a:t>Lofar 3</a:t>
+            </a:r>
+          </a:p>
         </p:txBody>
       </p:sp>
       <p:sp>
         <p:nvSpPr>
           <p:cNvPr id="7" name="Rounded Rectangle 6">
-            <a:hlinkClick r:id="rId9"/>
+            <a:hlinkClick r:id="rId10"/>
           </p:cNvPr>
           <p:cNvSpPr/>
           <p:nvPr/>
@@ -6483,7 +5036,7 @@
                   <a:srgbClr val="1F3A5F"/>
                 </a:solidFill>
               </a:rPr>
-              <a:t>Gram 40: FR Outrider, Category 1, Hoth</a:t>
+              <a:t>Gram 23: Star Destroyer contact bearing 214, codename Mustafar</a:t>
             </a:r>
           </a:p>
         </p:txBody>
@@ -6512,7 +5065,7 @@
           <a:p>
             <a:r>
               <a:rPr sz="800">
-                <a:hlinkClick r:id="rId10"/>
+                <a:hlinkClick r:id="rId11"/>
               </a:rPr>
               <a:t>Lofar 1</a:t>
             </a:r>
@@ -6520,17 +5073,25 @@
           <a:p>
             <a:r>
               <a:rPr sz="800">
-                <a:hlinkClick r:id="rId11"/>
+                <a:hlinkClick r:id="rId12"/>
               </a:rPr>
               <a:t>Lofar 2</a:t>
             </a:r>
           </a:p>
+          <a:p>
+            <a:r>
+              <a:rPr sz="800">
+                <a:hlinkClick r:id="rId13"/>
+              </a:rPr>
+              <a:t>Lofar 3</a:t>
+            </a:r>
+          </a:p>
         </p:txBody>
       </p:sp>
       <p:sp>
         <p:nvSpPr>
           <p:cNvPr id="9" name="Rounded Rectangle 8">
-            <a:hlinkClick r:id="rId12"/>
+            <a:hlinkClick r:id="rId14"/>
           </p:cNvPr>
           <p:cNvSpPr/>
           <p:nvPr/>
@@ -6577,7 +5138,7 @@
                   <a:srgbClr val="1F3A5F"/>
                 </a:solidFill>
               </a:rPr>
-              <a:t>Gram 43: Nebulon-B contact bearing 034, codename Kronos</a:t>
+              <a:t>Gram 24: Corellian Corvette contact bearing 131, codename Caprica</a:t>
             </a:r>
           </a:p>
         </p:txBody>
@@ -6606,7 +5167,7 @@
           <a:p>
             <a:r>
               <a:rPr sz="800">
-                <a:hlinkClick r:id="rId13"/>
+                <a:hlinkClick r:id="rId15"/>
               </a:rPr>
               <a:t>Lofar 1</a:t>
             </a:r>
@@ -6614,7 +5175,7 @@
           <a:p>
             <a:r>
               <a:rPr sz="800">
-                <a:hlinkClick r:id="rId14"/>
+                <a:hlinkClick r:id="rId16"/>
               </a:rPr>
               <a:t>Lofar 2</a:t>
             </a:r>
@@ -6622,7 +5183,7 @@
           <a:p>
             <a:r>
               <a:rPr sz="800">
-                <a:hlinkClick r:id="rId15"/>
+                <a:hlinkClick r:id="rId17"/>
               </a:rPr>
               <a:t>Lofar 3</a:t>
             </a:r>
@@ -6632,7 +5193,7 @@
       <p:sp>
         <p:nvSpPr>
           <p:cNvPr id="11" name="Rounded Rectangle 10">
-            <a:hlinkClick r:id="rId16"/>
+            <a:hlinkClick r:id="rId18"/>
           </p:cNvPr>
           <p:cNvSpPr/>
           <p:nvPr/>
@@ -6679,7 +5240,7 @@
                   <a:srgbClr val="1F3A5F"/>
                 </a:solidFill>
               </a:rPr>
-              <a:t>Gram 44: FR X-wing, Category 4, Vulcan</a:t>
+              <a:t>Gram 25: FR Akira-class, Category 2, Risa</a:t>
             </a:r>
           </a:p>
         </p:txBody>
@@ -6708,25 +5269,9 @@
           <a:p>
             <a:r>
               <a:rPr sz="800">
-                <a:hlinkClick r:id="rId17"/>
+                <a:hlinkClick r:id="rId19"/>
               </a:rPr>
               <a:t>Lofar 1</a:t>
-            </a:r>
-          </a:p>
-          <a:p>
-            <a:r>
-              <a:rPr sz="800">
-                <a:hlinkClick r:id="rId18"/>
-              </a:rPr>
-              <a:t>Lofar 2</a:t>
-            </a:r>
-          </a:p>
-          <a:p>
-            <a:r>
-              <a:rPr sz="800">
-                <a:hlinkClick r:id="rId19"/>
-              </a:rPr>
-              <a:t>Lofar 3</a:t>
             </a:r>
           </a:p>
         </p:txBody>
@@ -6781,7 +5326,7 @@
                   <a:srgbClr val="1F3A5F"/>
                 </a:solidFill>
               </a:rPr>
-              <a:t>Gram 46: FR Lambda Shuttle, Category 2, Endor</a:t>
+              <a:t>Gram 26: FR Intrepid-class, Category 4, Kronos</a:t>
             </a:r>
           </a:p>
         </p:txBody>
@@ -6815,12 +5360,20 @@
               <a:t>Lofar 1</a:t>
             </a:r>
           </a:p>
+          <a:p>
+            <a:r>
+              <a:rPr sz="800">
+                <a:hlinkClick r:id="rId22"/>
+              </a:rPr>
+              <a:t>Lofar 2</a:t>
+            </a:r>
+          </a:p>
         </p:txBody>
       </p:sp>
       <p:sp>
         <p:nvSpPr>
           <p:cNvPr id="15" name="Rounded Rectangle 14">
-            <a:hlinkClick r:id="rId22"/>
+            <a:hlinkClick r:id="rId23"/>
           </p:cNvPr>
           <p:cNvSpPr/>
           <p:nvPr/>
@@ -6867,7 +5420,7 @@
                   <a:srgbClr val="1F3A5F"/>
                 </a:solidFill>
               </a:rPr>
-              <a:t>Gram 47: Intrepid-class contact bearing 304, codename Hoth</a:t>
+              <a:t>Gram 27: Slave I contact bearing 006, codename Risa</a:t>
             </a:r>
           </a:p>
         </p:txBody>
@@ -6896,7 +5449,7 @@
           <a:p>
             <a:r>
               <a:rPr sz="800">
-                <a:hlinkClick r:id="rId23"/>
+                <a:hlinkClick r:id="rId24"/>
               </a:rPr>
               <a:t>Lofar 1</a:t>
             </a:r>
@@ -6904,17 +5457,25 @@
           <a:p>
             <a:r>
               <a:rPr sz="800">
-                <a:hlinkClick r:id="rId24"/>
+                <a:hlinkClick r:id="rId25"/>
               </a:rPr>
               <a:t>Lofar 2</a:t>
             </a:r>
           </a:p>
+          <a:p>
+            <a:r>
+              <a:rPr sz="800">
+                <a:hlinkClick r:id="rId26"/>
+              </a:rPr>
+              <a:t>Lofar 3</a:t>
+            </a:r>
+          </a:p>
         </p:txBody>
       </p:sp>
       <p:sp>
         <p:nvSpPr>
           <p:cNvPr id="17" name="Rounded Rectangle 16">
-            <a:hlinkClick r:id="rId25"/>
+            <a:hlinkClick r:id="rId27"/>
           </p:cNvPr>
           <p:cNvSpPr/>
           <p:nvPr/>
@@ -6961,7 +5522,7 @@
                   <a:srgbClr val="1F3A5F"/>
                 </a:solidFill>
               </a:rPr>
-              <a:t>Gram 48: FR Nebula-class, Category 2, Romulus</a:t>
+              <a:t>Gram 28: FR Nebula-class, Category 3, Coruscant</a:t>
             </a:r>
           </a:p>
         </p:txBody>
@@ -6990,17 +5551,41 @@
           <a:p>
             <a:r>
               <a:rPr sz="800">
-                <a:hlinkClick r:id="rId26"/>
+                <a:hlinkClick r:id="rId28"/>
               </a:rPr>
               <a:t>Lofar 1</a:t>
             </a:r>
           </a:p>
+          <a:p>
+            <a:r>
+              <a:rPr sz="800">
+                <a:hlinkClick r:id="rId29"/>
+              </a:rPr>
+              <a:t>Lofar 2</a:t>
+            </a:r>
+          </a:p>
+          <a:p>
+            <a:r>
+              <a:rPr sz="800">
+                <a:hlinkClick r:id="rId30"/>
+              </a:rPr>
+              <a:t>Lofar 3</a:t>
+            </a:r>
+          </a:p>
+          <a:p>
+            <a:r>
+              <a:rPr sz="800">
+                <a:hlinkClick r:id="rId31"/>
+              </a:rPr>
+              <a:t>Lofar 4</a:t>
+            </a:r>
+          </a:p>
         </p:txBody>
       </p:sp>
       <p:sp>
         <p:nvSpPr>
           <p:cNvPr id="19" name="Rounded Rectangle 18">
-            <a:hlinkClick r:id="rId27"/>
+            <a:hlinkClick r:id="rId32"/>
           </p:cNvPr>
           <p:cNvSpPr/>
           <p:nvPr/>
@@ -7047,7 +5632,7 @@
                   <a:srgbClr val="1F3A5F"/>
                 </a:solidFill>
               </a:rPr>
-              <a:t>Gram 49: FR Stargazer, Category 4, Dagobah</a:t>
+              <a:t>Gram 29: FR Reliant, Category 2, Kobol</a:t>
             </a:r>
           </a:p>
         </p:txBody>
@@ -7076,33 +5661,17 @@
           <a:p>
             <a:r>
               <a:rPr sz="800">
-                <a:hlinkClick r:id="rId28"/>
+                <a:hlinkClick r:id="rId33"/>
               </a:rPr>
               <a:t>Lofar 1</a:t>
             </a:r>
           </a:p>
-          <a:p>
-            <a:r>
-              <a:rPr sz="800">
-                <a:hlinkClick r:id="rId29"/>
-              </a:rPr>
-              <a:t>Lofar 2</a:t>
-            </a:r>
-          </a:p>
-          <a:p>
-            <a:r>
-              <a:rPr sz="800">
-                <a:hlinkClick r:id="rId30"/>
-              </a:rPr>
-              <a:t>Lofar 3</a:t>
-            </a:r>
-          </a:p>
         </p:txBody>
       </p:sp>
       <p:sp>
         <p:nvSpPr>
           <p:cNvPr id="21" name="Rounded Rectangle 20">
-            <a:hlinkClick r:id="rId31"/>
+            <a:hlinkClick r:id="rId34"/>
           </p:cNvPr>
           <p:cNvSpPr/>
           <p:nvPr/>
@@ -7149,7 +5718,7 @@
                   <a:srgbClr val="1F3A5F"/>
                 </a:solidFill>
               </a:rPr>
-              <a:t>Gram 50: FR Akira-class, Category 2, Coruscant</a:t>
+              <a:t>Gram 30: FR Corellian Corvette, Category 1, Dank</a:t>
             </a:r>
           </a:p>
         </p:txBody>
@@ -7178,7 +5747,7 @@
           <a:p>
             <a:r>
               <a:rPr sz="800">
-                <a:hlinkClick r:id="rId32"/>
+                <a:hlinkClick r:id="rId35"/>
               </a:rPr>
               <a:t>Lofar 1</a:t>
             </a:r>
@@ -7186,17 +5755,33 @@
           <a:p>
             <a:r>
               <a:rPr sz="800">
-                <a:hlinkClick r:id="rId33"/>
+                <a:hlinkClick r:id="rId36"/>
               </a:rPr>
               <a:t>Lofar 2</a:t>
             </a:r>
           </a:p>
+          <a:p>
+            <a:r>
+              <a:rPr sz="800">
+                <a:hlinkClick r:id="rId37"/>
+              </a:rPr>
+              <a:t>Lofar 3</a:t>
+            </a:r>
+          </a:p>
+          <a:p>
+            <a:r>
+              <a:rPr sz="800">
+                <a:hlinkClick r:id="rId38"/>
+              </a:rPr>
+              <a:t>Lofar 4</a:t>
+            </a:r>
+          </a:p>
         </p:txBody>
       </p:sp>
       <p:sp>
         <p:nvSpPr>
           <p:cNvPr id="23" name="Rounded Rectangle 22">
-            <a:hlinkClick r:id="rId34"/>
+            <a:hlinkClick r:id="rId39"/>
           </p:cNvPr>
           <p:cNvSpPr/>
           <p:nvPr/>
@@ -7243,7 +5828,7 @@
                   <a:srgbClr val="1F3A5F"/>
                 </a:solidFill>
               </a:rPr>
-              <a:t>Gram 51: FR Slave I, Category 2, Naboo</a:t>
+              <a:t>Gram 31: A-wing contact bearing 298, codename Dank</a:t>
             </a:r>
           </a:p>
         </p:txBody>
@@ -7272,25 +5857,17 @@
           <a:p>
             <a:r>
               <a:rPr sz="800">
-                <a:hlinkClick r:id="rId35"/>
+                <a:hlinkClick r:id="rId40"/>
               </a:rPr>
               <a:t>Lofar 1</a:t>
             </a:r>
           </a:p>
-          <a:p>
-            <a:r>
-              <a:rPr sz="800">
-                <a:hlinkClick r:id="rId36"/>
-              </a:rPr>
-              <a:t>Lofar 2</a:t>
-            </a:r>
-          </a:p>
         </p:txBody>
       </p:sp>
       <p:sp>
         <p:nvSpPr>
           <p:cNvPr id="25" name="Rounded Rectangle 24">
-            <a:hlinkClick r:id="rId37"/>
+            <a:hlinkClick r:id="rId41"/>
           </p:cNvPr>
           <p:cNvSpPr/>
           <p:nvPr/>
@@ -7337,7 +5914,7 @@
                   <a:srgbClr val="1F3A5F"/>
                 </a:solidFill>
               </a:rPr>
-              <a:t>Gram 52: Nebula-class contact bearing 194, codename Dagobah</a:t>
+              <a:t>Gram 32: FR Ghost, Category 1, Dank</a:t>
             </a:r>
           </a:p>
         </p:txBody>
@@ -7366,17 +5943,33 @@
           <a:p>
             <a:r>
               <a:rPr sz="800">
-                <a:hlinkClick r:id="rId38"/>
+                <a:hlinkClick r:id="rId42"/>
               </a:rPr>
               <a:t>Lofar 1</a:t>
             </a:r>
           </a:p>
+          <a:p>
+            <a:r>
+              <a:rPr sz="800">
+                <a:hlinkClick r:id="rId43"/>
+              </a:rPr>
+              <a:t>Lofar 2</a:t>
+            </a:r>
+          </a:p>
+          <a:p>
+            <a:r>
+              <a:rPr sz="800">
+                <a:hlinkClick r:id="rId44"/>
+              </a:rPr>
+              <a:t>Lofar 3</a:t>
+            </a:r>
+          </a:p>
         </p:txBody>
       </p:sp>
       <p:sp>
         <p:nvSpPr>
           <p:cNvPr id="27" name="Rounded Rectangle 26">
-            <a:hlinkClick r:id="rId39"/>
+            <a:hlinkClick r:id="rId45"/>
           </p:cNvPr>
           <p:cNvSpPr/>
           <p:nvPr/>
@@ -7423,7 +6016,7 @@
                   <a:srgbClr val="1F3A5F"/>
                 </a:solidFill>
               </a:rPr>
-              <a:t>Gram 54: FR Cerritos, Category 3, Vulcan</a:t>
+              <a:t>Gram 33: FR Nebulon-B, Category 2, Mustafar</a:t>
             </a:r>
           </a:p>
         </p:txBody>
@@ -7452,7 +6045,7 @@
           <a:p>
             <a:r>
               <a:rPr sz="800">
-                <a:hlinkClick r:id="rId40"/>
+                <a:hlinkClick r:id="rId46"/>
               </a:rPr>
               <a:t>Lofar 1</a:t>
             </a:r>
@@ -7460,7 +6053,7 @@
           <a:p>
             <a:r>
               <a:rPr sz="800">
-                <a:hlinkClick r:id="rId41"/>
+                <a:hlinkClick r:id="rId47"/>
               </a:rPr>
               <a:t>Lofar 2</a:t>
             </a:r>
@@ -7468,25 +6061,17 @@
           <a:p>
             <a:r>
               <a:rPr sz="800">
-                <a:hlinkClick r:id="rId42"/>
+                <a:hlinkClick r:id="rId48"/>
               </a:rPr>
               <a:t>Lofar 3</a:t>
             </a:r>
           </a:p>
-          <a:p>
-            <a:r>
-              <a:rPr sz="800">
-                <a:hlinkClick r:id="rId43"/>
-              </a:rPr>
-              <a:t>Lofar 4</a:t>
-            </a:r>
-          </a:p>
         </p:txBody>
       </p:sp>
       <p:sp>
         <p:nvSpPr>
           <p:cNvPr id="29" name="Rounded Rectangle 28">
-            <a:hlinkClick r:id="rId44"/>
+            <a:hlinkClick r:id="rId49"/>
           </p:cNvPr>
           <p:cNvSpPr/>
           <p:nvPr/>
@@ -7533,7 +6118,7 @@
                   <a:srgbClr val="1F3A5F"/>
                 </a:solidFill>
               </a:rPr>
-              <a:t>Gram 55: FR Akira-class, Category 3, Betazed</a:t>
+              <a:t>Gram 34: FR Discovery, Category 3, Dank</a:t>
             </a:r>
           </a:p>
         </p:txBody>
@@ -7562,7 +6147,7 @@
           <a:p>
             <a:r>
               <a:rPr sz="800">
-                <a:hlinkClick r:id="rId45"/>
+                <a:hlinkClick r:id="rId50"/>
               </a:rPr>
               <a:t>Lofar 1</a:t>
             </a:r>
@@ -7572,7 +6157,7 @@
       <p:sp>
         <p:nvSpPr>
           <p:cNvPr id="31" name="Rounded Rectangle 30">
-            <a:hlinkClick r:id="rId46"/>
+            <a:hlinkClick r:id="rId51"/>
           </p:cNvPr>
           <p:cNvSpPr/>
           <p:nvPr/>
@@ -7619,7 +6204,7 @@
                   <a:srgbClr val="1F3A5F"/>
                 </a:solidFill>
               </a:rPr>
-              <a:t>Gram 56: FR Discovery, Category 3, Kobol</a:t>
+              <a:t>Gram 35: FR Cerritos, Category 3, Naboo</a:t>
             </a:r>
           </a:p>
         </p:txBody>
@@ -7648,7 +6233,7 @@
           <a:p>
             <a:r>
               <a:rPr sz="800">
-                <a:hlinkClick r:id="rId47"/>
+                <a:hlinkClick r:id="rId52"/>
               </a:rPr>
               <a:t>Lofar 1</a:t>
             </a:r>
@@ -7656,7 +6241,7 @@
           <a:p>
             <a:r>
               <a:rPr sz="800">
-                <a:hlinkClick r:id="rId48"/>
+                <a:hlinkClick r:id="rId53"/>
               </a:rPr>
               <a:t>Lofar 2</a:t>
             </a:r>
@@ -7664,17 +6249,9 @@
           <a:p>
             <a:r>
               <a:rPr sz="800">
-                <a:hlinkClick r:id="rId49"/>
+                <a:hlinkClick r:id="rId54"/>
               </a:rPr>
               <a:t>Lofar 3</a:t>
-            </a:r>
-          </a:p>
-          <a:p>
-            <a:r>
-              <a:rPr sz="800">
-                <a:hlinkClick r:id="rId50"/>
-              </a:rPr>
-              <a:t>Lofar 4</a:t>
             </a:r>
           </a:p>
         </p:txBody>
@@ -7743,7 +6320,7 @@
                   <a:srgbClr val="FFFFFF"/>
                 </a:solidFill>
               </a:rPr>
-              <a:t>Instructor Pub10_Ed22B_Updated — Page 4 of 5</a:t>
+              <a:t>Instructor Pub10_Ed22B_Updated — Page 3 of 5</a:t>
             </a:r>
           </a:p>
         </p:txBody>
@@ -7798,7 +6375,7 @@
                   <a:srgbClr val="1F3A5F"/>
                 </a:solidFill>
               </a:rPr>
-              <a:t>Gram 57: Imperial-class contact bearing 089, codename Dagobah</a:t>
+              <a:t>Gram 37: FR Discovery, Category 1, Gandalf</a:t>
             </a:r>
           </a:p>
         </p:txBody>
@@ -7900,7 +6477,7 @@
                   <a:srgbClr val="1F3A5F"/>
                 </a:solidFill>
               </a:rPr>
-              <a:t>Gram 58: FR Tantive IV, Category 3, Yavin</a:t>
+              <a:t>Gram 39: FR Defiant-class, Category 1, Coruscant</a:t>
             </a:r>
           </a:p>
         </p:txBody>
@@ -7994,7 +6571,7 @@
                   <a:srgbClr val="1F3A5F"/>
                 </a:solidFill>
               </a:rPr>
-              <a:t>Gram 59: FR Akira-class, Category 3, Kobol</a:t>
+              <a:t>Gram 40: FR Outrider, Category 1, Hoth</a:t>
             </a:r>
           </a:p>
         </p:txBody>
@@ -8036,20 +6613,12 @@
               <a:t>Lofar 2</a:t>
             </a:r>
           </a:p>
-          <a:p>
-            <a:r>
-              <a:rPr sz="800">
-                <a:hlinkClick r:id="rId12"/>
-              </a:rPr>
-              <a:t>Lofar 3</a:t>
-            </a:r>
-          </a:p>
         </p:txBody>
       </p:sp>
       <p:sp>
         <p:nvSpPr>
           <p:cNvPr id="9" name="Rounded Rectangle 8">
-            <a:hlinkClick r:id="rId13"/>
+            <a:hlinkClick r:id="rId12"/>
           </p:cNvPr>
           <p:cNvSpPr/>
           <p:nvPr/>
@@ -8096,7 +6665,7 @@
                   <a:srgbClr val="1F3A5F"/>
                 </a:solidFill>
               </a:rPr>
-              <a:t>Gram 60: Constitution-class contact bearing 355, codename Dank</a:t>
+              <a:t>Gram 43: Nebulon-B contact bearing 034, codename Kronos</a:t>
             </a:r>
           </a:p>
         </p:txBody>
@@ -8125,9 +6694,25 @@
           <a:p>
             <a:r>
               <a:rPr sz="800">
+                <a:hlinkClick r:id="rId13"/>
+              </a:rPr>
+              <a:t>Lofar 1</a:t>
+            </a:r>
+          </a:p>
+          <a:p>
+            <a:r>
+              <a:rPr sz="800">
                 <a:hlinkClick r:id="rId14"/>
               </a:rPr>
-              <a:t>Lofar 1</a:t>
+              <a:t>Lofar 2</a:t>
+            </a:r>
+          </a:p>
+          <a:p>
+            <a:r>
+              <a:rPr sz="800">
+                <a:hlinkClick r:id="rId15"/>
+              </a:rPr>
+              <a:t>Lofar 3</a:t>
             </a:r>
           </a:p>
         </p:txBody>
@@ -8135,7 +6720,7 @@
       <p:sp>
         <p:nvSpPr>
           <p:cNvPr id="11" name="Rounded Rectangle 10">
-            <a:hlinkClick r:id="rId15"/>
+            <a:hlinkClick r:id="rId16"/>
           </p:cNvPr>
           <p:cNvSpPr/>
           <p:nvPr/>
@@ -8182,7 +6767,7 @@
                   <a:srgbClr val="1F3A5F"/>
                 </a:solidFill>
               </a:rPr>
-              <a:t>Gram 61: FR Nebulon-B, Category 4, Hoth</a:t>
+              <a:t>Gram 44: FR X-wing, Category 4, Vulcan</a:t>
             </a:r>
           </a:p>
         </p:txBody>
@@ -8211,7 +6796,7 @@
           <a:p>
             <a:r>
               <a:rPr sz="800">
-                <a:hlinkClick r:id="rId16"/>
+                <a:hlinkClick r:id="rId17"/>
               </a:rPr>
               <a:t>Lofar 1</a:t>
             </a:r>
@@ -8219,7 +6804,7 @@
           <a:p>
             <a:r>
               <a:rPr sz="800">
-                <a:hlinkClick r:id="rId17"/>
+                <a:hlinkClick r:id="rId18"/>
               </a:rPr>
               <a:t>Lofar 2</a:t>
             </a:r>
@@ -8227,7 +6812,7 @@
           <a:p>
             <a:r>
               <a:rPr sz="800">
-                <a:hlinkClick r:id="rId18"/>
+                <a:hlinkClick r:id="rId19"/>
               </a:rPr>
               <a:t>Lofar 3</a:t>
             </a:r>
@@ -8237,7 +6822,7 @@
       <p:sp>
         <p:nvSpPr>
           <p:cNvPr id="13" name="Rounded Rectangle 12">
-            <a:hlinkClick r:id="rId19"/>
+            <a:hlinkClick r:id="rId20"/>
           </p:cNvPr>
           <p:cNvSpPr/>
           <p:nvPr/>
@@ -8284,7 +6869,7 @@
                   <a:srgbClr val="1F3A5F"/>
                 </a:solidFill>
               </a:rPr>
-              <a:t>Gram 62: Millennium Falcon contact bearing 148, codename Cardassia</a:t>
+              <a:t>Gram 46: FR Lambda Shuttle, Category 2, Endor</a:t>
             </a:r>
           </a:p>
         </p:txBody>
@@ -8313,17 +6898,9 @@
           <a:p>
             <a:r>
               <a:rPr sz="800">
-                <a:hlinkClick r:id="rId20"/>
+                <a:hlinkClick r:id="rId21"/>
               </a:rPr>
               <a:t>Lofar 1</a:t>
-            </a:r>
-          </a:p>
-          <a:p>
-            <a:r>
-              <a:rPr sz="800">
-                <a:hlinkClick r:id="rId21"/>
-              </a:rPr>
-              <a:t>Lofar 2</a:t>
             </a:r>
           </a:p>
         </p:txBody>
@@ -8378,7 +6955,7 @@
                   <a:srgbClr val="1F3A5F"/>
                 </a:solidFill>
               </a:rPr>
-              <a:t>Gram 63: FR Defiant-class, Category 3, Yavin</a:t>
+              <a:t>Gram 47: Intrepid-class contact bearing 304, codename Hoth</a:t>
             </a:r>
           </a:p>
         </p:txBody>
@@ -8420,28 +6997,12 @@
               <a:t>Lofar 2</a:t>
             </a:r>
           </a:p>
-          <a:p>
-            <a:r>
-              <a:rPr sz="800">
-                <a:hlinkClick r:id="rId25"/>
-              </a:rPr>
-              <a:t>Lofar 3</a:t>
-            </a:r>
-          </a:p>
-          <a:p>
-            <a:r>
-              <a:rPr sz="800">
-                <a:hlinkClick r:id="rId26"/>
-              </a:rPr>
-              <a:t>Lofar 4</a:t>
-            </a:r>
-          </a:p>
         </p:txBody>
       </p:sp>
       <p:sp>
         <p:nvSpPr>
           <p:cNvPr id="17" name="Rounded Rectangle 16">
-            <a:hlinkClick r:id="rId27"/>
+            <a:hlinkClick r:id="rId25"/>
           </p:cNvPr>
           <p:cNvSpPr/>
           <p:nvPr/>
@@ -8488,7 +7049,7 @@
                   <a:srgbClr val="1F3A5F"/>
                 </a:solidFill>
               </a:rPr>
-              <a:t>Gram 64: FR Excelsior, Category 4, Mustafar</a:t>
+              <a:t>Gram 48: FR Nebula-class, Category 2, Romulus</a:t>
             </a:r>
           </a:p>
         </p:txBody>
@@ -8517,33 +7078,17 @@
           <a:p>
             <a:r>
               <a:rPr sz="800">
-                <a:hlinkClick r:id="rId28"/>
+                <a:hlinkClick r:id="rId26"/>
               </a:rPr>
               <a:t>Lofar 1</a:t>
             </a:r>
           </a:p>
-          <a:p>
-            <a:r>
-              <a:rPr sz="800">
-                <a:hlinkClick r:id="rId29"/>
-              </a:rPr>
-              <a:t>Lofar 2</a:t>
-            </a:r>
-          </a:p>
-          <a:p>
-            <a:r>
-              <a:rPr sz="800">
-                <a:hlinkClick r:id="rId30"/>
-              </a:rPr>
-              <a:t>Lofar 3</a:t>
-            </a:r>
-          </a:p>
         </p:txBody>
       </p:sp>
       <p:sp>
         <p:nvSpPr>
           <p:cNvPr id="19" name="Rounded Rectangle 18">
-            <a:hlinkClick r:id="rId31"/>
+            <a:hlinkClick r:id="rId27"/>
           </p:cNvPr>
           <p:cNvSpPr/>
           <p:nvPr/>
@@ -8590,7 +7135,7 @@
                   <a:srgbClr val="1F3A5F"/>
                 </a:solidFill>
               </a:rPr>
-              <a:t>Gram 65: Galaxy-class contact bearing 151, codename Gandalf</a:t>
+              <a:t>Gram 49: FR Stargazer, Category 4, Dagobah</a:t>
             </a:r>
           </a:p>
         </p:txBody>
@@ -8619,7 +7164,7 @@
           <a:p>
             <a:r>
               <a:rPr sz="800">
-                <a:hlinkClick r:id="rId32"/>
+                <a:hlinkClick r:id="rId28"/>
               </a:rPr>
               <a:t>Lofar 1</a:t>
             </a:r>
@@ -8627,7 +7172,7 @@
           <a:p>
             <a:r>
               <a:rPr sz="800">
-                <a:hlinkClick r:id="rId33"/>
+                <a:hlinkClick r:id="rId29"/>
               </a:rPr>
               <a:t>Lofar 2</a:t>
             </a:r>
@@ -8635,7 +7180,7 @@
           <a:p>
             <a:r>
               <a:rPr sz="800">
-                <a:hlinkClick r:id="rId34"/>
+                <a:hlinkClick r:id="rId30"/>
               </a:rPr>
               <a:t>Lofar 3</a:t>
             </a:r>
@@ -8645,7 +7190,7 @@
       <p:sp>
         <p:nvSpPr>
           <p:cNvPr id="21" name="Rounded Rectangle 20">
-            <a:hlinkClick r:id="rId35"/>
+            <a:hlinkClick r:id="rId31"/>
           </p:cNvPr>
           <p:cNvSpPr/>
           <p:nvPr/>
@@ -8692,7 +7237,7 @@
                   <a:srgbClr val="1F3A5F"/>
                 </a:solidFill>
               </a:rPr>
-              <a:t>Gram 66: FR Venator-class, Category 4, Cardassia</a:t>
+              <a:t>Gram 50: FR Akira-class, Category 2, Coruscant</a:t>
             </a:r>
           </a:p>
         </p:txBody>
@@ -8721,7 +7266,7 @@
           <a:p>
             <a:r>
               <a:rPr sz="800">
-                <a:hlinkClick r:id="rId36"/>
+                <a:hlinkClick r:id="rId32"/>
               </a:rPr>
               <a:t>Lofar 1</a:t>
             </a:r>
@@ -8729,33 +7274,17 @@
           <a:p>
             <a:r>
               <a:rPr sz="800">
-                <a:hlinkClick r:id="rId37"/>
+                <a:hlinkClick r:id="rId33"/>
               </a:rPr>
               <a:t>Lofar 2</a:t>
             </a:r>
           </a:p>
-          <a:p>
-            <a:r>
-              <a:rPr sz="800">
-                <a:hlinkClick r:id="rId38"/>
-              </a:rPr>
-              <a:t>Lofar 3</a:t>
-            </a:r>
-          </a:p>
-          <a:p>
-            <a:r>
-              <a:rPr sz="800">
-                <a:hlinkClick r:id="rId39"/>
-              </a:rPr>
-              <a:t>Lofar 4</a:t>
-            </a:r>
-          </a:p>
         </p:txBody>
       </p:sp>
       <p:sp>
         <p:nvSpPr>
           <p:cNvPr id="23" name="Rounded Rectangle 22">
-            <a:hlinkClick r:id="rId40"/>
+            <a:hlinkClick r:id="rId34"/>
           </p:cNvPr>
           <p:cNvSpPr/>
           <p:nvPr/>
@@ -8802,7 +7331,7 @@
                   <a:srgbClr val="1F3A5F"/>
                 </a:solidFill>
               </a:rPr>
-              <a:t>Gram 67: Voyager contact bearing 029, codename Vulcan</a:t>
+              <a:t>Gram 51: FR Slave I, Category 2, Naboo</a:t>
             </a:r>
           </a:p>
         </p:txBody>
@@ -8831,7 +7360,7 @@
           <a:p>
             <a:r>
               <a:rPr sz="800">
-                <a:hlinkClick r:id="rId41"/>
+                <a:hlinkClick r:id="rId35"/>
               </a:rPr>
               <a:t>Lofar 1</a:t>
             </a:r>
@@ -8839,7 +7368,7 @@
           <a:p>
             <a:r>
               <a:rPr sz="800">
-                <a:hlinkClick r:id="rId42"/>
+                <a:hlinkClick r:id="rId36"/>
               </a:rPr>
               <a:t>Lofar 2</a:t>
             </a:r>
@@ -8849,7 +7378,7 @@
       <p:sp>
         <p:nvSpPr>
           <p:cNvPr id="25" name="Rounded Rectangle 24">
-            <a:hlinkClick r:id="rId43"/>
+            <a:hlinkClick r:id="rId37"/>
           </p:cNvPr>
           <p:cNvSpPr/>
           <p:nvPr/>
@@ -8896,7 +7425,7 @@
                   <a:srgbClr val="1F3A5F"/>
                 </a:solidFill>
               </a:rPr>
-              <a:t>Gram 68: FR Akira-class, Category 4, Dank</a:t>
+              <a:t>Gram 52: Nebula-class contact bearing 194, codename Dagobah</a:t>
             </a:r>
           </a:p>
         </p:txBody>
@@ -8925,7 +7454,7 @@
           <a:p>
             <a:r>
               <a:rPr sz="800">
-                <a:hlinkClick r:id="rId44"/>
+                <a:hlinkClick r:id="rId38"/>
               </a:rPr>
               <a:t>Lofar 1</a:t>
             </a:r>
@@ -8935,7 +7464,7 @@
       <p:sp>
         <p:nvSpPr>
           <p:cNvPr id="27" name="Rounded Rectangle 26">
-            <a:hlinkClick r:id="rId45"/>
+            <a:hlinkClick r:id="rId39"/>
           </p:cNvPr>
           <p:cNvSpPr/>
           <p:nvPr/>
@@ -8982,7 +7511,7 @@
                   <a:srgbClr val="1F3A5F"/>
                 </a:solidFill>
               </a:rPr>
-              <a:t>Gram 69: FR Razor Crest, Category 3, Hoth</a:t>
+              <a:t>Gram 54: FR Cerritos, Category 3, Vulcan</a:t>
             </a:r>
           </a:p>
         </p:txBody>
@@ -9011,17 +7540,41 @@
           <a:p>
             <a:r>
               <a:rPr sz="800">
-                <a:hlinkClick r:id="rId46"/>
+                <a:hlinkClick r:id="rId40"/>
               </a:rPr>
               <a:t>Lofar 1</a:t>
             </a:r>
           </a:p>
+          <a:p>
+            <a:r>
+              <a:rPr sz="800">
+                <a:hlinkClick r:id="rId41"/>
+              </a:rPr>
+              <a:t>Lofar 2</a:t>
+            </a:r>
+          </a:p>
+          <a:p>
+            <a:r>
+              <a:rPr sz="800">
+                <a:hlinkClick r:id="rId42"/>
+              </a:rPr>
+              <a:t>Lofar 3</a:t>
+            </a:r>
+          </a:p>
+          <a:p>
+            <a:r>
+              <a:rPr sz="800">
+                <a:hlinkClick r:id="rId43"/>
+              </a:rPr>
+              <a:t>Lofar 4</a:t>
+            </a:r>
+          </a:p>
         </p:txBody>
       </p:sp>
       <p:sp>
         <p:nvSpPr>
           <p:cNvPr id="29" name="Rounded Rectangle 28">
-            <a:hlinkClick r:id="rId47"/>
+            <a:hlinkClick r:id="rId44"/>
           </p:cNvPr>
           <p:cNvSpPr/>
           <p:nvPr/>
@@ -9068,7 +7621,7 @@
                   <a:srgbClr val="1F3A5F"/>
                 </a:solidFill>
               </a:rPr>
-              <a:t>Gram 70: FR Nebulon-B, Category 4, Vulcan</a:t>
+              <a:t>Gram 55: FR Akira-class, Category 3, Betazed</a:t>
             </a:r>
           </a:p>
         </p:txBody>
@@ -9097,7 +7650,7 @@
           <a:p>
             <a:r>
               <a:rPr sz="800">
-                <a:hlinkClick r:id="rId48"/>
+                <a:hlinkClick r:id="rId45"/>
               </a:rPr>
               <a:t>Lofar 1</a:t>
             </a:r>
@@ -9107,7 +7660,7 @@
       <p:sp>
         <p:nvSpPr>
           <p:cNvPr id="31" name="Rounded Rectangle 30">
-            <a:hlinkClick r:id="rId49"/>
+            <a:hlinkClick r:id="rId46"/>
           </p:cNvPr>
           <p:cNvSpPr/>
           <p:nvPr/>
@@ -9154,7 +7707,7 @@
                   <a:srgbClr val="1F3A5F"/>
                 </a:solidFill>
               </a:rPr>
-              <a:t>Gram 72: FR A-wing, Category 1, Gandalf</a:t>
+              <a:t>Gram 56: FR Discovery, Category 3, Kobol</a:t>
             </a:r>
           </a:p>
         </p:txBody>
@@ -9183,9 +7736,33 @@
           <a:p>
             <a:r>
               <a:rPr sz="800">
+                <a:hlinkClick r:id="rId47"/>
+              </a:rPr>
+              <a:t>Lofar 1</a:t>
+            </a:r>
+          </a:p>
+          <a:p>
+            <a:r>
+              <a:rPr sz="800">
+                <a:hlinkClick r:id="rId48"/>
+              </a:rPr>
+              <a:t>Lofar 2</a:t>
+            </a:r>
+          </a:p>
+          <a:p>
+            <a:r>
+              <a:rPr sz="800">
+                <a:hlinkClick r:id="rId49"/>
+              </a:rPr>
+              <a:t>Lofar 3</a:t>
+            </a:r>
+          </a:p>
+          <a:p>
+            <a:r>
+              <a:rPr sz="800">
                 <a:hlinkClick r:id="rId50"/>
               </a:rPr>
-              <a:t>Lofar 1</a:t>
+              <a:t>Lofar 4</a:t>
             </a:r>
           </a:p>
         </p:txBody>
@@ -9254,7 +7831,7 @@
                   <a:srgbClr val="FFFFFF"/>
                 </a:solidFill>
               </a:rPr>
-              <a:t>Instructor Pub10_Ed22B_Updated — Page 5 of 5</a:t>
+              <a:t>Instructor Pub10_Ed22B_Updated — Page 4 of 5</a:t>
             </a:r>
           </a:p>
         </p:txBody>
@@ -9309,7 +7886,7 @@
                   <a:srgbClr val="1F3A5F"/>
                 </a:solidFill>
               </a:rPr>
-              <a:t>Gram 74: Star Destroyer contact bearing 169, codename Bespin</a:t>
+              <a:t>Gram 57: Imperial-class contact bearing 089, codename Dagobah</a:t>
             </a:r>
           </a:p>
         </p:txBody>
@@ -9351,12 +7928,20 @@
               <a:t>Lofar 2</a:t>
             </a:r>
           </a:p>
+          <a:p>
+            <a:r>
+              <a:rPr sz="800">
+                <a:hlinkClick r:id="rId5"/>
+              </a:rPr>
+              <a:t>Lofar 3</a:t>
+            </a:r>
+          </a:p>
         </p:txBody>
       </p:sp>
       <p:sp>
         <p:nvSpPr>
           <p:cNvPr id="5" name="Rounded Rectangle 4">
-            <a:hlinkClick r:id="rId5"/>
+            <a:hlinkClick r:id="rId6"/>
           </p:cNvPr>
           <p:cNvSpPr/>
           <p:nvPr/>
@@ -9403,7 +7988,7 @@
                   <a:srgbClr val="1F3A5F"/>
                 </a:solidFill>
               </a:rPr>
-              <a:t>Gram 75: FR Intrepid-class, Category 1, Vulcan</a:t>
+              <a:t>Gram 58: FR Tantive IV, Category 3, Yavin</a:t>
             </a:r>
           </a:p>
         </p:txBody>
@@ -9432,17 +8017,25 @@
           <a:p>
             <a:r>
               <a:rPr sz="800">
-                <a:hlinkClick r:id="rId6"/>
+                <a:hlinkClick r:id="rId7"/>
               </a:rPr>
               <a:t>Lofar 1</a:t>
             </a:r>
           </a:p>
+          <a:p>
+            <a:r>
+              <a:rPr sz="800">
+                <a:hlinkClick r:id="rId8"/>
+              </a:rPr>
+              <a:t>Lofar 2</a:t>
+            </a:r>
+          </a:p>
         </p:txBody>
       </p:sp>
       <p:sp>
         <p:nvSpPr>
           <p:cNvPr id="7" name="Rounded Rectangle 6">
-            <a:hlinkClick r:id="rId7"/>
+            <a:hlinkClick r:id="rId9"/>
           </p:cNvPr>
           <p:cNvSpPr/>
           <p:nvPr/>
@@ -9489,7 +8082,7 @@
                   <a:srgbClr val="1F3A5F"/>
                 </a:solidFill>
               </a:rPr>
-              <a:t>Gram 76: FR Y-wing, Category 4, Tatooine</a:t>
+              <a:t>Gram 59: FR Akira-class, Category 3, Kobol</a:t>
             </a:r>
           </a:p>
         </p:txBody>
@@ -9518,7 +8111,7 @@
           <a:p>
             <a:r>
               <a:rPr sz="800">
-                <a:hlinkClick r:id="rId8"/>
+                <a:hlinkClick r:id="rId10"/>
               </a:rPr>
               <a:t>Lofar 1</a:t>
             </a:r>
@@ -9526,17 +8119,25 @@
           <a:p>
             <a:r>
               <a:rPr sz="800">
-                <a:hlinkClick r:id="rId9"/>
+                <a:hlinkClick r:id="rId11"/>
               </a:rPr>
               <a:t>Lofar 2</a:t>
             </a:r>
           </a:p>
+          <a:p>
+            <a:r>
+              <a:rPr sz="800">
+                <a:hlinkClick r:id="rId12"/>
+              </a:rPr>
+              <a:t>Lofar 3</a:t>
+            </a:r>
+          </a:p>
         </p:txBody>
       </p:sp>
       <p:sp>
         <p:nvSpPr>
           <p:cNvPr id="9" name="Rounded Rectangle 8">
-            <a:hlinkClick r:id="rId10"/>
+            <a:hlinkClick r:id="rId13"/>
           </p:cNvPr>
           <p:cNvSpPr/>
           <p:nvPr/>
@@ -9583,7 +8184,7 @@
                   <a:srgbClr val="1F3A5F"/>
                 </a:solidFill>
               </a:rPr>
-              <a:t>Gram 77: FR Miranda-class, Category 3, Coruscant</a:t>
+              <a:t>Gram 60: Constitution-class contact bearing 355, codename Dank</a:t>
             </a:r>
           </a:p>
         </p:txBody>
@@ -9612,25 +8213,17 @@
           <a:p>
             <a:r>
               <a:rPr sz="800">
-                <a:hlinkClick r:id="rId11"/>
+                <a:hlinkClick r:id="rId14"/>
               </a:rPr>
               <a:t>Lofar 1</a:t>
             </a:r>
           </a:p>
-          <a:p>
-            <a:r>
-              <a:rPr sz="800">
-                <a:hlinkClick r:id="rId12"/>
-              </a:rPr>
-              <a:t>Lofar 2</a:t>
-            </a:r>
-          </a:p>
         </p:txBody>
       </p:sp>
       <p:sp>
         <p:nvSpPr>
           <p:cNvPr id="11" name="Rounded Rectangle 10">
-            <a:hlinkClick r:id="rId13"/>
+            <a:hlinkClick r:id="rId15"/>
           </p:cNvPr>
           <p:cNvSpPr/>
           <p:nvPr/>
@@ -9677,7 +8270,7 @@
                   <a:srgbClr val="1F3A5F"/>
                 </a:solidFill>
               </a:rPr>
-              <a:t>Gram 78: Defiant-class contact bearing 142, codename Risa</a:t>
+              <a:t>Gram 61: FR Nebulon-B, Category 4, Hoth</a:t>
             </a:r>
           </a:p>
         </p:txBody>
@@ -9706,17 +8299,33 @@
           <a:p>
             <a:r>
               <a:rPr sz="800">
-                <a:hlinkClick r:id="rId14"/>
+                <a:hlinkClick r:id="rId16"/>
               </a:rPr>
               <a:t>Lofar 1</a:t>
             </a:r>
           </a:p>
+          <a:p>
+            <a:r>
+              <a:rPr sz="800">
+                <a:hlinkClick r:id="rId17"/>
+              </a:rPr>
+              <a:t>Lofar 2</a:t>
+            </a:r>
+          </a:p>
+          <a:p>
+            <a:r>
+              <a:rPr sz="800">
+                <a:hlinkClick r:id="rId18"/>
+              </a:rPr>
+              <a:t>Lofar 3</a:t>
+            </a:r>
+          </a:p>
         </p:txBody>
       </p:sp>
       <p:sp>
         <p:nvSpPr>
           <p:cNvPr id="13" name="Rounded Rectangle 12">
-            <a:hlinkClick r:id="rId15"/>
+            <a:hlinkClick r:id="rId19"/>
           </p:cNvPr>
           <p:cNvSpPr/>
           <p:nvPr/>
@@ -9763,7 +8372,7 @@
                   <a:srgbClr val="1F3A5F"/>
                 </a:solidFill>
               </a:rPr>
-              <a:t>Gram 79: FR Voyager, Category 1, Dank</a:t>
+              <a:t>Gram 62: Millennium Falcon contact bearing 148, codename Cardassia</a:t>
             </a:r>
           </a:p>
         </p:txBody>
@@ -9792,7 +8401,7 @@
           <a:p>
             <a:r>
               <a:rPr sz="800">
-                <a:hlinkClick r:id="rId16"/>
+                <a:hlinkClick r:id="rId20"/>
               </a:rPr>
               <a:t>Lofar 1</a:t>
             </a:r>
@@ -9800,33 +8409,17 @@
           <a:p>
             <a:r>
               <a:rPr sz="800">
-                <a:hlinkClick r:id="rId17"/>
+                <a:hlinkClick r:id="rId21"/>
               </a:rPr>
               <a:t>Lofar 2</a:t>
             </a:r>
           </a:p>
-          <a:p>
-            <a:r>
-              <a:rPr sz="800">
-                <a:hlinkClick r:id="rId18"/>
-              </a:rPr>
-              <a:t>Lofar 3</a:t>
-            </a:r>
-          </a:p>
-          <a:p>
-            <a:r>
-              <a:rPr sz="800">
-                <a:hlinkClick r:id="rId19"/>
-              </a:rPr>
-              <a:t>Lofar 4</a:t>
-            </a:r>
-          </a:p>
         </p:txBody>
       </p:sp>
       <p:sp>
         <p:nvSpPr>
           <p:cNvPr id="15" name="Rounded Rectangle 14">
-            <a:hlinkClick r:id="rId20"/>
+            <a:hlinkClick r:id="rId22"/>
           </p:cNvPr>
           <p:cNvSpPr/>
           <p:nvPr/>
@@ -9873,7 +8466,7 @@
                   <a:srgbClr val="1F3A5F"/>
                 </a:solidFill>
               </a:rPr>
-              <a:t>Gram 80: FR Mon Calamari Cruiser, Category 3, Cardassia</a:t>
+              <a:t>Gram 63: FR Defiant-class, Category 3, Yavin</a:t>
             </a:r>
           </a:p>
         </p:txBody>
@@ -9902,7 +8495,7 @@
           <a:p>
             <a:r>
               <a:rPr sz="800">
-                <a:hlinkClick r:id="rId21"/>
+                <a:hlinkClick r:id="rId23"/>
               </a:rPr>
               <a:t>Lofar 1</a:t>
             </a:r>
@@ -9910,7 +8503,7 @@
           <a:p>
             <a:r>
               <a:rPr sz="800">
-                <a:hlinkClick r:id="rId22"/>
+                <a:hlinkClick r:id="rId24"/>
               </a:rPr>
               <a:t>Lofar 2</a:t>
             </a:r>
@@ -9918,7 +8511,7 @@
           <a:p>
             <a:r>
               <a:rPr sz="800">
-                <a:hlinkClick r:id="rId23"/>
+                <a:hlinkClick r:id="rId25"/>
               </a:rPr>
               <a:t>Lofar 3</a:t>
             </a:r>
@@ -9926,7 +8519,7 @@
           <a:p>
             <a:r>
               <a:rPr sz="800">
-                <a:hlinkClick r:id="rId24"/>
+                <a:hlinkClick r:id="rId26"/>
               </a:rPr>
               <a:t>Lofar 4</a:t>
             </a:r>
@@ -9936,7 +8529,7 @@
       <p:sp>
         <p:nvSpPr>
           <p:cNvPr id="17" name="Rounded Rectangle 16">
-            <a:hlinkClick r:id="rId25"/>
+            <a:hlinkClick r:id="rId27"/>
           </p:cNvPr>
           <p:cNvSpPr/>
           <p:nvPr/>
@@ -9983,7 +8576,7 @@
                   <a:srgbClr val="1F3A5F"/>
                 </a:solidFill>
               </a:rPr>
-              <a:t>Gram 81: Prometheus contact bearing 167, codename Mustafar</a:t>
+              <a:t>Gram 64: FR Excelsior, Category 4, Mustafar</a:t>
             </a:r>
           </a:p>
         </p:txBody>
@@ -10012,7 +8605,7 @@
           <a:p>
             <a:r>
               <a:rPr sz="800">
-                <a:hlinkClick r:id="rId26"/>
+                <a:hlinkClick r:id="rId28"/>
               </a:rPr>
               <a:t>Lofar 1</a:t>
             </a:r>
@@ -10020,7 +8613,7 @@
           <a:p>
             <a:r>
               <a:rPr sz="800">
-                <a:hlinkClick r:id="rId27"/>
+                <a:hlinkClick r:id="rId29"/>
               </a:rPr>
               <a:t>Lofar 2</a:t>
             </a:r>
@@ -10028,25 +8621,17 @@
           <a:p>
             <a:r>
               <a:rPr sz="800">
-                <a:hlinkClick r:id="rId28"/>
+                <a:hlinkClick r:id="rId30"/>
               </a:rPr>
               <a:t>Lofar 3</a:t>
             </a:r>
           </a:p>
-          <a:p>
-            <a:r>
-              <a:rPr sz="800">
-                <a:hlinkClick r:id="rId29"/>
-              </a:rPr>
-              <a:t>Lofar 4</a:t>
-            </a:r>
-          </a:p>
         </p:txBody>
       </p:sp>
       <p:sp>
         <p:nvSpPr>
           <p:cNvPr id="19" name="Rounded Rectangle 18">
-            <a:hlinkClick r:id="rId30"/>
+            <a:hlinkClick r:id="rId31"/>
           </p:cNvPr>
           <p:cNvSpPr/>
           <p:nvPr/>
@@ -10093,7 +8678,7 @@
                   <a:srgbClr val="1F3A5F"/>
                 </a:solidFill>
               </a:rPr>
-              <a:t>Gram 82: Constitution-class contact bearing 066, codename Kronos</a:t>
+              <a:t>Gram 65: Galaxy-class contact bearing 151, codename Gandalf</a:t>
             </a:r>
           </a:p>
         </p:txBody>
@@ -10122,7 +8707,7 @@
           <a:p>
             <a:r>
               <a:rPr sz="800">
-                <a:hlinkClick r:id="rId31"/>
+                <a:hlinkClick r:id="rId32"/>
               </a:rPr>
               <a:t>Lofar 1</a:t>
             </a:r>
@@ -10130,7 +8715,7 @@
           <a:p>
             <a:r>
               <a:rPr sz="800">
-                <a:hlinkClick r:id="rId32"/>
+                <a:hlinkClick r:id="rId33"/>
               </a:rPr>
               <a:t>Lofar 2</a:t>
             </a:r>
@@ -10138,7 +8723,7 @@
           <a:p>
             <a:r>
               <a:rPr sz="800">
-                <a:hlinkClick r:id="rId33"/>
+                <a:hlinkClick r:id="rId34"/>
               </a:rPr>
               <a:t>Lofar 3</a:t>
             </a:r>
@@ -10148,7 +8733,7 @@
       <p:sp>
         <p:nvSpPr>
           <p:cNvPr id="21" name="Rounded Rectangle 20">
-            <a:hlinkClick r:id="rId34"/>
+            <a:hlinkClick r:id="rId35"/>
           </p:cNvPr>
           <p:cNvSpPr/>
           <p:nvPr/>
@@ -10195,7 +8780,7 @@
                   <a:srgbClr val="1F3A5F"/>
                 </a:solidFill>
               </a:rPr>
-              <a:t>Gram 83: FR A-wing, Category 2, Vulcan</a:t>
+              <a:t>Gram 66: FR Venator-class, Category 4, Cardassia</a:t>
             </a:r>
           </a:p>
         </p:txBody>
@@ -10224,17 +8809,41 @@
           <a:p>
             <a:r>
               <a:rPr sz="800">
-                <a:hlinkClick r:id="rId35"/>
+                <a:hlinkClick r:id="rId36"/>
               </a:rPr>
               <a:t>Lofar 1</a:t>
             </a:r>
           </a:p>
+          <a:p>
+            <a:r>
+              <a:rPr sz="800">
+                <a:hlinkClick r:id="rId37"/>
+              </a:rPr>
+              <a:t>Lofar 2</a:t>
+            </a:r>
+          </a:p>
+          <a:p>
+            <a:r>
+              <a:rPr sz="800">
+                <a:hlinkClick r:id="rId38"/>
+              </a:rPr>
+              <a:t>Lofar 3</a:t>
+            </a:r>
+          </a:p>
+          <a:p>
+            <a:r>
+              <a:rPr sz="800">
+                <a:hlinkClick r:id="rId39"/>
+              </a:rPr>
+              <a:t>Lofar 4</a:t>
+            </a:r>
+          </a:p>
         </p:txBody>
       </p:sp>
       <p:sp>
         <p:nvSpPr>
           <p:cNvPr id="23" name="Rounded Rectangle 22">
-            <a:hlinkClick r:id="rId36"/>
+            <a:hlinkClick r:id="rId40"/>
           </p:cNvPr>
           <p:cNvSpPr/>
           <p:nvPr/>
@@ -10281,7 +8890,7 @@
                   <a:srgbClr val="1F3A5F"/>
                 </a:solidFill>
               </a:rPr>
-              <a:t>Gram 84: FR Slave I, Category 4, Risa</a:t>
+              <a:t>Gram 67: Voyager contact bearing 029, codename Vulcan</a:t>
             </a:r>
           </a:p>
         </p:txBody>
@@ -10310,7 +8919,7 @@
           <a:p>
             <a:r>
               <a:rPr sz="800">
-                <a:hlinkClick r:id="rId37"/>
+                <a:hlinkClick r:id="rId41"/>
               </a:rPr>
               <a:t>Lofar 1</a:t>
             </a:r>
@@ -10318,33 +8927,17 @@
           <a:p>
             <a:r>
               <a:rPr sz="800">
-                <a:hlinkClick r:id="rId38"/>
+                <a:hlinkClick r:id="rId42"/>
               </a:rPr>
               <a:t>Lofar 2</a:t>
             </a:r>
           </a:p>
-          <a:p>
-            <a:r>
-              <a:rPr sz="800">
-                <a:hlinkClick r:id="rId39"/>
-              </a:rPr>
-              <a:t>Lofar 3</a:t>
-            </a:r>
-          </a:p>
-          <a:p>
-            <a:r>
-              <a:rPr sz="800">
-                <a:hlinkClick r:id="rId40"/>
-              </a:rPr>
-              <a:t>Lofar 4</a:t>
-            </a:r>
-          </a:p>
         </p:txBody>
       </p:sp>
       <p:sp>
         <p:nvSpPr>
           <p:cNvPr id="25" name="Rounded Rectangle 24">
-            <a:hlinkClick r:id="rId41"/>
+            <a:hlinkClick r:id="rId43"/>
           </p:cNvPr>
           <p:cNvSpPr/>
           <p:nvPr/>
@@ -10391,7 +8984,7 @@
                   <a:srgbClr val="1F3A5F"/>
                 </a:solidFill>
               </a:rPr>
-              <a:t>Gram 85: FR Razor Crest, Category 3, Bajor</a:t>
+              <a:t>Gram 68: FR Akira-class, Category 4, Dank</a:t>
             </a:r>
           </a:p>
         </p:txBody>
@@ -10420,25 +9013,17 @@
           <a:p>
             <a:r>
               <a:rPr sz="800">
-                <a:hlinkClick r:id="rId42"/>
+                <a:hlinkClick r:id="rId44"/>
               </a:rPr>
               <a:t>Lofar 1</a:t>
             </a:r>
           </a:p>
-          <a:p>
-            <a:r>
-              <a:rPr sz="800">
-                <a:hlinkClick r:id="rId43"/>
-              </a:rPr>
-              <a:t>Lofar 2</a:t>
-            </a:r>
-          </a:p>
         </p:txBody>
       </p:sp>
       <p:sp>
         <p:nvSpPr>
           <p:cNvPr id="27" name="Rounded Rectangle 26">
-            <a:hlinkClick r:id="rId44"/>
+            <a:hlinkClick r:id="rId45"/>
           </p:cNvPr>
           <p:cNvSpPr/>
           <p:nvPr/>
@@ -10485,7 +9070,7 @@
                   <a:srgbClr val="1F3A5F"/>
                 </a:solidFill>
               </a:rPr>
-              <a:t>Gram 86: FR Devastator, Category 2, Betazed</a:t>
+              <a:t>Gram 69: FR Razor Crest, Category 3, Hoth</a:t>
             </a:r>
           </a:p>
         </p:txBody>
@@ -10514,7 +9099,7 @@
           <a:p>
             <a:r>
               <a:rPr sz="800">
-                <a:hlinkClick r:id="rId45"/>
+                <a:hlinkClick r:id="rId46"/>
               </a:rPr>
               <a:t>Lofar 1</a:t>
             </a:r>
@@ -10524,7 +9109,7 @@
       <p:sp>
         <p:nvSpPr>
           <p:cNvPr id="29" name="Rounded Rectangle 28">
-            <a:hlinkClick r:id="rId46"/>
+            <a:hlinkClick r:id="rId47"/>
           </p:cNvPr>
           <p:cNvSpPr/>
           <p:nvPr/>
@@ -10571,7 +9156,7 @@
                   <a:srgbClr val="1F3A5F"/>
                 </a:solidFill>
               </a:rPr>
-              <a:t>Gram 87: FR Sovereign-class, Category 3, Dagobah</a:t>
+              <a:t>Gram 70: FR Nebulon-B, Category 4, Vulcan</a:t>
             </a:r>
           </a:p>
         </p:txBody>
@@ -10600,17 +9185,9 @@
           <a:p>
             <a:r>
               <a:rPr sz="800">
-                <a:hlinkClick r:id="rId47"/>
+                <a:hlinkClick r:id="rId48"/>
               </a:rPr>
               <a:t>Lofar 1</a:t>
-            </a:r>
-          </a:p>
-          <a:p>
-            <a:r>
-              <a:rPr sz="800">
-                <a:hlinkClick r:id="rId48"/>
-              </a:rPr>
-              <a:t>Lofar 2</a:t>
             </a:r>
           </a:p>
         </p:txBody>
@@ -10665,7 +9242,7 @@
                   <a:srgbClr val="1F3A5F"/>
                 </a:solidFill>
               </a:rPr>
-              <a:t>Gram 88: FR Nebula-class, Category 1, Cardassia</a:t>
+              <a:t>Gram 72: FR A-wing, Category 1, Gandalf</a:t>
             </a:r>
           </a:p>
         </p:txBody>
@@ -10699,12 +9276,1609 @@
               <a:t>Lofar 1</a:t>
             </a:r>
           </a:p>
+        </p:txBody>
+      </p:sp>
+    </p:spTree>
+  </p:cSld>
+  <p:clrMapOvr>
+    <a:masterClrMapping/>
+  </p:clrMapOvr>
+</p:sld>
+</file>
+
+<file path=ppt/slides/slide6.xml><?xml version="1.0" encoding="utf-8"?>
+<p:sld xmlns:a="http://schemas.openxmlformats.org/drawingml/2006/main" xmlns:p="http://schemas.openxmlformats.org/presentationml/2006/main" xmlns:r="http://schemas.openxmlformats.org/officeDocument/2006/relationships">
+  <p:cSld>
+    <p:spTree>
+      <p:nvGrpSpPr>
+        <p:cNvPr id="1" name=""/>
+        <p:cNvGrpSpPr/>
+        <p:nvPr/>
+      </p:nvGrpSpPr>
+      <p:grpSpPr/>
+      <p:sp>
+        <p:nvSpPr>
+          <p:cNvPr id="2" name="Rectangle 1"/>
+          <p:cNvSpPr/>
+          <p:nvPr/>
+        </p:nvSpPr>
+        <p:spPr>
+          <a:xfrm>
+            <a:off x="0" y="0"/>
+            <a:ext cx="12188952" cy="548640"/>
+          </a:xfrm>
+          <a:prstGeom prst="rect">
+            <a:avLst/>
+          </a:prstGeom>
+          <a:solidFill>
+            <a:srgbClr val="1F3A5F"/>
+          </a:solidFill>
+          <a:ln>
+            <a:noFill/>
+          </a:ln>
+        </p:spPr>
+        <p:style>
+          <a:lnRef idx="1">
+            <a:schemeClr val="accent1"/>
+          </a:lnRef>
+          <a:fillRef idx="3">
+            <a:schemeClr val="accent1"/>
+          </a:fillRef>
+          <a:effectRef idx="2">
+            <a:schemeClr val="accent1"/>
+          </a:effectRef>
+          <a:fontRef idx="minor">
+            <a:schemeClr val="lt1"/>
+          </a:fontRef>
+        </p:style>
+        <p:txBody>
+          <a:bodyPr rtlCol="0" anchor="ctr" lIns="182880" rIns="182880"/>
+          <a:lstStyle/>
+          <a:p>
+            <a:pPr algn="ctr"/>
+            <a:r>
+              <a:rPr sz="2000" b="1">
+                <a:solidFill>
+                  <a:srgbClr val="FFFFFF"/>
+                </a:solidFill>
+              </a:rPr>
+              <a:t>Instructor Pub10_Ed22B_Updated — Page 5 of 5</a:t>
+            </a:r>
+          </a:p>
+        </p:txBody>
+      </p:sp>
+      <p:sp>
+        <p:nvSpPr>
+          <p:cNvPr id="3" name="Rounded Rectangle 2">
+            <a:hlinkClick r:id="rId2"/>
+          </p:cNvPr>
+          <p:cNvSpPr/>
+          <p:nvPr/>
+        </p:nvSpPr>
+        <p:spPr>
+          <a:xfrm>
+            <a:off x="365760" y="731520"/>
+            <a:ext cx="2200046" cy="365760"/>
+          </a:xfrm>
+          <a:prstGeom prst="roundRect">
+            <a:avLst/>
+          </a:prstGeom>
+          <a:solidFill>
+            <a:srgbClr val="E8EEF7"/>
+          </a:solidFill>
+          <a:ln>
+            <a:solidFill>
+              <a:srgbClr val="1F3A5F"/>
+            </a:solidFill>
+          </a:ln>
+        </p:spPr>
+        <p:style>
+          <a:lnRef idx="1">
+            <a:schemeClr val="accent1"/>
+          </a:lnRef>
+          <a:fillRef idx="3">
+            <a:schemeClr val="accent1"/>
+          </a:fillRef>
+          <a:effectRef idx="2">
+            <a:schemeClr val="accent1"/>
+          </a:effectRef>
+          <a:fontRef idx="minor">
+            <a:schemeClr val="lt1"/>
+          </a:fontRef>
+        </p:style>
+        <p:txBody>
+          <a:bodyPr rtlCol="0" anchor="ctr" lIns="45720" rIns="45720"/>
+          <a:lstStyle/>
+          <a:p>
+            <a:pPr algn="ctr"/>
+            <a:r>
+              <a:rPr sz="900">
+                <a:solidFill>
+                  <a:srgbClr val="1F3A5F"/>
+                </a:solidFill>
+              </a:rPr>
+              <a:t>Gram 74: Star Destroyer contact bearing 169, codename Bespin</a:t>
+            </a:r>
+          </a:p>
+        </p:txBody>
+      </p:sp>
+      <p:sp>
+        <p:nvSpPr>
+          <p:cNvPr id="4" name="TextBox 3"/>
+          <p:cNvSpPr txBox="1"/>
+          <p:nvPr/>
+        </p:nvSpPr>
+        <p:spPr>
+          <a:xfrm>
+            <a:off x="365760" y="1115568"/>
+            <a:ext cx="2200046" cy="1447800"/>
+          </a:xfrm>
+          <a:prstGeom prst="rect">
+            <a:avLst/>
+          </a:prstGeom>
+          <a:noFill/>
+        </p:spPr>
+        <p:txBody>
+          <a:bodyPr wrap="square">
+            <a:spAutoFit/>
+          </a:bodyPr>
+          <a:lstStyle/>
+          <a:p>
+            <a:r>
+              <a:rPr sz="800">
+                <a:hlinkClick r:id="rId3"/>
+              </a:rPr>
+              <a:t>Lofar 1</a:t>
+            </a:r>
+          </a:p>
+          <a:p>
+            <a:r>
+              <a:rPr sz="800">
+                <a:hlinkClick r:id="rId4"/>
+              </a:rPr>
+              <a:t>Lofar 2</a:t>
+            </a:r>
+          </a:p>
+        </p:txBody>
+      </p:sp>
+      <p:sp>
+        <p:nvSpPr>
+          <p:cNvPr id="5" name="Rounded Rectangle 4">
+            <a:hlinkClick r:id="rId5"/>
+          </p:cNvPr>
+          <p:cNvSpPr/>
+          <p:nvPr/>
+        </p:nvSpPr>
+        <p:spPr>
+          <a:xfrm>
+            <a:off x="2657246" y="731520"/>
+            <a:ext cx="2200046" cy="365760"/>
+          </a:xfrm>
+          <a:prstGeom prst="roundRect">
+            <a:avLst/>
+          </a:prstGeom>
+          <a:solidFill>
+            <a:srgbClr val="E8EEF7"/>
+          </a:solidFill>
+          <a:ln>
+            <a:solidFill>
+              <a:srgbClr val="1F3A5F"/>
+            </a:solidFill>
+          </a:ln>
+        </p:spPr>
+        <p:style>
+          <a:lnRef idx="1">
+            <a:schemeClr val="accent1"/>
+          </a:lnRef>
+          <a:fillRef idx="3">
+            <a:schemeClr val="accent1"/>
+          </a:fillRef>
+          <a:effectRef idx="2">
+            <a:schemeClr val="accent1"/>
+          </a:effectRef>
+          <a:fontRef idx="minor">
+            <a:schemeClr val="lt1"/>
+          </a:fontRef>
+        </p:style>
+        <p:txBody>
+          <a:bodyPr rtlCol="0" anchor="ctr" lIns="45720" rIns="45720"/>
+          <a:lstStyle/>
+          <a:p>
+            <a:pPr algn="ctr"/>
+            <a:r>
+              <a:rPr sz="900">
+                <a:solidFill>
+                  <a:srgbClr val="1F3A5F"/>
+                </a:solidFill>
+              </a:rPr>
+              <a:t>Gram 75: FR Intrepid-class, Category 1, Vulcan</a:t>
+            </a:r>
+          </a:p>
+        </p:txBody>
+      </p:sp>
+      <p:sp>
+        <p:nvSpPr>
+          <p:cNvPr id="6" name="TextBox 5"/>
+          <p:cNvSpPr txBox="1"/>
+          <p:nvPr/>
+        </p:nvSpPr>
+        <p:spPr>
+          <a:xfrm>
+            <a:off x="2657246" y="1115568"/>
+            <a:ext cx="2200046" cy="1447800"/>
+          </a:xfrm>
+          <a:prstGeom prst="rect">
+            <a:avLst/>
+          </a:prstGeom>
+          <a:noFill/>
+        </p:spPr>
+        <p:txBody>
+          <a:bodyPr wrap="square">
+            <a:spAutoFit/>
+          </a:bodyPr>
+          <a:lstStyle/>
+          <a:p>
+            <a:r>
+              <a:rPr sz="800">
+                <a:hlinkClick r:id="rId6"/>
+              </a:rPr>
+              <a:t>Lofar 1</a:t>
+            </a:r>
+          </a:p>
+        </p:txBody>
+      </p:sp>
+      <p:sp>
+        <p:nvSpPr>
+          <p:cNvPr id="7" name="Rounded Rectangle 6">
+            <a:hlinkClick r:id="rId7"/>
+          </p:cNvPr>
+          <p:cNvSpPr/>
+          <p:nvPr/>
+        </p:nvSpPr>
+        <p:spPr>
+          <a:xfrm>
+            <a:off x="4948732" y="731520"/>
+            <a:ext cx="2200046" cy="365760"/>
+          </a:xfrm>
+          <a:prstGeom prst="roundRect">
+            <a:avLst/>
+          </a:prstGeom>
+          <a:solidFill>
+            <a:srgbClr val="E8EEF7"/>
+          </a:solidFill>
+          <a:ln>
+            <a:solidFill>
+              <a:srgbClr val="1F3A5F"/>
+            </a:solidFill>
+          </a:ln>
+        </p:spPr>
+        <p:style>
+          <a:lnRef idx="1">
+            <a:schemeClr val="accent1"/>
+          </a:lnRef>
+          <a:fillRef idx="3">
+            <a:schemeClr val="accent1"/>
+          </a:fillRef>
+          <a:effectRef idx="2">
+            <a:schemeClr val="accent1"/>
+          </a:effectRef>
+          <a:fontRef idx="minor">
+            <a:schemeClr val="lt1"/>
+          </a:fontRef>
+        </p:style>
+        <p:txBody>
+          <a:bodyPr rtlCol="0" anchor="ctr" lIns="45720" rIns="45720"/>
+          <a:lstStyle/>
+          <a:p>
+            <a:pPr algn="ctr"/>
+            <a:r>
+              <a:rPr sz="900">
+                <a:solidFill>
+                  <a:srgbClr val="1F3A5F"/>
+                </a:solidFill>
+              </a:rPr>
+              <a:t>Gram 76: FR Y-wing, Category 4, Tatooine</a:t>
+            </a:r>
+          </a:p>
+        </p:txBody>
+      </p:sp>
+      <p:sp>
+        <p:nvSpPr>
+          <p:cNvPr id="8" name="TextBox 7"/>
+          <p:cNvSpPr txBox="1"/>
+          <p:nvPr/>
+        </p:nvSpPr>
+        <p:spPr>
+          <a:xfrm>
+            <a:off x="4948732" y="1115568"/>
+            <a:ext cx="2200046" cy="1447800"/>
+          </a:xfrm>
+          <a:prstGeom prst="rect">
+            <a:avLst/>
+          </a:prstGeom>
+          <a:noFill/>
+        </p:spPr>
+        <p:txBody>
+          <a:bodyPr wrap="square">
+            <a:spAutoFit/>
+          </a:bodyPr>
+          <a:lstStyle/>
+          <a:p>
+            <a:r>
+              <a:rPr sz="800">
+                <a:hlinkClick r:id="rId8"/>
+              </a:rPr>
+              <a:t>Lofar 1</a:t>
+            </a:r>
+          </a:p>
+          <a:p>
+            <a:r>
+              <a:rPr sz="800">
+                <a:hlinkClick r:id="rId9"/>
+              </a:rPr>
+              <a:t>Lofar 2</a:t>
+            </a:r>
+          </a:p>
+        </p:txBody>
+      </p:sp>
+      <p:sp>
+        <p:nvSpPr>
+          <p:cNvPr id="9" name="Rounded Rectangle 8">
+            <a:hlinkClick r:id="rId10"/>
+          </p:cNvPr>
+          <p:cNvSpPr/>
+          <p:nvPr/>
+        </p:nvSpPr>
+        <p:spPr>
+          <a:xfrm>
+            <a:off x="7240219" y="731520"/>
+            <a:ext cx="2200046" cy="365760"/>
+          </a:xfrm>
+          <a:prstGeom prst="roundRect">
+            <a:avLst/>
+          </a:prstGeom>
+          <a:solidFill>
+            <a:srgbClr val="E8EEF7"/>
+          </a:solidFill>
+          <a:ln>
+            <a:solidFill>
+              <a:srgbClr val="1F3A5F"/>
+            </a:solidFill>
+          </a:ln>
+        </p:spPr>
+        <p:style>
+          <a:lnRef idx="1">
+            <a:schemeClr val="accent1"/>
+          </a:lnRef>
+          <a:fillRef idx="3">
+            <a:schemeClr val="accent1"/>
+          </a:fillRef>
+          <a:effectRef idx="2">
+            <a:schemeClr val="accent1"/>
+          </a:effectRef>
+          <a:fontRef idx="minor">
+            <a:schemeClr val="lt1"/>
+          </a:fontRef>
+        </p:style>
+        <p:txBody>
+          <a:bodyPr rtlCol="0" anchor="ctr" lIns="45720" rIns="45720"/>
+          <a:lstStyle/>
+          <a:p>
+            <a:pPr algn="ctr"/>
+            <a:r>
+              <a:rPr sz="900">
+                <a:solidFill>
+                  <a:srgbClr val="1F3A5F"/>
+                </a:solidFill>
+              </a:rPr>
+              <a:t>Gram 77: FR Miranda-class, Category 3, Coruscant</a:t>
+            </a:r>
+          </a:p>
+        </p:txBody>
+      </p:sp>
+      <p:sp>
+        <p:nvSpPr>
+          <p:cNvPr id="10" name="TextBox 9"/>
+          <p:cNvSpPr txBox="1"/>
+          <p:nvPr/>
+        </p:nvSpPr>
+        <p:spPr>
+          <a:xfrm>
+            <a:off x="7240219" y="1115568"/>
+            <a:ext cx="2200046" cy="1447800"/>
+          </a:xfrm>
+          <a:prstGeom prst="rect">
+            <a:avLst/>
+          </a:prstGeom>
+          <a:noFill/>
+        </p:spPr>
+        <p:txBody>
+          <a:bodyPr wrap="square">
+            <a:spAutoFit/>
+          </a:bodyPr>
+          <a:lstStyle/>
+          <a:p>
+            <a:r>
+              <a:rPr sz="800">
+                <a:hlinkClick r:id="rId11"/>
+              </a:rPr>
+              <a:t>Lofar 1</a:t>
+            </a:r>
+          </a:p>
+          <a:p>
+            <a:r>
+              <a:rPr sz="800">
+                <a:hlinkClick r:id="rId12"/>
+              </a:rPr>
+              <a:t>Lofar 2</a:t>
+            </a:r>
+          </a:p>
+        </p:txBody>
+      </p:sp>
+      <p:sp>
+        <p:nvSpPr>
+          <p:cNvPr id="11" name="Rounded Rectangle 10">
+            <a:hlinkClick r:id="rId13"/>
+          </p:cNvPr>
+          <p:cNvSpPr/>
+          <p:nvPr/>
+        </p:nvSpPr>
+        <p:spPr>
+          <a:xfrm>
+            <a:off x="9531705" y="731520"/>
+            <a:ext cx="2200046" cy="365760"/>
+          </a:xfrm>
+          <a:prstGeom prst="roundRect">
+            <a:avLst/>
+          </a:prstGeom>
+          <a:solidFill>
+            <a:srgbClr val="E8EEF7"/>
+          </a:solidFill>
+          <a:ln>
+            <a:solidFill>
+              <a:srgbClr val="1F3A5F"/>
+            </a:solidFill>
+          </a:ln>
+        </p:spPr>
+        <p:style>
+          <a:lnRef idx="1">
+            <a:schemeClr val="accent1"/>
+          </a:lnRef>
+          <a:fillRef idx="3">
+            <a:schemeClr val="accent1"/>
+          </a:fillRef>
+          <a:effectRef idx="2">
+            <a:schemeClr val="accent1"/>
+          </a:effectRef>
+          <a:fontRef idx="minor">
+            <a:schemeClr val="lt1"/>
+          </a:fontRef>
+        </p:style>
+        <p:txBody>
+          <a:bodyPr rtlCol="0" anchor="ctr" lIns="45720" rIns="45720"/>
+          <a:lstStyle/>
+          <a:p>
+            <a:pPr algn="ctr"/>
+            <a:r>
+              <a:rPr sz="900">
+                <a:solidFill>
+                  <a:srgbClr val="1F3A5F"/>
+                </a:solidFill>
+              </a:rPr>
+              <a:t>Gram 78: Defiant-class contact bearing 142, codename Risa</a:t>
+            </a:r>
+          </a:p>
+        </p:txBody>
+      </p:sp>
+      <p:sp>
+        <p:nvSpPr>
+          <p:cNvPr id="12" name="TextBox 11"/>
+          <p:cNvSpPr txBox="1"/>
+          <p:nvPr/>
+        </p:nvSpPr>
+        <p:spPr>
+          <a:xfrm>
+            <a:off x="9531705" y="1115568"/>
+            <a:ext cx="2200046" cy="1447800"/>
+          </a:xfrm>
+          <a:prstGeom prst="rect">
+            <a:avLst/>
+          </a:prstGeom>
+          <a:noFill/>
+        </p:spPr>
+        <p:txBody>
+          <a:bodyPr wrap="square">
+            <a:spAutoFit/>
+          </a:bodyPr>
+          <a:lstStyle/>
+          <a:p>
+            <a:r>
+              <a:rPr sz="800">
+                <a:hlinkClick r:id="rId14"/>
+              </a:rPr>
+              <a:t>Lofar 1</a:t>
+            </a:r>
+          </a:p>
+        </p:txBody>
+      </p:sp>
+      <p:sp>
+        <p:nvSpPr>
+          <p:cNvPr id="13" name="Rounded Rectangle 12">
+            <a:hlinkClick r:id="rId15"/>
+          </p:cNvPr>
+          <p:cNvSpPr/>
+          <p:nvPr/>
+        </p:nvSpPr>
+        <p:spPr>
+          <a:xfrm>
+            <a:off x="365760" y="2682240"/>
+            <a:ext cx="2200046" cy="365760"/>
+          </a:xfrm>
+          <a:prstGeom prst="roundRect">
+            <a:avLst/>
+          </a:prstGeom>
+          <a:solidFill>
+            <a:srgbClr val="E8EEF7"/>
+          </a:solidFill>
+          <a:ln>
+            <a:solidFill>
+              <a:srgbClr val="1F3A5F"/>
+            </a:solidFill>
+          </a:ln>
+        </p:spPr>
+        <p:style>
+          <a:lnRef idx="1">
+            <a:schemeClr val="accent1"/>
+          </a:lnRef>
+          <a:fillRef idx="3">
+            <a:schemeClr val="accent1"/>
+          </a:fillRef>
+          <a:effectRef idx="2">
+            <a:schemeClr val="accent1"/>
+          </a:effectRef>
+          <a:fontRef idx="minor">
+            <a:schemeClr val="lt1"/>
+          </a:fontRef>
+        </p:style>
+        <p:txBody>
+          <a:bodyPr rtlCol="0" anchor="ctr" lIns="45720" rIns="45720"/>
+          <a:lstStyle/>
+          <a:p>
+            <a:pPr algn="ctr"/>
+            <a:r>
+              <a:rPr sz="900">
+                <a:solidFill>
+                  <a:srgbClr val="1F3A5F"/>
+                </a:solidFill>
+              </a:rPr>
+              <a:t>Gram 79: FR Voyager, Category 1, Dank</a:t>
+            </a:r>
+          </a:p>
+        </p:txBody>
+      </p:sp>
+      <p:sp>
+        <p:nvSpPr>
+          <p:cNvPr id="14" name="TextBox 13"/>
+          <p:cNvSpPr txBox="1"/>
+          <p:nvPr/>
+        </p:nvSpPr>
+        <p:spPr>
+          <a:xfrm>
+            <a:off x="365760" y="3066288"/>
+            <a:ext cx="2200046" cy="1447800"/>
+          </a:xfrm>
+          <a:prstGeom prst="rect">
+            <a:avLst/>
+          </a:prstGeom>
+          <a:noFill/>
+        </p:spPr>
+        <p:txBody>
+          <a:bodyPr wrap="square">
+            <a:spAutoFit/>
+          </a:bodyPr>
+          <a:lstStyle/>
+          <a:p>
+            <a:r>
+              <a:rPr sz="800">
+                <a:hlinkClick r:id="rId16"/>
+              </a:rPr>
+              <a:t>Lofar 1</a:t>
+            </a:r>
+          </a:p>
+          <a:p>
+            <a:r>
+              <a:rPr sz="800">
+                <a:hlinkClick r:id="rId17"/>
+              </a:rPr>
+              <a:t>Lofar 2</a:t>
+            </a:r>
+          </a:p>
+          <a:p>
+            <a:r>
+              <a:rPr sz="800">
+                <a:hlinkClick r:id="rId18"/>
+              </a:rPr>
+              <a:t>Lofar 3</a:t>
+            </a:r>
+          </a:p>
+          <a:p>
+            <a:r>
+              <a:rPr sz="800">
+                <a:hlinkClick r:id="rId19"/>
+              </a:rPr>
+              <a:t>Lofar 4</a:t>
+            </a:r>
+          </a:p>
+        </p:txBody>
+      </p:sp>
+      <p:sp>
+        <p:nvSpPr>
+          <p:cNvPr id="15" name="Rounded Rectangle 14">
+            <a:hlinkClick r:id="rId20"/>
+          </p:cNvPr>
+          <p:cNvSpPr/>
+          <p:nvPr/>
+        </p:nvSpPr>
+        <p:spPr>
+          <a:xfrm>
+            <a:off x="2657246" y="2682240"/>
+            <a:ext cx="2200046" cy="365760"/>
+          </a:xfrm>
+          <a:prstGeom prst="roundRect">
+            <a:avLst/>
+          </a:prstGeom>
+          <a:solidFill>
+            <a:srgbClr val="E8EEF7"/>
+          </a:solidFill>
+          <a:ln>
+            <a:solidFill>
+              <a:srgbClr val="1F3A5F"/>
+            </a:solidFill>
+          </a:ln>
+        </p:spPr>
+        <p:style>
+          <a:lnRef idx="1">
+            <a:schemeClr val="accent1"/>
+          </a:lnRef>
+          <a:fillRef idx="3">
+            <a:schemeClr val="accent1"/>
+          </a:fillRef>
+          <a:effectRef idx="2">
+            <a:schemeClr val="accent1"/>
+          </a:effectRef>
+          <a:fontRef idx="minor">
+            <a:schemeClr val="lt1"/>
+          </a:fontRef>
+        </p:style>
+        <p:txBody>
+          <a:bodyPr rtlCol="0" anchor="ctr" lIns="45720" rIns="45720"/>
+          <a:lstStyle/>
+          <a:p>
+            <a:pPr algn="ctr"/>
+            <a:r>
+              <a:rPr sz="900">
+                <a:solidFill>
+                  <a:srgbClr val="1F3A5F"/>
+                </a:solidFill>
+              </a:rPr>
+              <a:t>Gram 80: FR Mon Calamari Cruiser, Category 3, Cardassia</a:t>
+            </a:r>
+          </a:p>
+        </p:txBody>
+      </p:sp>
+      <p:sp>
+        <p:nvSpPr>
+          <p:cNvPr id="16" name="TextBox 15"/>
+          <p:cNvSpPr txBox="1"/>
+          <p:nvPr/>
+        </p:nvSpPr>
+        <p:spPr>
+          <a:xfrm>
+            <a:off x="2657246" y="3066288"/>
+            <a:ext cx="2200046" cy="1447800"/>
+          </a:xfrm>
+          <a:prstGeom prst="rect">
+            <a:avLst/>
+          </a:prstGeom>
+          <a:noFill/>
+        </p:spPr>
+        <p:txBody>
+          <a:bodyPr wrap="square">
+            <a:spAutoFit/>
+          </a:bodyPr>
+          <a:lstStyle/>
+          <a:p>
+            <a:r>
+              <a:rPr sz="800">
+                <a:hlinkClick r:id="rId21"/>
+              </a:rPr>
+              <a:t>Lofar 1</a:t>
+            </a:r>
+          </a:p>
+          <a:p>
+            <a:r>
+              <a:rPr sz="800">
+                <a:hlinkClick r:id="rId22"/>
+              </a:rPr>
+              <a:t>Lofar 2</a:t>
+            </a:r>
+          </a:p>
+          <a:p>
+            <a:r>
+              <a:rPr sz="800">
+                <a:hlinkClick r:id="rId23"/>
+              </a:rPr>
+              <a:t>Lofar 3</a:t>
+            </a:r>
+          </a:p>
+          <a:p>
+            <a:r>
+              <a:rPr sz="800">
+                <a:hlinkClick r:id="rId24"/>
+              </a:rPr>
+              <a:t>Lofar 4</a:t>
+            </a:r>
+          </a:p>
+        </p:txBody>
+      </p:sp>
+      <p:sp>
+        <p:nvSpPr>
+          <p:cNvPr id="17" name="Rounded Rectangle 16">
+            <a:hlinkClick r:id="rId25"/>
+          </p:cNvPr>
+          <p:cNvSpPr/>
+          <p:nvPr/>
+        </p:nvSpPr>
+        <p:spPr>
+          <a:xfrm>
+            <a:off x="4948732" y="2682240"/>
+            <a:ext cx="2200046" cy="365760"/>
+          </a:xfrm>
+          <a:prstGeom prst="roundRect">
+            <a:avLst/>
+          </a:prstGeom>
+          <a:solidFill>
+            <a:srgbClr val="E8EEF7"/>
+          </a:solidFill>
+          <a:ln>
+            <a:solidFill>
+              <a:srgbClr val="1F3A5F"/>
+            </a:solidFill>
+          </a:ln>
+        </p:spPr>
+        <p:style>
+          <a:lnRef idx="1">
+            <a:schemeClr val="accent1"/>
+          </a:lnRef>
+          <a:fillRef idx="3">
+            <a:schemeClr val="accent1"/>
+          </a:fillRef>
+          <a:effectRef idx="2">
+            <a:schemeClr val="accent1"/>
+          </a:effectRef>
+          <a:fontRef idx="minor">
+            <a:schemeClr val="lt1"/>
+          </a:fontRef>
+        </p:style>
+        <p:txBody>
+          <a:bodyPr rtlCol="0" anchor="ctr" lIns="45720" rIns="45720"/>
+          <a:lstStyle/>
+          <a:p>
+            <a:pPr algn="ctr"/>
+            <a:r>
+              <a:rPr sz="900">
+                <a:solidFill>
+                  <a:srgbClr val="1F3A5F"/>
+                </a:solidFill>
+              </a:rPr>
+              <a:t>Gram 81: Prometheus contact bearing 167, codename Mustafar</a:t>
+            </a:r>
+          </a:p>
+        </p:txBody>
+      </p:sp>
+      <p:sp>
+        <p:nvSpPr>
+          <p:cNvPr id="18" name="TextBox 17"/>
+          <p:cNvSpPr txBox="1"/>
+          <p:nvPr/>
+        </p:nvSpPr>
+        <p:spPr>
+          <a:xfrm>
+            <a:off x="4948732" y="3066288"/>
+            <a:ext cx="2200046" cy="1447800"/>
+          </a:xfrm>
+          <a:prstGeom prst="rect">
+            <a:avLst/>
+          </a:prstGeom>
+          <a:noFill/>
+        </p:spPr>
+        <p:txBody>
+          <a:bodyPr wrap="square">
+            <a:spAutoFit/>
+          </a:bodyPr>
+          <a:lstStyle/>
+          <a:p>
+            <a:r>
+              <a:rPr sz="800">
+                <a:hlinkClick r:id="rId26"/>
+              </a:rPr>
+              <a:t>Lofar 1</a:t>
+            </a:r>
+          </a:p>
+          <a:p>
+            <a:r>
+              <a:rPr sz="800">
+                <a:hlinkClick r:id="rId27"/>
+              </a:rPr>
+              <a:t>Lofar 2</a:t>
+            </a:r>
+          </a:p>
+          <a:p>
+            <a:r>
+              <a:rPr sz="800">
+                <a:hlinkClick r:id="rId28"/>
+              </a:rPr>
+              <a:t>Lofar 3</a:t>
+            </a:r>
+          </a:p>
+          <a:p>
+            <a:r>
+              <a:rPr sz="800">
+                <a:hlinkClick r:id="rId29"/>
+              </a:rPr>
+              <a:t>Lofar 4</a:t>
+            </a:r>
+          </a:p>
+        </p:txBody>
+      </p:sp>
+      <p:sp>
+        <p:nvSpPr>
+          <p:cNvPr id="19" name="Rounded Rectangle 18">
+            <a:hlinkClick r:id="rId30"/>
+          </p:cNvPr>
+          <p:cNvSpPr/>
+          <p:nvPr/>
+        </p:nvSpPr>
+        <p:spPr>
+          <a:xfrm>
+            <a:off x="7240219" y="2682240"/>
+            <a:ext cx="2200046" cy="365760"/>
+          </a:xfrm>
+          <a:prstGeom prst="roundRect">
+            <a:avLst/>
+          </a:prstGeom>
+          <a:solidFill>
+            <a:srgbClr val="E8EEF7"/>
+          </a:solidFill>
+          <a:ln>
+            <a:solidFill>
+              <a:srgbClr val="1F3A5F"/>
+            </a:solidFill>
+          </a:ln>
+        </p:spPr>
+        <p:style>
+          <a:lnRef idx="1">
+            <a:schemeClr val="accent1"/>
+          </a:lnRef>
+          <a:fillRef idx="3">
+            <a:schemeClr val="accent1"/>
+          </a:fillRef>
+          <a:effectRef idx="2">
+            <a:schemeClr val="accent1"/>
+          </a:effectRef>
+          <a:fontRef idx="minor">
+            <a:schemeClr val="lt1"/>
+          </a:fontRef>
+        </p:style>
+        <p:txBody>
+          <a:bodyPr rtlCol="0" anchor="ctr" lIns="45720" rIns="45720"/>
+          <a:lstStyle/>
+          <a:p>
+            <a:pPr algn="ctr"/>
+            <a:r>
+              <a:rPr sz="900">
+                <a:solidFill>
+                  <a:srgbClr val="1F3A5F"/>
+                </a:solidFill>
+              </a:rPr>
+              <a:t>Gram 82: Constitution-class contact bearing 066, codename Kronos</a:t>
+            </a:r>
+          </a:p>
+        </p:txBody>
+      </p:sp>
+      <p:sp>
+        <p:nvSpPr>
+          <p:cNvPr id="20" name="TextBox 19"/>
+          <p:cNvSpPr txBox="1"/>
+          <p:nvPr/>
+        </p:nvSpPr>
+        <p:spPr>
+          <a:xfrm>
+            <a:off x="7240219" y="3066288"/>
+            <a:ext cx="2200046" cy="1447800"/>
+          </a:xfrm>
+          <a:prstGeom prst="rect">
+            <a:avLst/>
+          </a:prstGeom>
+          <a:noFill/>
+        </p:spPr>
+        <p:txBody>
+          <a:bodyPr wrap="square">
+            <a:spAutoFit/>
+          </a:bodyPr>
+          <a:lstStyle/>
+          <a:p>
+            <a:r>
+              <a:rPr sz="800">
+                <a:hlinkClick r:id="rId31"/>
+              </a:rPr>
+              <a:t>Lofar 1</a:t>
+            </a:r>
+          </a:p>
+          <a:p>
+            <a:r>
+              <a:rPr sz="800">
+                <a:hlinkClick r:id="rId32"/>
+              </a:rPr>
+              <a:t>Lofar 2</a:t>
+            </a:r>
+          </a:p>
+          <a:p>
+            <a:r>
+              <a:rPr sz="800">
+                <a:hlinkClick r:id="rId33"/>
+              </a:rPr>
+              <a:t>Lofar 3</a:t>
+            </a:r>
+          </a:p>
+        </p:txBody>
+      </p:sp>
+      <p:sp>
+        <p:nvSpPr>
+          <p:cNvPr id="21" name="Rounded Rectangle 20">
+            <a:hlinkClick r:id="rId34"/>
+          </p:cNvPr>
+          <p:cNvSpPr/>
+          <p:nvPr/>
+        </p:nvSpPr>
+        <p:spPr>
+          <a:xfrm>
+            <a:off x="9531705" y="2682240"/>
+            <a:ext cx="2200046" cy="365760"/>
+          </a:xfrm>
+          <a:prstGeom prst="roundRect">
+            <a:avLst/>
+          </a:prstGeom>
+          <a:solidFill>
+            <a:srgbClr val="E8EEF7"/>
+          </a:solidFill>
+          <a:ln>
+            <a:solidFill>
+              <a:srgbClr val="1F3A5F"/>
+            </a:solidFill>
+          </a:ln>
+        </p:spPr>
+        <p:style>
+          <a:lnRef idx="1">
+            <a:schemeClr val="accent1"/>
+          </a:lnRef>
+          <a:fillRef idx="3">
+            <a:schemeClr val="accent1"/>
+          </a:fillRef>
+          <a:effectRef idx="2">
+            <a:schemeClr val="accent1"/>
+          </a:effectRef>
+          <a:fontRef idx="minor">
+            <a:schemeClr val="lt1"/>
+          </a:fontRef>
+        </p:style>
+        <p:txBody>
+          <a:bodyPr rtlCol="0" anchor="ctr" lIns="45720" rIns="45720"/>
+          <a:lstStyle/>
+          <a:p>
+            <a:pPr algn="ctr"/>
+            <a:r>
+              <a:rPr sz="900">
+                <a:solidFill>
+                  <a:srgbClr val="1F3A5F"/>
+                </a:solidFill>
+              </a:rPr>
+              <a:t>Gram 83: FR A-wing, Category 2, Vulcan</a:t>
+            </a:r>
+          </a:p>
+        </p:txBody>
+      </p:sp>
+      <p:sp>
+        <p:nvSpPr>
+          <p:cNvPr id="22" name="TextBox 21"/>
+          <p:cNvSpPr txBox="1"/>
+          <p:nvPr/>
+        </p:nvSpPr>
+        <p:spPr>
+          <a:xfrm>
+            <a:off x="9531705" y="3066288"/>
+            <a:ext cx="2200046" cy="1447800"/>
+          </a:xfrm>
+          <a:prstGeom prst="rect">
+            <a:avLst/>
+          </a:prstGeom>
+          <a:noFill/>
+        </p:spPr>
+        <p:txBody>
+          <a:bodyPr wrap="square">
+            <a:spAutoFit/>
+          </a:bodyPr>
+          <a:lstStyle/>
+          <a:p>
+            <a:r>
+              <a:rPr sz="800">
+                <a:hlinkClick r:id="rId35"/>
+              </a:rPr>
+              <a:t>Lofar 1</a:t>
+            </a:r>
+          </a:p>
+        </p:txBody>
+      </p:sp>
+      <p:sp>
+        <p:nvSpPr>
+          <p:cNvPr id="23" name="Rounded Rectangle 22">
+            <a:hlinkClick r:id="rId36"/>
+          </p:cNvPr>
+          <p:cNvSpPr/>
+          <p:nvPr/>
+        </p:nvSpPr>
+        <p:spPr>
+          <a:xfrm>
+            <a:off x="365760" y="4632960"/>
+            <a:ext cx="2200046" cy="365760"/>
+          </a:xfrm>
+          <a:prstGeom prst="roundRect">
+            <a:avLst/>
+          </a:prstGeom>
+          <a:solidFill>
+            <a:srgbClr val="E8EEF7"/>
+          </a:solidFill>
+          <a:ln>
+            <a:solidFill>
+              <a:srgbClr val="1F3A5F"/>
+            </a:solidFill>
+          </a:ln>
+        </p:spPr>
+        <p:style>
+          <a:lnRef idx="1">
+            <a:schemeClr val="accent1"/>
+          </a:lnRef>
+          <a:fillRef idx="3">
+            <a:schemeClr val="accent1"/>
+          </a:fillRef>
+          <a:effectRef idx="2">
+            <a:schemeClr val="accent1"/>
+          </a:effectRef>
+          <a:fontRef idx="minor">
+            <a:schemeClr val="lt1"/>
+          </a:fontRef>
+        </p:style>
+        <p:txBody>
+          <a:bodyPr rtlCol="0" anchor="ctr" lIns="45720" rIns="45720"/>
+          <a:lstStyle/>
+          <a:p>
+            <a:pPr algn="ctr"/>
+            <a:r>
+              <a:rPr sz="900">
+                <a:solidFill>
+                  <a:srgbClr val="1F3A5F"/>
+                </a:solidFill>
+              </a:rPr>
+              <a:t>Gram 84: FR Slave I, Category 4, Risa</a:t>
+            </a:r>
+          </a:p>
+        </p:txBody>
+      </p:sp>
+      <p:sp>
+        <p:nvSpPr>
+          <p:cNvPr id="24" name="TextBox 23"/>
+          <p:cNvSpPr txBox="1"/>
+          <p:nvPr/>
+        </p:nvSpPr>
+        <p:spPr>
+          <a:xfrm>
+            <a:off x="365760" y="5017008"/>
+            <a:ext cx="2200046" cy="1447800"/>
+          </a:xfrm>
+          <a:prstGeom prst="rect">
+            <a:avLst/>
+          </a:prstGeom>
+          <a:noFill/>
+        </p:spPr>
+        <p:txBody>
+          <a:bodyPr wrap="square">
+            <a:spAutoFit/>
+          </a:bodyPr>
+          <a:lstStyle/>
+          <a:p>
+            <a:r>
+              <a:rPr sz="800">
+                <a:hlinkClick r:id="rId37"/>
+              </a:rPr>
+              <a:t>Lofar 1</a:t>
+            </a:r>
+          </a:p>
+          <a:p>
+            <a:r>
+              <a:rPr sz="800">
+                <a:hlinkClick r:id="rId38"/>
+              </a:rPr>
+              <a:t>Lofar 2</a:t>
+            </a:r>
+          </a:p>
+          <a:p>
+            <a:r>
+              <a:rPr sz="800">
+                <a:hlinkClick r:id="rId39"/>
+              </a:rPr>
+              <a:t>Lofar 3</a:t>
+            </a:r>
+          </a:p>
+          <a:p>
+            <a:r>
+              <a:rPr sz="800">
+                <a:hlinkClick r:id="rId40"/>
+              </a:rPr>
+              <a:t>Lofar 4</a:t>
+            </a:r>
+          </a:p>
+        </p:txBody>
+      </p:sp>
+      <p:sp>
+        <p:nvSpPr>
+          <p:cNvPr id="25" name="Rounded Rectangle 24">
+            <a:hlinkClick r:id="rId41"/>
+          </p:cNvPr>
+          <p:cNvSpPr/>
+          <p:nvPr/>
+        </p:nvSpPr>
+        <p:spPr>
+          <a:xfrm>
+            <a:off x="2657246" y="4632960"/>
+            <a:ext cx="2200046" cy="365760"/>
+          </a:xfrm>
+          <a:prstGeom prst="roundRect">
+            <a:avLst/>
+          </a:prstGeom>
+          <a:solidFill>
+            <a:srgbClr val="E8EEF7"/>
+          </a:solidFill>
+          <a:ln>
+            <a:solidFill>
+              <a:srgbClr val="1F3A5F"/>
+            </a:solidFill>
+          </a:ln>
+        </p:spPr>
+        <p:style>
+          <a:lnRef idx="1">
+            <a:schemeClr val="accent1"/>
+          </a:lnRef>
+          <a:fillRef idx="3">
+            <a:schemeClr val="accent1"/>
+          </a:fillRef>
+          <a:effectRef idx="2">
+            <a:schemeClr val="accent1"/>
+          </a:effectRef>
+          <a:fontRef idx="minor">
+            <a:schemeClr val="lt1"/>
+          </a:fontRef>
+        </p:style>
+        <p:txBody>
+          <a:bodyPr rtlCol="0" anchor="ctr" lIns="45720" rIns="45720"/>
+          <a:lstStyle/>
+          <a:p>
+            <a:pPr algn="ctr"/>
+            <a:r>
+              <a:rPr sz="900">
+                <a:solidFill>
+                  <a:srgbClr val="1F3A5F"/>
+                </a:solidFill>
+              </a:rPr>
+              <a:t>Gram 85: FR Razor Crest, Category 3, Bajor</a:t>
+            </a:r>
+          </a:p>
+        </p:txBody>
+      </p:sp>
+      <p:sp>
+        <p:nvSpPr>
+          <p:cNvPr id="26" name="TextBox 25"/>
+          <p:cNvSpPr txBox="1"/>
+          <p:nvPr/>
+        </p:nvSpPr>
+        <p:spPr>
+          <a:xfrm>
+            <a:off x="2657246" y="5017008"/>
+            <a:ext cx="2200046" cy="1447800"/>
+          </a:xfrm>
+          <a:prstGeom prst="rect">
+            <a:avLst/>
+          </a:prstGeom>
+          <a:noFill/>
+        </p:spPr>
+        <p:txBody>
+          <a:bodyPr wrap="square">
+            <a:spAutoFit/>
+          </a:bodyPr>
+          <a:lstStyle/>
+          <a:p>
+            <a:r>
+              <a:rPr sz="800">
+                <a:hlinkClick r:id="rId42"/>
+              </a:rPr>
+              <a:t>Lofar 1</a:t>
+            </a:r>
+          </a:p>
+          <a:p>
+            <a:r>
+              <a:rPr sz="800">
+                <a:hlinkClick r:id="rId43"/>
+              </a:rPr>
+              <a:t>Lofar 2</a:t>
+            </a:r>
+          </a:p>
+        </p:txBody>
+      </p:sp>
+      <p:sp>
+        <p:nvSpPr>
+          <p:cNvPr id="27" name="Rounded Rectangle 26">
+            <a:hlinkClick r:id="rId44"/>
+          </p:cNvPr>
+          <p:cNvSpPr/>
+          <p:nvPr/>
+        </p:nvSpPr>
+        <p:spPr>
+          <a:xfrm>
+            <a:off x="4948732" y="4632960"/>
+            <a:ext cx="2200046" cy="365760"/>
+          </a:xfrm>
+          <a:prstGeom prst="roundRect">
+            <a:avLst/>
+          </a:prstGeom>
+          <a:solidFill>
+            <a:srgbClr val="E8EEF7"/>
+          </a:solidFill>
+          <a:ln>
+            <a:solidFill>
+              <a:srgbClr val="1F3A5F"/>
+            </a:solidFill>
+          </a:ln>
+        </p:spPr>
+        <p:style>
+          <a:lnRef idx="1">
+            <a:schemeClr val="accent1"/>
+          </a:lnRef>
+          <a:fillRef idx="3">
+            <a:schemeClr val="accent1"/>
+          </a:fillRef>
+          <a:effectRef idx="2">
+            <a:schemeClr val="accent1"/>
+          </a:effectRef>
+          <a:fontRef idx="minor">
+            <a:schemeClr val="lt1"/>
+          </a:fontRef>
+        </p:style>
+        <p:txBody>
+          <a:bodyPr rtlCol="0" anchor="ctr" lIns="45720" rIns="45720"/>
+          <a:lstStyle/>
+          <a:p>
+            <a:pPr algn="ctr"/>
+            <a:r>
+              <a:rPr sz="900">
+                <a:solidFill>
+                  <a:srgbClr val="1F3A5F"/>
+                </a:solidFill>
+              </a:rPr>
+              <a:t>Gram 86: FR Devastator, Category 2, Betazed</a:t>
+            </a:r>
+          </a:p>
+        </p:txBody>
+      </p:sp>
+      <p:sp>
+        <p:nvSpPr>
+          <p:cNvPr id="28" name="TextBox 27"/>
+          <p:cNvSpPr txBox="1"/>
+          <p:nvPr/>
+        </p:nvSpPr>
+        <p:spPr>
+          <a:xfrm>
+            <a:off x="4948732" y="5017008"/>
+            <a:ext cx="2200046" cy="1447800"/>
+          </a:xfrm>
+          <a:prstGeom prst="rect">
+            <a:avLst/>
+          </a:prstGeom>
+          <a:noFill/>
+        </p:spPr>
+        <p:txBody>
+          <a:bodyPr wrap="square">
+            <a:spAutoFit/>
+          </a:bodyPr>
+          <a:lstStyle/>
+          <a:p>
+            <a:r>
+              <a:rPr sz="800">
+                <a:hlinkClick r:id="rId45"/>
+              </a:rPr>
+              <a:t>Lofar 1</a:t>
+            </a:r>
+          </a:p>
+        </p:txBody>
+      </p:sp>
+      <p:sp>
+        <p:nvSpPr>
+          <p:cNvPr id="29" name="Rounded Rectangle 28">
+            <a:hlinkClick r:id="rId46"/>
+          </p:cNvPr>
+          <p:cNvSpPr/>
+          <p:nvPr/>
+        </p:nvSpPr>
+        <p:spPr>
+          <a:xfrm>
+            <a:off x="7240219" y="4632960"/>
+            <a:ext cx="2200046" cy="365760"/>
+          </a:xfrm>
+          <a:prstGeom prst="roundRect">
+            <a:avLst/>
+          </a:prstGeom>
+          <a:solidFill>
+            <a:srgbClr val="E8EEF7"/>
+          </a:solidFill>
+          <a:ln>
+            <a:solidFill>
+              <a:srgbClr val="1F3A5F"/>
+            </a:solidFill>
+          </a:ln>
+        </p:spPr>
+        <p:style>
+          <a:lnRef idx="1">
+            <a:schemeClr val="accent1"/>
+          </a:lnRef>
+          <a:fillRef idx="3">
+            <a:schemeClr val="accent1"/>
+          </a:fillRef>
+          <a:effectRef idx="2">
+            <a:schemeClr val="accent1"/>
+          </a:effectRef>
+          <a:fontRef idx="minor">
+            <a:schemeClr val="lt1"/>
+          </a:fontRef>
+        </p:style>
+        <p:txBody>
+          <a:bodyPr rtlCol="0" anchor="ctr" lIns="45720" rIns="45720"/>
+          <a:lstStyle/>
+          <a:p>
+            <a:pPr algn="ctr"/>
+            <a:r>
+              <a:rPr sz="900">
+                <a:solidFill>
+                  <a:srgbClr val="1F3A5F"/>
+                </a:solidFill>
+              </a:rPr>
+              <a:t>Gram 87: FR Sovereign-class, Category 3, Dagobah</a:t>
+            </a:r>
+          </a:p>
+        </p:txBody>
+      </p:sp>
+      <p:sp>
+        <p:nvSpPr>
+          <p:cNvPr id="30" name="TextBox 29"/>
+          <p:cNvSpPr txBox="1"/>
+          <p:nvPr/>
+        </p:nvSpPr>
+        <p:spPr>
+          <a:xfrm>
+            <a:off x="7240219" y="5017008"/>
+            <a:ext cx="2200046" cy="1447800"/>
+          </a:xfrm>
+          <a:prstGeom prst="rect">
+            <a:avLst/>
+          </a:prstGeom>
+          <a:noFill/>
+        </p:spPr>
+        <p:txBody>
+          <a:bodyPr wrap="square">
+            <a:spAutoFit/>
+          </a:bodyPr>
+          <a:lstStyle/>
+          <a:p>
+            <a:r>
+              <a:rPr sz="800">
+                <a:hlinkClick r:id="rId47"/>
+              </a:rPr>
+              <a:t>Lofar 1</a:t>
+            </a:r>
+          </a:p>
+          <a:p>
+            <a:r>
+              <a:rPr sz="800">
+                <a:hlinkClick r:id="rId48"/>
+              </a:rPr>
+              <a:t>Lofar 2</a:t>
+            </a:r>
+          </a:p>
+        </p:txBody>
+      </p:sp>
+      <p:sp>
+        <p:nvSpPr>
+          <p:cNvPr id="31" name="Rounded Rectangle 30">
+            <a:hlinkClick r:id="rId49"/>
+          </p:cNvPr>
+          <p:cNvSpPr/>
+          <p:nvPr/>
+        </p:nvSpPr>
+        <p:spPr>
+          <a:xfrm>
+            <a:off x="9531705" y="4632960"/>
+            <a:ext cx="2200046" cy="365760"/>
+          </a:xfrm>
+          <a:prstGeom prst="roundRect">
+            <a:avLst/>
+          </a:prstGeom>
+          <a:solidFill>
+            <a:srgbClr val="E8EEF7"/>
+          </a:solidFill>
+          <a:ln>
+            <a:solidFill>
+              <a:srgbClr val="1F3A5F"/>
+            </a:solidFill>
+          </a:ln>
+        </p:spPr>
+        <p:style>
+          <a:lnRef idx="1">
+            <a:schemeClr val="accent1"/>
+          </a:lnRef>
+          <a:fillRef idx="3">
+            <a:schemeClr val="accent1"/>
+          </a:fillRef>
+          <a:effectRef idx="2">
+            <a:schemeClr val="accent1"/>
+          </a:effectRef>
+          <a:fontRef idx="minor">
+            <a:schemeClr val="lt1"/>
+          </a:fontRef>
+        </p:style>
+        <p:txBody>
+          <a:bodyPr rtlCol="0" anchor="ctr" lIns="45720" rIns="45720"/>
+          <a:lstStyle/>
+          <a:p>
+            <a:pPr algn="ctr"/>
+            <a:r>
+              <a:rPr sz="900">
+                <a:solidFill>
+                  <a:srgbClr val="1F3A5F"/>
+                </a:solidFill>
+              </a:rPr>
+              <a:t>Gram 88: FR Nebula-class, Category 1, Cardassia</a:t>
+            </a:r>
+          </a:p>
+        </p:txBody>
+      </p:sp>
+      <p:sp>
+        <p:nvSpPr>
+          <p:cNvPr id="32" name="TextBox 31"/>
+          <p:cNvSpPr txBox="1"/>
+          <p:nvPr/>
+        </p:nvSpPr>
+        <p:spPr>
+          <a:xfrm>
+            <a:off x="9531705" y="5017008"/>
+            <a:ext cx="2200046" cy="1447800"/>
+          </a:xfrm>
+          <a:prstGeom prst="rect">
+            <a:avLst/>
+          </a:prstGeom>
+          <a:noFill/>
+        </p:spPr>
+        <p:txBody>
+          <a:bodyPr wrap="square">
+            <a:spAutoFit/>
+          </a:bodyPr>
+          <a:lstStyle/>
+          <a:p>
+            <a:r>
+              <a:rPr sz="800">
+                <a:hlinkClick r:id="rId50"/>
+              </a:rPr>
+              <a:t>Lofar 1</a:t>
+            </a:r>
+          </a:p>
           <a:p>
             <a:r>
               <a:rPr sz="800">
                 <a:hlinkClick r:id="rId51"/>
               </a:rPr>
               <a:t>Lofar 2</a:t>
+            </a:r>
+          </a:p>
+        </p:txBody>
+      </p:sp>
+    </p:spTree>
+  </p:cSld>
+  <p:clrMapOvr>
+    <a:masterClrMapping/>
+  </p:clrMapOvr>
+</p:sld>
+</file>
+
+<file path=ppt/slides/slide7.xml><?xml version="1.0" encoding="utf-8"?>
+<p:sld xmlns:a="http://schemas.openxmlformats.org/drawingml/2006/main" xmlns:p="http://schemas.openxmlformats.org/presentationml/2006/main" xmlns:r="http://schemas.openxmlformats.org/officeDocument/2006/relationships">
+  <p:cSld>
+    <p:spTree>
+      <p:nvGrpSpPr>
+        <p:cNvPr id="1" name=""/>
+        <p:cNvGrpSpPr/>
+        <p:nvPr/>
+      </p:nvGrpSpPr>
+      <p:grpSpPr/>
+      <p:sp>
+        <p:nvSpPr>
+          <p:cNvPr id="2" name="TextBox 1"/>
+          <p:cNvSpPr txBox="1"/>
+          <p:nvPr/>
+        </p:nvSpPr>
+        <p:spPr>
+          <a:xfrm>
+            <a:off x="914400" y="2377440"/>
+            <a:ext cx="10360152" cy="1280160"/>
+          </a:xfrm>
+          <a:prstGeom prst="rect">
+            <a:avLst/>
+          </a:prstGeom>
+          <a:noFill/>
+        </p:spPr>
+        <p:txBody>
+          <a:bodyPr wrap="square">
+            <a:spAutoFit/>
+          </a:bodyPr>
+          <a:lstStyle/>
+          <a:p>
+            <a:pPr algn="ctr"/>
+            <a:r>
+              <a:rPr sz="4000" b="1">
+                <a:solidFill>
+                  <a:srgbClr val="1F3A5F"/>
+                </a:solidFill>
+              </a:rPr>
+              <a:t>End of Instructor Pub10_Ed22B_Updated</a:t>
+            </a:r>
+          </a:p>
+        </p:txBody>
+      </p:sp>
+      <p:sp>
+        <p:nvSpPr>
+          <p:cNvPr id="3" name="TextBox 2"/>
+          <p:cNvSpPr txBox="1"/>
+          <p:nvPr/>
+        </p:nvSpPr>
+        <p:spPr>
+          <a:xfrm>
+            <a:off x="914400" y="3840480"/>
+            <a:ext cx="10360152" cy="731520"/>
+          </a:xfrm>
+          <a:prstGeom prst="rect">
+            <a:avLst/>
+          </a:prstGeom>
+          <a:noFill/>
+        </p:spPr>
+        <p:txBody>
+          <a:bodyPr wrap="none">
+            <a:spAutoFit/>
+          </a:bodyPr>
+          <a:lstStyle/>
+          <a:p>
+            <a:pPr algn="ctr"/>
+            <a:r>
+              <a:rPr sz="2400">
+                <a:solidFill>
+                  <a:srgbClr val="1F3A5F"/>
+                </a:solidFill>
+              </a:rPr>
+              <a:t>Instructor Version</a:t>
             </a:r>
           </a:p>
         </p:txBody>
